--- a/docs/Atlas-AEC-Demo.pptx
+++ b/docs/Atlas-AEC-Demo.pptx
@@ -21,9 +21,14 @@
     <p:sldId id="269" r:id="rId15"/>
     <p:sldId id="270" r:id="rId16"/>
     <p:sldId id="271" r:id="rId17"/>
+    <p:sldId id="272" r:id="rId18"/>
+    <p:sldId id="273" r:id="rId19"/>
+    <p:sldId id="274" r:id="rId20"/>
+    <p:sldId id="275" r:id="rId21"/>
+    <p:sldId id="276" r:id="rId22"/>
   </p:sldIdLst>
   <p:notesMasterIdLst>
-    <p:notesMasterId r:id="rId18"/>
+    <p:notesMasterId r:id="rId23"/>
   </p:notesMasterIdLst>
   <p:sldSz cx="12192000" cy="6858000"/>
   <p:notesSz cx="6858000" cy="12192000"/>
@@ -1175,6 +1180,270 @@
 </p:notes>
 </file>
 
+<file path=ppt/notesSlides/notesSlide17.xml><?xml version="1.0" encoding="utf-8"?>
+<p:notes xmlns:a="http://schemas.openxmlformats.org/drawingml/2006/main" xmlns:r="http://schemas.openxmlformats.org/officeDocument/2006/relationships" xmlns:p="http://schemas.openxmlformats.org/presentationml/2006/main">
+  <p:cSld>
+    <p:spTree>
+      <p:nvGrpSpPr>
+        <p:cNvPr id="1" name=""/>
+        <p:cNvGrpSpPr/>
+        <p:nvPr/>
+      </p:nvGrpSpPr>
+      <p:grpSpPr>
+        <a:xfrm>
+          <a:off x="0" y="0"/>
+          <a:ext cx="0" cy="0"/>
+          <a:chOff x="0" y="0"/>
+          <a:chExt cx="0" cy="0"/>
+        </a:xfrm>
+      </p:grpSpPr>
+      <p:sp>
+        <p:nvSpPr>
+          <p:cNvPr id="2" name="Slide Image Placeholder 1"/>
+          <p:cNvSpPr>
+            <a:spLocks noGrp="1" noRot="1" noChangeAspect="1"/>
+          </p:cNvSpPr>
+          <p:nvPr>
+            <p:ph type="sldImg"/>
+          </p:nvPr>
+        </p:nvSpPr>
+        <p:spPr/>
+      </p:sp>
+      <p:sp>
+        <p:nvSpPr>
+          <p:cNvPr id="3" name="Notes Placeholder 2"/>
+          <p:cNvSpPr>
+            <a:spLocks noGrp="1"/>
+          </p:cNvSpPr>
+          <p:nvPr>
+            <p:ph type="body" idx="1"/>
+          </p:nvPr>
+        </p:nvSpPr>
+        <p:spPr/>
+        <p:txBody>
+          <a:bodyPr/>
+          <a:lstStyle/>
+          <a:p>
+            <a:r>
+              <a:rPr lang="en-US" dirty="0"/>
+              <a:t/>
+            </a:r>
+            <a:endParaRPr lang="en-US" dirty="0"/>
+          </a:p>
+        </p:txBody>
+      </p:sp>
+      <p:sp>
+        <p:nvSpPr>
+          <p:cNvPr id="4" name="Slide Number Placeholder 3"/>
+          <p:cNvSpPr>
+            <a:spLocks noGrp="1"/>
+          </p:cNvSpPr>
+          <p:nvPr>
+            <p:ph type="sldNum" sz="quarter" idx="10"/>
+          </p:nvPr>
+        </p:nvSpPr>
+        <p:spPr/>
+        <p:txBody>
+          <a:bodyPr/>
+          <a:lstStyle/>
+          <a:p>
+            <a:fld id="{F7021451-1387-4CA6-816F-3879F97B5CBC}" type="slidenum">
+              <a:rPr lang="en-US"/>
+              <a:t>17</a:t>
+            </a:fld>
+            <a:endParaRPr lang="en-US"/>
+          </a:p>
+        </p:txBody>
+      </p:sp>
+    </p:spTree>
+    <p:extLst>
+      <p:ext uri="{BB962C8B-B14F-4D97-AF65-F5344CB8AC3E}">
+        <p14:creationId xmlns:p14="http://schemas.microsoft.com/office/powerpoint/2010/main" val="1024086991"/>
+      </p:ext>
+    </p:extLst>
+  </p:cSld>
+  <p:clrMapOvr>
+    <a:masterClrMapping/>
+  </p:clrMapOvr>
+</p:notes>
+</file>
+
+<file path=ppt/notesSlides/notesSlide18.xml><?xml version="1.0" encoding="utf-8"?>
+<p:notes xmlns:a="http://schemas.openxmlformats.org/drawingml/2006/main" xmlns:r="http://schemas.openxmlformats.org/officeDocument/2006/relationships" xmlns:p="http://schemas.openxmlformats.org/presentationml/2006/main">
+  <p:cSld>
+    <p:spTree>
+      <p:nvGrpSpPr>
+        <p:cNvPr id="1" name=""/>
+        <p:cNvGrpSpPr/>
+        <p:nvPr/>
+      </p:nvGrpSpPr>
+      <p:grpSpPr>
+        <a:xfrm>
+          <a:off x="0" y="0"/>
+          <a:ext cx="0" cy="0"/>
+          <a:chOff x="0" y="0"/>
+          <a:chExt cx="0" cy="0"/>
+        </a:xfrm>
+      </p:grpSpPr>
+      <p:sp>
+        <p:nvSpPr>
+          <p:cNvPr id="2" name="Slide Image Placeholder 1"/>
+          <p:cNvSpPr>
+            <a:spLocks noGrp="1" noRot="1" noChangeAspect="1"/>
+          </p:cNvSpPr>
+          <p:nvPr>
+            <p:ph type="sldImg"/>
+          </p:nvPr>
+        </p:nvSpPr>
+        <p:spPr/>
+      </p:sp>
+      <p:sp>
+        <p:nvSpPr>
+          <p:cNvPr id="3" name="Notes Placeholder 2"/>
+          <p:cNvSpPr>
+            <a:spLocks noGrp="1"/>
+          </p:cNvSpPr>
+          <p:nvPr>
+            <p:ph type="body" idx="1"/>
+          </p:nvPr>
+        </p:nvSpPr>
+        <p:spPr/>
+        <p:txBody>
+          <a:bodyPr/>
+          <a:lstStyle/>
+          <a:p>
+            <a:r>
+              <a:rPr lang="en-US" dirty="0"/>
+              <a:t/>
+            </a:r>
+            <a:endParaRPr lang="en-US" dirty="0"/>
+          </a:p>
+        </p:txBody>
+      </p:sp>
+      <p:sp>
+        <p:nvSpPr>
+          <p:cNvPr id="4" name="Slide Number Placeholder 3"/>
+          <p:cNvSpPr>
+            <a:spLocks noGrp="1"/>
+          </p:cNvSpPr>
+          <p:nvPr>
+            <p:ph type="sldNum" sz="quarter" idx="10"/>
+          </p:nvPr>
+        </p:nvSpPr>
+        <p:spPr/>
+        <p:txBody>
+          <a:bodyPr/>
+          <a:lstStyle/>
+          <a:p>
+            <a:fld id="{F7021451-1387-4CA6-816F-3879F97B5CBC}" type="slidenum">
+              <a:rPr lang="en-US"/>
+              <a:t>18</a:t>
+            </a:fld>
+            <a:endParaRPr lang="en-US"/>
+          </a:p>
+        </p:txBody>
+      </p:sp>
+    </p:spTree>
+    <p:extLst>
+      <p:ext uri="{BB962C8B-B14F-4D97-AF65-F5344CB8AC3E}">
+        <p14:creationId xmlns:p14="http://schemas.microsoft.com/office/powerpoint/2010/main" val="1024086991"/>
+      </p:ext>
+    </p:extLst>
+  </p:cSld>
+  <p:clrMapOvr>
+    <a:masterClrMapping/>
+  </p:clrMapOvr>
+</p:notes>
+</file>
+
+<file path=ppt/notesSlides/notesSlide19.xml><?xml version="1.0" encoding="utf-8"?>
+<p:notes xmlns:a="http://schemas.openxmlformats.org/drawingml/2006/main" xmlns:r="http://schemas.openxmlformats.org/officeDocument/2006/relationships" xmlns:p="http://schemas.openxmlformats.org/presentationml/2006/main">
+  <p:cSld>
+    <p:spTree>
+      <p:nvGrpSpPr>
+        <p:cNvPr id="1" name=""/>
+        <p:cNvGrpSpPr/>
+        <p:nvPr/>
+      </p:nvGrpSpPr>
+      <p:grpSpPr>
+        <a:xfrm>
+          <a:off x="0" y="0"/>
+          <a:ext cx="0" cy="0"/>
+          <a:chOff x="0" y="0"/>
+          <a:chExt cx="0" cy="0"/>
+        </a:xfrm>
+      </p:grpSpPr>
+      <p:sp>
+        <p:nvSpPr>
+          <p:cNvPr id="2" name="Slide Image Placeholder 1"/>
+          <p:cNvSpPr>
+            <a:spLocks noGrp="1" noRot="1" noChangeAspect="1"/>
+          </p:cNvSpPr>
+          <p:nvPr>
+            <p:ph type="sldImg"/>
+          </p:nvPr>
+        </p:nvSpPr>
+        <p:spPr/>
+      </p:sp>
+      <p:sp>
+        <p:nvSpPr>
+          <p:cNvPr id="3" name="Notes Placeholder 2"/>
+          <p:cNvSpPr>
+            <a:spLocks noGrp="1"/>
+          </p:cNvSpPr>
+          <p:nvPr>
+            <p:ph type="body" idx="1"/>
+          </p:nvPr>
+        </p:nvSpPr>
+        <p:spPr/>
+        <p:txBody>
+          <a:bodyPr/>
+          <a:lstStyle/>
+          <a:p>
+            <a:r>
+              <a:rPr lang="en-US" dirty="0"/>
+              <a:t/>
+            </a:r>
+            <a:endParaRPr lang="en-US" dirty="0"/>
+          </a:p>
+        </p:txBody>
+      </p:sp>
+      <p:sp>
+        <p:nvSpPr>
+          <p:cNvPr id="4" name="Slide Number Placeholder 3"/>
+          <p:cNvSpPr>
+            <a:spLocks noGrp="1"/>
+          </p:cNvSpPr>
+          <p:nvPr>
+            <p:ph type="sldNum" sz="quarter" idx="10"/>
+          </p:nvPr>
+        </p:nvSpPr>
+        <p:spPr/>
+        <p:txBody>
+          <a:bodyPr/>
+          <a:lstStyle/>
+          <a:p>
+            <a:fld id="{F7021451-1387-4CA6-816F-3879F97B5CBC}" type="slidenum">
+              <a:rPr lang="en-US"/>
+              <a:t>19</a:t>
+            </a:fld>
+            <a:endParaRPr lang="en-US"/>
+          </a:p>
+        </p:txBody>
+      </p:sp>
+    </p:spTree>
+    <p:extLst>
+      <p:ext uri="{BB962C8B-B14F-4D97-AF65-F5344CB8AC3E}">
+        <p14:creationId xmlns:p14="http://schemas.microsoft.com/office/powerpoint/2010/main" val="1024086991"/>
+      </p:ext>
+    </p:extLst>
+  </p:cSld>
+  <p:clrMapOvr>
+    <a:masterClrMapping/>
+  </p:clrMapOvr>
+</p:notes>
+</file>
+
 <file path=ppt/notesSlides/notesSlide2.xml><?xml version="1.0" encoding="utf-8"?>
 <p:notes xmlns:a="http://schemas.openxmlformats.org/drawingml/2006/main" xmlns:r="http://schemas.openxmlformats.org/officeDocument/2006/relationships" xmlns:p="http://schemas.openxmlformats.org/presentationml/2006/main">
   <p:cSld>
@@ -1245,6 +1514,182 @@
             <a:fld id="{F7021451-1387-4CA6-816F-3879F97B5CBC}" type="slidenum">
               <a:rPr lang="en-US"/>
               <a:t>2</a:t>
+            </a:fld>
+            <a:endParaRPr lang="en-US"/>
+          </a:p>
+        </p:txBody>
+      </p:sp>
+    </p:spTree>
+    <p:extLst>
+      <p:ext uri="{BB962C8B-B14F-4D97-AF65-F5344CB8AC3E}">
+        <p14:creationId xmlns:p14="http://schemas.microsoft.com/office/powerpoint/2010/main" val="1024086991"/>
+      </p:ext>
+    </p:extLst>
+  </p:cSld>
+  <p:clrMapOvr>
+    <a:masterClrMapping/>
+  </p:clrMapOvr>
+</p:notes>
+</file>
+
+<file path=ppt/notesSlides/notesSlide20.xml><?xml version="1.0" encoding="utf-8"?>
+<p:notes xmlns:a="http://schemas.openxmlformats.org/drawingml/2006/main" xmlns:r="http://schemas.openxmlformats.org/officeDocument/2006/relationships" xmlns:p="http://schemas.openxmlformats.org/presentationml/2006/main">
+  <p:cSld>
+    <p:spTree>
+      <p:nvGrpSpPr>
+        <p:cNvPr id="1" name=""/>
+        <p:cNvGrpSpPr/>
+        <p:nvPr/>
+      </p:nvGrpSpPr>
+      <p:grpSpPr>
+        <a:xfrm>
+          <a:off x="0" y="0"/>
+          <a:ext cx="0" cy="0"/>
+          <a:chOff x="0" y="0"/>
+          <a:chExt cx="0" cy="0"/>
+        </a:xfrm>
+      </p:grpSpPr>
+      <p:sp>
+        <p:nvSpPr>
+          <p:cNvPr id="2" name="Slide Image Placeholder 1"/>
+          <p:cNvSpPr>
+            <a:spLocks noGrp="1" noRot="1" noChangeAspect="1"/>
+          </p:cNvSpPr>
+          <p:nvPr>
+            <p:ph type="sldImg"/>
+          </p:nvPr>
+        </p:nvSpPr>
+        <p:spPr/>
+      </p:sp>
+      <p:sp>
+        <p:nvSpPr>
+          <p:cNvPr id="3" name="Notes Placeholder 2"/>
+          <p:cNvSpPr>
+            <a:spLocks noGrp="1"/>
+          </p:cNvSpPr>
+          <p:nvPr>
+            <p:ph type="body" idx="1"/>
+          </p:nvPr>
+        </p:nvSpPr>
+        <p:spPr/>
+        <p:txBody>
+          <a:bodyPr/>
+          <a:lstStyle/>
+          <a:p>
+            <a:r>
+              <a:rPr lang="en-US" dirty="0"/>
+              <a:t/>
+            </a:r>
+            <a:endParaRPr lang="en-US" dirty="0"/>
+          </a:p>
+        </p:txBody>
+      </p:sp>
+      <p:sp>
+        <p:nvSpPr>
+          <p:cNvPr id="4" name="Slide Number Placeholder 3"/>
+          <p:cNvSpPr>
+            <a:spLocks noGrp="1"/>
+          </p:cNvSpPr>
+          <p:nvPr>
+            <p:ph type="sldNum" sz="quarter" idx="10"/>
+          </p:nvPr>
+        </p:nvSpPr>
+        <p:spPr/>
+        <p:txBody>
+          <a:bodyPr/>
+          <a:lstStyle/>
+          <a:p>
+            <a:fld id="{F7021451-1387-4CA6-816F-3879F97B5CBC}" type="slidenum">
+              <a:rPr lang="en-US"/>
+              <a:t>20</a:t>
+            </a:fld>
+            <a:endParaRPr lang="en-US"/>
+          </a:p>
+        </p:txBody>
+      </p:sp>
+    </p:spTree>
+    <p:extLst>
+      <p:ext uri="{BB962C8B-B14F-4D97-AF65-F5344CB8AC3E}">
+        <p14:creationId xmlns:p14="http://schemas.microsoft.com/office/powerpoint/2010/main" val="1024086991"/>
+      </p:ext>
+    </p:extLst>
+  </p:cSld>
+  <p:clrMapOvr>
+    <a:masterClrMapping/>
+  </p:clrMapOvr>
+</p:notes>
+</file>
+
+<file path=ppt/notesSlides/notesSlide21.xml><?xml version="1.0" encoding="utf-8"?>
+<p:notes xmlns:a="http://schemas.openxmlformats.org/drawingml/2006/main" xmlns:r="http://schemas.openxmlformats.org/officeDocument/2006/relationships" xmlns:p="http://schemas.openxmlformats.org/presentationml/2006/main">
+  <p:cSld>
+    <p:spTree>
+      <p:nvGrpSpPr>
+        <p:cNvPr id="1" name=""/>
+        <p:cNvGrpSpPr/>
+        <p:nvPr/>
+      </p:nvGrpSpPr>
+      <p:grpSpPr>
+        <a:xfrm>
+          <a:off x="0" y="0"/>
+          <a:ext cx="0" cy="0"/>
+          <a:chOff x="0" y="0"/>
+          <a:chExt cx="0" cy="0"/>
+        </a:xfrm>
+      </p:grpSpPr>
+      <p:sp>
+        <p:nvSpPr>
+          <p:cNvPr id="2" name="Slide Image Placeholder 1"/>
+          <p:cNvSpPr>
+            <a:spLocks noGrp="1" noRot="1" noChangeAspect="1"/>
+          </p:cNvSpPr>
+          <p:nvPr>
+            <p:ph type="sldImg"/>
+          </p:nvPr>
+        </p:nvSpPr>
+        <p:spPr/>
+      </p:sp>
+      <p:sp>
+        <p:nvSpPr>
+          <p:cNvPr id="3" name="Notes Placeholder 2"/>
+          <p:cNvSpPr>
+            <a:spLocks noGrp="1"/>
+          </p:cNvSpPr>
+          <p:nvPr>
+            <p:ph type="body" idx="1"/>
+          </p:nvPr>
+        </p:nvSpPr>
+        <p:spPr/>
+        <p:txBody>
+          <a:bodyPr/>
+          <a:lstStyle/>
+          <a:p>
+            <a:r>
+              <a:rPr lang="en-US" dirty="0"/>
+              <a:t/>
+            </a:r>
+            <a:endParaRPr lang="en-US" dirty="0"/>
+          </a:p>
+        </p:txBody>
+      </p:sp>
+      <p:sp>
+        <p:nvSpPr>
+          <p:cNvPr id="4" name="Slide Number Placeholder 3"/>
+          <p:cNvSpPr>
+            <a:spLocks noGrp="1"/>
+          </p:cNvSpPr>
+          <p:nvPr>
+            <p:ph type="sldNum" sz="quarter" idx="10"/>
+          </p:nvPr>
+        </p:nvSpPr>
+        <p:spPr/>
+        <p:txBody>
+          <a:bodyPr/>
+          <a:lstStyle/>
+          <a:p>
+            <a:fld id="{F7021451-1387-4CA6-816F-3879F97B5CBC}" type="slidenum">
+              <a:rPr lang="en-US"/>
+              <a:t>21</a:t>
             </a:fld>
             <a:endParaRPr lang="en-US"/>
           </a:p>
@@ -2701,7 +3146,7 @@
                 <a:ea typeface="Calibri" pitchFamily="34" charset="-122"/>
                 <a:cs typeface="Calibri" pitchFamily="34" charset="-120"/>
               </a:rPr>
-              <a:t>10 / 16</a:t>
+              <a:t>10 / 21</a:t>
             </a:r>
             <a:endParaRPr lang="en-US" sz="1100" dirty="0"/>
           </a:p>
@@ -3315,7 +3760,7 @@
                 <a:ea typeface="Calibri" pitchFamily="34" charset="-122"/>
                 <a:cs typeface="Calibri" pitchFamily="34" charset="-120"/>
               </a:rPr>
-              <a:t>11 / 16</a:t>
+              <a:t>11 / 21</a:t>
             </a:r>
             <a:endParaRPr lang="en-US" sz="1100" dirty="0"/>
           </a:p>
@@ -3948,7 +4393,7 @@
                 <a:ea typeface="Calibri" pitchFamily="34" charset="-122"/>
                 <a:cs typeface="Calibri" pitchFamily="34" charset="-120"/>
               </a:rPr>
-              <a:t>12 / 16</a:t>
+              <a:t>12 / 21</a:t>
             </a:r>
             <a:endParaRPr lang="en-US" sz="1100" dirty="0"/>
           </a:p>
@@ -4581,7 +5026,7 @@
                 <a:ea typeface="Calibri" pitchFamily="34" charset="-122"/>
                 <a:cs typeface="Calibri" pitchFamily="34" charset="-120"/>
               </a:rPr>
-              <a:t>13 / 16</a:t>
+              <a:t>13 / 21</a:t>
             </a:r>
             <a:endParaRPr lang="en-US" sz="1100" dirty="0"/>
           </a:p>
@@ -5214,7 +5659,7 @@
                 <a:ea typeface="Calibri" pitchFamily="34" charset="-122"/>
                 <a:cs typeface="Calibri" pitchFamily="34" charset="-120"/>
               </a:rPr>
-              <a:t>14 / 16</a:t>
+              <a:t>14 / 21</a:t>
             </a:r>
             <a:endParaRPr lang="en-US" sz="1100" dirty="0"/>
           </a:p>
@@ -5888,7 +6333,7 @@
                 <a:ea typeface="Calibri" pitchFamily="34" charset="-122"/>
                 <a:cs typeface="Calibri" pitchFamily="34" charset="-120"/>
               </a:rPr>
-              <a:t>15 / 16</a:t>
+              <a:t>15 / 21</a:t>
             </a:r>
             <a:endParaRPr lang="en-US" sz="1100" dirty="0"/>
           </a:p>
@@ -6501,7 +6946,7 @@
                 <a:ea typeface="Calibri" pitchFamily="34" charset="-122"/>
                 <a:cs typeface="Calibri" pitchFamily="34" charset="-120"/>
               </a:rPr>
-              <a:t>Shipping evidence</a:t>
+              <a:t>Catalog</a:t>
             </a:r>
             <a:endParaRPr lang="en-US" sz="1100" dirty="0"/>
           </a:p>
@@ -6540,7 +6985,7 @@
                 <a:ea typeface="Calibri" pitchFamily="34" charset="-122"/>
                 <a:cs typeface="Calibri" pitchFamily="34" charset="-120"/>
               </a:rPr>
-              <a:t>16 / 16</a:t>
+              <a:t>16 / 21</a:t>
             </a:r>
             <a:endParaRPr lang="en-US" sz="1100" dirty="0"/>
           </a:p>
@@ -6554,8 +6999,8 @@
         </p:nvSpPr>
         <p:spPr>
           <a:xfrm>
-            <a:off x="548640" y="914400"/>
-            <a:ext cx="11064240" cy="640080"/>
+            <a:off x="457200" y="822960"/>
+            <a:ext cx="11247120" cy="502920"/>
           </a:xfrm>
           <a:prstGeom prst="rect">
             <a:avLst/>
@@ -6571,17 +7016,17 @@
               <a:buNone/>
             </a:pPr>
             <a:r>
-              <a:rPr lang="en-US" sz="3600" b="1" dirty="0">
-                <a:solidFill>
-                  <a:srgbClr val="F1F5F9"/>
-                </a:solidFill>
-                <a:latin typeface="Calibri" pitchFamily="34" charset="0"/>
-                <a:ea typeface="Calibri" pitchFamily="34" charset="-122"/>
-                <a:cs typeface="Calibri" pitchFamily="34" charset="-120"/>
-              </a:rPr>
-              <a:t>Atlas AEC · v2 shipped 19/05/2026</a:t>
-            </a:r>
-            <a:endParaRPr lang="en-US" sz="3600" dirty="0"/>
+              <a:rPr lang="en-US" sz="2600" b="1" dirty="0">
+                <a:solidFill>
+                  <a:srgbClr val="F1F5F9"/>
+                </a:solidFill>
+                <a:latin typeface="Calibri" pitchFamily="34" charset="0"/>
+                <a:ea typeface="Calibri" pitchFamily="34" charset="-122"/>
+                <a:cs typeface="Calibri" pitchFamily="34" charset="-120"/>
+              </a:rPr>
+              <a:t>Catalog · Cấu kiện · vật tư · NCC</a:t>
+            </a:r>
+            <a:endParaRPr lang="en-US" sz="2600" dirty="0"/>
           </a:p>
         </p:txBody>
       </p:sp>
@@ -6593,8 +7038,8 @@
         </p:nvSpPr>
         <p:spPr>
           <a:xfrm>
-            <a:off x="548640" y="1554480"/>
-            <a:ext cx="11064240" cy="365760"/>
+            <a:off x="457200" y="1325880"/>
+            <a:ext cx="11247120" cy="292608"/>
           </a:xfrm>
           <a:prstGeom prst="rect">
             <a:avLst/>
@@ -6618,7 +7063,7 @@
                 <a:ea typeface="Calibri" pitchFamily="34" charset="-122"/>
                 <a:cs typeface="Calibri" pitchFamily="34" charset="-120"/>
               </a:rPr>
-              <a:t>Mỗi gate đều tự re-run được — không phải lời hứa, là làm rồi.</a:t>
+              <a:t>Thư viện chuẩn hoá cho công ty — link Submittal (vật liệu) + BoQ (giá đơn vị) · form Thêm cấu kiện mở sẵn</a:t>
             </a:r>
             <a:endParaRPr lang="en-US" sz="1400" dirty="0"/>
           </a:p>
@@ -6632,8 +7077,8 @@
         </p:nvSpPr>
         <p:spPr>
           <a:xfrm>
-            <a:off x="411480" y="2194560"/>
-            <a:ext cx="3657600" cy="1280160"/>
+            <a:off x="594360" y="1737360"/>
+            <a:ext cx="7863840" cy="4663440"/>
           </a:xfrm>
           <a:prstGeom prst="rect">
             <a:avLst/>
@@ -6649,26 +7094,367 @@
           </a:ln>
         </p:spPr>
       </p:sp>
-      <p:sp>
-        <p:nvSpPr>
-          <p:cNvPr id="10" name="Shape 8"/>
-          <p:cNvSpPr/>
-          <p:nvPr/>
-        </p:nvSpPr>
-        <p:spPr>
-          <a:xfrm>
-            <a:off x="411480" y="2194560"/>
-            <a:ext cx="73152" cy="1280160"/>
+      <p:pic>
+        <p:nvPicPr>
+          <p:cNvPr id="10" name="Image 0" descr="/Users/vsf-thuynt519-l/Documents/GitHub/atlas-aec/docs/demo-screens/15-catalog.png">    </p:cNvPr>
+          <p:cNvPicPr>
+            <a:picLocks noChangeAspect="1"/>
+          </p:cNvPicPr>
+          <p:nvPr/>
+        </p:nvPicPr>
+        <p:blipFill>
+          <a:blip r:embed="rId1"/>
+          <a:srcRect l="0" r="0" t="0" b="0"/>
+          <a:stretch/>
+        </p:blipFill>
+        <p:spPr>
+          <a:xfrm>
+            <a:off x="640080" y="1783080"/>
+            <a:ext cx="7772400" cy="4572000"/>
+          </a:xfrm>
+          <a:prstGeom prst="rect">
+            <a:avLst/>
+          </a:prstGeom>
+        </p:spPr>
+      </p:pic>
+      <p:sp>
+        <p:nvSpPr>
+          <p:cNvPr id="11" name="Text 8"/>
+          <p:cNvSpPr/>
+          <p:nvPr/>
+        </p:nvSpPr>
+        <p:spPr>
+          <a:xfrm>
+            <a:off x="8778240" y="1783080"/>
+            <a:ext cx="2926080" cy="4572000"/>
+          </a:xfrm>
+          <a:prstGeom prst="rect">
+            <a:avLst/>
+          </a:prstGeom>
+          <a:noFill/>
+          <a:ln/>
+        </p:spPr>
+        <p:txBody>
+          <a:bodyPr wrap="square" lIns="0" tIns="0" rIns="0" bIns="0" rtlCol="0" anchor="t"/>
+          <a:lstStyle/>
+          <a:p>
+            <a:pPr>
+              <a:spcAft>
+                <a:spcPts val="600"/>
+              </a:spcAft>
+            </a:pPr>
+            <a:r>
+              <a:rPr lang="en-US" sz="1300" dirty="0">
+                <a:solidFill>
+                  <a:srgbClr val="F1F5F9"/>
+                </a:solidFill>
+                <a:latin typeface="Calibri" pitchFamily="34" charset="0"/>
+                <a:ea typeface="Calibri" pitchFamily="34" charset="-122"/>
+                <a:cs typeface="Calibri" pitchFamily="34" charset="-120"/>
+              </a:rPr>
+              <a:t>Cấu kiện chia 12 nhóm:</a:t>
+            </a:r>
+            <a:endParaRPr lang="en-US" sz="1300" dirty="0"/>
+          </a:p>
+          <a:p>
+            <a:pPr>
+              <a:spcAft>
+                <a:spcPts val="600"/>
+              </a:spcAft>
+            </a:pPr>
+            <a:r>
+              <a:rPr lang="en-US" sz="1300" dirty="0">
+                <a:solidFill>
+                  <a:srgbClr val="F1F5F9"/>
+                </a:solidFill>
+                <a:latin typeface="Calibri" pitchFamily="34" charset="0"/>
+                <a:ea typeface="Calibri" pitchFamily="34" charset="-122"/>
+                <a:cs typeface="Calibri" pitchFamily="34" charset="-120"/>
+              </a:rPr>
+              <a:t>  Bê tông · Cốt thép</a:t>
+            </a:r>
+            <a:endParaRPr lang="en-US" sz="1300" dirty="0"/>
+          </a:p>
+          <a:p>
+            <a:pPr>
+              <a:spcAft>
+                <a:spcPts val="600"/>
+              </a:spcAft>
+            </a:pPr>
+            <a:r>
+              <a:rPr lang="en-US" sz="1300" dirty="0">
+                <a:solidFill>
+                  <a:srgbClr val="F1F5F9"/>
+                </a:solidFill>
+                <a:latin typeface="Calibri" pitchFamily="34" charset="0"/>
+                <a:ea typeface="Calibri" pitchFamily="34" charset="-122"/>
+                <a:cs typeface="Calibri" pitchFamily="34" charset="-120"/>
+              </a:rPr>
+              <a:t>  Gạch đá · Xi măng</a:t>
+            </a:r>
+            <a:endParaRPr lang="en-US" sz="1300" dirty="0"/>
+          </a:p>
+          <a:p>
+            <a:pPr>
+              <a:spcAft>
+                <a:spcPts val="600"/>
+              </a:spcAft>
+            </a:pPr>
+            <a:r>
+              <a:rPr lang="en-US" sz="1300" dirty="0">
+                <a:solidFill>
+                  <a:srgbClr val="F1F5F9"/>
+                </a:solidFill>
+                <a:latin typeface="Calibri" pitchFamily="34" charset="0"/>
+                <a:ea typeface="Calibri" pitchFamily="34" charset="-122"/>
+                <a:cs typeface="Calibri" pitchFamily="34" charset="-120"/>
+              </a:rPr>
+              <a:t>  Sơn · M&amp;E · PCCC</a:t>
+            </a:r>
+            <a:endParaRPr lang="en-US" sz="1300" dirty="0"/>
+          </a:p>
+          <a:p>
+            <a:pPr>
+              <a:spcAft>
+                <a:spcPts val="600"/>
+              </a:spcAft>
+            </a:pPr>
+            <a:r>
+              <a:rPr lang="en-US" sz="1300" dirty="0">
+                <a:solidFill>
+                  <a:srgbClr val="F1F5F9"/>
+                </a:solidFill>
+                <a:latin typeface="Calibri" pitchFamily="34" charset="0"/>
+                <a:ea typeface="Calibri" pitchFamily="34" charset="-122"/>
+                <a:cs typeface="Calibri" pitchFamily="34" charset="-120"/>
+              </a:rPr>
+              <a:t>  Cửa kính · Thiết bị</a:t>
+            </a:r>
+            <a:endParaRPr lang="en-US" sz="1300" dirty="0"/>
+          </a:p>
+          <a:p>
+            <a:pPr>
+              <a:spcAft>
+                <a:spcPts val="600"/>
+              </a:spcAft>
+            </a:pPr>
+            <a:endParaRPr lang="en-US" sz="1300" dirty="0"/>
+          </a:p>
+          <a:p>
+            <a:pPr>
+              <a:spcAft>
+                <a:spcPts val="600"/>
+              </a:spcAft>
+            </a:pPr>
+            <a:r>
+              <a:rPr lang="en-US" sz="1300" dirty="0">
+                <a:solidFill>
+                  <a:srgbClr val="F1F5F9"/>
+                </a:solidFill>
+                <a:latin typeface="Calibri" pitchFamily="34" charset="0"/>
+                <a:ea typeface="Calibri" pitchFamily="34" charset="-122"/>
+                <a:cs typeface="Calibri" pitchFamily="34" charset="-120"/>
+              </a:rPr>
+              <a:t>Form CRUD:</a:t>
+            </a:r>
+            <a:endParaRPr lang="en-US" sz="1300" dirty="0"/>
+          </a:p>
+          <a:p>
+            <a:pPr>
+              <a:spcAft>
+                <a:spcPts val="600"/>
+              </a:spcAft>
+            </a:pPr>
+            <a:r>
+              <a:rPr lang="en-US" sz="1300" dirty="0">
+                <a:solidFill>
+                  <a:srgbClr val="F1F5F9"/>
+                </a:solidFill>
+                <a:latin typeface="Calibri" pitchFamily="34" charset="0"/>
+                <a:ea typeface="Calibri" pitchFamily="34" charset="-122"/>
+                <a:cs typeface="Calibri" pitchFamily="34" charset="-120"/>
+              </a:rPr>
+              <a:t>  + Thêm cấu kiện</a:t>
+            </a:r>
+            <a:endParaRPr lang="en-US" sz="1300" dirty="0"/>
+          </a:p>
+          <a:p>
+            <a:pPr>
+              <a:spcAft>
+                <a:spcPts val="600"/>
+              </a:spcAft>
+            </a:pPr>
+            <a:r>
+              <a:rPr lang="en-US" sz="1300" dirty="0">
+                <a:solidFill>
+                  <a:srgbClr val="F1F5F9"/>
+                </a:solidFill>
+                <a:latin typeface="Calibri" pitchFamily="34" charset="0"/>
+                <a:ea typeface="Calibri" pitchFamily="34" charset="-122"/>
+                <a:cs typeface="Calibri" pitchFamily="34" charset="-120"/>
+              </a:rPr>
+              <a:t>  + Thêm NCC (MST)</a:t>
+            </a:r>
+            <a:endParaRPr lang="en-US" sz="1300" dirty="0"/>
+          </a:p>
+          <a:p>
+            <a:pPr>
+              <a:spcAft>
+                <a:spcPts val="600"/>
+              </a:spcAft>
+            </a:pPr>
+            <a:r>
+              <a:rPr lang="en-US" sz="1300" dirty="0">
+                <a:solidFill>
+                  <a:srgbClr val="F1F5F9"/>
+                </a:solidFill>
+                <a:latin typeface="Calibri" pitchFamily="34" charset="0"/>
+                <a:ea typeface="Calibri" pitchFamily="34" charset="-122"/>
+                <a:cs typeface="Calibri" pitchFamily="34" charset="-120"/>
+              </a:rPr>
+              <a:t>  + Quan hệ giá</a:t>
+            </a:r>
+            <a:endParaRPr lang="en-US" sz="1300" dirty="0"/>
+          </a:p>
+          <a:p>
+            <a:pPr>
+              <a:spcAft>
+                <a:spcPts val="600"/>
+              </a:spcAft>
+            </a:pPr>
+            <a:endParaRPr lang="en-US" sz="1300" dirty="0"/>
+          </a:p>
+          <a:p>
+            <a:pPr>
+              <a:spcAft>
+                <a:spcPts val="600"/>
+              </a:spcAft>
+            </a:pPr>
+            <a:r>
+              <a:rPr lang="en-US" sz="1300" dirty="0">
+                <a:solidFill>
+                  <a:srgbClr val="F1F5F9"/>
+                </a:solidFill>
+                <a:latin typeface="Calibri" pitchFamily="34" charset="0"/>
+                <a:ea typeface="Calibri" pitchFamily="34" charset="-122"/>
+                <a:cs typeface="Calibri" pitchFamily="34" charset="-120"/>
+              </a:rPr>
+              <a:t>Mỗi cấu kiện có giá</a:t>
+            </a:r>
+            <a:endParaRPr lang="en-US" sz="1300" dirty="0"/>
+          </a:p>
+          <a:p>
+            <a:pPr>
+              <a:spcAft>
+                <a:spcPts val="600"/>
+              </a:spcAft>
+            </a:pPr>
+            <a:r>
+              <a:rPr lang="en-US" sz="1300" dirty="0">
+                <a:solidFill>
+                  <a:srgbClr val="F1F5F9"/>
+                </a:solidFill>
+                <a:latin typeface="Calibri" pitchFamily="34" charset="0"/>
+                <a:ea typeface="Calibri" pitchFamily="34" charset="-122"/>
+                <a:cs typeface="Calibri" pitchFamily="34" charset="-120"/>
+              </a:rPr>
+              <a:t>baseline · qty NCC · đơn vị.</a:t>
+            </a:r>
+            <a:endParaRPr lang="en-US" sz="1300" dirty="0"/>
+          </a:p>
+        </p:txBody>
+      </p:sp>
+      <p:sp>
+        <p:nvSpPr>
+          <p:cNvPr id="12" name="Text 9"/>
+          <p:cNvSpPr/>
+          <p:nvPr/>
+        </p:nvSpPr>
+        <p:spPr>
+          <a:xfrm>
+            <a:off x="457200" y="6446520"/>
+            <a:ext cx="11247120" cy="274320"/>
+          </a:xfrm>
+          <a:prstGeom prst="rect">
+            <a:avLst/>
+          </a:prstGeom>
+          <a:noFill/>
+          <a:ln/>
+        </p:spPr>
+        <p:txBody>
+          <a:bodyPr wrap="square" lIns="0" tIns="0" rIns="0" bIns="0" rtlCol="0" anchor="ctr"/>
+          <a:lstStyle/>
+          <a:p>
+            <a:pPr indent="0" marL="0">
+              <a:buNone/>
+            </a:pPr>
+            <a:r>
+              <a:rPr lang="en-US" sz="1000" dirty="0">
+                <a:solidFill>
+                  <a:srgbClr val="475569"/>
+                </a:solidFill>
+                <a:latin typeface="Calibri" pitchFamily="34" charset="0"/>
+                <a:ea typeface="Calibri" pitchFamily="34" charset="-122"/>
+                <a:cs typeface="Calibri" pitchFamily="34" charset="-120"/>
+              </a:rPr>
+              <a:t>atlas-aec · v2 · live demo</a:t>
+            </a:r>
+            <a:endParaRPr lang="en-US" sz="1000" dirty="0"/>
+          </a:p>
+        </p:txBody>
+      </p:sp>
+    </p:spTree>
+  </p:cSld>
+  <p:clrMapOvr>
+    <a:masterClrMapping/>
+  </p:clrMapOvr>
+</p:sld>
+</file>
+
+<file path=ppt/slides/slide17.xml><?xml version="1.0" encoding="utf-8"?>
+<p:sld xmlns:a="http://schemas.openxmlformats.org/drawingml/2006/main" xmlns:r="http://schemas.openxmlformats.org/officeDocument/2006/relationships" xmlns:p="http://schemas.openxmlformats.org/presentationml/2006/main">
+  <p:cSld name="Slide 17">
+    <p:bg>
+      <p:bgPr>
+        <a:solidFill>
+          <a:srgbClr val="0B1220"/>
+        </a:solidFill>
+      </p:bgPr>
+    </p:bg>
+    <p:spTree>
+      <p:nvGrpSpPr>
+        <p:cNvPr id="1" name=""/>
+        <p:cNvGrpSpPr/>
+        <p:nvPr/>
+      </p:nvGrpSpPr>
+      <p:grpSpPr>
+        <a:xfrm>
+          <a:off x="0" y="0"/>
+          <a:ext cx="0" cy="0"/>
+          <a:chOff x="0" y="0"/>
+          <a:chExt cx="0" cy="0"/>
+        </a:xfrm>
+      </p:grpSpPr>
+      <p:sp>
+        <p:nvSpPr>
+          <p:cNvPr id="2" name="Shape 0"/>
+          <p:cNvSpPr/>
+          <p:nvPr/>
+        </p:nvSpPr>
+        <p:spPr>
+          <a:xfrm>
+            <a:off x="457200" y="320040"/>
+            <a:ext cx="292608" cy="292608"/>
           </a:xfrm>
           <a:prstGeom prst="rect">
             <a:avLst/>
           </a:prstGeom>
           <a:solidFill>
-            <a:srgbClr val="10B981"/>
+            <a:srgbClr val="3B82F6"/>
           </a:solidFill>
           <a:ln w="12700">
             <a:solidFill>
-              <a:srgbClr val="10B981"/>
+              <a:srgbClr val="3B82F6"/>
             </a:solidFill>
             <a:prstDash val="solid"/>
           </a:ln>
@@ -6676,14 +7462,53 @@
       </p:sp>
       <p:sp>
         <p:nvSpPr>
-          <p:cNvPr id="11" name="Text 9"/>
-          <p:cNvSpPr/>
-          <p:nvPr/>
-        </p:nvSpPr>
-        <p:spPr>
-          <a:xfrm>
-            <a:off x="640080" y="2331720"/>
-            <a:ext cx="3200400" cy="457200"/>
+          <p:cNvPr id="3" name="Text 1"/>
+          <p:cNvSpPr/>
+          <p:nvPr/>
+        </p:nvSpPr>
+        <p:spPr>
+          <a:xfrm>
+            <a:off x="457200" y="320040"/>
+            <a:ext cx="292608" cy="292608"/>
+          </a:xfrm>
+          <a:prstGeom prst="rect">
+            <a:avLst/>
+          </a:prstGeom>
+          <a:noFill/>
+          <a:ln/>
+        </p:spPr>
+        <p:txBody>
+          <a:bodyPr wrap="square" lIns="0" tIns="0" rIns="0" bIns="0" rtlCol="0" anchor="ctr"/>
+          <a:lstStyle/>
+          <a:p>
+            <a:pPr algn="ctr" indent="0" marL="0">
+              <a:buNone/>
+            </a:pPr>
+            <a:r>
+              <a:rPr lang="en-US" sz="1600" b="1" dirty="0">
+                <a:solidFill>
+                  <a:srgbClr val="FFFFFF"/>
+                </a:solidFill>
+                <a:latin typeface="Calibri" pitchFamily="34" charset="0"/>
+                <a:ea typeface="Calibri" pitchFamily="34" charset="-122"/>
+                <a:cs typeface="Calibri" pitchFamily="34" charset="-120"/>
+              </a:rPr>
+              <a:t>A</a:t>
+            </a:r>
+            <a:endParaRPr lang="en-US" sz="1600" dirty="0"/>
+          </a:p>
+        </p:txBody>
+      </p:sp>
+      <p:sp>
+        <p:nvSpPr>
+          <p:cNvPr id="4" name="Text 2"/>
+          <p:cNvSpPr/>
+          <p:nvPr/>
+        </p:nvSpPr>
+        <p:spPr>
+          <a:xfrm>
+            <a:off x="822960" y="320040"/>
+            <a:ext cx="2743200" cy="292608"/>
           </a:xfrm>
           <a:prstGeom prst="rect">
             <a:avLst/>
@@ -6699,15 +7524,132 @@
               <a:buNone/>
             </a:pPr>
             <a:r>
+              <a:rPr lang="en-US" sz="1300" b="1" dirty="0">
+                <a:solidFill>
+                  <a:srgbClr val="F1F5F9"/>
+                </a:solidFill>
+                <a:latin typeface="Calibri" pitchFamily="34" charset="0"/>
+                <a:ea typeface="Calibri" pitchFamily="34" charset="-122"/>
+                <a:cs typeface="Calibri" pitchFamily="34" charset="-120"/>
+              </a:rPr>
+              <a:t>Atlas AEC</a:t>
+            </a:r>
+            <a:endParaRPr lang="en-US" sz="1300" dirty="0"/>
+          </a:p>
+        </p:txBody>
+      </p:sp>
+      <p:sp>
+        <p:nvSpPr>
+          <p:cNvPr id="5" name="Text 3"/>
+          <p:cNvSpPr/>
+          <p:nvPr/>
+        </p:nvSpPr>
+        <p:spPr>
+          <a:xfrm>
+            <a:off x="3566160" y="356616"/>
+            <a:ext cx="5486400" cy="256032"/>
+          </a:xfrm>
+          <a:prstGeom prst="rect">
+            <a:avLst/>
+          </a:prstGeom>
+          <a:noFill/>
+          <a:ln/>
+        </p:spPr>
+        <p:txBody>
+          <a:bodyPr wrap="square" lIns="0" tIns="0" rIns="0" bIns="0" rtlCol="0" anchor="ctr"/>
+          <a:lstStyle/>
+          <a:p>
+            <a:pPr indent="0" marL="0">
+              <a:buNone/>
+            </a:pPr>
+            <a:r>
+              <a:rPr lang="en-US" sz="1100" dirty="0">
+                <a:solidFill>
+                  <a:srgbClr val="8B9BB4"/>
+                </a:solidFill>
+                <a:latin typeface="Calibri" pitchFamily="34" charset="0"/>
+                <a:ea typeface="Calibri" pitchFamily="34" charset="-122"/>
+                <a:cs typeface="Calibri" pitchFamily="34" charset="-120"/>
+              </a:rPr>
+              <a:t>Thi công — Schedule</a:t>
+            </a:r>
+            <a:endParaRPr lang="en-US" sz="1100" dirty="0"/>
+          </a:p>
+        </p:txBody>
+      </p:sp>
+      <p:sp>
+        <p:nvSpPr>
+          <p:cNvPr id="6" name="Text 4"/>
+          <p:cNvSpPr/>
+          <p:nvPr/>
+        </p:nvSpPr>
+        <p:spPr>
+          <a:xfrm>
+            <a:off x="10881360" y="320040"/>
+            <a:ext cx="822960" cy="292608"/>
+          </a:xfrm>
+          <a:prstGeom prst="rect">
+            <a:avLst/>
+          </a:prstGeom>
+          <a:noFill/>
+          <a:ln/>
+        </p:spPr>
+        <p:txBody>
+          <a:bodyPr wrap="square" lIns="0" tIns="0" rIns="0" bIns="0" rtlCol="0" anchor="ctr"/>
+          <a:lstStyle/>
+          <a:p>
+            <a:pPr algn="r" indent="0" marL="0">
+              <a:buNone/>
+            </a:pPr>
+            <a:r>
+              <a:rPr lang="en-US" sz="1100" dirty="0">
+                <a:solidFill>
+                  <a:srgbClr val="8B9BB4"/>
+                </a:solidFill>
+                <a:latin typeface="Calibri" pitchFamily="34" charset="0"/>
+                <a:ea typeface="Calibri" pitchFamily="34" charset="-122"/>
+                <a:cs typeface="Calibri" pitchFamily="34" charset="-120"/>
+              </a:rPr>
+              <a:t>17 / 21</a:t>
+            </a:r>
+            <a:endParaRPr lang="en-US" sz="1100" dirty="0"/>
+          </a:p>
+        </p:txBody>
+      </p:sp>
+      <p:sp>
+        <p:nvSpPr>
+          <p:cNvPr id="7" name="Text 5"/>
+          <p:cNvSpPr/>
+          <p:nvPr/>
+        </p:nvSpPr>
+        <p:spPr>
+          <a:xfrm>
+            <a:off x="457200" y="822960"/>
+            <a:ext cx="11247120" cy="502920"/>
+          </a:xfrm>
+          <a:prstGeom prst="rect">
+            <a:avLst/>
+          </a:prstGeom>
+          <a:noFill/>
+          <a:ln/>
+        </p:spPr>
+        <p:txBody>
+          <a:bodyPr wrap="square" lIns="0" tIns="0" rIns="0" bIns="0" rtlCol="0" anchor="ctr"/>
+          <a:lstStyle/>
+          <a:p>
+            <a:pPr indent="0" marL="0">
+              <a:buNone/>
+            </a:pPr>
+            <a:r>
               <a:rPr lang="en-US" sz="2600" b="1" dirty="0">
                 <a:solidFill>
-                  <a:srgbClr val="10B981"/>
-                </a:solidFill>
-                <a:latin typeface="Calibri" pitchFamily="34" charset="0"/>
-                <a:ea typeface="Calibri" pitchFamily="34" charset="-122"/>
-                <a:cs typeface="Calibri" pitchFamily="34" charset="-120"/>
-              </a:rPr>
-              <a:t>9 / 9</a:t>
+                  <a:srgbClr val="F1F5F9"/>
+                </a:solidFill>
+                <a:latin typeface="Calibri" pitchFamily="34" charset="0"/>
+                <a:ea typeface="Calibri" pitchFamily="34" charset="-122"/>
+                <a:cs typeface="Calibri" pitchFamily="34" charset="-120"/>
+              </a:rPr>
+              <a:t>Schedule · Tiến độ + đường găng (CPM)</a:t>
             </a:r>
             <a:endParaRPr lang="en-US" sz="2600" dirty="0"/>
           </a:p>
@@ -6715,14 +7657,14 @@
       </p:sp>
       <p:sp>
         <p:nvSpPr>
-          <p:cNvPr id="12" name="Text 10"/>
-          <p:cNvSpPr/>
-          <p:nvPr/>
-        </p:nvSpPr>
-        <p:spPr>
-          <a:xfrm>
-            <a:off x="640080" y="2788920"/>
-            <a:ext cx="3200400" cy="292608"/>
+          <p:cNvPr id="8" name="Text 6"/>
+          <p:cNvSpPr/>
+          <p:nvPr/>
+        </p:nvSpPr>
+        <p:spPr>
+          <a:xfrm>
+            <a:off x="457200" y="1325880"/>
+            <a:ext cx="11247120" cy="292608"/>
           </a:xfrm>
           <a:prstGeom prst="rect">
             <a:avLst/>
@@ -6738,69 +7680,30 @@
               <a:buNone/>
             </a:pPr>
             <a:r>
-              <a:rPr lang="en-US" sz="1300" b="1" dirty="0">
-                <a:solidFill>
-                  <a:srgbClr val="F1F5F9"/>
-                </a:solidFill>
-                <a:latin typeface="Calibri" pitchFamily="34" charset="0"/>
-                <a:ea typeface="Calibri" pitchFamily="34" charset="-122"/>
-                <a:cs typeface="Calibri" pitchFamily="34" charset="-120"/>
-              </a:rPr>
-              <a:t>Packages typecheck</a:t>
-            </a:r>
-            <a:endParaRPr lang="en-US" sz="1300" dirty="0"/>
-          </a:p>
-        </p:txBody>
-      </p:sp>
-      <p:sp>
-        <p:nvSpPr>
-          <p:cNvPr id="13" name="Text 11"/>
-          <p:cNvSpPr/>
-          <p:nvPr/>
-        </p:nvSpPr>
-        <p:spPr>
-          <a:xfrm>
-            <a:off x="640080" y="3063240"/>
-            <a:ext cx="3200400" cy="320040"/>
-          </a:xfrm>
-          <a:prstGeom prst="rect">
-            <a:avLst/>
-          </a:prstGeom>
-          <a:noFill/>
-          <a:ln/>
-        </p:spPr>
-        <p:txBody>
-          <a:bodyPr wrap="square" lIns="0" tIns="0" rIns="0" bIns="0" rtlCol="0" anchor="ctr"/>
-          <a:lstStyle/>
-          <a:p>
-            <a:pPr indent="0" marL="0">
-              <a:buNone/>
-            </a:pPr>
-            <a:r>
-              <a:rPr lang="en-US" sz="1100" dirty="0">
+              <a:rPr lang="en-US" sz="1400" i="1" dirty="0">
                 <a:solidFill>
                   <a:srgbClr val="8B9BB4"/>
                 </a:solidFill>
-                <a:latin typeface="Consolas" pitchFamily="34" charset="0"/>
-                <a:ea typeface="Consolas" pitchFamily="34" charset="-122"/>
-                <a:cs typeface="Consolas" pitchFamily="34" charset="-120"/>
-              </a:rPr>
-              <a:t>pnpm typecheck</a:t>
-            </a:r>
-            <a:endParaRPr lang="en-US" sz="1100" dirty="0"/>
-          </a:p>
-        </p:txBody>
-      </p:sp>
-      <p:sp>
-        <p:nvSpPr>
-          <p:cNvPr id="14" name="Shape 12"/>
-          <p:cNvSpPr/>
-          <p:nvPr/>
-        </p:nvSpPr>
-        <p:spPr>
-          <a:xfrm>
-            <a:off x="4251960" y="2194560"/>
-            <a:ext cx="3657600" cy="1280160"/>
+                <a:latin typeface="Calibri" pitchFamily="34" charset="0"/>
+                <a:ea typeface="Calibri" pitchFamily="34" charset="-122"/>
+                <a:cs typeface="Calibri" pitchFamily="34" charset="-120"/>
+              </a:rPr>
+              <a:t>Gantt-ready · AI rủi ro chậm từ daily log + thời tiết · form Thêm công việc mở sẵn</a:t>
+            </a:r>
+            <a:endParaRPr lang="en-US" sz="1400" dirty="0"/>
+          </a:p>
+        </p:txBody>
+      </p:sp>
+      <p:sp>
+        <p:nvSpPr>
+          <p:cNvPr id="9" name="Shape 7"/>
+          <p:cNvSpPr/>
+          <p:nvPr/>
+        </p:nvSpPr>
+        <p:spPr>
+          <a:xfrm>
+            <a:off x="594360" y="1737360"/>
+            <a:ext cx="7863840" cy="4663440"/>
           </a:xfrm>
           <a:prstGeom prst="rect">
             <a:avLst/>
@@ -6816,26 +7719,348 @@
           </a:ln>
         </p:spPr>
       </p:sp>
-      <p:sp>
-        <p:nvSpPr>
-          <p:cNvPr id="15" name="Shape 13"/>
-          <p:cNvSpPr/>
-          <p:nvPr/>
-        </p:nvSpPr>
-        <p:spPr>
-          <a:xfrm>
-            <a:off x="4251960" y="2194560"/>
-            <a:ext cx="73152" cy="1280160"/>
+      <p:pic>
+        <p:nvPicPr>
+          <p:cNvPr id="10" name="Image 0" descr="/Users/vsf-thuynt519-l/Documents/GitHub/atlas-aec/docs/demo-screens/16-schedule.png">    </p:cNvPr>
+          <p:cNvPicPr>
+            <a:picLocks noChangeAspect="1"/>
+          </p:cNvPicPr>
+          <p:nvPr/>
+        </p:nvPicPr>
+        <p:blipFill>
+          <a:blip r:embed="rId1"/>
+          <a:srcRect l="0" r="0" t="0" b="0"/>
+          <a:stretch/>
+        </p:blipFill>
+        <p:spPr>
+          <a:xfrm>
+            <a:off x="640080" y="1783080"/>
+            <a:ext cx="7772400" cy="4572000"/>
+          </a:xfrm>
+          <a:prstGeom prst="rect">
+            <a:avLst/>
+          </a:prstGeom>
+        </p:spPr>
+      </p:pic>
+      <p:sp>
+        <p:nvSpPr>
+          <p:cNvPr id="11" name="Text 8"/>
+          <p:cNvSpPr/>
+          <p:nvPr/>
+        </p:nvSpPr>
+        <p:spPr>
+          <a:xfrm>
+            <a:off x="8778240" y="1783080"/>
+            <a:ext cx="2926080" cy="4572000"/>
+          </a:xfrm>
+          <a:prstGeom prst="rect">
+            <a:avLst/>
+          </a:prstGeom>
+          <a:noFill/>
+          <a:ln/>
+        </p:spPr>
+        <p:txBody>
+          <a:bodyPr wrap="square" lIns="0" tIns="0" rIns="0" bIns="0" rtlCol="0" anchor="t"/>
+          <a:lstStyle/>
+          <a:p>
+            <a:pPr>
+              <a:spcAft>
+                <a:spcPts val="600"/>
+              </a:spcAft>
+            </a:pPr>
+            <a:r>
+              <a:rPr lang="en-US" sz="1300" dirty="0">
+                <a:solidFill>
+                  <a:srgbClr val="F1F5F9"/>
+                </a:solidFill>
+                <a:latin typeface="Calibri" pitchFamily="34" charset="0"/>
+                <a:ea typeface="Calibri" pitchFamily="34" charset="-122"/>
+                <a:cs typeface="Calibri" pitchFamily="34" charset="-120"/>
+              </a:rPr>
+              <a:t>KPI cấp công ty:</a:t>
+            </a:r>
+            <a:endParaRPr lang="en-US" sz="1300" dirty="0"/>
+          </a:p>
+          <a:p>
+            <a:pPr>
+              <a:spcAft>
+                <a:spcPts val="600"/>
+              </a:spcAft>
+            </a:pPr>
+            <a:r>
+              <a:rPr lang="en-US" sz="1300" dirty="0">
+                <a:solidFill>
+                  <a:srgbClr val="F1F5F9"/>
+                </a:solidFill>
+                <a:latin typeface="Calibri" pitchFamily="34" charset="0"/>
+                <a:ea typeface="Calibri" pitchFamily="34" charset="-122"/>
+                <a:cs typeface="Calibri" pitchFamily="34" charset="-120"/>
+              </a:rPr>
+              <a:t>  Tổng task · Đang thi công</a:t>
+            </a:r>
+            <a:endParaRPr lang="en-US" sz="1300" dirty="0"/>
+          </a:p>
+          <a:p>
+            <a:pPr>
+              <a:spcAft>
+                <a:spcPts val="600"/>
+              </a:spcAft>
+            </a:pPr>
+            <a:r>
+              <a:rPr lang="en-US" sz="1300" dirty="0">
+                <a:solidFill>
+                  <a:srgbClr val="F1F5F9"/>
+                </a:solidFill>
+                <a:latin typeface="Calibri" pitchFamily="34" charset="0"/>
+                <a:ea typeface="Calibri" pitchFamily="34" charset="-122"/>
+                <a:cs typeface="Calibri" pitchFamily="34" charset="-120"/>
+              </a:rPr>
+              <a:t>  Quá hạn · Đường găng</a:t>
+            </a:r>
+            <a:endParaRPr lang="en-US" sz="1300" dirty="0"/>
+          </a:p>
+          <a:p>
+            <a:pPr>
+              <a:spcAft>
+                <a:spcPts val="600"/>
+              </a:spcAft>
+            </a:pPr>
+            <a:endParaRPr lang="en-US" sz="1300" dirty="0"/>
+          </a:p>
+          <a:p>
+            <a:pPr>
+              <a:spcAft>
+                <a:spcPts val="600"/>
+              </a:spcAft>
+            </a:pPr>
+            <a:r>
+              <a:rPr lang="en-US" sz="1300" dirty="0">
+                <a:solidFill>
+                  <a:srgbClr val="F1F5F9"/>
+                </a:solidFill>
+                <a:latin typeface="Calibri" pitchFamily="34" charset="0"/>
+                <a:ea typeface="Calibri" pitchFamily="34" charset="-122"/>
+                <a:cs typeface="Calibri" pitchFamily="34" charset="-120"/>
+              </a:rPr>
+              <a:t>Form CRUD:</a:t>
+            </a:r>
+            <a:endParaRPr lang="en-US" sz="1300" dirty="0"/>
+          </a:p>
+          <a:p>
+            <a:pPr>
+              <a:spcAft>
+                <a:spcPts val="600"/>
+              </a:spcAft>
+            </a:pPr>
+            <a:r>
+              <a:rPr lang="en-US" sz="1300" dirty="0">
+                <a:solidFill>
+                  <a:srgbClr val="F1F5F9"/>
+                </a:solidFill>
+                <a:latin typeface="Calibri" pitchFamily="34" charset="0"/>
+                <a:ea typeface="Calibri" pitchFamily="34" charset="-122"/>
+                <a:cs typeface="Calibri" pitchFamily="34" charset="-120"/>
+              </a:rPr>
+              <a:t>  + Thêm công việc (task)</a:t>
+            </a:r>
+            <a:endParaRPr lang="en-US" sz="1300" dirty="0"/>
+          </a:p>
+          <a:p>
+            <a:pPr>
+              <a:spcAft>
+                <a:spcPts val="600"/>
+              </a:spcAft>
+            </a:pPr>
+            <a:r>
+              <a:rPr lang="en-US" sz="1300" dirty="0">
+                <a:solidFill>
+                  <a:srgbClr val="F1F5F9"/>
+                </a:solidFill>
+                <a:latin typeface="Calibri" pitchFamily="34" charset="0"/>
+                <a:ea typeface="Calibri" pitchFamily="34" charset="-122"/>
+                <a:cs typeface="Calibri" pitchFamily="34" charset="-120"/>
+              </a:rPr>
+              <a:t>  WBS · Discipline · Zone</a:t>
+            </a:r>
+            <a:endParaRPr lang="en-US" sz="1300" dirty="0"/>
+          </a:p>
+          <a:p>
+            <a:pPr>
+              <a:spcAft>
+                <a:spcPts val="600"/>
+              </a:spcAft>
+            </a:pPr>
+            <a:r>
+              <a:rPr lang="en-US" sz="1300" dirty="0">
+                <a:solidFill>
+                  <a:srgbClr val="F1F5F9"/>
+                </a:solidFill>
+                <a:latin typeface="Calibri" pitchFamily="34" charset="0"/>
+                <a:ea typeface="Calibri" pitchFamily="34" charset="-122"/>
+                <a:cs typeface="Calibri" pitchFamily="34" charset="-120"/>
+              </a:rPr>
+              <a:t>  Plan start/end · % xong</a:t>
+            </a:r>
+            <a:endParaRPr lang="en-US" sz="1300" dirty="0"/>
+          </a:p>
+          <a:p>
+            <a:pPr>
+              <a:spcAft>
+                <a:spcPts val="600"/>
+              </a:spcAft>
+            </a:pPr>
+            <a:endParaRPr lang="en-US" sz="1300" dirty="0"/>
+          </a:p>
+          <a:p>
+            <a:pPr>
+              <a:spcAft>
+                <a:spcPts val="600"/>
+              </a:spcAft>
+            </a:pPr>
+            <a:r>
+              <a:rPr lang="en-US" sz="1300" dirty="0">
+                <a:solidFill>
+                  <a:srgbClr val="F1F5F9"/>
+                </a:solidFill>
+                <a:latin typeface="Calibri" pitchFamily="34" charset="0"/>
+                <a:ea typeface="Calibri" pitchFamily="34" charset="-122"/>
+                <a:cs typeface="Calibri" pitchFamily="34" charset="-120"/>
+              </a:rPr>
+              <a:t>Critical Path đánh dấu</a:t>
+            </a:r>
+            <a:endParaRPr lang="en-US" sz="1300" dirty="0"/>
+          </a:p>
+          <a:p>
+            <a:pPr>
+              <a:spcAft>
+                <a:spcPts val="600"/>
+              </a:spcAft>
+            </a:pPr>
+            <a:r>
+              <a:rPr lang="en-US" sz="1300" dirty="0">
+                <a:solidFill>
+                  <a:srgbClr val="F1F5F9"/>
+                </a:solidFill>
+                <a:latin typeface="Calibri" pitchFamily="34" charset="0"/>
+                <a:ea typeface="Calibri" pitchFamily="34" charset="-122"/>
+                <a:cs typeface="Calibri" pitchFamily="34" charset="-120"/>
+              </a:rPr>
+              <a:t>tím — chậm 1 ngày =</a:t>
+            </a:r>
+            <a:endParaRPr lang="en-US" sz="1300" dirty="0"/>
+          </a:p>
+          <a:p>
+            <a:pPr>
+              <a:spcAft>
+                <a:spcPts val="600"/>
+              </a:spcAft>
+            </a:pPr>
+            <a:r>
+              <a:rPr lang="en-US" sz="1300" dirty="0">
+                <a:solidFill>
+                  <a:srgbClr val="F1F5F9"/>
+                </a:solidFill>
+                <a:latin typeface="Calibri" pitchFamily="34" charset="0"/>
+                <a:ea typeface="Calibri" pitchFamily="34" charset="-122"/>
+                <a:cs typeface="Calibri" pitchFamily="34" charset="-120"/>
+              </a:rPr>
+              <a:t>dự án chậm 1 ngày.</a:t>
+            </a:r>
+            <a:endParaRPr lang="en-US" sz="1300" dirty="0"/>
+          </a:p>
+        </p:txBody>
+      </p:sp>
+      <p:sp>
+        <p:nvSpPr>
+          <p:cNvPr id="12" name="Text 9"/>
+          <p:cNvSpPr/>
+          <p:nvPr/>
+        </p:nvSpPr>
+        <p:spPr>
+          <a:xfrm>
+            <a:off x="457200" y="6446520"/>
+            <a:ext cx="11247120" cy="274320"/>
+          </a:xfrm>
+          <a:prstGeom prst="rect">
+            <a:avLst/>
+          </a:prstGeom>
+          <a:noFill/>
+          <a:ln/>
+        </p:spPr>
+        <p:txBody>
+          <a:bodyPr wrap="square" lIns="0" tIns="0" rIns="0" bIns="0" rtlCol="0" anchor="ctr"/>
+          <a:lstStyle/>
+          <a:p>
+            <a:pPr indent="0" marL="0">
+              <a:buNone/>
+            </a:pPr>
+            <a:r>
+              <a:rPr lang="en-US" sz="1000" dirty="0">
+                <a:solidFill>
+                  <a:srgbClr val="475569"/>
+                </a:solidFill>
+                <a:latin typeface="Calibri" pitchFamily="34" charset="0"/>
+                <a:ea typeface="Calibri" pitchFamily="34" charset="-122"/>
+                <a:cs typeface="Calibri" pitchFamily="34" charset="-120"/>
+              </a:rPr>
+              <a:t>atlas-aec · v2 · live demo</a:t>
+            </a:r>
+            <a:endParaRPr lang="en-US" sz="1000" dirty="0"/>
+          </a:p>
+        </p:txBody>
+      </p:sp>
+    </p:spTree>
+  </p:cSld>
+  <p:clrMapOvr>
+    <a:masterClrMapping/>
+  </p:clrMapOvr>
+</p:sld>
+</file>
+
+<file path=ppt/slides/slide18.xml><?xml version="1.0" encoding="utf-8"?>
+<p:sld xmlns:a="http://schemas.openxmlformats.org/drawingml/2006/main" xmlns:r="http://schemas.openxmlformats.org/officeDocument/2006/relationships" xmlns:p="http://schemas.openxmlformats.org/presentationml/2006/main">
+  <p:cSld name="Slide 18">
+    <p:bg>
+      <p:bgPr>
+        <a:solidFill>
+          <a:srgbClr val="0B1220"/>
+        </a:solidFill>
+      </p:bgPr>
+    </p:bg>
+    <p:spTree>
+      <p:nvGrpSpPr>
+        <p:cNvPr id="1" name=""/>
+        <p:cNvGrpSpPr/>
+        <p:nvPr/>
+      </p:nvGrpSpPr>
+      <p:grpSpPr>
+        <a:xfrm>
+          <a:off x="0" y="0"/>
+          <a:ext cx="0" cy="0"/>
+          <a:chOff x="0" y="0"/>
+          <a:chExt cx="0" cy="0"/>
+        </a:xfrm>
+      </p:grpSpPr>
+      <p:sp>
+        <p:nvSpPr>
+          <p:cNvPr id="2" name="Shape 0"/>
+          <p:cNvSpPr/>
+          <p:nvPr/>
+        </p:nvSpPr>
+        <p:spPr>
+          <a:xfrm>
+            <a:off x="457200" y="320040"/>
+            <a:ext cx="292608" cy="292608"/>
           </a:xfrm>
           <a:prstGeom prst="rect">
             <a:avLst/>
           </a:prstGeom>
           <a:solidFill>
-            <a:srgbClr val="10B981"/>
+            <a:srgbClr val="3B82F6"/>
           </a:solidFill>
           <a:ln w="12700">
             <a:solidFill>
-              <a:srgbClr val="10B981"/>
+              <a:srgbClr val="3B82F6"/>
             </a:solidFill>
             <a:prstDash val="solid"/>
           </a:ln>
@@ -6843,14 +8068,53 @@
       </p:sp>
       <p:sp>
         <p:nvSpPr>
-          <p:cNvPr id="16" name="Text 14"/>
-          <p:cNvSpPr/>
-          <p:nvPr/>
-        </p:nvSpPr>
-        <p:spPr>
-          <a:xfrm>
-            <a:off x="4480560" y="2331720"/>
-            <a:ext cx="3200400" cy="457200"/>
+          <p:cNvPr id="3" name="Text 1"/>
+          <p:cNvSpPr/>
+          <p:nvPr/>
+        </p:nvSpPr>
+        <p:spPr>
+          <a:xfrm>
+            <a:off x="457200" y="320040"/>
+            <a:ext cx="292608" cy="292608"/>
+          </a:xfrm>
+          <a:prstGeom prst="rect">
+            <a:avLst/>
+          </a:prstGeom>
+          <a:noFill/>
+          <a:ln/>
+        </p:spPr>
+        <p:txBody>
+          <a:bodyPr wrap="square" lIns="0" tIns="0" rIns="0" bIns="0" rtlCol="0" anchor="ctr"/>
+          <a:lstStyle/>
+          <a:p>
+            <a:pPr algn="ctr" indent="0" marL="0">
+              <a:buNone/>
+            </a:pPr>
+            <a:r>
+              <a:rPr lang="en-US" sz="1600" b="1" dirty="0">
+                <a:solidFill>
+                  <a:srgbClr val="FFFFFF"/>
+                </a:solidFill>
+                <a:latin typeface="Calibri" pitchFamily="34" charset="0"/>
+                <a:ea typeface="Calibri" pitchFamily="34" charset="-122"/>
+                <a:cs typeface="Calibri" pitchFamily="34" charset="-120"/>
+              </a:rPr>
+              <a:t>A</a:t>
+            </a:r>
+            <a:endParaRPr lang="en-US" sz="1600" dirty="0"/>
+          </a:p>
+        </p:txBody>
+      </p:sp>
+      <p:sp>
+        <p:nvSpPr>
+          <p:cNvPr id="4" name="Text 2"/>
+          <p:cNvSpPr/>
+          <p:nvPr/>
+        </p:nvSpPr>
+        <p:spPr>
+          <a:xfrm>
+            <a:off x="822960" y="320040"/>
+            <a:ext cx="2743200" cy="292608"/>
           </a:xfrm>
           <a:prstGeom prst="rect">
             <a:avLst/>
@@ -6866,15 +8130,132 @@
               <a:buNone/>
             </a:pPr>
             <a:r>
+              <a:rPr lang="en-US" sz="1300" b="1" dirty="0">
+                <a:solidFill>
+                  <a:srgbClr val="F1F5F9"/>
+                </a:solidFill>
+                <a:latin typeface="Calibri" pitchFamily="34" charset="0"/>
+                <a:ea typeface="Calibri" pitchFamily="34" charset="-122"/>
+                <a:cs typeface="Calibri" pitchFamily="34" charset="-120"/>
+              </a:rPr>
+              <a:t>Atlas AEC</a:t>
+            </a:r>
+            <a:endParaRPr lang="en-US" sz="1300" dirty="0"/>
+          </a:p>
+        </p:txBody>
+      </p:sp>
+      <p:sp>
+        <p:nvSpPr>
+          <p:cNvPr id="5" name="Text 3"/>
+          <p:cNvSpPr/>
+          <p:nvPr/>
+        </p:nvSpPr>
+        <p:spPr>
+          <a:xfrm>
+            <a:off x="3566160" y="356616"/>
+            <a:ext cx="5486400" cy="256032"/>
+          </a:xfrm>
+          <a:prstGeom prst="rect">
+            <a:avLst/>
+          </a:prstGeom>
+          <a:noFill/>
+          <a:ln/>
+        </p:spPr>
+        <p:txBody>
+          <a:bodyPr wrap="square" lIns="0" tIns="0" rIns="0" bIns="0" rtlCol="0" anchor="ctr"/>
+          <a:lstStyle/>
+          <a:p>
+            <a:pPr indent="0" marL="0">
+              <a:buNone/>
+            </a:pPr>
+            <a:r>
+              <a:rPr lang="en-US" sz="1100" dirty="0">
+                <a:solidFill>
+                  <a:srgbClr val="8B9BB4"/>
+                </a:solidFill>
+                <a:latin typeface="Calibri" pitchFamily="34" charset="0"/>
+                <a:ea typeface="Calibri" pitchFamily="34" charset="-122"/>
+                <a:cs typeface="Calibri" pitchFamily="34" charset="-120"/>
+              </a:rPr>
+              <a:t>Pháp lý — PermitFlow</a:t>
+            </a:r>
+            <a:endParaRPr lang="en-US" sz="1100" dirty="0"/>
+          </a:p>
+        </p:txBody>
+      </p:sp>
+      <p:sp>
+        <p:nvSpPr>
+          <p:cNvPr id="6" name="Text 4"/>
+          <p:cNvSpPr/>
+          <p:nvPr/>
+        </p:nvSpPr>
+        <p:spPr>
+          <a:xfrm>
+            <a:off x="10881360" y="320040"/>
+            <a:ext cx="822960" cy="292608"/>
+          </a:xfrm>
+          <a:prstGeom prst="rect">
+            <a:avLst/>
+          </a:prstGeom>
+          <a:noFill/>
+          <a:ln/>
+        </p:spPr>
+        <p:txBody>
+          <a:bodyPr wrap="square" lIns="0" tIns="0" rIns="0" bIns="0" rtlCol="0" anchor="ctr"/>
+          <a:lstStyle/>
+          <a:p>
+            <a:pPr algn="r" indent="0" marL="0">
+              <a:buNone/>
+            </a:pPr>
+            <a:r>
+              <a:rPr lang="en-US" sz="1100" dirty="0">
+                <a:solidFill>
+                  <a:srgbClr val="8B9BB4"/>
+                </a:solidFill>
+                <a:latin typeface="Calibri" pitchFamily="34" charset="0"/>
+                <a:ea typeface="Calibri" pitchFamily="34" charset="-122"/>
+                <a:cs typeface="Calibri" pitchFamily="34" charset="-120"/>
+              </a:rPr>
+              <a:t>18 / 21</a:t>
+            </a:r>
+            <a:endParaRPr lang="en-US" sz="1100" dirty="0"/>
+          </a:p>
+        </p:txBody>
+      </p:sp>
+      <p:sp>
+        <p:nvSpPr>
+          <p:cNvPr id="7" name="Text 5"/>
+          <p:cNvSpPr/>
+          <p:nvPr/>
+        </p:nvSpPr>
+        <p:spPr>
+          <a:xfrm>
+            <a:off x="457200" y="822960"/>
+            <a:ext cx="11247120" cy="502920"/>
+          </a:xfrm>
+          <a:prstGeom prst="rect">
+            <a:avLst/>
+          </a:prstGeom>
+          <a:noFill/>
+          <a:ln/>
+        </p:spPr>
+        <p:txBody>
+          <a:bodyPr wrap="square" lIns="0" tIns="0" rIns="0" bIns="0" rtlCol="0" anchor="ctr"/>
+          <a:lstStyle/>
+          <a:p>
+            <a:pPr indent="0" marL="0">
+              <a:buNone/>
+            </a:pPr>
+            <a:r>
               <a:rPr lang="en-US" sz="2600" b="1" dirty="0">
                 <a:solidFill>
-                  <a:srgbClr val="10B981"/>
-                </a:solidFill>
-                <a:latin typeface="Calibri" pitchFamily="34" charset="0"/>
-                <a:ea typeface="Calibri" pitchFamily="34" charset="-122"/>
-                <a:cs typeface="Calibri" pitchFamily="34" charset="-120"/>
-              </a:rPr>
-              <a:t>2 / 2</a:t>
+                  <a:srgbClr val="F1F5F9"/>
+                </a:solidFill>
+                <a:latin typeface="Calibri" pitchFamily="34" charset="0"/>
+                <a:ea typeface="Calibri" pitchFamily="34" charset="-122"/>
+                <a:cs typeface="Calibri" pitchFamily="34" charset="-120"/>
+              </a:rPr>
+              <a:t>PermitFlow · Xin GPXD NĐ 15/2021</a:t>
             </a:r>
             <a:endParaRPr lang="en-US" sz="2600" dirty="0"/>
           </a:p>
@@ -6882,14 +8263,14 @@
       </p:sp>
       <p:sp>
         <p:nvSpPr>
-          <p:cNvPr id="17" name="Text 15"/>
-          <p:cNvSpPr/>
-          <p:nvPr/>
-        </p:nvSpPr>
-        <p:spPr>
-          <a:xfrm>
-            <a:off x="4480560" y="2788920"/>
-            <a:ext cx="3200400" cy="292608"/>
+          <p:cNvPr id="8" name="Text 6"/>
+          <p:cNvSpPr/>
+          <p:nvPr/>
+        </p:nvSpPr>
+        <p:spPr>
+          <a:xfrm>
+            <a:off x="457200" y="1325880"/>
+            <a:ext cx="11247120" cy="292608"/>
           </a:xfrm>
           <a:prstGeom prst="rect">
             <a:avLst/>
@@ -6905,69 +8286,30 @@
               <a:buNone/>
             </a:pPr>
             <a:r>
-              <a:rPr lang="en-US" sz="1300" b="1" dirty="0">
-                <a:solidFill>
-                  <a:srgbClr val="F1F5F9"/>
-                </a:solidFill>
-                <a:latin typeface="Calibri" pitchFamily="34" charset="0"/>
-                <a:ea typeface="Calibri" pitchFamily="34" charset="-122"/>
-                <a:cs typeface="Calibri" pitchFamily="34" charset="-120"/>
-              </a:rPr>
-              <a:t>Next apps lint clean</a:t>
-            </a:r>
-            <a:endParaRPr lang="en-US" sz="1300" dirty="0"/>
-          </a:p>
-        </p:txBody>
-      </p:sp>
-      <p:sp>
-        <p:nvSpPr>
-          <p:cNvPr id="18" name="Text 16"/>
-          <p:cNvSpPr/>
-          <p:nvPr/>
-        </p:nvSpPr>
-        <p:spPr>
-          <a:xfrm>
-            <a:off x="4480560" y="3063240"/>
-            <a:ext cx="3200400" cy="320040"/>
-          </a:xfrm>
-          <a:prstGeom prst="rect">
-            <a:avLst/>
-          </a:prstGeom>
-          <a:noFill/>
-          <a:ln/>
-        </p:spPr>
-        <p:txBody>
-          <a:bodyPr wrap="square" lIns="0" tIns="0" rIns="0" bIns="0" rtlCol="0" anchor="ctr"/>
-          <a:lstStyle/>
-          <a:p>
-            <a:pPr indent="0" marL="0">
-              <a:buNone/>
-            </a:pPr>
-            <a:r>
-              <a:rPr lang="en-US" sz="1100" dirty="0">
+              <a:rPr lang="en-US" sz="1400" i="1" dirty="0">
                 <a:solidFill>
                   <a:srgbClr val="8B9BB4"/>
                 </a:solidFill>
-                <a:latin typeface="Consolas" pitchFamily="34" charset="0"/>
-                <a:ea typeface="Consolas" pitchFamily="34" charset="-122"/>
-                <a:cs typeface="Consolas" pitchFamily="34" charset="-120"/>
-              </a:rPr>
-              <a:t>pnpm lint</a:t>
-            </a:r>
-            <a:endParaRPr lang="en-US" sz="1100" dirty="0"/>
-          </a:p>
-        </p:txBody>
-      </p:sp>
-      <p:sp>
-        <p:nvSpPr>
-          <p:cNvPr id="19" name="Shape 17"/>
-          <p:cNvSpPr/>
-          <p:nvPr/>
-        </p:nvSpPr>
-        <p:spPr>
-          <a:xfrm>
-            <a:off x="8092440" y="2194560"/>
-            <a:ext cx="3657600" cy="1280160"/>
+                <a:latin typeface="Calibri" pitchFamily="34" charset="0"/>
+                <a:ea typeface="Calibri" pitchFamily="34" charset="-122"/>
+                <a:cs typeface="Calibri" pitchFamily="34" charset="-120"/>
+              </a:rPr>
+              <a:t>Tự sinh checklist Phụ lục I từ profile dự án · 6 loại GPXD · form Tạo hồ sơ mở sẵn</a:t>
+            </a:r>
+            <a:endParaRPr lang="en-US" sz="1400" dirty="0"/>
+          </a:p>
+        </p:txBody>
+      </p:sp>
+      <p:sp>
+        <p:nvSpPr>
+          <p:cNvPr id="9" name="Shape 7"/>
+          <p:cNvSpPr/>
+          <p:nvPr/>
+        </p:nvSpPr>
+        <p:spPr>
+          <a:xfrm>
+            <a:off x="594360" y="1737360"/>
+            <a:ext cx="7863840" cy="4663440"/>
           </a:xfrm>
           <a:prstGeom prst="rect">
             <a:avLst/>
@@ -6983,26 +8325,367 @@
           </a:ln>
         </p:spPr>
       </p:sp>
-      <p:sp>
-        <p:nvSpPr>
-          <p:cNvPr id="20" name="Shape 18"/>
-          <p:cNvSpPr/>
-          <p:nvPr/>
-        </p:nvSpPr>
-        <p:spPr>
-          <a:xfrm>
-            <a:off x="8092440" y="2194560"/>
-            <a:ext cx="73152" cy="1280160"/>
+      <p:pic>
+        <p:nvPicPr>
+          <p:cNvPr id="10" name="Image 0" descr="/Users/vsf-thuynt519-l/Documents/GitHub/atlas-aec/docs/demo-screens/17-permitflow.png">    </p:cNvPr>
+          <p:cNvPicPr>
+            <a:picLocks noChangeAspect="1"/>
+          </p:cNvPicPr>
+          <p:nvPr/>
+        </p:nvPicPr>
+        <p:blipFill>
+          <a:blip r:embed="rId1"/>
+          <a:srcRect l="0" r="0" t="0" b="0"/>
+          <a:stretch/>
+        </p:blipFill>
+        <p:spPr>
+          <a:xfrm>
+            <a:off x="640080" y="1783080"/>
+            <a:ext cx="7772400" cy="4572000"/>
+          </a:xfrm>
+          <a:prstGeom prst="rect">
+            <a:avLst/>
+          </a:prstGeom>
+        </p:spPr>
+      </p:pic>
+      <p:sp>
+        <p:nvSpPr>
+          <p:cNvPr id="11" name="Text 8"/>
+          <p:cNvSpPr/>
+          <p:nvPr/>
+        </p:nvSpPr>
+        <p:spPr>
+          <a:xfrm>
+            <a:off x="8778240" y="1783080"/>
+            <a:ext cx="2926080" cy="4572000"/>
+          </a:xfrm>
+          <a:prstGeom prst="rect">
+            <a:avLst/>
+          </a:prstGeom>
+          <a:noFill/>
+          <a:ln/>
+        </p:spPr>
+        <p:txBody>
+          <a:bodyPr wrap="square" lIns="0" tIns="0" rIns="0" bIns="0" rtlCol="0" anchor="t"/>
+          <a:lstStyle/>
+          <a:p>
+            <a:pPr>
+              <a:spcAft>
+                <a:spcPts val="600"/>
+              </a:spcAft>
+            </a:pPr>
+            <a:r>
+              <a:rPr lang="en-US" sz="1300" dirty="0">
+                <a:solidFill>
+                  <a:srgbClr val="F1F5F9"/>
+                </a:solidFill>
+                <a:latin typeface="Calibri" pitchFamily="34" charset="0"/>
+                <a:ea typeface="Calibri" pitchFamily="34" charset="-122"/>
+                <a:cs typeface="Calibri" pitchFamily="34" charset="-120"/>
+              </a:rPr>
+              <a:t>6 loại GPXD:</a:t>
+            </a:r>
+            <a:endParaRPr lang="en-US" sz="1300" dirty="0"/>
+          </a:p>
+          <a:p>
+            <a:pPr>
+              <a:spcAft>
+                <a:spcPts val="600"/>
+              </a:spcAft>
+            </a:pPr>
+            <a:r>
+              <a:rPr lang="en-US" sz="1300" dirty="0">
+                <a:solidFill>
+                  <a:srgbClr val="F1F5F9"/>
+                </a:solidFill>
+                <a:latin typeface="Calibri" pitchFamily="34" charset="0"/>
+                <a:ea typeface="Calibri" pitchFamily="34" charset="-122"/>
+                <a:cs typeface="Calibri" pitchFamily="34" charset="-120"/>
+              </a:rPr>
+              <a:t>  Mới · Điều chỉnh</a:t>
+            </a:r>
+            <a:endParaRPr lang="en-US" sz="1300" dirty="0"/>
+          </a:p>
+          <a:p>
+            <a:pPr>
+              <a:spcAft>
+                <a:spcPts val="600"/>
+              </a:spcAft>
+            </a:pPr>
+            <a:r>
+              <a:rPr lang="en-US" sz="1300" dirty="0">
+                <a:solidFill>
+                  <a:srgbClr val="F1F5F9"/>
+                </a:solidFill>
+                <a:latin typeface="Calibri" pitchFamily="34" charset="0"/>
+                <a:ea typeface="Calibri" pitchFamily="34" charset="-122"/>
+                <a:cs typeface="Calibri" pitchFamily="34" charset="-120"/>
+              </a:rPr>
+              <a:t>  Sửa chữa · Tạm</a:t>
+            </a:r>
+            <a:endParaRPr lang="en-US" sz="1300" dirty="0"/>
+          </a:p>
+          <a:p>
+            <a:pPr>
+              <a:spcAft>
+                <a:spcPts val="600"/>
+              </a:spcAft>
+            </a:pPr>
+            <a:r>
+              <a:rPr lang="en-US" sz="1300" dirty="0">
+                <a:solidFill>
+                  <a:srgbClr val="F1F5F9"/>
+                </a:solidFill>
+                <a:latin typeface="Calibri" pitchFamily="34" charset="0"/>
+                <a:ea typeface="Calibri" pitchFamily="34" charset="-122"/>
+                <a:cs typeface="Calibri" pitchFamily="34" charset="-120"/>
+              </a:rPr>
+              <a:t>  Hạ tầng · Thông báo</a:t>
+            </a:r>
+            <a:endParaRPr lang="en-US" sz="1300" dirty="0"/>
+          </a:p>
+          <a:p>
+            <a:pPr>
+              <a:spcAft>
+                <a:spcPts val="600"/>
+              </a:spcAft>
+            </a:pPr>
+            <a:endParaRPr lang="en-US" sz="1300" dirty="0"/>
+          </a:p>
+          <a:p>
+            <a:pPr>
+              <a:spcAft>
+                <a:spcPts val="600"/>
+              </a:spcAft>
+            </a:pPr>
+            <a:r>
+              <a:rPr lang="en-US" sz="1300" dirty="0">
+                <a:solidFill>
+                  <a:srgbClr val="F1F5F9"/>
+                </a:solidFill>
+                <a:latin typeface="Calibri" pitchFamily="34" charset="0"/>
+                <a:ea typeface="Calibri" pitchFamily="34" charset="-122"/>
+                <a:cs typeface="Calibri" pitchFamily="34" charset="-120"/>
+              </a:rPr>
+              <a:t>Form CRUD:</a:t>
+            </a:r>
+            <a:endParaRPr lang="en-US" sz="1300" dirty="0"/>
+          </a:p>
+          <a:p>
+            <a:pPr>
+              <a:spcAft>
+                <a:spcPts val="600"/>
+              </a:spcAft>
+            </a:pPr>
+            <a:r>
+              <a:rPr lang="en-US" sz="1300" dirty="0">
+                <a:solidFill>
+                  <a:srgbClr val="F1F5F9"/>
+                </a:solidFill>
+                <a:latin typeface="Calibri" pitchFamily="34" charset="0"/>
+                <a:ea typeface="Calibri" pitchFamily="34" charset="-122"/>
+                <a:cs typeface="Calibri" pitchFamily="34" charset="-120"/>
+              </a:rPr>
+              <a:t>  + Tạo hồ sơ xin GPXD</a:t>
+            </a:r>
+            <a:endParaRPr lang="en-US" sz="1300" dirty="0"/>
+          </a:p>
+          <a:p>
+            <a:pPr>
+              <a:spcAft>
+                <a:spcPts val="600"/>
+              </a:spcAft>
+            </a:pPr>
+            <a:r>
+              <a:rPr lang="en-US" sz="1300" dirty="0">
+                <a:solidFill>
+                  <a:srgbClr val="F1F5F9"/>
+                </a:solidFill>
+                <a:latin typeface="Calibri" pitchFamily="34" charset="0"/>
+                <a:ea typeface="Calibri" pitchFamily="34" charset="-122"/>
+                <a:cs typeface="Calibri" pitchFamily="34" charset="-120"/>
+              </a:rPr>
+              <a:t>  Dự án · Đơn vị nộp</a:t>
+            </a:r>
+            <a:endParaRPr lang="en-US" sz="1300" dirty="0"/>
+          </a:p>
+          <a:p>
+            <a:pPr>
+              <a:spcAft>
+                <a:spcPts val="600"/>
+              </a:spcAft>
+            </a:pPr>
+            <a:r>
+              <a:rPr lang="en-US" sz="1300" dirty="0">
+                <a:solidFill>
+                  <a:srgbClr val="F1F5F9"/>
+                </a:solidFill>
+                <a:latin typeface="Calibri" pitchFamily="34" charset="0"/>
+                <a:ea typeface="Calibri" pitchFamily="34" charset="-122"/>
+                <a:cs typeface="Calibri" pitchFamily="34" charset="-120"/>
+              </a:rPr>
+              <a:t>  Cơ quan cấp (Sở XD)</a:t>
+            </a:r>
+            <a:endParaRPr lang="en-US" sz="1300" dirty="0"/>
+          </a:p>
+          <a:p>
+            <a:pPr>
+              <a:spcAft>
+                <a:spcPts val="600"/>
+              </a:spcAft>
+            </a:pPr>
+            <a:endParaRPr lang="en-US" sz="1300" dirty="0"/>
+          </a:p>
+          <a:p>
+            <a:pPr>
+              <a:spcAft>
+                <a:spcPts val="600"/>
+              </a:spcAft>
+            </a:pPr>
+            <a:r>
+              <a:rPr lang="en-US" sz="1300" dirty="0">
+                <a:solidFill>
+                  <a:srgbClr val="F1F5F9"/>
+                </a:solidFill>
+                <a:latin typeface="Calibri" pitchFamily="34" charset="0"/>
+                <a:ea typeface="Calibri" pitchFamily="34" charset="-122"/>
+                <a:cs typeface="Calibri" pitchFamily="34" charset="-120"/>
+              </a:rPr>
+              <a:t>Auto-checklist 8 mục</a:t>
+            </a:r>
+            <a:endParaRPr lang="en-US" sz="1300" dirty="0"/>
+          </a:p>
+          <a:p>
+            <a:pPr>
+              <a:spcAft>
+                <a:spcPts val="600"/>
+              </a:spcAft>
+            </a:pPr>
+            <a:r>
+              <a:rPr lang="en-US" sz="1300" dirty="0">
+                <a:solidFill>
+                  <a:srgbClr val="F1F5F9"/>
+                </a:solidFill>
+                <a:latin typeface="Calibri" pitchFamily="34" charset="0"/>
+                <a:ea typeface="Calibri" pitchFamily="34" charset="-122"/>
+                <a:cs typeface="Calibri" pitchFamily="34" charset="-120"/>
+              </a:rPr>
+              <a:t>PL-I.A.1 → PL-I.A.8</a:t>
+            </a:r>
+            <a:endParaRPr lang="en-US" sz="1300" dirty="0"/>
+          </a:p>
+          <a:p>
+            <a:pPr>
+              <a:spcAft>
+                <a:spcPts val="600"/>
+              </a:spcAft>
+            </a:pPr>
+            <a:r>
+              <a:rPr lang="en-US" sz="1300" dirty="0">
+                <a:solidFill>
+                  <a:srgbClr val="F1F5F9"/>
+                </a:solidFill>
+                <a:latin typeface="Calibri" pitchFamily="34" charset="0"/>
+                <a:ea typeface="Calibri" pitchFamily="34" charset="-122"/>
+                <a:cs typeface="Calibri" pitchFamily="34" charset="-120"/>
+              </a:rPr>
+              <a:t>(GCN đất · bản vẽ · PCCC).</a:t>
+            </a:r>
+            <a:endParaRPr lang="en-US" sz="1300" dirty="0"/>
+          </a:p>
+        </p:txBody>
+      </p:sp>
+      <p:sp>
+        <p:nvSpPr>
+          <p:cNvPr id="12" name="Text 9"/>
+          <p:cNvSpPr/>
+          <p:nvPr/>
+        </p:nvSpPr>
+        <p:spPr>
+          <a:xfrm>
+            <a:off x="457200" y="6446520"/>
+            <a:ext cx="11247120" cy="274320"/>
+          </a:xfrm>
+          <a:prstGeom prst="rect">
+            <a:avLst/>
+          </a:prstGeom>
+          <a:noFill/>
+          <a:ln/>
+        </p:spPr>
+        <p:txBody>
+          <a:bodyPr wrap="square" lIns="0" tIns="0" rIns="0" bIns="0" rtlCol="0" anchor="ctr"/>
+          <a:lstStyle/>
+          <a:p>
+            <a:pPr indent="0" marL="0">
+              <a:buNone/>
+            </a:pPr>
+            <a:r>
+              <a:rPr lang="en-US" sz="1000" dirty="0">
+                <a:solidFill>
+                  <a:srgbClr val="475569"/>
+                </a:solidFill>
+                <a:latin typeface="Calibri" pitchFamily="34" charset="0"/>
+                <a:ea typeface="Calibri" pitchFamily="34" charset="-122"/>
+                <a:cs typeface="Calibri" pitchFamily="34" charset="-120"/>
+              </a:rPr>
+              <a:t>atlas-aec · v2 · live demo</a:t>
+            </a:r>
+            <a:endParaRPr lang="en-US" sz="1000" dirty="0"/>
+          </a:p>
+        </p:txBody>
+      </p:sp>
+    </p:spTree>
+  </p:cSld>
+  <p:clrMapOvr>
+    <a:masterClrMapping/>
+  </p:clrMapOvr>
+</p:sld>
+</file>
+
+<file path=ppt/slides/slide19.xml><?xml version="1.0" encoding="utf-8"?>
+<p:sld xmlns:a="http://schemas.openxmlformats.org/drawingml/2006/main" xmlns:r="http://schemas.openxmlformats.org/officeDocument/2006/relationships" xmlns:p="http://schemas.openxmlformats.org/presentationml/2006/main">
+  <p:cSld name="Slide 19">
+    <p:bg>
+      <p:bgPr>
+        <a:solidFill>
+          <a:srgbClr val="0B1220"/>
+        </a:solidFill>
+      </p:bgPr>
+    </p:bg>
+    <p:spTree>
+      <p:nvGrpSpPr>
+        <p:cNvPr id="1" name=""/>
+        <p:cNvGrpSpPr/>
+        <p:nvPr/>
+      </p:nvGrpSpPr>
+      <p:grpSpPr>
+        <a:xfrm>
+          <a:off x="0" y="0"/>
+          <a:ext cx="0" cy="0"/>
+          <a:chOff x="0" y="0"/>
+          <a:chExt cx="0" cy="0"/>
+        </a:xfrm>
+      </p:grpSpPr>
+      <p:sp>
+        <p:nvSpPr>
+          <p:cNvPr id="2" name="Shape 0"/>
+          <p:cNvSpPr/>
+          <p:nvPr/>
+        </p:nvSpPr>
+        <p:spPr>
+          <a:xfrm>
+            <a:off x="457200" y="320040"/>
+            <a:ext cx="292608" cy="292608"/>
           </a:xfrm>
           <a:prstGeom prst="rect">
             <a:avLst/>
           </a:prstGeom>
           <a:solidFill>
-            <a:srgbClr val="10B981"/>
+            <a:srgbClr val="3B82F6"/>
           </a:solidFill>
           <a:ln w="12700">
             <a:solidFill>
-              <a:srgbClr val="10B981"/>
+              <a:srgbClr val="3B82F6"/>
             </a:solidFill>
             <a:prstDash val="solid"/>
           </a:ln>
@@ -7010,14 +8693,53 @@
       </p:sp>
       <p:sp>
         <p:nvSpPr>
-          <p:cNvPr id="21" name="Text 19"/>
-          <p:cNvSpPr/>
-          <p:nvPr/>
-        </p:nvSpPr>
-        <p:spPr>
-          <a:xfrm>
-            <a:off x="8321040" y="2331720"/>
-            <a:ext cx="3200400" cy="457200"/>
+          <p:cNvPr id="3" name="Text 1"/>
+          <p:cNvSpPr/>
+          <p:nvPr/>
+        </p:nvSpPr>
+        <p:spPr>
+          <a:xfrm>
+            <a:off x="457200" y="320040"/>
+            <a:ext cx="292608" cy="292608"/>
+          </a:xfrm>
+          <a:prstGeom prst="rect">
+            <a:avLst/>
+          </a:prstGeom>
+          <a:noFill/>
+          <a:ln/>
+        </p:spPr>
+        <p:txBody>
+          <a:bodyPr wrap="square" lIns="0" tIns="0" rIns="0" bIns="0" rtlCol="0" anchor="ctr"/>
+          <a:lstStyle/>
+          <a:p>
+            <a:pPr algn="ctr" indent="0" marL="0">
+              <a:buNone/>
+            </a:pPr>
+            <a:r>
+              <a:rPr lang="en-US" sz="1600" b="1" dirty="0">
+                <a:solidFill>
+                  <a:srgbClr val="FFFFFF"/>
+                </a:solidFill>
+                <a:latin typeface="Calibri" pitchFamily="34" charset="0"/>
+                <a:ea typeface="Calibri" pitchFamily="34" charset="-122"/>
+                <a:cs typeface="Calibri" pitchFamily="34" charset="-120"/>
+              </a:rPr>
+              <a:t>A</a:t>
+            </a:r>
+            <a:endParaRPr lang="en-US" sz="1600" dirty="0"/>
+          </a:p>
+        </p:txBody>
+      </p:sp>
+      <p:sp>
+        <p:nvSpPr>
+          <p:cNvPr id="4" name="Text 2"/>
+          <p:cNvSpPr/>
+          <p:nvPr/>
+        </p:nvSpPr>
+        <p:spPr>
+          <a:xfrm>
+            <a:off x="822960" y="320040"/>
+            <a:ext cx="2743200" cy="292608"/>
           </a:xfrm>
           <a:prstGeom prst="rect">
             <a:avLst/>
@@ -7033,15 +8755,132 @@
               <a:buNone/>
             </a:pPr>
             <a:r>
+              <a:rPr lang="en-US" sz="1300" b="1" dirty="0">
+                <a:solidFill>
+                  <a:srgbClr val="F1F5F9"/>
+                </a:solidFill>
+                <a:latin typeface="Calibri" pitchFamily="34" charset="0"/>
+                <a:ea typeface="Calibri" pitchFamily="34" charset="-122"/>
+                <a:cs typeface="Calibri" pitchFamily="34" charset="-120"/>
+              </a:rPr>
+              <a:t>Atlas AEC</a:t>
+            </a:r>
+            <a:endParaRPr lang="en-US" sz="1300" dirty="0"/>
+          </a:p>
+        </p:txBody>
+      </p:sp>
+      <p:sp>
+        <p:nvSpPr>
+          <p:cNvPr id="5" name="Text 3"/>
+          <p:cNvSpPr/>
+          <p:nvPr/>
+        </p:nvSpPr>
+        <p:spPr>
+          <a:xfrm>
+            <a:off x="3566160" y="356616"/>
+            <a:ext cx="5486400" cy="256032"/>
+          </a:xfrm>
+          <a:prstGeom prst="rect">
+            <a:avLst/>
+          </a:prstGeom>
+          <a:noFill/>
+          <a:ln/>
+        </p:spPr>
+        <p:txBody>
+          <a:bodyPr wrap="square" lIns="0" tIns="0" rIns="0" bIns="0" rtlCol="0" anchor="ctr"/>
+          <a:lstStyle/>
+          <a:p>
+            <a:pPr indent="0" marL="0">
+              <a:buNone/>
+            </a:pPr>
+            <a:r>
+              <a:rPr lang="en-US" sz="1100" dirty="0">
+                <a:solidFill>
+                  <a:srgbClr val="8B9BB4"/>
+                </a:solidFill>
+                <a:latin typeface="Calibri" pitchFamily="34" charset="0"/>
+                <a:ea typeface="Calibri" pitchFamily="34" charset="-122"/>
+                <a:cs typeface="Calibri" pitchFamily="34" charset="-120"/>
+              </a:rPr>
+              <a:t>Pháp lý — PCCC</a:t>
+            </a:r>
+            <a:endParaRPr lang="en-US" sz="1100" dirty="0"/>
+          </a:p>
+        </p:txBody>
+      </p:sp>
+      <p:sp>
+        <p:nvSpPr>
+          <p:cNvPr id="6" name="Text 4"/>
+          <p:cNvSpPr/>
+          <p:nvPr/>
+        </p:nvSpPr>
+        <p:spPr>
+          <a:xfrm>
+            <a:off x="10881360" y="320040"/>
+            <a:ext cx="822960" cy="292608"/>
+          </a:xfrm>
+          <a:prstGeom prst="rect">
+            <a:avLst/>
+          </a:prstGeom>
+          <a:noFill/>
+          <a:ln/>
+        </p:spPr>
+        <p:txBody>
+          <a:bodyPr wrap="square" lIns="0" tIns="0" rIns="0" bIns="0" rtlCol="0" anchor="ctr"/>
+          <a:lstStyle/>
+          <a:p>
+            <a:pPr algn="r" indent="0" marL="0">
+              <a:buNone/>
+            </a:pPr>
+            <a:r>
+              <a:rPr lang="en-US" sz="1100" dirty="0">
+                <a:solidFill>
+                  <a:srgbClr val="8B9BB4"/>
+                </a:solidFill>
+                <a:latin typeface="Calibri" pitchFamily="34" charset="0"/>
+                <a:ea typeface="Calibri" pitchFamily="34" charset="-122"/>
+                <a:cs typeface="Calibri" pitchFamily="34" charset="-120"/>
+              </a:rPr>
+              <a:t>19 / 21</a:t>
+            </a:r>
+            <a:endParaRPr lang="en-US" sz="1100" dirty="0"/>
+          </a:p>
+        </p:txBody>
+      </p:sp>
+      <p:sp>
+        <p:nvSpPr>
+          <p:cNvPr id="7" name="Text 5"/>
+          <p:cNvSpPr/>
+          <p:nvPr/>
+        </p:nvSpPr>
+        <p:spPr>
+          <a:xfrm>
+            <a:off x="457200" y="822960"/>
+            <a:ext cx="11247120" cy="502920"/>
+          </a:xfrm>
+          <a:prstGeom prst="rect">
+            <a:avLst/>
+          </a:prstGeom>
+          <a:noFill/>
+          <a:ln/>
+        </p:spPr>
+        <p:txBody>
+          <a:bodyPr wrap="square" lIns="0" tIns="0" rIns="0" bIns="0" rtlCol="0" anchor="ctr"/>
+          <a:lstStyle/>
+          <a:p>
+            <a:pPr indent="0" marL="0">
+              <a:buNone/>
+            </a:pPr>
+            <a:r>
               <a:rPr lang="en-US" sz="2600" b="1" dirty="0">
                 <a:solidFill>
-                  <a:srgbClr val="10B981"/>
-                </a:solidFill>
-                <a:latin typeface="Calibri" pitchFamily="34" charset="0"/>
-                <a:ea typeface="Calibri" pitchFamily="34" charset="-122"/>
-                <a:cs typeface="Calibri" pitchFamily="34" charset="-120"/>
-              </a:rPr>
-              <a:t>10 / 10</a:t>
+                  <a:srgbClr val="F1F5F9"/>
+                </a:solidFill>
+                <a:latin typeface="Calibri" pitchFamily="34" charset="0"/>
+                <a:ea typeface="Calibri" pitchFamily="34" charset="-122"/>
+                <a:cs typeface="Calibri" pitchFamily="34" charset="-120"/>
+              </a:rPr>
+              <a:t>PCCC · Thẩm duyệt NĐ 136/2020</a:t>
             </a:r>
             <a:endParaRPr lang="en-US" sz="2600" dirty="0"/>
           </a:p>
@@ -7049,14 +8888,14 @@
       </p:sp>
       <p:sp>
         <p:nvSpPr>
-          <p:cNvPr id="22" name="Text 20"/>
-          <p:cNvSpPr/>
-          <p:nvPr/>
-        </p:nvSpPr>
-        <p:spPr>
-          <a:xfrm>
-            <a:off x="8321040" y="2788920"/>
-            <a:ext cx="3200400" cy="292608"/>
+          <p:cNvPr id="8" name="Text 6"/>
+          <p:cNvSpPr/>
+          <p:nvPr/>
+        </p:nvSpPr>
+        <p:spPr>
+          <a:xfrm>
+            <a:off x="457200" y="1325880"/>
+            <a:ext cx="11247120" cy="292608"/>
           </a:xfrm>
           <a:prstGeom prst="rect">
             <a:avLst/>
@@ -7072,69 +8911,30 @@
               <a:buNone/>
             </a:pPr>
             <a:r>
-              <a:rPr lang="en-US" sz="1300" b="1" dirty="0">
-                <a:solidFill>
-                  <a:srgbClr val="F1F5F9"/>
-                </a:solidFill>
-                <a:latin typeface="Calibri" pitchFamily="34" charset="0"/>
-                <a:ea typeface="Calibri" pitchFamily="34" charset="-122"/>
-                <a:cs typeface="Calibri" pitchFamily="34" charset="-120"/>
-              </a:rPr>
-              <a:t>Vitest FSM tests pass</a:t>
-            </a:r>
-            <a:endParaRPr lang="en-US" sz="1300" dirty="0"/>
-          </a:p>
-        </p:txBody>
-      </p:sp>
-      <p:sp>
-        <p:nvSpPr>
-          <p:cNvPr id="23" name="Text 21"/>
-          <p:cNvSpPr/>
-          <p:nvPr/>
-        </p:nvSpPr>
-        <p:spPr>
-          <a:xfrm>
-            <a:off x="8321040" y="3063240"/>
-            <a:ext cx="3200400" cy="320040"/>
-          </a:xfrm>
-          <a:prstGeom prst="rect">
-            <a:avLst/>
-          </a:prstGeom>
-          <a:noFill/>
-          <a:ln/>
-        </p:spPr>
-        <p:txBody>
-          <a:bodyPr wrap="square" lIns="0" tIns="0" rIns="0" bIns="0" rtlCol="0" anchor="ctr"/>
-          <a:lstStyle/>
-          <a:p>
-            <a:pPr indent="0" marL="0">
-              <a:buNone/>
-            </a:pPr>
-            <a:r>
-              <a:rPr lang="en-US" sz="1100" dirty="0">
+              <a:rPr lang="en-US" sz="1400" i="1" dirty="0">
                 <a:solidFill>
                   <a:srgbClr val="8B9BB4"/>
                 </a:solidFill>
-                <a:latin typeface="Consolas" pitchFamily="34" charset="0"/>
-                <a:ea typeface="Consolas" pitchFamily="34" charset="-122"/>
-                <a:cs typeface="Consolas" pitchFamily="34" charset="-120"/>
-              </a:rPr>
-              <a:t>pnpm test</a:t>
-            </a:r>
-            <a:endParaRPr lang="en-US" sz="1100" dirty="0"/>
-          </a:p>
-        </p:txBody>
-      </p:sp>
-      <p:sp>
-        <p:nvSpPr>
-          <p:cNvPr id="24" name="Shape 22"/>
-          <p:cNvSpPr/>
-          <p:nvPr/>
-        </p:nvSpPr>
-        <p:spPr>
-          <a:xfrm>
-            <a:off x="411480" y="3657600"/>
-            <a:ext cx="3657600" cy="1280160"/>
+                <a:latin typeface="Calibri" pitchFamily="34" charset="0"/>
+                <a:ea typeface="Calibri" pitchFamily="34" charset="-122"/>
+                <a:cs typeface="Calibri" pitchFamily="34" charset="-120"/>
+              </a:rPr>
+              <a:t>QCVN 06:2022/BXD · TCVN 5738 · 3 giai đoạn từ thẩm duyệt → cấp Giấy đủ điều kiện · form mở sẵn</a:t>
+            </a:r>
+            <a:endParaRPr lang="en-US" sz="1400" dirty="0"/>
+          </a:p>
+        </p:txBody>
+      </p:sp>
+      <p:sp>
+        <p:nvSpPr>
+          <p:cNvPr id="9" name="Shape 7"/>
+          <p:cNvSpPr/>
+          <p:nvPr/>
+        </p:nvSpPr>
+        <p:spPr>
+          <a:xfrm>
+            <a:off x="594360" y="1737360"/>
+            <a:ext cx="7863840" cy="4663440"/>
           </a:xfrm>
           <a:prstGeom prst="rect">
             <a:avLst/>
@@ -7150,588 +8950,279 @@
           </a:ln>
         </p:spPr>
       </p:sp>
-      <p:sp>
-        <p:nvSpPr>
-          <p:cNvPr id="25" name="Shape 23"/>
-          <p:cNvSpPr/>
-          <p:nvPr/>
-        </p:nvSpPr>
-        <p:spPr>
-          <a:xfrm>
-            <a:off x="411480" y="3657600"/>
-            <a:ext cx="73152" cy="1280160"/>
-          </a:xfrm>
-          <a:prstGeom prst="rect">
-            <a:avLst/>
-          </a:prstGeom>
-          <a:solidFill>
-            <a:srgbClr val="10B981"/>
-          </a:solidFill>
-          <a:ln w="12700">
-            <a:solidFill>
-              <a:srgbClr val="10B981"/>
-            </a:solidFill>
-            <a:prstDash val="solid"/>
-          </a:ln>
-        </p:spPr>
-      </p:sp>
-      <p:sp>
-        <p:nvSpPr>
-          <p:cNvPr id="26" name="Text 24"/>
-          <p:cNvSpPr/>
-          <p:nvPr/>
-        </p:nvSpPr>
-        <p:spPr>
-          <a:xfrm>
-            <a:off x="640080" y="3794760"/>
-            <a:ext cx="3200400" cy="457200"/>
-          </a:xfrm>
-          <a:prstGeom prst="rect">
-            <a:avLst/>
-          </a:prstGeom>
-          <a:noFill/>
-          <a:ln/>
-        </p:spPr>
-        <p:txBody>
-          <a:bodyPr wrap="square" lIns="0" tIns="0" rIns="0" bIns="0" rtlCol="0" anchor="ctr"/>
-          <a:lstStyle/>
-          <a:p>
-            <a:pPr indent="0" marL="0">
-              <a:buNone/>
-            </a:pPr>
-            <a:r>
-              <a:rPr lang="en-US" sz="2600" b="1" dirty="0">
-                <a:solidFill>
-                  <a:srgbClr val="10B981"/>
-                </a:solidFill>
-                <a:latin typeface="Calibri" pitchFamily="34" charset="0"/>
-                <a:ea typeface="Calibri" pitchFamily="34" charset="-122"/>
-                <a:cs typeface="Calibri" pitchFamily="34" charset="-120"/>
-              </a:rPr>
-              <a:t>58 routes</a:t>
-            </a:r>
-            <a:endParaRPr lang="en-US" sz="2600" dirty="0"/>
-          </a:p>
-        </p:txBody>
-      </p:sp>
-      <p:sp>
-        <p:nvSpPr>
-          <p:cNvPr id="27" name="Text 25"/>
-          <p:cNvSpPr/>
-          <p:nvPr/>
-        </p:nvSpPr>
-        <p:spPr>
-          <a:xfrm>
-            <a:off x="640080" y="4251960"/>
-            <a:ext cx="3200400" cy="292608"/>
-          </a:xfrm>
-          <a:prstGeom prst="rect">
-            <a:avLst/>
-          </a:prstGeom>
-          <a:noFill/>
-          <a:ln/>
-        </p:spPr>
-        <p:txBody>
-          <a:bodyPr wrap="square" lIns="0" tIns="0" rIns="0" bIns="0" rtlCol="0" anchor="ctr"/>
-          <a:lstStyle/>
-          <a:p>
-            <a:pPr indent="0" marL="0">
-              <a:buNone/>
-            </a:pPr>
-            <a:r>
-              <a:rPr lang="en-US" sz="1300" b="1" dirty="0">
-                <a:solidFill>
-                  <a:srgbClr val="F1F5F9"/>
-                </a:solidFill>
-                <a:latin typeface="Calibri" pitchFamily="34" charset="0"/>
-                <a:ea typeface="Calibri" pitchFamily="34" charset="-122"/>
-                <a:cs typeface="Calibri" pitchFamily="34" charset="-120"/>
-              </a:rPr>
-              <a:t>Production build OK</a:t>
-            </a:r>
-            <a:endParaRPr lang="en-US" sz="1300" dirty="0"/>
-          </a:p>
-        </p:txBody>
-      </p:sp>
-      <p:sp>
-        <p:nvSpPr>
-          <p:cNvPr id="28" name="Text 26"/>
-          <p:cNvSpPr/>
-          <p:nvPr/>
-        </p:nvSpPr>
-        <p:spPr>
-          <a:xfrm>
-            <a:off x="640080" y="4526280"/>
-            <a:ext cx="3200400" cy="320040"/>
-          </a:xfrm>
-          <a:prstGeom prst="rect">
-            <a:avLst/>
-          </a:prstGeom>
-          <a:noFill/>
-          <a:ln/>
-        </p:spPr>
-        <p:txBody>
-          <a:bodyPr wrap="square" lIns="0" tIns="0" rIns="0" bIns="0" rtlCol="0" anchor="ctr"/>
-          <a:lstStyle/>
-          <a:p>
-            <a:pPr indent="0" marL="0">
-              <a:buNone/>
-            </a:pPr>
-            <a:r>
-              <a:rPr lang="en-US" sz="1100" dirty="0">
-                <a:solidFill>
-                  <a:srgbClr val="8B9BB4"/>
-                </a:solidFill>
-                <a:latin typeface="Consolas" pitchFamily="34" charset="0"/>
-                <a:ea typeface="Consolas" pitchFamily="34" charset="-122"/>
-                <a:cs typeface="Consolas" pitchFamily="34" charset="-120"/>
-              </a:rPr>
-              <a:t>pnpm build</a:t>
-            </a:r>
-            <a:endParaRPr lang="en-US" sz="1100" dirty="0"/>
-          </a:p>
-        </p:txBody>
-      </p:sp>
-      <p:sp>
-        <p:nvSpPr>
-          <p:cNvPr id="29" name="Shape 27"/>
-          <p:cNvSpPr/>
-          <p:nvPr/>
-        </p:nvSpPr>
-        <p:spPr>
-          <a:xfrm>
-            <a:off x="4251960" y="3657600"/>
-            <a:ext cx="3657600" cy="1280160"/>
-          </a:xfrm>
-          <a:prstGeom prst="rect">
-            <a:avLst/>
-          </a:prstGeom>
-          <a:solidFill>
-            <a:srgbClr val="111A30"/>
-          </a:solidFill>
-          <a:ln w="12700">
-            <a:solidFill>
-              <a:srgbClr val="1F2A44"/>
-            </a:solidFill>
-            <a:prstDash val="solid"/>
-          </a:ln>
-        </p:spPr>
-      </p:sp>
-      <p:sp>
-        <p:nvSpPr>
-          <p:cNvPr id="30" name="Shape 28"/>
-          <p:cNvSpPr/>
-          <p:nvPr/>
-        </p:nvSpPr>
-        <p:spPr>
-          <a:xfrm>
-            <a:off x="4251960" y="3657600"/>
-            <a:ext cx="73152" cy="1280160"/>
-          </a:xfrm>
-          <a:prstGeom prst="rect">
-            <a:avLst/>
-          </a:prstGeom>
-          <a:solidFill>
-            <a:srgbClr val="60A5FA"/>
-          </a:solidFill>
-          <a:ln w="12700">
-            <a:solidFill>
-              <a:srgbClr val="60A5FA"/>
-            </a:solidFill>
-            <a:prstDash val="solid"/>
-          </a:ln>
-        </p:spPr>
-      </p:sp>
-      <p:sp>
-        <p:nvSpPr>
-          <p:cNvPr id="31" name="Text 29"/>
-          <p:cNvSpPr/>
-          <p:nvPr/>
-        </p:nvSpPr>
-        <p:spPr>
-          <a:xfrm>
-            <a:off x="4480560" y="3794760"/>
-            <a:ext cx="3200400" cy="457200"/>
-          </a:xfrm>
-          <a:prstGeom prst="rect">
-            <a:avLst/>
-          </a:prstGeom>
-          <a:noFill/>
-          <a:ln/>
-        </p:spPr>
-        <p:txBody>
-          <a:bodyPr wrap="square" lIns="0" tIns="0" rIns="0" bIns="0" rtlCol="0" anchor="ctr"/>
-          <a:lstStyle/>
-          <a:p>
-            <a:pPr indent="0" marL="0">
-              <a:buNone/>
-            </a:pPr>
-            <a:r>
-              <a:rPr lang="en-US" sz="2600" b="1" dirty="0">
-                <a:solidFill>
-                  <a:srgbClr val="60A5FA"/>
-                </a:solidFill>
-                <a:latin typeface="Calibri" pitchFamily="34" charset="0"/>
-                <a:ea typeface="Calibri" pitchFamily="34" charset="-122"/>
-                <a:cs typeface="Calibri" pitchFamily="34" charset="-120"/>
-              </a:rPr>
-              <a:t>35+ models</a:t>
-            </a:r>
-            <a:endParaRPr lang="en-US" sz="2600" dirty="0"/>
-          </a:p>
-        </p:txBody>
-      </p:sp>
-      <p:sp>
-        <p:nvSpPr>
-          <p:cNvPr id="32" name="Text 30"/>
-          <p:cNvSpPr/>
-          <p:nvPr/>
-        </p:nvSpPr>
-        <p:spPr>
-          <a:xfrm>
-            <a:off x="4480560" y="4251960"/>
-            <a:ext cx="3200400" cy="292608"/>
-          </a:xfrm>
-          <a:prstGeom prst="rect">
-            <a:avLst/>
-          </a:prstGeom>
-          <a:noFill/>
-          <a:ln/>
-        </p:spPr>
-        <p:txBody>
-          <a:bodyPr wrap="square" lIns="0" tIns="0" rIns="0" bIns="0" rtlCol="0" anchor="ctr"/>
-          <a:lstStyle/>
-          <a:p>
-            <a:pPr indent="0" marL="0">
-              <a:buNone/>
-            </a:pPr>
-            <a:r>
-              <a:rPr lang="en-US" sz="1300" b="1" dirty="0">
-                <a:solidFill>
-                  <a:srgbClr val="F1F5F9"/>
-                </a:solidFill>
-                <a:latin typeface="Calibri" pitchFamily="34" charset="0"/>
-                <a:ea typeface="Calibri" pitchFamily="34" charset="-122"/>
-                <a:cs typeface="Calibri" pitchFamily="34" charset="-120"/>
-              </a:rPr>
-              <a:t>Prisma schema applied</a:t>
-            </a:r>
-            <a:endParaRPr lang="en-US" sz="1300" dirty="0"/>
-          </a:p>
-        </p:txBody>
-      </p:sp>
-      <p:sp>
-        <p:nvSpPr>
-          <p:cNvPr id="33" name="Text 31"/>
-          <p:cNvSpPr/>
-          <p:nvPr/>
-        </p:nvSpPr>
-        <p:spPr>
-          <a:xfrm>
-            <a:off x="4480560" y="4526280"/>
-            <a:ext cx="3200400" cy="320040"/>
-          </a:xfrm>
-          <a:prstGeom prst="rect">
-            <a:avLst/>
-          </a:prstGeom>
-          <a:noFill/>
-          <a:ln/>
-        </p:spPr>
-        <p:txBody>
-          <a:bodyPr wrap="square" lIns="0" tIns="0" rIns="0" bIns="0" rtlCol="0" anchor="ctr"/>
-          <a:lstStyle/>
-          <a:p>
-            <a:pPr indent="0" marL="0">
-              <a:buNone/>
-            </a:pPr>
-            <a:r>
-              <a:rPr lang="en-US" sz="1100" dirty="0">
-                <a:solidFill>
-                  <a:srgbClr val="8B9BB4"/>
-                </a:solidFill>
-                <a:latin typeface="Consolas" pitchFamily="34" charset="0"/>
-                <a:ea typeface="Consolas" pitchFamily="34" charset="-122"/>
-                <a:cs typeface="Consolas" pitchFamily="34" charset="-120"/>
-              </a:rPr>
-              <a:t>pnpm db:push</a:t>
-            </a:r>
-            <a:endParaRPr lang="en-US" sz="1100" dirty="0"/>
-          </a:p>
-        </p:txBody>
-      </p:sp>
-      <p:sp>
-        <p:nvSpPr>
-          <p:cNvPr id="34" name="Shape 32"/>
-          <p:cNvSpPr/>
-          <p:nvPr/>
-        </p:nvSpPr>
-        <p:spPr>
-          <a:xfrm>
-            <a:off x="8092440" y="3657600"/>
-            <a:ext cx="3657600" cy="1280160"/>
-          </a:xfrm>
-          <a:prstGeom prst="rect">
-            <a:avLst/>
-          </a:prstGeom>
-          <a:solidFill>
-            <a:srgbClr val="111A30"/>
-          </a:solidFill>
-          <a:ln w="12700">
-            <a:solidFill>
-              <a:srgbClr val="1F2A44"/>
-            </a:solidFill>
-            <a:prstDash val="solid"/>
-          </a:ln>
-        </p:spPr>
-      </p:sp>
-      <p:sp>
-        <p:nvSpPr>
-          <p:cNvPr id="35" name="Shape 33"/>
-          <p:cNvSpPr/>
-          <p:nvPr/>
-        </p:nvSpPr>
-        <p:spPr>
-          <a:xfrm>
-            <a:off x="8092440" y="3657600"/>
-            <a:ext cx="73152" cy="1280160"/>
-          </a:xfrm>
-          <a:prstGeom prst="rect">
-            <a:avLst/>
-          </a:prstGeom>
-          <a:solidFill>
-            <a:srgbClr val="60A5FA"/>
-          </a:solidFill>
-          <a:ln w="12700">
-            <a:solidFill>
-              <a:srgbClr val="60A5FA"/>
-            </a:solidFill>
-            <a:prstDash val="solid"/>
-          </a:ln>
-        </p:spPr>
-      </p:sp>
-      <p:sp>
-        <p:nvSpPr>
-          <p:cNvPr id="36" name="Text 34"/>
-          <p:cNvSpPr/>
-          <p:nvPr/>
-        </p:nvSpPr>
-        <p:spPr>
-          <a:xfrm>
-            <a:off x="8321040" y="3794760"/>
-            <a:ext cx="3200400" cy="457200"/>
-          </a:xfrm>
-          <a:prstGeom prst="rect">
-            <a:avLst/>
-          </a:prstGeom>
-          <a:noFill/>
-          <a:ln/>
-        </p:spPr>
-        <p:txBody>
-          <a:bodyPr wrap="square" lIns="0" tIns="0" rIns="0" bIns="0" rtlCol="0" anchor="ctr"/>
-          <a:lstStyle/>
-          <a:p>
-            <a:pPr indent="0" marL="0">
-              <a:buNone/>
-            </a:pPr>
-            <a:r>
-              <a:rPr lang="en-US" sz="2600" b="1" dirty="0">
-                <a:solidFill>
-                  <a:srgbClr val="60A5FA"/>
-                </a:solidFill>
-                <a:latin typeface="Calibri" pitchFamily="34" charset="0"/>
-                <a:ea typeface="Calibri" pitchFamily="34" charset="-122"/>
-                <a:cs typeface="Calibri" pitchFamily="34" charset="-120"/>
-              </a:rPr>
-              <a:t>14 PNGs</a:t>
-            </a:r>
-            <a:endParaRPr lang="en-US" sz="2600" dirty="0"/>
-          </a:p>
-        </p:txBody>
-      </p:sp>
-      <p:sp>
-        <p:nvSpPr>
-          <p:cNvPr id="37" name="Text 35"/>
-          <p:cNvSpPr/>
-          <p:nvPr/>
-        </p:nvSpPr>
-        <p:spPr>
-          <a:xfrm>
-            <a:off x="8321040" y="4251960"/>
-            <a:ext cx="3200400" cy="292608"/>
-          </a:xfrm>
-          <a:prstGeom prst="rect">
-            <a:avLst/>
-          </a:prstGeom>
-          <a:noFill/>
-          <a:ln/>
-        </p:spPr>
-        <p:txBody>
-          <a:bodyPr wrap="square" lIns="0" tIns="0" rIns="0" bIns="0" rtlCol="0" anchor="ctr"/>
-          <a:lstStyle/>
-          <a:p>
-            <a:pPr indent="0" marL="0">
-              <a:buNone/>
-            </a:pPr>
-            <a:r>
-              <a:rPr lang="en-US" sz="1300" b="1" dirty="0">
-                <a:solidFill>
-                  <a:srgbClr val="F1F5F9"/>
-                </a:solidFill>
-                <a:latin typeface="Calibri" pitchFamily="34" charset="0"/>
-                <a:ea typeface="Calibri" pitchFamily="34" charset="-122"/>
-                <a:cs typeface="Calibri" pitchFamily="34" charset="-120"/>
-              </a:rPr>
-              <a:t>Live screenshots regenerated</a:t>
-            </a:r>
-            <a:endParaRPr lang="en-US" sz="1300" dirty="0"/>
-          </a:p>
-        </p:txBody>
-      </p:sp>
-      <p:sp>
-        <p:nvSpPr>
-          <p:cNvPr id="38" name="Text 36"/>
-          <p:cNvSpPr/>
-          <p:nvPr/>
-        </p:nvSpPr>
-        <p:spPr>
-          <a:xfrm>
-            <a:off x="8321040" y="4526280"/>
-            <a:ext cx="3200400" cy="320040"/>
-          </a:xfrm>
-          <a:prstGeom prst="rect">
-            <a:avLst/>
-          </a:prstGeom>
-          <a:noFill/>
-          <a:ln/>
-        </p:spPr>
-        <p:txBody>
-          <a:bodyPr wrap="square" lIns="0" tIns="0" rIns="0" bIns="0" rtlCol="0" anchor="ctr"/>
-          <a:lstStyle/>
-          <a:p>
-            <a:pPr indent="0" marL="0">
-              <a:buNone/>
-            </a:pPr>
-            <a:r>
-              <a:rPr lang="en-US" sz="1100" dirty="0">
-                <a:solidFill>
-                  <a:srgbClr val="8B9BB4"/>
-                </a:solidFill>
-                <a:latin typeface="Consolas" pitchFamily="34" charset="0"/>
-                <a:ea typeface="Consolas" pitchFamily="34" charset="-122"/>
-                <a:cs typeface="Consolas" pitchFamily="34" charset="-120"/>
-              </a:rPr>
-              <a:t>tsx scripts/capture-demo.ts</a:t>
-            </a:r>
-            <a:endParaRPr lang="en-US" sz="1100" dirty="0"/>
-          </a:p>
-        </p:txBody>
-      </p:sp>
-      <p:sp>
-        <p:nvSpPr>
-          <p:cNvPr id="39" name="Shape 37"/>
-          <p:cNvSpPr/>
-          <p:nvPr/>
-        </p:nvSpPr>
-        <p:spPr>
-          <a:xfrm>
-            <a:off x="548640" y="5029200"/>
-            <a:ext cx="11064240" cy="914400"/>
-          </a:xfrm>
-          <a:prstGeom prst="rect">
-            <a:avLst/>
-          </a:prstGeom>
-          <a:solidFill>
-            <a:srgbClr val="111A30"/>
-          </a:solidFill>
-          <a:ln w="25400">
-            <a:solidFill>
-              <a:srgbClr val="3B82F6"/>
-            </a:solidFill>
-            <a:prstDash val="solid"/>
-          </a:ln>
-        </p:spPr>
-      </p:sp>
-      <p:sp>
-        <p:nvSpPr>
-          <p:cNvPr id="40" name="Text 38"/>
-          <p:cNvSpPr/>
-          <p:nvPr/>
-        </p:nvSpPr>
-        <p:spPr>
-          <a:xfrm>
-            <a:off x="777240" y="5074920"/>
-            <a:ext cx="5486400" cy="365760"/>
-          </a:xfrm>
-          <a:prstGeom prst="rect">
-            <a:avLst/>
-          </a:prstGeom>
-          <a:noFill/>
-          <a:ln/>
-        </p:spPr>
-        <p:txBody>
-          <a:bodyPr wrap="square" lIns="0" tIns="0" rIns="0" bIns="0" rtlCol="0" anchor="ctr"/>
-          <a:lstStyle/>
-          <a:p>
-            <a:pPr indent="0" marL="0">
-              <a:buNone/>
-            </a:pPr>
-            <a:r>
-              <a:rPr lang="en-US" sz="1300" b="1" spc="100" kern="0" dirty="0">
-                <a:solidFill>
-                  <a:srgbClr val="8B9BB4"/>
-                </a:solidFill>
-                <a:latin typeface="Calibri" pitchFamily="34" charset="0"/>
-                <a:ea typeface="Calibri" pitchFamily="34" charset="-122"/>
-                <a:cs typeface="Calibri" pitchFamily="34" charset="-120"/>
-              </a:rPr>
-              <a:t>Replay demo bất kỳ lúc nào</a:t>
-            </a:r>
-            <a:endParaRPr lang="en-US" sz="1300" dirty="0"/>
-          </a:p>
-        </p:txBody>
-      </p:sp>
-      <p:sp>
-        <p:nvSpPr>
-          <p:cNvPr id="41" name="Text 39"/>
-          <p:cNvSpPr/>
-          <p:nvPr/>
-        </p:nvSpPr>
-        <p:spPr>
-          <a:xfrm>
-            <a:off x="777240" y="5394960"/>
-            <a:ext cx="10607040" cy="457200"/>
-          </a:xfrm>
-          <a:prstGeom prst="rect">
-            <a:avLst/>
-          </a:prstGeom>
-          <a:noFill/>
-          <a:ln/>
-        </p:spPr>
-        <p:txBody>
-          <a:bodyPr wrap="square" lIns="0" tIns="0" rIns="0" bIns="0" rtlCol="0" anchor="ctr"/>
-          <a:lstStyle/>
-          <a:p>
-            <a:pPr indent="0" marL="0">
-              <a:buNone/>
-            </a:pPr>
-            <a:r>
-              <a:rPr lang="en-US" sz="1800" dirty="0">
-                <a:solidFill>
-                  <a:srgbClr val="60A5FA"/>
-                </a:solidFill>
-                <a:latin typeface="Consolas" pitchFamily="34" charset="0"/>
-                <a:ea typeface="Consolas" pitchFamily="34" charset="-122"/>
-                <a:cs typeface="Consolas" pitchFamily="34" charset="-120"/>
-              </a:rPr>
-              <a:t>http://localhost:3000/demo.html  ·  docs/DEMO.md  ·  docs/Atlas-AEC-Demo.pptx</a:t>
-            </a:r>
-            <a:endParaRPr lang="en-US" sz="1800" dirty="0"/>
-          </a:p>
-        </p:txBody>
-      </p:sp>
-      <p:sp>
-        <p:nvSpPr>
-          <p:cNvPr id="42" name="Text 40"/>
+      <p:pic>
+        <p:nvPicPr>
+          <p:cNvPr id="10" name="Image 0" descr="/Users/vsf-thuynt519-l/Documents/GitHub/atlas-aec/docs/demo-screens/18-pccc.png">    </p:cNvPr>
+          <p:cNvPicPr>
+            <a:picLocks noChangeAspect="1"/>
+          </p:cNvPicPr>
+          <p:nvPr/>
+        </p:nvPicPr>
+        <p:blipFill>
+          <a:blip r:embed="rId1"/>
+          <a:srcRect l="0" r="0" t="0" b="0"/>
+          <a:stretch/>
+        </p:blipFill>
+        <p:spPr>
+          <a:xfrm>
+            <a:off x="640080" y="1783080"/>
+            <a:ext cx="7772400" cy="4572000"/>
+          </a:xfrm>
+          <a:prstGeom prst="rect">
+            <a:avLst/>
+          </a:prstGeom>
+        </p:spPr>
+      </p:pic>
+      <p:sp>
+        <p:nvSpPr>
+          <p:cNvPr id="11" name="Text 8"/>
+          <p:cNvSpPr/>
+          <p:nvPr/>
+        </p:nvSpPr>
+        <p:spPr>
+          <a:xfrm>
+            <a:off x="8778240" y="1783080"/>
+            <a:ext cx="2926080" cy="4572000"/>
+          </a:xfrm>
+          <a:prstGeom prst="rect">
+            <a:avLst/>
+          </a:prstGeom>
+          <a:noFill/>
+          <a:ln/>
+        </p:spPr>
+        <p:txBody>
+          <a:bodyPr wrap="square" lIns="0" tIns="0" rIns="0" bIns="0" rtlCol="0" anchor="t"/>
+          <a:lstStyle/>
+          <a:p>
+            <a:pPr>
+              <a:spcAft>
+                <a:spcPts val="600"/>
+              </a:spcAft>
+            </a:pPr>
+            <a:r>
+              <a:rPr lang="en-US" sz="1300" dirty="0">
+                <a:solidFill>
+                  <a:srgbClr val="F1F5F9"/>
+                </a:solidFill>
+                <a:latin typeface="Calibri" pitchFamily="34" charset="0"/>
+                <a:ea typeface="Calibri" pitchFamily="34" charset="-122"/>
+                <a:cs typeface="Calibri" pitchFamily="34" charset="-120"/>
+              </a:rPr>
+              <a:t>3 giai đoạn:</a:t>
+            </a:r>
+            <a:endParaRPr lang="en-US" sz="1300" dirty="0"/>
+          </a:p>
+          <a:p>
+            <a:pPr>
+              <a:spcAft>
+                <a:spcPts val="600"/>
+              </a:spcAft>
+            </a:pPr>
+            <a:r>
+              <a:rPr lang="en-US" sz="1300" dirty="0">
+                <a:solidFill>
+                  <a:srgbClr val="F1F5F9"/>
+                </a:solidFill>
+                <a:latin typeface="Calibri" pitchFamily="34" charset="0"/>
+                <a:ea typeface="Calibri" pitchFamily="34" charset="-122"/>
+                <a:cs typeface="Calibri" pitchFamily="34" charset="-120"/>
+              </a:rPr>
+              <a:t>  Thẩm duyệt thiết kế</a:t>
+            </a:r>
+            <a:endParaRPr lang="en-US" sz="1300" dirty="0"/>
+          </a:p>
+          <a:p>
+            <a:pPr>
+              <a:spcAft>
+                <a:spcPts val="600"/>
+              </a:spcAft>
+            </a:pPr>
+            <a:r>
+              <a:rPr lang="en-US" sz="1300" dirty="0">
+                <a:solidFill>
+                  <a:srgbClr val="F1F5F9"/>
+                </a:solidFill>
+                <a:latin typeface="Calibri" pitchFamily="34" charset="0"/>
+                <a:ea typeface="Calibri" pitchFamily="34" charset="-122"/>
+                <a:cs typeface="Calibri" pitchFamily="34" charset="-120"/>
+              </a:rPr>
+              <a:t>  Nghiệm thu PCCC</a:t>
+            </a:r>
+            <a:endParaRPr lang="en-US" sz="1300" dirty="0"/>
+          </a:p>
+          <a:p>
+            <a:pPr>
+              <a:spcAft>
+                <a:spcPts val="600"/>
+              </a:spcAft>
+            </a:pPr>
+            <a:r>
+              <a:rPr lang="en-US" sz="1300" dirty="0">
+                <a:solidFill>
+                  <a:srgbClr val="F1F5F9"/>
+                </a:solidFill>
+                <a:latin typeface="Calibri" pitchFamily="34" charset="0"/>
+                <a:ea typeface="Calibri" pitchFamily="34" charset="-122"/>
+                <a:cs typeface="Calibri" pitchFamily="34" charset="-120"/>
+              </a:rPr>
+              <a:t>  Cấp Giấy đủ điều kiện</a:t>
+            </a:r>
+            <a:endParaRPr lang="en-US" sz="1300" dirty="0"/>
+          </a:p>
+          <a:p>
+            <a:pPr>
+              <a:spcAft>
+                <a:spcPts val="600"/>
+              </a:spcAft>
+            </a:pPr>
+            <a:endParaRPr lang="en-US" sz="1300" dirty="0"/>
+          </a:p>
+          <a:p>
+            <a:pPr>
+              <a:spcAft>
+                <a:spcPts val="600"/>
+              </a:spcAft>
+            </a:pPr>
+            <a:r>
+              <a:rPr lang="en-US" sz="1300" dirty="0">
+                <a:solidFill>
+                  <a:srgbClr val="F1F5F9"/>
+                </a:solidFill>
+                <a:latin typeface="Calibri" pitchFamily="34" charset="0"/>
+                <a:ea typeface="Calibri" pitchFamily="34" charset="-122"/>
+                <a:cs typeface="Calibri" pitchFamily="34" charset="-120"/>
+              </a:rPr>
+              <a:t>Form CRUD:</a:t>
+            </a:r>
+            <a:endParaRPr lang="en-US" sz="1300" dirty="0"/>
+          </a:p>
+          <a:p>
+            <a:pPr>
+              <a:spcAft>
+                <a:spcPts val="600"/>
+              </a:spcAft>
+            </a:pPr>
+            <a:r>
+              <a:rPr lang="en-US" sz="1300" dirty="0">
+                <a:solidFill>
+                  <a:srgbClr val="F1F5F9"/>
+                </a:solidFill>
+                <a:latin typeface="Calibri" pitchFamily="34" charset="0"/>
+                <a:ea typeface="Calibri" pitchFamily="34" charset="-122"/>
+                <a:cs typeface="Calibri" pitchFamily="34" charset="-120"/>
+              </a:rPr>
+              <a:t>  + Tạo hồ sơ PCCC</a:t>
+            </a:r>
+            <a:endParaRPr lang="en-US" sz="1300" dirty="0"/>
+          </a:p>
+          <a:p>
+            <a:pPr>
+              <a:spcAft>
+                <a:spcPts val="600"/>
+              </a:spcAft>
+            </a:pPr>
+            <a:r>
+              <a:rPr lang="en-US" sz="1300" dirty="0">
+                <a:solidFill>
+                  <a:srgbClr val="F1F5F9"/>
+                </a:solidFill>
+                <a:latin typeface="Calibri" pitchFamily="34" charset="0"/>
+                <a:ea typeface="Calibri" pitchFamily="34" charset="-122"/>
+                <a:cs typeface="Calibri" pitchFamily="34" charset="-120"/>
+              </a:rPr>
+              <a:t>  Cấp PC07 / C06</a:t>
+            </a:r>
+            <a:endParaRPr lang="en-US" sz="1300" dirty="0"/>
+          </a:p>
+          <a:p>
+            <a:pPr>
+              <a:spcAft>
+                <a:spcPts val="600"/>
+              </a:spcAft>
+            </a:pPr>
+            <a:endParaRPr lang="en-US" sz="1300" dirty="0"/>
+          </a:p>
+          <a:p>
+            <a:pPr>
+              <a:spcAft>
+                <a:spcPts val="600"/>
+              </a:spcAft>
+            </a:pPr>
+            <a:r>
+              <a:rPr lang="en-US" sz="1300" dirty="0">
+                <a:solidFill>
+                  <a:srgbClr val="F1F5F9"/>
+                </a:solidFill>
+                <a:latin typeface="Calibri" pitchFamily="34" charset="0"/>
+                <a:ea typeface="Calibri" pitchFamily="34" charset="-122"/>
+                <a:cs typeface="Calibri" pitchFamily="34" charset="-120"/>
+              </a:rPr>
+              <a:t>Checklist PC-1 → PC-8</a:t>
+            </a:r>
+            <a:endParaRPr lang="en-US" sz="1300" dirty="0"/>
+          </a:p>
+          <a:p>
+            <a:pPr>
+              <a:spcAft>
+                <a:spcPts val="600"/>
+              </a:spcAft>
+            </a:pPr>
+            <a:r>
+              <a:rPr lang="en-US" sz="1300" dirty="0">
+                <a:solidFill>
+                  <a:srgbClr val="F1F5F9"/>
+                </a:solidFill>
+                <a:latin typeface="Calibri" pitchFamily="34" charset="0"/>
+                <a:ea typeface="Calibri" pitchFamily="34" charset="-122"/>
+                <a:cs typeface="Calibri" pitchFamily="34" charset="-120"/>
+              </a:rPr>
+              <a:t>(bản vẽ · tính nước</a:t>
+            </a:r>
+            <a:endParaRPr lang="en-US" sz="1300" dirty="0"/>
+          </a:p>
+          <a:p>
+            <a:pPr>
+              <a:spcAft>
+                <a:spcPts val="600"/>
+              </a:spcAft>
+            </a:pPr>
+            <a:r>
+              <a:rPr lang="en-US" sz="1300" dirty="0">
+                <a:solidFill>
+                  <a:srgbClr val="F1F5F9"/>
+                </a:solidFill>
+                <a:latin typeface="Calibri" pitchFamily="34" charset="0"/>
+                <a:ea typeface="Calibri" pitchFamily="34" charset="-122"/>
+                <a:cs typeface="Calibri" pitchFamily="34" charset="-120"/>
+              </a:rPr>
+              <a:t>thuyết minh · thí nghiệm</a:t>
+            </a:r>
+            <a:endParaRPr lang="en-US" sz="1300" dirty="0"/>
+          </a:p>
+          <a:p>
+            <a:pPr>
+              <a:spcAft>
+                <a:spcPts val="600"/>
+              </a:spcAft>
+            </a:pPr>
+            <a:r>
+              <a:rPr lang="en-US" sz="1300" dirty="0">
+                <a:solidFill>
+                  <a:srgbClr val="F1F5F9"/>
+                </a:solidFill>
+                <a:latin typeface="Calibri" pitchFamily="34" charset="0"/>
+                <a:ea typeface="Calibri" pitchFamily="34" charset="-122"/>
+                <a:cs typeface="Calibri" pitchFamily="34" charset="-120"/>
+              </a:rPr>
+              <a:t>vật liệu chống cháy).</a:t>
+            </a:r>
+            <a:endParaRPr lang="en-US" sz="1300" dirty="0"/>
+          </a:p>
+        </p:txBody>
+      </p:sp>
+      <p:sp>
+        <p:nvSpPr>
+          <p:cNvPr id="12" name="Text 9"/>
           <p:cNvSpPr/>
           <p:nvPr/>
         </p:nvSpPr>
@@ -7762,7 +9253,7 @@
                 <a:ea typeface="Calibri" pitchFamily="34" charset="-122"/>
                 <a:cs typeface="Calibri" pitchFamily="34" charset="-120"/>
               </a:rPr>
-              <a:t>Demo credentials: anh.nguyen@cofico.vn / demo1234! — đăng nhập, click 6 tabs, mọi thứ là live data từ Postgres.</a:t>
+              <a:t>atlas-aec · v2 · live demo</a:t>
             </a:r>
             <a:endParaRPr lang="en-US" sz="1000" dirty="0"/>
           </a:p>
@@ -7975,7 +9466,7 @@
                 <a:ea typeface="Calibri" pitchFamily="34" charset="-122"/>
                 <a:cs typeface="Calibri" pitchFamily="34" charset="-120"/>
               </a:rPr>
-              <a:t>2 / 16</a:t>
+              <a:t>2 / 21</a:t>
             </a:r>
             <a:endParaRPr lang="en-US" sz="1100" dirty="0"/>
           </a:p>
@@ -8812,6 +10303,2066 @@
                 <a:cs typeface="Calibri" pitchFamily="34" charset="-120"/>
               </a:rPr>
               <a:t>Atlas AEC tấn công đúng 4 nỗi đau này — bằng một codebase, một stack OSS, gắn chặt luật VN.</a:t>
+            </a:r>
+            <a:endParaRPr lang="en-US" sz="1000" dirty="0"/>
+          </a:p>
+        </p:txBody>
+      </p:sp>
+    </p:spTree>
+  </p:cSld>
+  <p:clrMapOvr>
+    <a:masterClrMapping/>
+  </p:clrMapOvr>
+</p:sld>
+</file>
+
+<file path=ppt/slides/slide20.xml><?xml version="1.0" encoding="utf-8"?>
+<p:sld xmlns:a="http://schemas.openxmlformats.org/drawingml/2006/main" xmlns:r="http://schemas.openxmlformats.org/officeDocument/2006/relationships" xmlns:p="http://schemas.openxmlformats.org/presentationml/2006/main">
+  <p:cSld name="Slide 20">
+    <p:bg>
+      <p:bgPr>
+        <a:solidFill>
+          <a:srgbClr val="0B1220"/>
+        </a:solidFill>
+      </p:bgPr>
+    </p:bg>
+    <p:spTree>
+      <p:nvGrpSpPr>
+        <p:cNvPr id="1" name=""/>
+        <p:cNvGrpSpPr/>
+        <p:nvPr/>
+      </p:nvGrpSpPr>
+      <p:grpSpPr>
+        <a:xfrm>
+          <a:off x="0" y="0"/>
+          <a:ext cx="0" cy="0"/>
+          <a:chOff x="0" y="0"/>
+          <a:chExt cx="0" cy="0"/>
+        </a:xfrm>
+      </p:grpSpPr>
+      <p:sp>
+        <p:nvSpPr>
+          <p:cNvPr id="2" name="Shape 0"/>
+          <p:cNvSpPr/>
+          <p:nvPr/>
+        </p:nvSpPr>
+        <p:spPr>
+          <a:xfrm>
+            <a:off x="457200" y="320040"/>
+            <a:ext cx="292608" cy="292608"/>
+          </a:xfrm>
+          <a:prstGeom prst="rect">
+            <a:avLst/>
+          </a:prstGeom>
+          <a:solidFill>
+            <a:srgbClr val="3B82F6"/>
+          </a:solidFill>
+          <a:ln w="12700">
+            <a:solidFill>
+              <a:srgbClr val="3B82F6"/>
+            </a:solidFill>
+            <a:prstDash val="solid"/>
+          </a:ln>
+        </p:spPr>
+      </p:sp>
+      <p:sp>
+        <p:nvSpPr>
+          <p:cNvPr id="3" name="Text 1"/>
+          <p:cNvSpPr/>
+          <p:nvPr/>
+        </p:nvSpPr>
+        <p:spPr>
+          <a:xfrm>
+            <a:off x="457200" y="320040"/>
+            <a:ext cx="292608" cy="292608"/>
+          </a:xfrm>
+          <a:prstGeom prst="rect">
+            <a:avLst/>
+          </a:prstGeom>
+          <a:noFill/>
+          <a:ln/>
+        </p:spPr>
+        <p:txBody>
+          <a:bodyPr wrap="square" lIns="0" tIns="0" rIns="0" bIns="0" rtlCol="0" anchor="ctr"/>
+          <a:lstStyle/>
+          <a:p>
+            <a:pPr algn="ctr" indent="0" marL="0">
+              <a:buNone/>
+            </a:pPr>
+            <a:r>
+              <a:rPr lang="en-US" sz="1600" b="1" dirty="0">
+                <a:solidFill>
+                  <a:srgbClr val="FFFFFF"/>
+                </a:solidFill>
+                <a:latin typeface="Calibri" pitchFamily="34" charset="0"/>
+                <a:ea typeface="Calibri" pitchFamily="34" charset="-122"/>
+                <a:cs typeface="Calibri" pitchFamily="34" charset="-120"/>
+              </a:rPr>
+              <a:t>A</a:t>
+            </a:r>
+            <a:endParaRPr lang="en-US" sz="1600" dirty="0"/>
+          </a:p>
+        </p:txBody>
+      </p:sp>
+      <p:sp>
+        <p:nvSpPr>
+          <p:cNvPr id="4" name="Text 2"/>
+          <p:cNvSpPr/>
+          <p:nvPr/>
+        </p:nvSpPr>
+        <p:spPr>
+          <a:xfrm>
+            <a:off x="822960" y="320040"/>
+            <a:ext cx="2743200" cy="292608"/>
+          </a:xfrm>
+          <a:prstGeom prst="rect">
+            <a:avLst/>
+          </a:prstGeom>
+          <a:noFill/>
+          <a:ln/>
+        </p:spPr>
+        <p:txBody>
+          <a:bodyPr wrap="square" lIns="0" tIns="0" rIns="0" bIns="0" rtlCol="0" anchor="ctr"/>
+          <a:lstStyle/>
+          <a:p>
+            <a:pPr indent="0" marL="0">
+              <a:buNone/>
+            </a:pPr>
+            <a:r>
+              <a:rPr lang="en-US" sz="1300" b="1" dirty="0">
+                <a:solidFill>
+                  <a:srgbClr val="F1F5F9"/>
+                </a:solidFill>
+                <a:latin typeface="Calibri" pitchFamily="34" charset="0"/>
+                <a:ea typeface="Calibri" pitchFamily="34" charset="-122"/>
+                <a:cs typeface="Calibri" pitchFamily="34" charset="-120"/>
+              </a:rPr>
+              <a:t>Atlas AEC</a:t>
+            </a:r>
+            <a:endParaRPr lang="en-US" sz="1300" dirty="0"/>
+          </a:p>
+        </p:txBody>
+      </p:sp>
+      <p:sp>
+        <p:nvSpPr>
+          <p:cNvPr id="5" name="Text 3"/>
+          <p:cNvSpPr/>
+          <p:nvPr/>
+        </p:nvSpPr>
+        <p:spPr>
+          <a:xfrm>
+            <a:off x="3566160" y="356616"/>
+            <a:ext cx="5486400" cy="256032"/>
+          </a:xfrm>
+          <a:prstGeom prst="rect">
+            <a:avLst/>
+          </a:prstGeom>
+          <a:noFill/>
+          <a:ln/>
+        </p:spPr>
+        <p:txBody>
+          <a:bodyPr wrap="square" lIns="0" tIns="0" rIns="0" bIns="0" rtlCol="0" anchor="ctr"/>
+          <a:lstStyle/>
+          <a:p>
+            <a:pPr indent="0" marL="0">
+              <a:buNone/>
+            </a:pPr>
+            <a:r>
+              <a:rPr lang="en-US" sz="1100" dirty="0">
+                <a:solidFill>
+                  <a:srgbClr val="8B9BB4"/>
+                </a:solidFill>
+                <a:latin typeface="Calibri" pitchFamily="34" charset="0"/>
+                <a:ea typeface="Calibri" pitchFamily="34" charset="-122"/>
+                <a:cs typeface="Calibri" pitchFamily="34" charset="-120"/>
+              </a:rPr>
+              <a:t>Đấu thầu — BidRadar</a:t>
+            </a:r>
+            <a:endParaRPr lang="en-US" sz="1100" dirty="0"/>
+          </a:p>
+        </p:txBody>
+      </p:sp>
+      <p:sp>
+        <p:nvSpPr>
+          <p:cNvPr id="6" name="Text 4"/>
+          <p:cNvSpPr/>
+          <p:nvPr/>
+        </p:nvSpPr>
+        <p:spPr>
+          <a:xfrm>
+            <a:off x="10881360" y="320040"/>
+            <a:ext cx="822960" cy="292608"/>
+          </a:xfrm>
+          <a:prstGeom prst="rect">
+            <a:avLst/>
+          </a:prstGeom>
+          <a:noFill/>
+          <a:ln/>
+        </p:spPr>
+        <p:txBody>
+          <a:bodyPr wrap="square" lIns="0" tIns="0" rIns="0" bIns="0" rtlCol="0" anchor="ctr"/>
+          <a:lstStyle/>
+          <a:p>
+            <a:pPr algn="r" indent="0" marL="0">
+              <a:buNone/>
+            </a:pPr>
+            <a:r>
+              <a:rPr lang="en-US" sz="1100" dirty="0">
+                <a:solidFill>
+                  <a:srgbClr val="8B9BB4"/>
+                </a:solidFill>
+                <a:latin typeface="Calibri" pitchFamily="34" charset="0"/>
+                <a:ea typeface="Calibri" pitchFamily="34" charset="-122"/>
+                <a:cs typeface="Calibri" pitchFamily="34" charset="-120"/>
+              </a:rPr>
+              <a:t>20 / 21</a:t>
+            </a:r>
+            <a:endParaRPr lang="en-US" sz="1100" dirty="0"/>
+          </a:p>
+        </p:txBody>
+      </p:sp>
+      <p:sp>
+        <p:nvSpPr>
+          <p:cNvPr id="7" name="Text 5"/>
+          <p:cNvSpPr/>
+          <p:nvPr/>
+        </p:nvSpPr>
+        <p:spPr>
+          <a:xfrm>
+            <a:off x="457200" y="822960"/>
+            <a:ext cx="11247120" cy="502920"/>
+          </a:xfrm>
+          <a:prstGeom prst="rect">
+            <a:avLst/>
+          </a:prstGeom>
+          <a:noFill/>
+          <a:ln/>
+        </p:spPr>
+        <p:txBody>
+          <a:bodyPr wrap="square" lIns="0" tIns="0" rIns="0" bIns="0" rtlCol="0" anchor="ctr"/>
+          <a:lstStyle/>
+          <a:p>
+            <a:pPr indent="0" marL="0">
+              <a:buNone/>
+            </a:pPr>
+            <a:r>
+              <a:rPr lang="en-US" sz="2600" b="1" dirty="0">
+                <a:solidFill>
+                  <a:srgbClr val="F1F5F9"/>
+                </a:solidFill>
+                <a:latin typeface="Calibri" pitchFamily="34" charset="0"/>
+                <a:ea typeface="Calibri" pitchFamily="34" charset="-122"/>
+                <a:cs typeface="Calibri" pitchFamily="34" charset="-120"/>
+              </a:rPr>
+              <a:t>BidRadar · Săn gói thầu nhà nước</a:t>
+            </a:r>
+            <a:endParaRPr lang="en-US" sz="2600" dirty="0"/>
+          </a:p>
+        </p:txBody>
+      </p:sp>
+      <p:sp>
+        <p:nvSpPr>
+          <p:cNvPr id="8" name="Text 6"/>
+          <p:cNvSpPr/>
+          <p:nvPr/>
+        </p:nvSpPr>
+        <p:spPr>
+          <a:xfrm>
+            <a:off x="457200" y="1325880"/>
+            <a:ext cx="11247120" cy="292608"/>
+          </a:xfrm>
+          <a:prstGeom prst="rect">
+            <a:avLst/>
+          </a:prstGeom>
+          <a:noFill/>
+          <a:ln/>
+        </p:spPr>
+        <p:txBody>
+          <a:bodyPr wrap="square" lIns="0" tIns="0" rIns="0" bIns="0" rtlCol="0" anchor="ctr"/>
+          <a:lstStyle/>
+          <a:p>
+            <a:pPr indent="0" marL="0">
+              <a:buNone/>
+            </a:pPr>
+            <a:r>
+              <a:rPr lang="en-US" sz="1400" i="1" dirty="0">
+                <a:solidFill>
+                  <a:srgbClr val="8B9BB4"/>
+                </a:solidFill>
+                <a:latin typeface="Calibri" pitchFamily="34" charset="0"/>
+                <a:ea typeface="Calibri" pitchFamily="34" charset="-122"/>
+                <a:cs typeface="Calibri" pitchFamily="34" charset="-120"/>
+              </a:rPr>
+              <a:t>muasamcong.mpi.gov.vn + dauthau.asia · alert email theo NACE · reuses TenderCreateButton</a:t>
+            </a:r>
+            <a:endParaRPr lang="en-US" sz="1400" dirty="0"/>
+          </a:p>
+        </p:txBody>
+      </p:sp>
+      <p:sp>
+        <p:nvSpPr>
+          <p:cNvPr id="9" name="Shape 7"/>
+          <p:cNvSpPr/>
+          <p:nvPr/>
+        </p:nvSpPr>
+        <p:spPr>
+          <a:xfrm>
+            <a:off x="594360" y="1737360"/>
+            <a:ext cx="7863840" cy="4663440"/>
+          </a:xfrm>
+          <a:prstGeom prst="rect">
+            <a:avLst/>
+          </a:prstGeom>
+          <a:solidFill>
+            <a:srgbClr val="111A30"/>
+          </a:solidFill>
+          <a:ln w="12700">
+            <a:solidFill>
+              <a:srgbClr val="1F2A44"/>
+            </a:solidFill>
+            <a:prstDash val="solid"/>
+          </a:ln>
+        </p:spPr>
+      </p:sp>
+      <p:pic>
+        <p:nvPicPr>
+          <p:cNvPr id="10" name="Image 0" descr="/Users/vsf-thuynt519-l/Documents/GitHub/atlas-aec/docs/demo-screens/19-bidradar.png">    </p:cNvPr>
+          <p:cNvPicPr>
+            <a:picLocks noChangeAspect="1"/>
+          </p:cNvPicPr>
+          <p:nvPr/>
+        </p:nvPicPr>
+        <p:blipFill>
+          <a:blip r:embed="rId1"/>
+          <a:srcRect l="0" r="0" t="0" b="0"/>
+          <a:stretch/>
+        </p:blipFill>
+        <p:spPr>
+          <a:xfrm>
+            <a:off x="640080" y="1783080"/>
+            <a:ext cx="7772400" cy="4572000"/>
+          </a:xfrm>
+          <a:prstGeom prst="rect">
+            <a:avLst/>
+          </a:prstGeom>
+        </p:spPr>
+      </p:pic>
+      <p:sp>
+        <p:nvSpPr>
+          <p:cNvPr id="11" name="Text 8"/>
+          <p:cNvSpPr/>
+          <p:nvPr/>
+        </p:nvSpPr>
+        <p:spPr>
+          <a:xfrm>
+            <a:off x="8778240" y="1783080"/>
+            <a:ext cx="2926080" cy="4572000"/>
+          </a:xfrm>
+          <a:prstGeom prst="rect">
+            <a:avLst/>
+          </a:prstGeom>
+          <a:noFill/>
+          <a:ln/>
+        </p:spPr>
+        <p:txBody>
+          <a:bodyPr wrap="square" lIns="0" tIns="0" rIns="0" bIns="0" rtlCol="0" anchor="t"/>
+          <a:lstStyle/>
+          <a:p>
+            <a:pPr>
+              <a:spcAft>
+                <a:spcPts val="600"/>
+              </a:spcAft>
+            </a:pPr>
+            <a:r>
+              <a:rPr lang="en-US" sz="1300" dirty="0">
+                <a:solidFill>
+                  <a:srgbClr val="F1F5F9"/>
+                </a:solidFill>
+                <a:latin typeface="Calibri" pitchFamily="34" charset="0"/>
+                <a:ea typeface="Calibri" pitchFamily="34" charset="-122"/>
+                <a:cs typeface="Calibri" pitchFamily="34" charset="-120"/>
+              </a:rPr>
+              <a:t>Top-level cho org:</a:t>
+            </a:r>
+            <a:endParaRPr lang="en-US" sz="1300" dirty="0"/>
+          </a:p>
+          <a:p>
+            <a:pPr>
+              <a:spcAft>
+                <a:spcPts val="600"/>
+              </a:spcAft>
+            </a:pPr>
+            <a:r>
+              <a:rPr lang="en-US" sz="1300" dirty="0">
+                <a:solidFill>
+                  <a:srgbClr val="F1F5F9"/>
+                </a:solidFill>
+                <a:latin typeface="Calibri" pitchFamily="34" charset="0"/>
+                <a:ea typeface="Calibri" pitchFamily="34" charset="-122"/>
+                <a:cs typeface="Calibri" pitchFamily="34" charset="-120"/>
+              </a:rPr>
+              <a:t>  Tổng gói · Đóng 7d</a:t>
+            </a:r>
+            <a:endParaRPr lang="en-US" sz="1300" dirty="0"/>
+          </a:p>
+          <a:p>
+            <a:pPr>
+              <a:spcAft>
+                <a:spcPts val="600"/>
+              </a:spcAft>
+            </a:pPr>
+            <a:r>
+              <a:rPr lang="en-US" sz="1300" dirty="0">
+                <a:solidFill>
+                  <a:srgbClr val="F1F5F9"/>
+                </a:solidFill>
+                <a:latin typeface="Calibri" pitchFamily="34" charset="0"/>
+                <a:ea typeface="Calibri" pitchFamily="34" charset="-122"/>
+                <a:cs typeface="Calibri" pitchFamily="34" charset="-120"/>
+              </a:rPr>
+              <a:t>  Ngân sách top 30</a:t>
+            </a:r>
+            <a:endParaRPr lang="en-US" sz="1300" dirty="0"/>
+          </a:p>
+          <a:p>
+            <a:pPr>
+              <a:spcAft>
+                <a:spcPts val="600"/>
+              </a:spcAft>
+            </a:pPr>
+            <a:r>
+              <a:rPr lang="en-US" sz="1300" dirty="0">
+                <a:solidFill>
+                  <a:srgbClr val="F1F5F9"/>
+                </a:solidFill>
+                <a:latin typeface="Calibri" pitchFamily="34" charset="0"/>
+                <a:ea typeface="Calibri" pitchFamily="34" charset="-122"/>
+                <a:cs typeface="Calibri" pitchFamily="34" charset="-120"/>
+              </a:rPr>
+              <a:t>  Watchlist (sắp tới)</a:t>
+            </a:r>
+            <a:endParaRPr lang="en-US" sz="1300" dirty="0"/>
+          </a:p>
+          <a:p>
+            <a:pPr>
+              <a:spcAft>
+                <a:spcPts val="600"/>
+              </a:spcAft>
+            </a:pPr>
+            <a:endParaRPr lang="en-US" sz="1300" dirty="0"/>
+          </a:p>
+          <a:p>
+            <a:pPr>
+              <a:spcAft>
+                <a:spcPts val="600"/>
+              </a:spcAft>
+            </a:pPr>
+            <a:r>
+              <a:rPr lang="en-US" sz="1300" dirty="0">
+                <a:solidFill>
+                  <a:srgbClr val="F1F5F9"/>
+                </a:solidFill>
+                <a:latin typeface="Calibri" pitchFamily="34" charset="0"/>
+                <a:ea typeface="Calibri" pitchFamily="34" charset="-122"/>
+                <a:cs typeface="Calibri" pitchFamily="34" charset="-120"/>
+              </a:rPr>
+              <a:t>Form CRUD (reuse):</a:t>
+            </a:r>
+            <a:endParaRPr lang="en-US" sz="1300" dirty="0"/>
+          </a:p>
+          <a:p>
+            <a:pPr>
+              <a:spcAft>
+                <a:spcPts val="600"/>
+              </a:spcAft>
+            </a:pPr>
+            <a:r>
+              <a:rPr lang="en-US" sz="1300" dirty="0">
+                <a:solidFill>
+                  <a:srgbClr val="F1F5F9"/>
+                </a:solidFill>
+                <a:latin typeface="Calibri" pitchFamily="34" charset="0"/>
+                <a:ea typeface="Calibri" pitchFamily="34" charset="-122"/>
+                <a:cs typeface="Calibri" pitchFamily="34" charset="-120"/>
+              </a:rPr>
+              <a:t>  + Thêm cơ hội</a:t>
+            </a:r>
+            <a:endParaRPr lang="en-US" sz="1300" dirty="0"/>
+          </a:p>
+          <a:p>
+            <a:pPr>
+              <a:spcAft>
+                <a:spcPts val="600"/>
+              </a:spcAft>
+            </a:pPr>
+            <a:r>
+              <a:rPr lang="en-US" sz="1300" dirty="0">
+                <a:solidFill>
+                  <a:srgbClr val="F1F5F9"/>
+                </a:solidFill>
+                <a:latin typeface="Calibri" pitchFamily="34" charset="0"/>
+                <a:ea typeface="Calibri" pitchFamily="34" charset="-122"/>
+                <a:cs typeface="Calibri" pitchFamily="34" charset="-120"/>
+              </a:rPr>
+              <a:t>  Bên mời · MST</a:t>
+            </a:r>
+            <a:endParaRPr lang="en-US" sz="1300" dirty="0"/>
+          </a:p>
+          <a:p>
+            <a:pPr>
+              <a:spcAft>
+                <a:spcPts val="600"/>
+              </a:spcAft>
+            </a:pPr>
+            <a:r>
+              <a:rPr lang="en-US" sz="1300" dirty="0">
+                <a:solidFill>
+                  <a:srgbClr val="F1F5F9"/>
+                </a:solidFill>
+                <a:latin typeface="Calibri" pitchFamily="34" charset="0"/>
+                <a:ea typeface="Calibri" pitchFamily="34" charset="-122"/>
+                <a:cs typeface="Calibri" pitchFamily="34" charset="-120"/>
+              </a:rPr>
+              <a:t>  Giá gói · Nguồn vốn</a:t>
+            </a:r>
+            <a:endParaRPr lang="en-US" sz="1300" dirty="0"/>
+          </a:p>
+          <a:p>
+            <a:pPr>
+              <a:spcAft>
+                <a:spcPts val="600"/>
+              </a:spcAft>
+            </a:pPr>
+            <a:r>
+              <a:rPr lang="en-US" sz="1300" dirty="0">
+                <a:solidFill>
+                  <a:srgbClr val="F1F5F9"/>
+                </a:solidFill>
+                <a:latin typeface="Calibri" pitchFamily="34" charset="0"/>
+                <a:ea typeface="Calibri" pitchFamily="34" charset="-122"/>
+                <a:cs typeface="Calibri" pitchFamily="34" charset="-120"/>
+              </a:rPr>
+              <a:t>  Tỉnh · Hình thức</a:t>
+            </a:r>
+            <a:endParaRPr lang="en-US" sz="1300" dirty="0"/>
+          </a:p>
+          <a:p>
+            <a:pPr>
+              <a:spcAft>
+                <a:spcPts val="600"/>
+              </a:spcAft>
+            </a:pPr>
+            <a:endParaRPr lang="en-US" sz="1300" dirty="0"/>
+          </a:p>
+          <a:p>
+            <a:pPr>
+              <a:spcAft>
+                <a:spcPts val="600"/>
+              </a:spcAft>
+            </a:pPr>
+            <a:r>
+              <a:rPr lang="en-US" sz="1300" dirty="0">
+                <a:solidFill>
+                  <a:srgbClr val="F1F5F9"/>
+                </a:solidFill>
+                <a:latin typeface="Calibri" pitchFamily="34" charset="0"/>
+                <a:ea typeface="Calibri" pitchFamily="34" charset="-122"/>
+                <a:cs typeface="Calibri" pitchFamily="34" charset="-120"/>
+              </a:rPr>
+              <a:t>Sắp đóng thầu hiện</a:t>
+            </a:r>
+            <a:endParaRPr lang="en-US" sz="1300" dirty="0"/>
+          </a:p>
+          <a:p>
+            <a:pPr>
+              <a:spcAft>
+                <a:spcPts val="600"/>
+              </a:spcAft>
+            </a:pPr>
+            <a:r>
+              <a:rPr lang="en-US" sz="1300" dirty="0">
+                <a:solidFill>
+                  <a:srgbClr val="F1F5F9"/>
+                </a:solidFill>
+                <a:latin typeface="Calibri" pitchFamily="34" charset="0"/>
+                <a:ea typeface="Calibri" pitchFamily="34" charset="-122"/>
+                <a:cs typeface="Calibri" pitchFamily="34" charset="-120"/>
+              </a:rPr>
+              <a:t>bảng cảnh báo vàng.</a:t>
+            </a:r>
+            <a:endParaRPr lang="en-US" sz="1300" dirty="0"/>
+          </a:p>
+        </p:txBody>
+      </p:sp>
+      <p:sp>
+        <p:nvSpPr>
+          <p:cNvPr id="12" name="Text 9"/>
+          <p:cNvSpPr/>
+          <p:nvPr/>
+        </p:nvSpPr>
+        <p:spPr>
+          <a:xfrm>
+            <a:off x="457200" y="6446520"/>
+            <a:ext cx="11247120" cy="274320"/>
+          </a:xfrm>
+          <a:prstGeom prst="rect">
+            <a:avLst/>
+          </a:prstGeom>
+          <a:noFill/>
+          <a:ln/>
+        </p:spPr>
+        <p:txBody>
+          <a:bodyPr wrap="square" lIns="0" tIns="0" rIns="0" bIns="0" rtlCol="0" anchor="ctr"/>
+          <a:lstStyle/>
+          <a:p>
+            <a:pPr indent="0" marL="0">
+              <a:buNone/>
+            </a:pPr>
+            <a:r>
+              <a:rPr lang="en-US" sz="1000" dirty="0">
+                <a:solidFill>
+                  <a:srgbClr val="475569"/>
+                </a:solidFill>
+                <a:latin typeface="Calibri" pitchFamily="34" charset="0"/>
+                <a:ea typeface="Calibri" pitchFamily="34" charset="-122"/>
+                <a:cs typeface="Calibri" pitchFamily="34" charset="-120"/>
+              </a:rPr>
+              <a:t>atlas-aec · v2 · live demo</a:t>
+            </a:r>
+            <a:endParaRPr lang="en-US" sz="1000" dirty="0"/>
+          </a:p>
+        </p:txBody>
+      </p:sp>
+    </p:spTree>
+  </p:cSld>
+  <p:clrMapOvr>
+    <a:masterClrMapping/>
+  </p:clrMapOvr>
+</p:sld>
+</file>
+
+<file path=ppt/slides/slide21.xml><?xml version="1.0" encoding="utf-8"?>
+<p:sld xmlns:a="http://schemas.openxmlformats.org/drawingml/2006/main" xmlns:r="http://schemas.openxmlformats.org/officeDocument/2006/relationships" xmlns:p="http://schemas.openxmlformats.org/presentationml/2006/main">
+  <p:cSld name="Slide 21">
+    <p:bg>
+      <p:bgPr>
+        <a:solidFill>
+          <a:srgbClr val="0B1220"/>
+        </a:solidFill>
+      </p:bgPr>
+    </p:bg>
+    <p:spTree>
+      <p:nvGrpSpPr>
+        <p:cNvPr id="1" name=""/>
+        <p:cNvGrpSpPr/>
+        <p:nvPr/>
+      </p:nvGrpSpPr>
+      <p:grpSpPr>
+        <a:xfrm>
+          <a:off x="0" y="0"/>
+          <a:ext cx="0" cy="0"/>
+          <a:chOff x="0" y="0"/>
+          <a:chExt cx="0" cy="0"/>
+        </a:xfrm>
+      </p:grpSpPr>
+      <p:sp>
+        <p:nvSpPr>
+          <p:cNvPr id="2" name="Shape 0"/>
+          <p:cNvSpPr/>
+          <p:nvPr/>
+        </p:nvSpPr>
+        <p:spPr>
+          <a:xfrm>
+            <a:off x="457200" y="320040"/>
+            <a:ext cx="292608" cy="292608"/>
+          </a:xfrm>
+          <a:prstGeom prst="rect">
+            <a:avLst/>
+          </a:prstGeom>
+          <a:solidFill>
+            <a:srgbClr val="3B82F6"/>
+          </a:solidFill>
+          <a:ln w="12700">
+            <a:solidFill>
+              <a:srgbClr val="3B82F6"/>
+            </a:solidFill>
+            <a:prstDash val="solid"/>
+          </a:ln>
+        </p:spPr>
+      </p:sp>
+      <p:sp>
+        <p:nvSpPr>
+          <p:cNvPr id="3" name="Text 1"/>
+          <p:cNvSpPr/>
+          <p:nvPr/>
+        </p:nvSpPr>
+        <p:spPr>
+          <a:xfrm>
+            <a:off x="457200" y="320040"/>
+            <a:ext cx="292608" cy="292608"/>
+          </a:xfrm>
+          <a:prstGeom prst="rect">
+            <a:avLst/>
+          </a:prstGeom>
+          <a:noFill/>
+          <a:ln/>
+        </p:spPr>
+        <p:txBody>
+          <a:bodyPr wrap="square" lIns="0" tIns="0" rIns="0" bIns="0" rtlCol="0" anchor="ctr"/>
+          <a:lstStyle/>
+          <a:p>
+            <a:pPr algn="ctr" indent="0" marL="0">
+              <a:buNone/>
+            </a:pPr>
+            <a:r>
+              <a:rPr lang="en-US" sz="1600" b="1" dirty="0">
+                <a:solidFill>
+                  <a:srgbClr val="FFFFFF"/>
+                </a:solidFill>
+                <a:latin typeface="Calibri" pitchFamily="34" charset="0"/>
+                <a:ea typeface="Calibri" pitchFamily="34" charset="-122"/>
+                <a:cs typeface="Calibri" pitchFamily="34" charset="-120"/>
+              </a:rPr>
+              <a:t>A</a:t>
+            </a:r>
+            <a:endParaRPr lang="en-US" sz="1600" dirty="0"/>
+          </a:p>
+        </p:txBody>
+      </p:sp>
+      <p:sp>
+        <p:nvSpPr>
+          <p:cNvPr id="4" name="Text 2"/>
+          <p:cNvSpPr/>
+          <p:nvPr/>
+        </p:nvSpPr>
+        <p:spPr>
+          <a:xfrm>
+            <a:off x="822960" y="320040"/>
+            <a:ext cx="2743200" cy="292608"/>
+          </a:xfrm>
+          <a:prstGeom prst="rect">
+            <a:avLst/>
+          </a:prstGeom>
+          <a:noFill/>
+          <a:ln/>
+        </p:spPr>
+        <p:txBody>
+          <a:bodyPr wrap="square" lIns="0" tIns="0" rIns="0" bIns="0" rtlCol="0" anchor="ctr"/>
+          <a:lstStyle/>
+          <a:p>
+            <a:pPr indent="0" marL="0">
+              <a:buNone/>
+            </a:pPr>
+            <a:r>
+              <a:rPr lang="en-US" sz="1300" b="1" dirty="0">
+                <a:solidFill>
+                  <a:srgbClr val="F1F5F9"/>
+                </a:solidFill>
+                <a:latin typeface="Calibri" pitchFamily="34" charset="0"/>
+                <a:ea typeface="Calibri" pitchFamily="34" charset="-122"/>
+                <a:cs typeface="Calibri" pitchFamily="34" charset="-120"/>
+              </a:rPr>
+              <a:t>Atlas AEC</a:t>
+            </a:r>
+            <a:endParaRPr lang="en-US" sz="1300" dirty="0"/>
+          </a:p>
+        </p:txBody>
+      </p:sp>
+      <p:sp>
+        <p:nvSpPr>
+          <p:cNvPr id="5" name="Text 3"/>
+          <p:cNvSpPr/>
+          <p:nvPr/>
+        </p:nvSpPr>
+        <p:spPr>
+          <a:xfrm>
+            <a:off x="3566160" y="356616"/>
+            <a:ext cx="5486400" cy="256032"/>
+          </a:xfrm>
+          <a:prstGeom prst="rect">
+            <a:avLst/>
+          </a:prstGeom>
+          <a:noFill/>
+          <a:ln/>
+        </p:spPr>
+        <p:txBody>
+          <a:bodyPr wrap="square" lIns="0" tIns="0" rIns="0" bIns="0" rtlCol="0" anchor="ctr"/>
+          <a:lstStyle/>
+          <a:p>
+            <a:pPr indent="0" marL="0">
+              <a:buNone/>
+            </a:pPr>
+            <a:r>
+              <a:rPr lang="en-US" sz="1100" dirty="0">
+                <a:solidFill>
+                  <a:srgbClr val="8B9BB4"/>
+                </a:solidFill>
+                <a:latin typeface="Calibri" pitchFamily="34" charset="0"/>
+                <a:ea typeface="Calibri" pitchFamily="34" charset="-122"/>
+                <a:cs typeface="Calibri" pitchFamily="34" charset="-120"/>
+              </a:rPr>
+              <a:t>Shipping evidence</a:t>
+            </a:r>
+            <a:endParaRPr lang="en-US" sz="1100" dirty="0"/>
+          </a:p>
+        </p:txBody>
+      </p:sp>
+      <p:sp>
+        <p:nvSpPr>
+          <p:cNvPr id="6" name="Text 4"/>
+          <p:cNvSpPr/>
+          <p:nvPr/>
+        </p:nvSpPr>
+        <p:spPr>
+          <a:xfrm>
+            <a:off x="10881360" y="320040"/>
+            <a:ext cx="822960" cy="292608"/>
+          </a:xfrm>
+          <a:prstGeom prst="rect">
+            <a:avLst/>
+          </a:prstGeom>
+          <a:noFill/>
+          <a:ln/>
+        </p:spPr>
+        <p:txBody>
+          <a:bodyPr wrap="square" lIns="0" tIns="0" rIns="0" bIns="0" rtlCol="0" anchor="ctr"/>
+          <a:lstStyle/>
+          <a:p>
+            <a:pPr algn="r" indent="0" marL="0">
+              <a:buNone/>
+            </a:pPr>
+            <a:r>
+              <a:rPr lang="en-US" sz="1100" dirty="0">
+                <a:solidFill>
+                  <a:srgbClr val="8B9BB4"/>
+                </a:solidFill>
+                <a:latin typeface="Calibri" pitchFamily="34" charset="0"/>
+                <a:ea typeface="Calibri" pitchFamily="34" charset="-122"/>
+                <a:cs typeface="Calibri" pitchFamily="34" charset="-120"/>
+              </a:rPr>
+              <a:t>21 / 21</a:t>
+            </a:r>
+            <a:endParaRPr lang="en-US" sz="1100" dirty="0"/>
+          </a:p>
+        </p:txBody>
+      </p:sp>
+      <p:sp>
+        <p:nvSpPr>
+          <p:cNvPr id="7" name="Text 5"/>
+          <p:cNvSpPr/>
+          <p:nvPr/>
+        </p:nvSpPr>
+        <p:spPr>
+          <a:xfrm>
+            <a:off x="548640" y="914400"/>
+            <a:ext cx="11064240" cy="640080"/>
+          </a:xfrm>
+          <a:prstGeom prst="rect">
+            <a:avLst/>
+          </a:prstGeom>
+          <a:noFill/>
+          <a:ln/>
+        </p:spPr>
+        <p:txBody>
+          <a:bodyPr wrap="square" lIns="0" tIns="0" rIns="0" bIns="0" rtlCol="0" anchor="ctr"/>
+          <a:lstStyle/>
+          <a:p>
+            <a:pPr indent="0" marL="0">
+              <a:buNone/>
+            </a:pPr>
+            <a:r>
+              <a:rPr lang="en-US" sz="3600" b="1" dirty="0">
+                <a:solidFill>
+                  <a:srgbClr val="F1F5F9"/>
+                </a:solidFill>
+                <a:latin typeface="Calibri" pitchFamily="34" charset="0"/>
+                <a:ea typeface="Calibri" pitchFamily="34" charset="-122"/>
+                <a:cs typeface="Calibri" pitchFamily="34" charset="-120"/>
+              </a:rPr>
+              <a:t>Atlas AEC · v2 shipped 19/05/2026</a:t>
+            </a:r>
+            <a:endParaRPr lang="en-US" sz="3600" dirty="0"/>
+          </a:p>
+        </p:txBody>
+      </p:sp>
+      <p:sp>
+        <p:nvSpPr>
+          <p:cNvPr id="8" name="Text 6"/>
+          <p:cNvSpPr/>
+          <p:nvPr/>
+        </p:nvSpPr>
+        <p:spPr>
+          <a:xfrm>
+            <a:off x="548640" y="1554480"/>
+            <a:ext cx="11064240" cy="365760"/>
+          </a:xfrm>
+          <a:prstGeom prst="rect">
+            <a:avLst/>
+          </a:prstGeom>
+          <a:noFill/>
+          <a:ln/>
+        </p:spPr>
+        <p:txBody>
+          <a:bodyPr wrap="square" lIns="0" tIns="0" rIns="0" bIns="0" rtlCol="0" anchor="ctr"/>
+          <a:lstStyle/>
+          <a:p>
+            <a:pPr indent="0" marL="0">
+              <a:buNone/>
+            </a:pPr>
+            <a:r>
+              <a:rPr lang="en-US" sz="1400" i="1" dirty="0">
+                <a:solidFill>
+                  <a:srgbClr val="8B9BB4"/>
+                </a:solidFill>
+                <a:latin typeface="Calibri" pitchFamily="34" charset="0"/>
+                <a:ea typeface="Calibri" pitchFamily="34" charset="-122"/>
+                <a:cs typeface="Calibri" pitchFamily="34" charset="-120"/>
+              </a:rPr>
+              <a:t>Mỗi gate đều tự re-run được — không phải lời hứa, là làm rồi.</a:t>
+            </a:r>
+            <a:endParaRPr lang="en-US" sz="1400" dirty="0"/>
+          </a:p>
+        </p:txBody>
+      </p:sp>
+      <p:sp>
+        <p:nvSpPr>
+          <p:cNvPr id="9" name="Shape 7"/>
+          <p:cNvSpPr/>
+          <p:nvPr/>
+        </p:nvSpPr>
+        <p:spPr>
+          <a:xfrm>
+            <a:off x="411480" y="2194560"/>
+            <a:ext cx="3657600" cy="1280160"/>
+          </a:xfrm>
+          <a:prstGeom prst="rect">
+            <a:avLst/>
+          </a:prstGeom>
+          <a:solidFill>
+            <a:srgbClr val="111A30"/>
+          </a:solidFill>
+          <a:ln w="12700">
+            <a:solidFill>
+              <a:srgbClr val="1F2A44"/>
+            </a:solidFill>
+            <a:prstDash val="solid"/>
+          </a:ln>
+        </p:spPr>
+      </p:sp>
+      <p:sp>
+        <p:nvSpPr>
+          <p:cNvPr id="10" name="Shape 8"/>
+          <p:cNvSpPr/>
+          <p:nvPr/>
+        </p:nvSpPr>
+        <p:spPr>
+          <a:xfrm>
+            <a:off x="411480" y="2194560"/>
+            <a:ext cx="73152" cy="1280160"/>
+          </a:xfrm>
+          <a:prstGeom prst="rect">
+            <a:avLst/>
+          </a:prstGeom>
+          <a:solidFill>
+            <a:srgbClr val="10B981"/>
+          </a:solidFill>
+          <a:ln w="12700">
+            <a:solidFill>
+              <a:srgbClr val="10B981"/>
+            </a:solidFill>
+            <a:prstDash val="solid"/>
+          </a:ln>
+        </p:spPr>
+      </p:sp>
+      <p:sp>
+        <p:nvSpPr>
+          <p:cNvPr id="11" name="Text 9"/>
+          <p:cNvSpPr/>
+          <p:nvPr/>
+        </p:nvSpPr>
+        <p:spPr>
+          <a:xfrm>
+            <a:off x="640080" y="2331720"/>
+            <a:ext cx="3200400" cy="457200"/>
+          </a:xfrm>
+          <a:prstGeom prst="rect">
+            <a:avLst/>
+          </a:prstGeom>
+          <a:noFill/>
+          <a:ln/>
+        </p:spPr>
+        <p:txBody>
+          <a:bodyPr wrap="square" lIns="0" tIns="0" rIns="0" bIns="0" rtlCol="0" anchor="ctr"/>
+          <a:lstStyle/>
+          <a:p>
+            <a:pPr indent="0" marL="0">
+              <a:buNone/>
+            </a:pPr>
+            <a:r>
+              <a:rPr lang="en-US" sz="2600" b="1" dirty="0">
+                <a:solidFill>
+                  <a:srgbClr val="10B981"/>
+                </a:solidFill>
+                <a:latin typeface="Calibri" pitchFamily="34" charset="0"/>
+                <a:ea typeface="Calibri" pitchFamily="34" charset="-122"/>
+                <a:cs typeface="Calibri" pitchFamily="34" charset="-120"/>
+              </a:rPr>
+              <a:t>9 / 9</a:t>
+            </a:r>
+            <a:endParaRPr lang="en-US" sz="2600" dirty="0"/>
+          </a:p>
+        </p:txBody>
+      </p:sp>
+      <p:sp>
+        <p:nvSpPr>
+          <p:cNvPr id="12" name="Text 10"/>
+          <p:cNvSpPr/>
+          <p:nvPr/>
+        </p:nvSpPr>
+        <p:spPr>
+          <a:xfrm>
+            <a:off x="640080" y="2788920"/>
+            <a:ext cx="3200400" cy="292608"/>
+          </a:xfrm>
+          <a:prstGeom prst="rect">
+            <a:avLst/>
+          </a:prstGeom>
+          <a:noFill/>
+          <a:ln/>
+        </p:spPr>
+        <p:txBody>
+          <a:bodyPr wrap="square" lIns="0" tIns="0" rIns="0" bIns="0" rtlCol="0" anchor="ctr"/>
+          <a:lstStyle/>
+          <a:p>
+            <a:pPr indent="0" marL="0">
+              <a:buNone/>
+            </a:pPr>
+            <a:r>
+              <a:rPr lang="en-US" sz="1300" b="1" dirty="0">
+                <a:solidFill>
+                  <a:srgbClr val="F1F5F9"/>
+                </a:solidFill>
+                <a:latin typeface="Calibri" pitchFamily="34" charset="0"/>
+                <a:ea typeface="Calibri" pitchFamily="34" charset="-122"/>
+                <a:cs typeface="Calibri" pitchFamily="34" charset="-120"/>
+              </a:rPr>
+              <a:t>Packages typecheck</a:t>
+            </a:r>
+            <a:endParaRPr lang="en-US" sz="1300" dirty="0"/>
+          </a:p>
+        </p:txBody>
+      </p:sp>
+      <p:sp>
+        <p:nvSpPr>
+          <p:cNvPr id="13" name="Text 11"/>
+          <p:cNvSpPr/>
+          <p:nvPr/>
+        </p:nvSpPr>
+        <p:spPr>
+          <a:xfrm>
+            <a:off x="640080" y="3063240"/>
+            <a:ext cx="3200400" cy="320040"/>
+          </a:xfrm>
+          <a:prstGeom prst="rect">
+            <a:avLst/>
+          </a:prstGeom>
+          <a:noFill/>
+          <a:ln/>
+        </p:spPr>
+        <p:txBody>
+          <a:bodyPr wrap="square" lIns="0" tIns="0" rIns="0" bIns="0" rtlCol="0" anchor="ctr"/>
+          <a:lstStyle/>
+          <a:p>
+            <a:pPr indent="0" marL="0">
+              <a:buNone/>
+            </a:pPr>
+            <a:r>
+              <a:rPr lang="en-US" sz="1100" dirty="0">
+                <a:solidFill>
+                  <a:srgbClr val="8B9BB4"/>
+                </a:solidFill>
+                <a:latin typeface="Consolas" pitchFamily="34" charset="0"/>
+                <a:ea typeface="Consolas" pitchFamily="34" charset="-122"/>
+                <a:cs typeface="Consolas" pitchFamily="34" charset="-120"/>
+              </a:rPr>
+              <a:t>pnpm typecheck</a:t>
+            </a:r>
+            <a:endParaRPr lang="en-US" sz="1100" dirty="0"/>
+          </a:p>
+        </p:txBody>
+      </p:sp>
+      <p:sp>
+        <p:nvSpPr>
+          <p:cNvPr id="14" name="Shape 12"/>
+          <p:cNvSpPr/>
+          <p:nvPr/>
+        </p:nvSpPr>
+        <p:spPr>
+          <a:xfrm>
+            <a:off x="4251960" y="2194560"/>
+            <a:ext cx="3657600" cy="1280160"/>
+          </a:xfrm>
+          <a:prstGeom prst="rect">
+            <a:avLst/>
+          </a:prstGeom>
+          <a:solidFill>
+            <a:srgbClr val="111A30"/>
+          </a:solidFill>
+          <a:ln w="12700">
+            <a:solidFill>
+              <a:srgbClr val="1F2A44"/>
+            </a:solidFill>
+            <a:prstDash val="solid"/>
+          </a:ln>
+        </p:spPr>
+      </p:sp>
+      <p:sp>
+        <p:nvSpPr>
+          <p:cNvPr id="15" name="Shape 13"/>
+          <p:cNvSpPr/>
+          <p:nvPr/>
+        </p:nvSpPr>
+        <p:spPr>
+          <a:xfrm>
+            <a:off x="4251960" y="2194560"/>
+            <a:ext cx="73152" cy="1280160"/>
+          </a:xfrm>
+          <a:prstGeom prst="rect">
+            <a:avLst/>
+          </a:prstGeom>
+          <a:solidFill>
+            <a:srgbClr val="10B981"/>
+          </a:solidFill>
+          <a:ln w="12700">
+            <a:solidFill>
+              <a:srgbClr val="10B981"/>
+            </a:solidFill>
+            <a:prstDash val="solid"/>
+          </a:ln>
+        </p:spPr>
+      </p:sp>
+      <p:sp>
+        <p:nvSpPr>
+          <p:cNvPr id="16" name="Text 14"/>
+          <p:cNvSpPr/>
+          <p:nvPr/>
+        </p:nvSpPr>
+        <p:spPr>
+          <a:xfrm>
+            <a:off x="4480560" y="2331720"/>
+            <a:ext cx="3200400" cy="457200"/>
+          </a:xfrm>
+          <a:prstGeom prst="rect">
+            <a:avLst/>
+          </a:prstGeom>
+          <a:noFill/>
+          <a:ln/>
+        </p:spPr>
+        <p:txBody>
+          <a:bodyPr wrap="square" lIns="0" tIns="0" rIns="0" bIns="0" rtlCol="0" anchor="ctr"/>
+          <a:lstStyle/>
+          <a:p>
+            <a:pPr indent="0" marL="0">
+              <a:buNone/>
+            </a:pPr>
+            <a:r>
+              <a:rPr lang="en-US" sz="2600" b="1" dirty="0">
+                <a:solidFill>
+                  <a:srgbClr val="10B981"/>
+                </a:solidFill>
+                <a:latin typeface="Calibri" pitchFamily="34" charset="0"/>
+                <a:ea typeface="Calibri" pitchFamily="34" charset="-122"/>
+                <a:cs typeface="Calibri" pitchFamily="34" charset="-120"/>
+              </a:rPr>
+              <a:t>2 / 2</a:t>
+            </a:r>
+            <a:endParaRPr lang="en-US" sz="2600" dirty="0"/>
+          </a:p>
+        </p:txBody>
+      </p:sp>
+      <p:sp>
+        <p:nvSpPr>
+          <p:cNvPr id="17" name="Text 15"/>
+          <p:cNvSpPr/>
+          <p:nvPr/>
+        </p:nvSpPr>
+        <p:spPr>
+          <a:xfrm>
+            <a:off x="4480560" y="2788920"/>
+            <a:ext cx="3200400" cy="292608"/>
+          </a:xfrm>
+          <a:prstGeom prst="rect">
+            <a:avLst/>
+          </a:prstGeom>
+          <a:noFill/>
+          <a:ln/>
+        </p:spPr>
+        <p:txBody>
+          <a:bodyPr wrap="square" lIns="0" tIns="0" rIns="0" bIns="0" rtlCol="0" anchor="ctr"/>
+          <a:lstStyle/>
+          <a:p>
+            <a:pPr indent="0" marL="0">
+              <a:buNone/>
+            </a:pPr>
+            <a:r>
+              <a:rPr lang="en-US" sz="1300" b="1" dirty="0">
+                <a:solidFill>
+                  <a:srgbClr val="F1F5F9"/>
+                </a:solidFill>
+                <a:latin typeface="Calibri" pitchFamily="34" charset="0"/>
+                <a:ea typeface="Calibri" pitchFamily="34" charset="-122"/>
+                <a:cs typeface="Calibri" pitchFamily="34" charset="-120"/>
+              </a:rPr>
+              <a:t>Next apps lint clean</a:t>
+            </a:r>
+            <a:endParaRPr lang="en-US" sz="1300" dirty="0"/>
+          </a:p>
+        </p:txBody>
+      </p:sp>
+      <p:sp>
+        <p:nvSpPr>
+          <p:cNvPr id="18" name="Text 16"/>
+          <p:cNvSpPr/>
+          <p:nvPr/>
+        </p:nvSpPr>
+        <p:spPr>
+          <a:xfrm>
+            <a:off x="4480560" y="3063240"/>
+            <a:ext cx="3200400" cy="320040"/>
+          </a:xfrm>
+          <a:prstGeom prst="rect">
+            <a:avLst/>
+          </a:prstGeom>
+          <a:noFill/>
+          <a:ln/>
+        </p:spPr>
+        <p:txBody>
+          <a:bodyPr wrap="square" lIns="0" tIns="0" rIns="0" bIns="0" rtlCol="0" anchor="ctr"/>
+          <a:lstStyle/>
+          <a:p>
+            <a:pPr indent="0" marL="0">
+              <a:buNone/>
+            </a:pPr>
+            <a:r>
+              <a:rPr lang="en-US" sz="1100" dirty="0">
+                <a:solidFill>
+                  <a:srgbClr val="8B9BB4"/>
+                </a:solidFill>
+                <a:latin typeface="Consolas" pitchFamily="34" charset="0"/>
+                <a:ea typeface="Consolas" pitchFamily="34" charset="-122"/>
+                <a:cs typeface="Consolas" pitchFamily="34" charset="-120"/>
+              </a:rPr>
+              <a:t>pnpm lint</a:t>
+            </a:r>
+            <a:endParaRPr lang="en-US" sz="1100" dirty="0"/>
+          </a:p>
+        </p:txBody>
+      </p:sp>
+      <p:sp>
+        <p:nvSpPr>
+          <p:cNvPr id="19" name="Shape 17"/>
+          <p:cNvSpPr/>
+          <p:nvPr/>
+        </p:nvSpPr>
+        <p:spPr>
+          <a:xfrm>
+            <a:off x="8092440" y="2194560"/>
+            <a:ext cx="3657600" cy="1280160"/>
+          </a:xfrm>
+          <a:prstGeom prst="rect">
+            <a:avLst/>
+          </a:prstGeom>
+          <a:solidFill>
+            <a:srgbClr val="111A30"/>
+          </a:solidFill>
+          <a:ln w="12700">
+            <a:solidFill>
+              <a:srgbClr val="1F2A44"/>
+            </a:solidFill>
+            <a:prstDash val="solid"/>
+          </a:ln>
+        </p:spPr>
+      </p:sp>
+      <p:sp>
+        <p:nvSpPr>
+          <p:cNvPr id="20" name="Shape 18"/>
+          <p:cNvSpPr/>
+          <p:nvPr/>
+        </p:nvSpPr>
+        <p:spPr>
+          <a:xfrm>
+            <a:off x="8092440" y="2194560"/>
+            <a:ext cx="73152" cy="1280160"/>
+          </a:xfrm>
+          <a:prstGeom prst="rect">
+            <a:avLst/>
+          </a:prstGeom>
+          <a:solidFill>
+            <a:srgbClr val="10B981"/>
+          </a:solidFill>
+          <a:ln w="12700">
+            <a:solidFill>
+              <a:srgbClr val="10B981"/>
+            </a:solidFill>
+            <a:prstDash val="solid"/>
+          </a:ln>
+        </p:spPr>
+      </p:sp>
+      <p:sp>
+        <p:nvSpPr>
+          <p:cNvPr id="21" name="Text 19"/>
+          <p:cNvSpPr/>
+          <p:nvPr/>
+        </p:nvSpPr>
+        <p:spPr>
+          <a:xfrm>
+            <a:off x="8321040" y="2331720"/>
+            <a:ext cx="3200400" cy="457200"/>
+          </a:xfrm>
+          <a:prstGeom prst="rect">
+            <a:avLst/>
+          </a:prstGeom>
+          <a:noFill/>
+          <a:ln/>
+        </p:spPr>
+        <p:txBody>
+          <a:bodyPr wrap="square" lIns="0" tIns="0" rIns="0" bIns="0" rtlCol="0" anchor="ctr"/>
+          <a:lstStyle/>
+          <a:p>
+            <a:pPr indent="0" marL="0">
+              <a:buNone/>
+            </a:pPr>
+            <a:r>
+              <a:rPr lang="en-US" sz="2600" b="1" dirty="0">
+                <a:solidFill>
+                  <a:srgbClr val="10B981"/>
+                </a:solidFill>
+                <a:latin typeface="Calibri" pitchFamily="34" charset="0"/>
+                <a:ea typeface="Calibri" pitchFamily="34" charset="-122"/>
+                <a:cs typeface="Calibri" pitchFamily="34" charset="-120"/>
+              </a:rPr>
+              <a:t>10 / 10</a:t>
+            </a:r>
+            <a:endParaRPr lang="en-US" sz="2600" dirty="0"/>
+          </a:p>
+        </p:txBody>
+      </p:sp>
+      <p:sp>
+        <p:nvSpPr>
+          <p:cNvPr id="22" name="Text 20"/>
+          <p:cNvSpPr/>
+          <p:nvPr/>
+        </p:nvSpPr>
+        <p:spPr>
+          <a:xfrm>
+            <a:off x="8321040" y="2788920"/>
+            <a:ext cx="3200400" cy="292608"/>
+          </a:xfrm>
+          <a:prstGeom prst="rect">
+            <a:avLst/>
+          </a:prstGeom>
+          <a:noFill/>
+          <a:ln/>
+        </p:spPr>
+        <p:txBody>
+          <a:bodyPr wrap="square" lIns="0" tIns="0" rIns="0" bIns="0" rtlCol="0" anchor="ctr"/>
+          <a:lstStyle/>
+          <a:p>
+            <a:pPr indent="0" marL="0">
+              <a:buNone/>
+            </a:pPr>
+            <a:r>
+              <a:rPr lang="en-US" sz="1300" b="1" dirty="0">
+                <a:solidFill>
+                  <a:srgbClr val="F1F5F9"/>
+                </a:solidFill>
+                <a:latin typeface="Calibri" pitchFamily="34" charset="0"/>
+                <a:ea typeface="Calibri" pitchFamily="34" charset="-122"/>
+                <a:cs typeface="Calibri" pitchFamily="34" charset="-120"/>
+              </a:rPr>
+              <a:t>Vitest FSM tests pass</a:t>
+            </a:r>
+            <a:endParaRPr lang="en-US" sz="1300" dirty="0"/>
+          </a:p>
+        </p:txBody>
+      </p:sp>
+      <p:sp>
+        <p:nvSpPr>
+          <p:cNvPr id="23" name="Text 21"/>
+          <p:cNvSpPr/>
+          <p:nvPr/>
+        </p:nvSpPr>
+        <p:spPr>
+          <a:xfrm>
+            <a:off x="8321040" y="3063240"/>
+            <a:ext cx="3200400" cy="320040"/>
+          </a:xfrm>
+          <a:prstGeom prst="rect">
+            <a:avLst/>
+          </a:prstGeom>
+          <a:noFill/>
+          <a:ln/>
+        </p:spPr>
+        <p:txBody>
+          <a:bodyPr wrap="square" lIns="0" tIns="0" rIns="0" bIns="0" rtlCol="0" anchor="ctr"/>
+          <a:lstStyle/>
+          <a:p>
+            <a:pPr indent="0" marL="0">
+              <a:buNone/>
+            </a:pPr>
+            <a:r>
+              <a:rPr lang="en-US" sz="1100" dirty="0">
+                <a:solidFill>
+                  <a:srgbClr val="8B9BB4"/>
+                </a:solidFill>
+                <a:latin typeface="Consolas" pitchFamily="34" charset="0"/>
+                <a:ea typeface="Consolas" pitchFamily="34" charset="-122"/>
+                <a:cs typeface="Consolas" pitchFamily="34" charset="-120"/>
+              </a:rPr>
+              <a:t>pnpm test</a:t>
+            </a:r>
+            <a:endParaRPr lang="en-US" sz="1100" dirty="0"/>
+          </a:p>
+        </p:txBody>
+      </p:sp>
+      <p:sp>
+        <p:nvSpPr>
+          <p:cNvPr id="24" name="Shape 22"/>
+          <p:cNvSpPr/>
+          <p:nvPr/>
+        </p:nvSpPr>
+        <p:spPr>
+          <a:xfrm>
+            <a:off x="411480" y="3657600"/>
+            <a:ext cx="3657600" cy="1280160"/>
+          </a:xfrm>
+          <a:prstGeom prst="rect">
+            <a:avLst/>
+          </a:prstGeom>
+          <a:solidFill>
+            <a:srgbClr val="111A30"/>
+          </a:solidFill>
+          <a:ln w="12700">
+            <a:solidFill>
+              <a:srgbClr val="1F2A44"/>
+            </a:solidFill>
+            <a:prstDash val="solid"/>
+          </a:ln>
+        </p:spPr>
+      </p:sp>
+      <p:sp>
+        <p:nvSpPr>
+          <p:cNvPr id="25" name="Shape 23"/>
+          <p:cNvSpPr/>
+          <p:nvPr/>
+        </p:nvSpPr>
+        <p:spPr>
+          <a:xfrm>
+            <a:off x="411480" y="3657600"/>
+            <a:ext cx="73152" cy="1280160"/>
+          </a:xfrm>
+          <a:prstGeom prst="rect">
+            <a:avLst/>
+          </a:prstGeom>
+          <a:solidFill>
+            <a:srgbClr val="10B981"/>
+          </a:solidFill>
+          <a:ln w="12700">
+            <a:solidFill>
+              <a:srgbClr val="10B981"/>
+            </a:solidFill>
+            <a:prstDash val="solid"/>
+          </a:ln>
+        </p:spPr>
+      </p:sp>
+      <p:sp>
+        <p:nvSpPr>
+          <p:cNvPr id="26" name="Text 24"/>
+          <p:cNvSpPr/>
+          <p:nvPr/>
+        </p:nvSpPr>
+        <p:spPr>
+          <a:xfrm>
+            <a:off x="640080" y="3794760"/>
+            <a:ext cx="3200400" cy="457200"/>
+          </a:xfrm>
+          <a:prstGeom prst="rect">
+            <a:avLst/>
+          </a:prstGeom>
+          <a:noFill/>
+          <a:ln/>
+        </p:spPr>
+        <p:txBody>
+          <a:bodyPr wrap="square" lIns="0" tIns="0" rIns="0" bIns="0" rtlCol="0" anchor="ctr"/>
+          <a:lstStyle/>
+          <a:p>
+            <a:pPr indent="0" marL="0">
+              <a:buNone/>
+            </a:pPr>
+            <a:r>
+              <a:rPr lang="en-US" sz="2600" b="1" dirty="0">
+                <a:solidFill>
+                  <a:srgbClr val="10B981"/>
+                </a:solidFill>
+                <a:latin typeface="Calibri" pitchFamily="34" charset="0"/>
+                <a:ea typeface="Calibri" pitchFamily="34" charset="-122"/>
+                <a:cs typeface="Calibri" pitchFamily="34" charset="-120"/>
+              </a:rPr>
+              <a:t>58 routes</a:t>
+            </a:r>
+            <a:endParaRPr lang="en-US" sz="2600" dirty="0"/>
+          </a:p>
+        </p:txBody>
+      </p:sp>
+      <p:sp>
+        <p:nvSpPr>
+          <p:cNvPr id="27" name="Text 25"/>
+          <p:cNvSpPr/>
+          <p:nvPr/>
+        </p:nvSpPr>
+        <p:spPr>
+          <a:xfrm>
+            <a:off x="640080" y="4251960"/>
+            <a:ext cx="3200400" cy="292608"/>
+          </a:xfrm>
+          <a:prstGeom prst="rect">
+            <a:avLst/>
+          </a:prstGeom>
+          <a:noFill/>
+          <a:ln/>
+        </p:spPr>
+        <p:txBody>
+          <a:bodyPr wrap="square" lIns="0" tIns="0" rIns="0" bIns="0" rtlCol="0" anchor="ctr"/>
+          <a:lstStyle/>
+          <a:p>
+            <a:pPr indent="0" marL="0">
+              <a:buNone/>
+            </a:pPr>
+            <a:r>
+              <a:rPr lang="en-US" sz="1300" b="1" dirty="0">
+                <a:solidFill>
+                  <a:srgbClr val="F1F5F9"/>
+                </a:solidFill>
+                <a:latin typeface="Calibri" pitchFamily="34" charset="0"/>
+                <a:ea typeface="Calibri" pitchFamily="34" charset="-122"/>
+                <a:cs typeface="Calibri" pitchFamily="34" charset="-120"/>
+              </a:rPr>
+              <a:t>Production build OK</a:t>
+            </a:r>
+            <a:endParaRPr lang="en-US" sz="1300" dirty="0"/>
+          </a:p>
+        </p:txBody>
+      </p:sp>
+      <p:sp>
+        <p:nvSpPr>
+          <p:cNvPr id="28" name="Text 26"/>
+          <p:cNvSpPr/>
+          <p:nvPr/>
+        </p:nvSpPr>
+        <p:spPr>
+          <a:xfrm>
+            <a:off x="640080" y="4526280"/>
+            <a:ext cx="3200400" cy="320040"/>
+          </a:xfrm>
+          <a:prstGeom prst="rect">
+            <a:avLst/>
+          </a:prstGeom>
+          <a:noFill/>
+          <a:ln/>
+        </p:spPr>
+        <p:txBody>
+          <a:bodyPr wrap="square" lIns="0" tIns="0" rIns="0" bIns="0" rtlCol="0" anchor="ctr"/>
+          <a:lstStyle/>
+          <a:p>
+            <a:pPr indent="0" marL="0">
+              <a:buNone/>
+            </a:pPr>
+            <a:r>
+              <a:rPr lang="en-US" sz="1100" dirty="0">
+                <a:solidFill>
+                  <a:srgbClr val="8B9BB4"/>
+                </a:solidFill>
+                <a:latin typeface="Consolas" pitchFamily="34" charset="0"/>
+                <a:ea typeface="Consolas" pitchFamily="34" charset="-122"/>
+                <a:cs typeface="Consolas" pitchFamily="34" charset="-120"/>
+              </a:rPr>
+              <a:t>pnpm build</a:t>
+            </a:r>
+            <a:endParaRPr lang="en-US" sz="1100" dirty="0"/>
+          </a:p>
+        </p:txBody>
+      </p:sp>
+      <p:sp>
+        <p:nvSpPr>
+          <p:cNvPr id="29" name="Shape 27"/>
+          <p:cNvSpPr/>
+          <p:nvPr/>
+        </p:nvSpPr>
+        <p:spPr>
+          <a:xfrm>
+            <a:off x="4251960" y="3657600"/>
+            <a:ext cx="3657600" cy="1280160"/>
+          </a:xfrm>
+          <a:prstGeom prst="rect">
+            <a:avLst/>
+          </a:prstGeom>
+          <a:solidFill>
+            <a:srgbClr val="111A30"/>
+          </a:solidFill>
+          <a:ln w="12700">
+            <a:solidFill>
+              <a:srgbClr val="1F2A44"/>
+            </a:solidFill>
+            <a:prstDash val="solid"/>
+          </a:ln>
+        </p:spPr>
+      </p:sp>
+      <p:sp>
+        <p:nvSpPr>
+          <p:cNvPr id="30" name="Shape 28"/>
+          <p:cNvSpPr/>
+          <p:nvPr/>
+        </p:nvSpPr>
+        <p:spPr>
+          <a:xfrm>
+            <a:off x="4251960" y="3657600"/>
+            <a:ext cx="73152" cy="1280160"/>
+          </a:xfrm>
+          <a:prstGeom prst="rect">
+            <a:avLst/>
+          </a:prstGeom>
+          <a:solidFill>
+            <a:srgbClr val="60A5FA"/>
+          </a:solidFill>
+          <a:ln w="12700">
+            <a:solidFill>
+              <a:srgbClr val="60A5FA"/>
+            </a:solidFill>
+            <a:prstDash val="solid"/>
+          </a:ln>
+        </p:spPr>
+      </p:sp>
+      <p:sp>
+        <p:nvSpPr>
+          <p:cNvPr id="31" name="Text 29"/>
+          <p:cNvSpPr/>
+          <p:nvPr/>
+        </p:nvSpPr>
+        <p:spPr>
+          <a:xfrm>
+            <a:off x="4480560" y="3794760"/>
+            <a:ext cx="3200400" cy="457200"/>
+          </a:xfrm>
+          <a:prstGeom prst="rect">
+            <a:avLst/>
+          </a:prstGeom>
+          <a:noFill/>
+          <a:ln/>
+        </p:spPr>
+        <p:txBody>
+          <a:bodyPr wrap="square" lIns="0" tIns="0" rIns="0" bIns="0" rtlCol="0" anchor="ctr"/>
+          <a:lstStyle/>
+          <a:p>
+            <a:pPr indent="0" marL="0">
+              <a:buNone/>
+            </a:pPr>
+            <a:r>
+              <a:rPr lang="en-US" sz="2600" b="1" dirty="0">
+                <a:solidFill>
+                  <a:srgbClr val="60A5FA"/>
+                </a:solidFill>
+                <a:latin typeface="Calibri" pitchFamily="34" charset="0"/>
+                <a:ea typeface="Calibri" pitchFamily="34" charset="-122"/>
+                <a:cs typeface="Calibri" pitchFamily="34" charset="-120"/>
+              </a:rPr>
+              <a:t>35+ models</a:t>
+            </a:r>
+            <a:endParaRPr lang="en-US" sz="2600" dirty="0"/>
+          </a:p>
+        </p:txBody>
+      </p:sp>
+      <p:sp>
+        <p:nvSpPr>
+          <p:cNvPr id="32" name="Text 30"/>
+          <p:cNvSpPr/>
+          <p:nvPr/>
+        </p:nvSpPr>
+        <p:spPr>
+          <a:xfrm>
+            <a:off x="4480560" y="4251960"/>
+            <a:ext cx="3200400" cy="292608"/>
+          </a:xfrm>
+          <a:prstGeom prst="rect">
+            <a:avLst/>
+          </a:prstGeom>
+          <a:noFill/>
+          <a:ln/>
+        </p:spPr>
+        <p:txBody>
+          <a:bodyPr wrap="square" lIns="0" tIns="0" rIns="0" bIns="0" rtlCol="0" anchor="ctr"/>
+          <a:lstStyle/>
+          <a:p>
+            <a:pPr indent="0" marL="0">
+              <a:buNone/>
+            </a:pPr>
+            <a:r>
+              <a:rPr lang="en-US" sz="1300" b="1" dirty="0">
+                <a:solidFill>
+                  <a:srgbClr val="F1F5F9"/>
+                </a:solidFill>
+                <a:latin typeface="Calibri" pitchFamily="34" charset="0"/>
+                <a:ea typeface="Calibri" pitchFamily="34" charset="-122"/>
+                <a:cs typeface="Calibri" pitchFamily="34" charset="-120"/>
+              </a:rPr>
+              <a:t>Prisma schema applied</a:t>
+            </a:r>
+            <a:endParaRPr lang="en-US" sz="1300" dirty="0"/>
+          </a:p>
+        </p:txBody>
+      </p:sp>
+      <p:sp>
+        <p:nvSpPr>
+          <p:cNvPr id="33" name="Text 31"/>
+          <p:cNvSpPr/>
+          <p:nvPr/>
+        </p:nvSpPr>
+        <p:spPr>
+          <a:xfrm>
+            <a:off x="4480560" y="4526280"/>
+            <a:ext cx="3200400" cy="320040"/>
+          </a:xfrm>
+          <a:prstGeom prst="rect">
+            <a:avLst/>
+          </a:prstGeom>
+          <a:noFill/>
+          <a:ln/>
+        </p:spPr>
+        <p:txBody>
+          <a:bodyPr wrap="square" lIns="0" tIns="0" rIns="0" bIns="0" rtlCol="0" anchor="ctr"/>
+          <a:lstStyle/>
+          <a:p>
+            <a:pPr indent="0" marL="0">
+              <a:buNone/>
+            </a:pPr>
+            <a:r>
+              <a:rPr lang="en-US" sz="1100" dirty="0">
+                <a:solidFill>
+                  <a:srgbClr val="8B9BB4"/>
+                </a:solidFill>
+                <a:latin typeface="Consolas" pitchFamily="34" charset="0"/>
+                <a:ea typeface="Consolas" pitchFamily="34" charset="-122"/>
+                <a:cs typeface="Consolas" pitchFamily="34" charset="-120"/>
+              </a:rPr>
+              <a:t>pnpm db:push</a:t>
+            </a:r>
+            <a:endParaRPr lang="en-US" sz="1100" dirty="0"/>
+          </a:p>
+        </p:txBody>
+      </p:sp>
+      <p:sp>
+        <p:nvSpPr>
+          <p:cNvPr id="34" name="Shape 32"/>
+          <p:cNvSpPr/>
+          <p:nvPr/>
+        </p:nvSpPr>
+        <p:spPr>
+          <a:xfrm>
+            <a:off x="8092440" y="3657600"/>
+            <a:ext cx="3657600" cy="1280160"/>
+          </a:xfrm>
+          <a:prstGeom prst="rect">
+            <a:avLst/>
+          </a:prstGeom>
+          <a:solidFill>
+            <a:srgbClr val="111A30"/>
+          </a:solidFill>
+          <a:ln w="12700">
+            <a:solidFill>
+              <a:srgbClr val="1F2A44"/>
+            </a:solidFill>
+            <a:prstDash val="solid"/>
+          </a:ln>
+        </p:spPr>
+      </p:sp>
+      <p:sp>
+        <p:nvSpPr>
+          <p:cNvPr id="35" name="Shape 33"/>
+          <p:cNvSpPr/>
+          <p:nvPr/>
+        </p:nvSpPr>
+        <p:spPr>
+          <a:xfrm>
+            <a:off x="8092440" y="3657600"/>
+            <a:ext cx="73152" cy="1280160"/>
+          </a:xfrm>
+          <a:prstGeom prst="rect">
+            <a:avLst/>
+          </a:prstGeom>
+          <a:solidFill>
+            <a:srgbClr val="60A5FA"/>
+          </a:solidFill>
+          <a:ln w="12700">
+            <a:solidFill>
+              <a:srgbClr val="60A5FA"/>
+            </a:solidFill>
+            <a:prstDash val="solid"/>
+          </a:ln>
+        </p:spPr>
+      </p:sp>
+      <p:sp>
+        <p:nvSpPr>
+          <p:cNvPr id="36" name="Text 34"/>
+          <p:cNvSpPr/>
+          <p:nvPr/>
+        </p:nvSpPr>
+        <p:spPr>
+          <a:xfrm>
+            <a:off x="8321040" y="3794760"/>
+            <a:ext cx="3200400" cy="457200"/>
+          </a:xfrm>
+          <a:prstGeom prst="rect">
+            <a:avLst/>
+          </a:prstGeom>
+          <a:noFill/>
+          <a:ln/>
+        </p:spPr>
+        <p:txBody>
+          <a:bodyPr wrap="square" lIns="0" tIns="0" rIns="0" bIns="0" rtlCol="0" anchor="ctr"/>
+          <a:lstStyle/>
+          <a:p>
+            <a:pPr indent="0" marL="0">
+              <a:buNone/>
+            </a:pPr>
+            <a:r>
+              <a:rPr lang="en-US" sz="2600" b="1" dirty="0">
+                <a:solidFill>
+                  <a:srgbClr val="60A5FA"/>
+                </a:solidFill>
+                <a:latin typeface="Calibri" pitchFamily="34" charset="0"/>
+                <a:ea typeface="Calibri" pitchFamily="34" charset="-122"/>
+                <a:cs typeface="Calibri" pitchFamily="34" charset="-120"/>
+              </a:rPr>
+              <a:t>19 PNGs</a:t>
+            </a:r>
+            <a:endParaRPr lang="en-US" sz="2600" dirty="0"/>
+          </a:p>
+        </p:txBody>
+      </p:sp>
+      <p:sp>
+        <p:nvSpPr>
+          <p:cNvPr id="37" name="Text 35"/>
+          <p:cNvSpPr/>
+          <p:nvPr/>
+        </p:nvSpPr>
+        <p:spPr>
+          <a:xfrm>
+            <a:off x="8321040" y="4251960"/>
+            <a:ext cx="3200400" cy="292608"/>
+          </a:xfrm>
+          <a:prstGeom prst="rect">
+            <a:avLst/>
+          </a:prstGeom>
+          <a:noFill/>
+          <a:ln/>
+        </p:spPr>
+        <p:txBody>
+          <a:bodyPr wrap="square" lIns="0" tIns="0" rIns="0" bIns="0" rtlCol="0" anchor="ctr"/>
+          <a:lstStyle/>
+          <a:p>
+            <a:pPr indent="0" marL="0">
+              <a:buNone/>
+            </a:pPr>
+            <a:r>
+              <a:rPr lang="en-US" sz="1300" b="1" dirty="0">
+                <a:solidFill>
+                  <a:srgbClr val="F1F5F9"/>
+                </a:solidFill>
+                <a:latin typeface="Calibri" pitchFamily="34" charset="0"/>
+                <a:ea typeface="Calibri" pitchFamily="34" charset="-122"/>
+                <a:cs typeface="Calibri" pitchFamily="34" charset="-120"/>
+              </a:rPr>
+              <a:t>Live screenshots regenerated</a:t>
+            </a:r>
+            <a:endParaRPr lang="en-US" sz="1300" dirty="0"/>
+          </a:p>
+        </p:txBody>
+      </p:sp>
+      <p:sp>
+        <p:nvSpPr>
+          <p:cNvPr id="38" name="Text 36"/>
+          <p:cNvSpPr/>
+          <p:nvPr/>
+        </p:nvSpPr>
+        <p:spPr>
+          <a:xfrm>
+            <a:off x="8321040" y="4526280"/>
+            <a:ext cx="3200400" cy="320040"/>
+          </a:xfrm>
+          <a:prstGeom prst="rect">
+            <a:avLst/>
+          </a:prstGeom>
+          <a:noFill/>
+          <a:ln/>
+        </p:spPr>
+        <p:txBody>
+          <a:bodyPr wrap="square" lIns="0" tIns="0" rIns="0" bIns="0" rtlCol="0" anchor="ctr"/>
+          <a:lstStyle/>
+          <a:p>
+            <a:pPr indent="0" marL="0">
+              <a:buNone/>
+            </a:pPr>
+            <a:r>
+              <a:rPr lang="en-US" sz="1100" dirty="0">
+                <a:solidFill>
+                  <a:srgbClr val="8B9BB4"/>
+                </a:solidFill>
+                <a:latin typeface="Consolas" pitchFamily="34" charset="0"/>
+                <a:ea typeface="Consolas" pitchFamily="34" charset="-122"/>
+                <a:cs typeface="Consolas" pitchFamily="34" charset="-120"/>
+              </a:rPr>
+              <a:t>tsx scripts/capture-demo.ts</a:t>
+            </a:r>
+            <a:endParaRPr lang="en-US" sz="1100" dirty="0"/>
+          </a:p>
+        </p:txBody>
+      </p:sp>
+      <p:sp>
+        <p:nvSpPr>
+          <p:cNvPr id="39" name="Shape 37"/>
+          <p:cNvSpPr/>
+          <p:nvPr/>
+        </p:nvSpPr>
+        <p:spPr>
+          <a:xfrm>
+            <a:off x="548640" y="5029200"/>
+            <a:ext cx="11064240" cy="914400"/>
+          </a:xfrm>
+          <a:prstGeom prst="rect">
+            <a:avLst/>
+          </a:prstGeom>
+          <a:solidFill>
+            <a:srgbClr val="111A30"/>
+          </a:solidFill>
+          <a:ln w="25400">
+            <a:solidFill>
+              <a:srgbClr val="3B82F6"/>
+            </a:solidFill>
+            <a:prstDash val="solid"/>
+          </a:ln>
+        </p:spPr>
+      </p:sp>
+      <p:sp>
+        <p:nvSpPr>
+          <p:cNvPr id="40" name="Text 38"/>
+          <p:cNvSpPr/>
+          <p:nvPr/>
+        </p:nvSpPr>
+        <p:spPr>
+          <a:xfrm>
+            <a:off x="777240" y="5074920"/>
+            <a:ext cx="5486400" cy="365760"/>
+          </a:xfrm>
+          <a:prstGeom prst="rect">
+            <a:avLst/>
+          </a:prstGeom>
+          <a:noFill/>
+          <a:ln/>
+        </p:spPr>
+        <p:txBody>
+          <a:bodyPr wrap="square" lIns="0" tIns="0" rIns="0" bIns="0" rtlCol="0" anchor="ctr"/>
+          <a:lstStyle/>
+          <a:p>
+            <a:pPr indent="0" marL="0">
+              <a:buNone/>
+            </a:pPr>
+            <a:r>
+              <a:rPr lang="en-US" sz="1300" b="1" spc="100" kern="0" dirty="0">
+                <a:solidFill>
+                  <a:srgbClr val="8B9BB4"/>
+                </a:solidFill>
+                <a:latin typeface="Calibri" pitchFamily="34" charset="0"/>
+                <a:ea typeface="Calibri" pitchFamily="34" charset="-122"/>
+                <a:cs typeface="Calibri" pitchFamily="34" charset="-120"/>
+              </a:rPr>
+              <a:t>Replay demo bất kỳ lúc nào</a:t>
+            </a:r>
+            <a:endParaRPr lang="en-US" sz="1300" dirty="0"/>
+          </a:p>
+        </p:txBody>
+      </p:sp>
+      <p:sp>
+        <p:nvSpPr>
+          <p:cNvPr id="41" name="Text 39"/>
+          <p:cNvSpPr/>
+          <p:nvPr/>
+        </p:nvSpPr>
+        <p:spPr>
+          <a:xfrm>
+            <a:off x="777240" y="5394960"/>
+            <a:ext cx="10607040" cy="457200"/>
+          </a:xfrm>
+          <a:prstGeom prst="rect">
+            <a:avLst/>
+          </a:prstGeom>
+          <a:noFill/>
+          <a:ln/>
+        </p:spPr>
+        <p:txBody>
+          <a:bodyPr wrap="square" lIns="0" tIns="0" rIns="0" bIns="0" rtlCol="0" anchor="ctr"/>
+          <a:lstStyle/>
+          <a:p>
+            <a:pPr indent="0" marL="0">
+              <a:buNone/>
+            </a:pPr>
+            <a:r>
+              <a:rPr lang="en-US" sz="1800" dirty="0">
+                <a:solidFill>
+                  <a:srgbClr val="60A5FA"/>
+                </a:solidFill>
+                <a:latin typeface="Consolas" pitchFamily="34" charset="0"/>
+                <a:ea typeface="Consolas" pitchFamily="34" charset="-122"/>
+                <a:cs typeface="Consolas" pitchFamily="34" charset="-120"/>
+              </a:rPr>
+              <a:t>http://localhost:3000/demo.html  ·  docs/DEMO.md  ·  docs/Atlas-AEC-Demo.pptx</a:t>
+            </a:r>
+            <a:endParaRPr lang="en-US" sz="1800" dirty="0"/>
+          </a:p>
+        </p:txBody>
+      </p:sp>
+      <p:sp>
+        <p:nvSpPr>
+          <p:cNvPr id="42" name="Text 40"/>
+          <p:cNvSpPr/>
+          <p:nvPr/>
+        </p:nvSpPr>
+        <p:spPr>
+          <a:xfrm>
+            <a:off x="457200" y="6446520"/>
+            <a:ext cx="11247120" cy="274320"/>
+          </a:xfrm>
+          <a:prstGeom prst="rect">
+            <a:avLst/>
+          </a:prstGeom>
+          <a:noFill/>
+          <a:ln/>
+        </p:spPr>
+        <p:txBody>
+          <a:bodyPr wrap="square" lIns="0" tIns="0" rIns="0" bIns="0" rtlCol="0" anchor="ctr"/>
+          <a:lstStyle/>
+          <a:p>
+            <a:pPr indent="0" marL="0">
+              <a:buNone/>
+            </a:pPr>
+            <a:r>
+              <a:rPr lang="en-US" sz="1000" dirty="0">
+                <a:solidFill>
+                  <a:srgbClr val="475569"/>
+                </a:solidFill>
+                <a:latin typeface="Calibri" pitchFamily="34" charset="0"/>
+                <a:ea typeface="Calibri" pitchFamily="34" charset="-122"/>
+                <a:cs typeface="Calibri" pitchFamily="34" charset="-120"/>
+              </a:rPr>
+              <a:t>Demo credentials: anh.nguyen@cofico.vn / demo1234! — đăng nhập, click 6 tabs, mọi thứ là live data từ Postgres.</a:t>
             </a:r>
             <a:endParaRPr lang="en-US" sz="1000" dirty="0"/>
           </a:p>
@@ -9024,7 +12575,7 @@
                 <a:ea typeface="Calibri" pitchFamily="34" charset="-122"/>
                 <a:cs typeface="Calibri" pitchFamily="34" charset="-120"/>
               </a:rPr>
-              <a:t>3 / 16</a:t>
+              <a:t>3 / 21</a:t>
             </a:r>
             <a:endParaRPr lang="en-US" sz="1100" dirty="0"/>
           </a:p>
@@ -11002,7 +14553,7 @@
                 <a:ea typeface="Calibri" pitchFamily="34" charset="-122"/>
                 <a:cs typeface="Calibri" pitchFamily="34" charset="-120"/>
               </a:rPr>
-              <a:t>4 / 16</a:t>
+              <a:t>4 / 21</a:t>
             </a:r>
             <a:endParaRPr lang="en-US" sz="1100" dirty="0"/>
           </a:p>
@@ -11505,7 +15056,7 @@
                 <a:ea typeface="Calibri" pitchFamily="34" charset="-122"/>
                 <a:cs typeface="Calibri" pitchFamily="34" charset="-120"/>
               </a:rPr>
-              <a:t>5 / 16</a:t>
+              <a:t>5 / 21</a:t>
             </a:r>
             <a:endParaRPr lang="en-US" sz="1100" dirty="0"/>
           </a:p>
@@ -12046,7 +15597,7 @@
                 <a:ea typeface="Calibri" pitchFamily="34" charset="-122"/>
                 <a:cs typeface="Calibri" pitchFamily="34" charset="-120"/>
               </a:rPr>
-              <a:t>6 / 16</a:t>
+              <a:t>6 / 21</a:t>
             </a:r>
             <a:endParaRPr lang="en-US" sz="1100" dirty="0"/>
           </a:p>
@@ -12633,7 +16184,7 @@
                 <a:ea typeface="Calibri" pitchFamily="34" charset="-122"/>
                 <a:cs typeface="Calibri" pitchFamily="34" charset="-120"/>
               </a:rPr>
-              <a:t>7 / 16</a:t>
+              <a:t>7 / 21</a:t>
             </a:r>
             <a:endParaRPr lang="en-US" sz="1100" dirty="0"/>
           </a:p>
@@ -13209,7 +16760,7 @@
                 <a:ea typeface="Calibri" pitchFamily="34" charset="-122"/>
                 <a:cs typeface="Calibri" pitchFamily="34" charset="-120"/>
               </a:rPr>
-              <a:t>8 / 16</a:t>
+              <a:t>8 / 21</a:t>
             </a:r>
             <a:endParaRPr lang="en-US" sz="1100" dirty="0"/>
           </a:p>
@@ -13823,7 +17374,7 @@
                 <a:ea typeface="Calibri" pitchFamily="34" charset="-122"/>
                 <a:cs typeface="Calibri" pitchFamily="34" charset="-120"/>
               </a:rPr>
-              <a:t>9 / 16</a:t>
+              <a:t>9 / 21</a:t>
             </a:r>
             <a:endParaRPr lang="en-US" sz="1100" dirty="0"/>
           </a:p>

--- a/docs/Atlas-AEC-Demo.pptx
+++ b/docs/Atlas-AEC-Demo.pptx
@@ -26,9 +26,20 @@
     <p:sldId id="274" r:id="rId20"/>
     <p:sldId id="275" r:id="rId21"/>
     <p:sldId id="276" r:id="rId22"/>
+    <p:sldId id="277" r:id="rId23"/>
+    <p:sldId id="278" r:id="rId24"/>
+    <p:sldId id="279" r:id="rId25"/>
+    <p:sldId id="280" r:id="rId26"/>
+    <p:sldId id="281" r:id="rId27"/>
+    <p:sldId id="282" r:id="rId28"/>
+    <p:sldId id="283" r:id="rId29"/>
+    <p:sldId id="284" r:id="rId30"/>
+    <p:sldId id="285" r:id="rId31"/>
+    <p:sldId id="286" r:id="rId32"/>
+    <p:sldId id="287" r:id="rId33"/>
   </p:sldIdLst>
   <p:notesMasterIdLst>
-    <p:notesMasterId r:id="rId23"/>
+    <p:notesMasterId r:id="rId34"/>
   </p:notesMasterIdLst>
   <p:sldSz cx="12192000" cy="6858000"/>
   <p:notesSz cx="6858000" cy="12192000"/>
@@ -1708,6 +1719,710 @@
 </p:notes>
 </file>
 
+<file path=ppt/notesSlides/notesSlide22.xml><?xml version="1.0" encoding="utf-8"?>
+<p:notes xmlns:a="http://schemas.openxmlformats.org/drawingml/2006/main" xmlns:r="http://schemas.openxmlformats.org/officeDocument/2006/relationships" xmlns:p="http://schemas.openxmlformats.org/presentationml/2006/main">
+  <p:cSld>
+    <p:spTree>
+      <p:nvGrpSpPr>
+        <p:cNvPr id="1" name=""/>
+        <p:cNvGrpSpPr/>
+        <p:nvPr/>
+      </p:nvGrpSpPr>
+      <p:grpSpPr>
+        <a:xfrm>
+          <a:off x="0" y="0"/>
+          <a:ext cx="0" cy="0"/>
+          <a:chOff x="0" y="0"/>
+          <a:chExt cx="0" cy="0"/>
+        </a:xfrm>
+      </p:grpSpPr>
+      <p:sp>
+        <p:nvSpPr>
+          <p:cNvPr id="2" name="Slide Image Placeholder 1"/>
+          <p:cNvSpPr>
+            <a:spLocks noGrp="1" noRot="1" noChangeAspect="1"/>
+          </p:cNvSpPr>
+          <p:nvPr>
+            <p:ph type="sldImg"/>
+          </p:nvPr>
+        </p:nvSpPr>
+        <p:spPr/>
+      </p:sp>
+      <p:sp>
+        <p:nvSpPr>
+          <p:cNvPr id="3" name="Notes Placeholder 2"/>
+          <p:cNvSpPr>
+            <a:spLocks noGrp="1"/>
+          </p:cNvSpPr>
+          <p:nvPr>
+            <p:ph type="body" idx="1"/>
+          </p:nvPr>
+        </p:nvSpPr>
+        <p:spPr/>
+        <p:txBody>
+          <a:bodyPr/>
+          <a:lstStyle/>
+          <a:p>
+            <a:r>
+              <a:rPr lang="en-US" dirty="0"/>
+              <a:t/>
+            </a:r>
+            <a:endParaRPr lang="en-US" dirty="0"/>
+          </a:p>
+        </p:txBody>
+      </p:sp>
+      <p:sp>
+        <p:nvSpPr>
+          <p:cNvPr id="4" name="Slide Number Placeholder 3"/>
+          <p:cNvSpPr>
+            <a:spLocks noGrp="1"/>
+          </p:cNvSpPr>
+          <p:nvPr>
+            <p:ph type="sldNum" sz="quarter" idx="10"/>
+          </p:nvPr>
+        </p:nvSpPr>
+        <p:spPr/>
+        <p:txBody>
+          <a:bodyPr/>
+          <a:lstStyle/>
+          <a:p>
+            <a:fld id="{F7021451-1387-4CA6-816F-3879F97B5CBC}" type="slidenum">
+              <a:rPr lang="en-US"/>
+              <a:t>22</a:t>
+            </a:fld>
+            <a:endParaRPr lang="en-US"/>
+          </a:p>
+        </p:txBody>
+      </p:sp>
+    </p:spTree>
+    <p:extLst>
+      <p:ext uri="{BB962C8B-B14F-4D97-AF65-F5344CB8AC3E}">
+        <p14:creationId xmlns:p14="http://schemas.microsoft.com/office/powerpoint/2010/main" val="1024086991"/>
+      </p:ext>
+    </p:extLst>
+  </p:cSld>
+  <p:clrMapOvr>
+    <a:masterClrMapping/>
+  </p:clrMapOvr>
+</p:notes>
+</file>
+
+<file path=ppt/notesSlides/notesSlide23.xml><?xml version="1.0" encoding="utf-8"?>
+<p:notes xmlns:a="http://schemas.openxmlformats.org/drawingml/2006/main" xmlns:r="http://schemas.openxmlformats.org/officeDocument/2006/relationships" xmlns:p="http://schemas.openxmlformats.org/presentationml/2006/main">
+  <p:cSld>
+    <p:spTree>
+      <p:nvGrpSpPr>
+        <p:cNvPr id="1" name=""/>
+        <p:cNvGrpSpPr/>
+        <p:nvPr/>
+      </p:nvGrpSpPr>
+      <p:grpSpPr>
+        <a:xfrm>
+          <a:off x="0" y="0"/>
+          <a:ext cx="0" cy="0"/>
+          <a:chOff x="0" y="0"/>
+          <a:chExt cx="0" cy="0"/>
+        </a:xfrm>
+      </p:grpSpPr>
+      <p:sp>
+        <p:nvSpPr>
+          <p:cNvPr id="2" name="Slide Image Placeholder 1"/>
+          <p:cNvSpPr>
+            <a:spLocks noGrp="1" noRot="1" noChangeAspect="1"/>
+          </p:cNvSpPr>
+          <p:nvPr>
+            <p:ph type="sldImg"/>
+          </p:nvPr>
+        </p:nvSpPr>
+        <p:spPr/>
+      </p:sp>
+      <p:sp>
+        <p:nvSpPr>
+          <p:cNvPr id="3" name="Notes Placeholder 2"/>
+          <p:cNvSpPr>
+            <a:spLocks noGrp="1"/>
+          </p:cNvSpPr>
+          <p:nvPr>
+            <p:ph type="body" idx="1"/>
+          </p:nvPr>
+        </p:nvSpPr>
+        <p:spPr/>
+        <p:txBody>
+          <a:bodyPr/>
+          <a:lstStyle/>
+          <a:p>
+            <a:r>
+              <a:rPr lang="en-US" dirty="0"/>
+              <a:t/>
+            </a:r>
+            <a:endParaRPr lang="en-US" dirty="0"/>
+          </a:p>
+        </p:txBody>
+      </p:sp>
+      <p:sp>
+        <p:nvSpPr>
+          <p:cNvPr id="4" name="Slide Number Placeholder 3"/>
+          <p:cNvSpPr>
+            <a:spLocks noGrp="1"/>
+          </p:cNvSpPr>
+          <p:nvPr>
+            <p:ph type="sldNum" sz="quarter" idx="10"/>
+          </p:nvPr>
+        </p:nvSpPr>
+        <p:spPr/>
+        <p:txBody>
+          <a:bodyPr/>
+          <a:lstStyle/>
+          <a:p>
+            <a:fld id="{F7021451-1387-4CA6-816F-3879F97B5CBC}" type="slidenum">
+              <a:rPr lang="en-US"/>
+              <a:t>23</a:t>
+            </a:fld>
+            <a:endParaRPr lang="en-US"/>
+          </a:p>
+        </p:txBody>
+      </p:sp>
+    </p:spTree>
+    <p:extLst>
+      <p:ext uri="{BB962C8B-B14F-4D97-AF65-F5344CB8AC3E}">
+        <p14:creationId xmlns:p14="http://schemas.microsoft.com/office/powerpoint/2010/main" val="1024086991"/>
+      </p:ext>
+    </p:extLst>
+  </p:cSld>
+  <p:clrMapOvr>
+    <a:masterClrMapping/>
+  </p:clrMapOvr>
+</p:notes>
+</file>
+
+<file path=ppt/notesSlides/notesSlide24.xml><?xml version="1.0" encoding="utf-8"?>
+<p:notes xmlns:a="http://schemas.openxmlformats.org/drawingml/2006/main" xmlns:r="http://schemas.openxmlformats.org/officeDocument/2006/relationships" xmlns:p="http://schemas.openxmlformats.org/presentationml/2006/main">
+  <p:cSld>
+    <p:spTree>
+      <p:nvGrpSpPr>
+        <p:cNvPr id="1" name=""/>
+        <p:cNvGrpSpPr/>
+        <p:nvPr/>
+      </p:nvGrpSpPr>
+      <p:grpSpPr>
+        <a:xfrm>
+          <a:off x="0" y="0"/>
+          <a:ext cx="0" cy="0"/>
+          <a:chOff x="0" y="0"/>
+          <a:chExt cx="0" cy="0"/>
+        </a:xfrm>
+      </p:grpSpPr>
+      <p:sp>
+        <p:nvSpPr>
+          <p:cNvPr id="2" name="Slide Image Placeholder 1"/>
+          <p:cNvSpPr>
+            <a:spLocks noGrp="1" noRot="1" noChangeAspect="1"/>
+          </p:cNvSpPr>
+          <p:nvPr>
+            <p:ph type="sldImg"/>
+          </p:nvPr>
+        </p:nvSpPr>
+        <p:spPr/>
+      </p:sp>
+      <p:sp>
+        <p:nvSpPr>
+          <p:cNvPr id="3" name="Notes Placeholder 2"/>
+          <p:cNvSpPr>
+            <a:spLocks noGrp="1"/>
+          </p:cNvSpPr>
+          <p:nvPr>
+            <p:ph type="body" idx="1"/>
+          </p:nvPr>
+        </p:nvSpPr>
+        <p:spPr/>
+        <p:txBody>
+          <a:bodyPr/>
+          <a:lstStyle/>
+          <a:p>
+            <a:r>
+              <a:rPr lang="en-US" dirty="0"/>
+              <a:t/>
+            </a:r>
+            <a:endParaRPr lang="en-US" dirty="0"/>
+          </a:p>
+        </p:txBody>
+      </p:sp>
+      <p:sp>
+        <p:nvSpPr>
+          <p:cNvPr id="4" name="Slide Number Placeholder 3"/>
+          <p:cNvSpPr>
+            <a:spLocks noGrp="1"/>
+          </p:cNvSpPr>
+          <p:nvPr>
+            <p:ph type="sldNum" sz="quarter" idx="10"/>
+          </p:nvPr>
+        </p:nvSpPr>
+        <p:spPr/>
+        <p:txBody>
+          <a:bodyPr/>
+          <a:lstStyle/>
+          <a:p>
+            <a:fld id="{F7021451-1387-4CA6-816F-3879F97B5CBC}" type="slidenum">
+              <a:rPr lang="en-US"/>
+              <a:t>24</a:t>
+            </a:fld>
+            <a:endParaRPr lang="en-US"/>
+          </a:p>
+        </p:txBody>
+      </p:sp>
+    </p:spTree>
+    <p:extLst>
+      <p:ext uri="{BB962C8B-B14F-4D97-AF65-F5344CB8AC3E}">
+        <p14:creationId xmlns:p14="http://schemas.microsoft.com/office/powerpoint/2010/main" val="1024086991"/>
+      </p:ext>
+    </p:extLst>
+  </p:cSld>
+  <p:clrMapOvr>
+    <a:masterClrMapping/>
+  </p:clrMapOvr>
+</p:notes>
+</file>
+
+<file path=ppt/notesSlides/notesSlide25.xml><?xml version="1.0" encoding="utf-8"?>
+<p:notes xmlns:a="http://schemas.openxmlformats.org/drawingml/2006/main" xmlns:r="http://schemas.openxmlformats.org/officeDocument/2006/relationships" xmlns:p="http://schemas.openxmlformats.org/presentationml/2006/main">
+  <p:cSld>
+    <p:spTree>
+      <p:nvGrpSpPr>
+        <p:cNvPr id="1" name=""/>
+        <p:cNvGrpSpPr/>
+        <p:nvPr/>
+      </p:nvGrpSpPr>
+      <p:grpSpPr>
+        <a:xfrm>
+          <a:off x="0" y="0"/>
+          <a:ext cx="0" cy="0"/>
+          <a:chOff x="0" y="0"/>
+          <a:chExt cx="0" cy="0"/>
+        </a:xfrm>
+      </p:grpSpPr>
+      <p:sp>
+        <p:nvSpPr>
+          <p:cNvPr id="2" name="Slide Image Placeholder 1"/>
+          <p:cNvSpPr>
+            <a:spLocks noGrp="1" noRot="1" noChangeAspect="1"/>
+          </p:cNvSpPr>
+          <p:nvPr>
+            <p:ph type="sldImg"/>
+          </p:nvPr>
+        </p:nvSpPr>
+        <p:spPr/>
+      </p:sp>
+      <p:sp>
+        <p:nvSpPr>
+          <p:cNvPr id="3" name="Notes Placeholder 2"/>
+          <p:cNvSpPr>
+            <a:spLocks noGrp="1"/>
+          </p:cNvSpPr>
+          <p:nvPr>
+            <p:ph type="body" idx="1"/>
+          </p:nvPr>
+        </p:nvSpPr>
+        <p:spPr/>
+        <p:txBody>
+          <a:bodyPr/>
+          <a:lstStyle/>
+          <a:p>
+            <a:r>
+              <a:rPr lang="en-US" dirty="0"/>
+              <a:t/>
+            </a:r>
+            <a:endParaRPr lang="en-US" dirty="0"/>
+          </a:p>
+        </p:txBody>
+      </p:sp>
+      <p:sp>
+        <p:nvSpPr>
+          <p:cNvPr id="4" name="Slide Number Placeholder 3"/>
+          <p:cNvSpPr>
+            <a:spLocks noGrp="1"/>
+          </p:cNvSpPr>
+          <p:nvPr>
+            <p:ph type="sldNum" sz="quarter" idx="10"/>
+          </p:nvPr>
+        </p:nvSpPr>
+        <p:spPr/>
+        <p:txBody>
+          <a:bodyPr/>
+          <a:lstStyle/>
+          <a:p>
+            <a:fld id="{F7021451-1387-4CA6-816F-3879F97B5CBC}" type="slidenum">
+              <a:rPr lang="en-US"/>
+              <a:t>25</a:t>
+            </a:fld>
+            <a:endParaRPr lang="en-US"/>
+          </a:p>
+        </p:txBody>
+      </p:sp>
+    </p:spTree>
+    <p:extLst>
+      <p:ext uri="{BB962C8B-B14F-4D97-AF65-F5344CB8AC3E}">
+        <p14:creationId xmlns:p14="http://schemas.microsoft.com/office/powerpoint/2010/main" val="1024086991"/>
+      </p:ext>
+    </p:extLst>
+  </p:cSld>
+  <p:clrMapOvr>
+    <a:masterClrMapping/>
+  </p:clrMapOvr>
+</p:notes>
+</file>
+
+<file path=ppt/notesSlides/notesSlide26.xml><?xml version="1.0" encoding="utf-8"?>
+<p:notes xmlns:a="http://schemas.openxmlformats.org/drawingml/2006/main" xmlns:r="http://schemas.openxmlformats.org/officeDocument/2006/relationships" xmlns:p="http://schemas.openxmlformats.org/presentationml/2006/main">
+  <p:cSld>
+    <p:spTree>
+      <p:nvGrpSpPr>
+        <p:cNvPr id="1" name=""/>
+        <p:cNvGrpSpPr/>
+        <p:nvPr/>
+      </p:nvGrpSpPr>
+      <p:grpSpPr>
+        <a:xfrm>
+          <a:off x="0" y="0"/>
+          <a:ext cx="0" cy="0"/>
+          <a:chOff x="0" y="0"/>
+          <a:chExt cx="0" cy="0"/>
+        </a:xfrm>
+      </p:grpSpPr>
+      <p:sp>
+        <p:nvSpPr>
+          <p:cNvPr id="2" name="Slide Image Placeholder 1"/>
+          <p:cNvSpPr>
+            <a:spLocks noGrp="1" noRot="1" noChangeAspect="1"/>
+          </p:cNvSpPr>
+          <p:nvPr>
+            <p:ph type="sldImg"/>
+          </p:nvPr>
+        </p:nvSpPr>
+        <p:spPr/>
+      </p:sp>
+      <p:sp>
+        <p:nvSpPr>
+          <p:cNvPr id="3" name="Notes Placeholder 2"/>
+          <p:cNvSpPr>
+            <a:spLocks noGrp="1"/>
+          </p:cNvSpPr>
+          <p:nvPr>
+            <p:ph type="body" idx="1"/>
+          </p:nvPr>
+        </p:nvSpPr>
+        <p:spPr/>
+        <p:txBody>
+          <a:bodyPr/>
+          <a:lstStyle/>
+          <a:p>
+            <a:r>
+              <a:rPr lang="en-US" dirty="0"/>
+              <a:t/>
+            </a:r>
+            <a:endParaRPr lang="en-US" dirty="0"/>
+          </a:p>
+        </p:txBody>
+      </p:sp>
+      <p:sp>
+        <p:nvSpPr>
+          <p:cNvPr id="4" name="Slide Number Placeholder 3"/>
+          <p:cNvSpPr>
+            <a:spLocks noGrp="1"/>
+          </p:cNvSpPr>
+          <p:nvPr>
+            <p:ph type="sldNum" sz="quarter" idx="10"/>
+          </p:nvPr>
+        </p:nvSpPr>
+        <p:spPr/>
+        <p:txBody>
+          <a:bodyPr/>
+          <a:lstStyle/>
+          <a:p>
+            <a:fld id="{F7021451-1387-4CA6-816F-3879F97B5CBC}" type="slidenum">
+              <a:rPr lang="en-US"/>
+              <a:t>26</a:t>
+            </a:fld>
+            <a:endParaRPr lang="en-US"/>
+          </a:p>
+        </p:txBody>
+      </p:sp>
+    </p:spTree>
+    <p:extLst>
+      <p:ext uri="{BB962C8B-B14F-4D97-AF65-F5344CB8AC3E}">
+        <p14:creationId xmlns:p14="http://schemas.microsoft.com/office/powerpoint/2010/main" val="1024086991"/>
+      </p:ext>
+    </p:extLst>
+  </p:cSld>
+  <p:clrMapOvr>
+    <a:masterClrMapping/>
+  </p:clrMapOvr>
+</p:notes>
+</file>
+
+<file path=ppt/notesSlides/notesSlide27.xml><?xml version="1.0" encoding="utf-8"?>
+<p:notes xmlns:a="http://schemas.openxmlformats.org/drawingml/2006/main" xmlns:r="http://schemas.openxmlformats.org/officeDocument/2006/relationships" xmlns:p="http://schemas.openxmlformats.org/presentationml/2006/main">
+  <p:cSld>
+    <p:spTree>
+      <p:nvGrpSpPr>
+        <p:cNvPr id="1" name=""/>
+        <p:cNvGrpSpPr/>
+        <p:nvPr/>
+      </p:nvGrpSpPr>
+      <p:grpSpPr>
+        <a:xfrm>
+          <a:off x="0" y="0"/>
+          <a:ext cx="0" cy="0"/>
+          <a:chOff x="0" y="0"/>
+          <a:chExt cx="0" cy="0"/>
+        </a:xfrm>
+      </p:grpSpPr>
+      <p:sp>
+        <p:nvSpPr>
+          <p:cNvPr id="2" name="Slide Image Placeholder 1"/>
+          <p:cNvSpPr>
+            <a:spLocks noGrp="1" noRot="1" noChangeAspect="1"/>
+          </p:cNvSpPr>
+          <p:nvPr>
+            <p:ph type="sldImg"/>
+          </p:nvPr>
+        </p:nvSpPr>
+        <p:spPr/>
+      </p:sp>
+      <p:sp>
+        <p:nvSpPr>
+          <p:cNvPr id="3" name="Notes Placeholder 2"/>
+          <p:cNvSpPr>
+            <a:spLocks noGrp="1"/>
+          </p:cNvSpPr>
+          <p:nvPr>
+            <p:ph type="body" idx="1"/>
+          </p:nvPr>
+        </p:nvSpPr>
+        <p:spPr/>
+        <p:txBody>
+          <a:bodyPr/>
+          <a:lstStyle/>
+          <a:p>
+            <a:r>
+              <a:rPr lang="en-US" dirty="0"/>
+              <a:t/>
+            </a:r>
+            <a:endParaRPr lang="en-US" dirty="0"/>
+          </a:p>
+        </p:txBody>
+      </p:sp>
+      <p:sp>
+        <p:nvSpPr>
+          <p:cNvPr id="4" name="Slide Number Placeholder 3"/>
+          <p:cNvSpPr>
+            <a:spLocks noGrp="1"/>
+          </p:cNvSpPr>
+          <p:nvPr>
+            <p:ph type="sldNum" sz="quarter" idx="10"/>
+          </p:nvPr>
+        </p:nvSpPr>
+        <p:spPr/>
+        <p:txBody>
+          <a:bodyPr/>
+          <a:lstStyle/>
+          <a:p>
+            <a:fld id="{F7021451-1387-4CA6-816F-3879F97B5CBC}" type="slidenum">
+              <a:rPr lang="en-US"/>
+              <a:t>27</a:t>
+            </a:fld>
+            <a:endParaRPr lang="en-US"/>
+          </a:p>
+        </p:txBody>
+      </p:sp>
+    </p:spTree>
+    <p:extLst>
+      <p:ext uri="{BB962C8B-B14F-4D97-AF65-F5344CB8AC3E}">
+        <p14:creationId xmlns:p14="http://schemas.microsoft.com/office/powerpoint/2010/main" val="1024086991"/>
+      </p:ext>
+    </p:extLst>
+  </p:cSld>
+  <p:clrMapOvr>
+    <a:masterClrMapping/>
+  </p:clrMapOvr>
+</p:notes>
+</file>
+
+<file path=ppt/notesSlides/notesSlide28.xml><?xml version="1.0" encoding="utf-8"?>
+<p:notes xmlns:a="http://schemas.openxmlformats.org/drawingml/2006/main" xmlns:r="http://schemas.openxmlformats.org/officeDocument/2006/relationships" xmlns:p="http://schemas.openxmlformats.org/presentationml/2006/main">
+  <p:cSld>
+    <p:spTree>
+      <p:nvGrpSpPr>
+        <p:cNvPr id="1" name=""/>
+        <p:cNvGrpSpPr/>
+        <p:nvPr/>
+      </p:nvGrpSpPr>
+      <p:grpSpPr>
+        <a:xfrm>
+          <a:off x="0" y="0"/>
+          <a:ext cx="0" cy="0"/>
+          <a:chOff x="0" y="0"/>
+          <a:chExt cx="0" cy="0"/>
+        </a:xfrm>
+      </p:grpSpPr>
+      <p:sp>
+        <p:nvSpPr>
+          <p:cNvPr id="2" name="Slide Image Placeholder 1"/>
+          <p:cNvSpPr>
+            <a:spLocks noGrp="1" noRot="1" noChangeAspect="1"/>
+          </p:cNvSpPr>
+          <p:nvPr>
+            <p:ph type="sldImg"/>
+          </p:nvPr>
+        </p:nvSpPr>
+        <p:spPr/>
+      </p:sp>
+      <p:sp>
+        <p:nvSpPr>
+          <p:cNvPr id="3" name="Notes Placeholder 2"/>
+          <p:cNvSpPr>
+            <a:spLocks noGrp="1"/>
+          </p:cNvSpPr>
+          <p:nvPr>
+            <p:ph type="body" idx="1"/>
+          </p:nvPr>
+        </p:nvSpPr>
+        <p:spPr/>
+        <p:txBody>
+          <a:bodyPr/>
+          <a:lstStyle/>
+          <a:p>
+            <a:r>
+              <a:rPr lang="en-US" dirty="0"/>
+              <a:t/>
+            </a:r>
+            <a:endParaRPr lang="en-US" dirty="0"/>
+          </a:p>
+        </p:txBody>
+      </p:sp>
+      <p:sp>
+        <p:nvSpPr>
+          <p:cNvPr id="4" name="Slide Number Placeholder 3"/>
+          <p:cNvSpPr>
+            <a:spLocks noGrp="1"/>
+          </p:cNvSpPr>
+          <p:nvPr>
+            <p:ph type="sldNum" sz="quarter" idx="10"/>
+          </p:nvPr>
+        </p:nvSpPr>
+        <p:spPr/>
+        <p:txBody>
+          <a:bodyPr/>
+          <a:lstStyle/>
+          <a:p>
+            <a:fld id="{F7021451-1387-4CA6-816F-3879F97B5CBC}" type="slidenum">
+              <a:rPr lang="en-US"/>
+              <a:t>28</a:t>
+            </a:fld>
+            <a:endParaRPr lang="en-US"/>
+          </a:p>
+        </p:txBody>
+      </p:sp>
+    </p:spTree>
+    <p:extLst>
+      <p:ext uri="{BB962C8B-B14F-4D97-AF65-F5344CB8AC3E}">
+        <p14:creationId xmlns:p14="http://schemas.microsoft.com/office/powerpoint/2010/main" val="1024086991"/>
+      </p:ext>
+    </p:extLst>
+  </p:cSld>
+  <p:clrMapOvr>
+    <a:masterClrMapping/>
+  </p:clrMapOvr>
+</p:notes>
+</file>
+
+<file path=ppt/notesSlides/notesSlide29.xml><?xml version="1.0" encoding="utf-8"?>
+<p:notes xmlns:a="http://schemas.openxmlformats.org/drawingml/2006/main" xmlns:r="http://schemas.openxmlformats.org/officeDocument/2006/relationships" xmlns:p="http://schemas.openxmlformats.org/presentationml/2006/main">
+  <p:cSld>
+    <p:spTree>
+      <p:nvGrpSpPr>
+        <p:cNvPr id="1" name=""/>
+        <p:cNvGrpSpPr/>
+        <p:nvPr/>
+      </p:nvGrpSpPr>
+      <p:grpSpPr>
+        <a:xfrm>
+          <a:off x="0" y="0"/>
+          <a:ext cx="0" cy="0"/>
+          <a:chOff x="0" y="0"/>
+          <a:chExt cx="0" cy="0"/>
+        </a:xfrm>
+      </p:grpSpPr>
+      <p:sp>
+        <p:nvSpPr>
+          <p:cNvPr id="2" name="Slide Image Placeholder 1"/>
+          <p:cNvSpPr>
+            <a:spLocks noGrp="1" noRot="1" noChangeAspect="1"/>
+          </p:cNvSpPr>
+          <p:nvPr>
+            <p:ph type="sldImg"/>
+          </p:nvPr>
+        </p:nvSpPr>
+        <p:spPr/>
+      </p:sp>
+      <p:sp>
+        <p:nvSpPr>
+          <p:cNvPr id="3" name="Notes Placeholder 2"/>
+          <p:cNvSpPr>
+            <a:spLocks noGrp="1"/>
+          </p:cNvSpPr>
+          <p:nvPr>
+            <p:ph type="body" idx="1"/>
+          </p:nvPr>
+        </p:nvSpPr>
+        <p:spPr/>
+        <p:txBody>
+          <a:bodyPr/>
+          <a:lstStyle/>
+          <a:p>
+            <a:r>
+              <a:rPr lang="en-US" dirty="0"/>
+              <a:t/>
+            </a:r>
+            <a:endParaRPr lang="en-US" dirty="0"/>
+          </a:p>
+        </p:txBody>
+      </p:sp>
+      <p:sp>
+        <p:nvSpPr>
+          <p:cNvPr id="4" name="Slide Number Placeholder 3"/>
+          <p:cNvSpPr>
+            <a:spLocks noGrp="1"/>
+          </p:cNvSpPr>
+          <p:nvPr>
+            <p:ph type="sldNum" sz="quarter" idx="10"/>
+          </p:nvPr>
+        </p:nvSpPr>
+        <p:spPr/>
+        <p:txBody>
+          <a:bodyPr/>
+          <a:lstStyle/>
+          <a:p>
+            <a:fld id="{F7021451-1387-4CA6-816F-3879F97B5CBC}" type="slidenum">
+              <a:rPr lang="en-US"/>
+              <a:t>29</a:t>
+            </a:fld>
+            <a:endParaRPr lang="en-US"/>
+          </a:p>
+        </p:txBody>
+      </p:sp>
+    </p:spTree>
+    <p:extLst>
+      <p:ext uri="{BB962C8B-B14F-4D97-AF65-F5344CB8AC3E}">
+        <p14:creationId xmlns:p14="http://schemas.microsoft.com/office/powerpoint/2010/main" val="1024086991"/>
+      </p:ext>
+    </p:extLst>
+  </p:cSld>
+  <p:clrMapOvr>
+    <a:masterClrMapping/>
+  </p:clrMapOvr>
+</p:notes>
+</file>
+
 <file path=ppt/notesSlides/notesSlide3.xml><?xml version="1.0" encoding="utf-8"?>
 <p:notes xmlns:a="http://schemas.openxmlformats.org/drawingml/2006/main" xmlns:r="http://schemas.openxmlformats.org/officeDocument/2006/relationships" xmlns:p="http://schemas.openxmlformats.org/presentationml/2006/main">
   <p:cSld>
@@ -1778,6 +2493,270 @@
             <a:fld id="{F7021451-1387-4CA6-816F-3879F97B5CBC}" type="slidenum">
               <a:rPr lang="en-US"/>
               <a:t>3</a:t>
+            </a:fld>
+            <a:endParaRPr lang="en-US"/>
+          </a:p>
+        </p:txBody>
+      </p:sp>
+    </p:spTree>
+    <p:extLst>
+      <p:ext uri="{BB962C8B-B14F-4D97-AF65-F5344CB8AC3E}">
+        <p14:creationId xmlns:p14="http://schemas.microsoft.com/office/powerpoint/2010/main" val="1024086991"/>
+      </p:ext>
+    </p:extLst>
+  </p:cSld>
+  <p:clrMapOvr>
+    <a:masterClrMapping/>
+  </p:clrMapOvr>
+</p:notes>
+</file>
+
+<file path=ppt/notesSlides/notesSlide30.xml><?xml version="1.0" encoding="utf-8"?>
+<p:notes xmlns:a="http://schemas.openxmlformats.org/drawingml/2006/main" xmlns:r="http://schemas.openxmlformats.org/officeDocument/2006/relationships" xmlns:p="http://schemas.openxmlformats.org/presentationml/2006/main">
+  <p:cSld>
+    <p:spTree>
+      <p:nvGrpSpPr>
+        <p:cNvPr id="1" name=""/>
+        <p:cNvGrpSpPr/>
+        <p:nvPr/>
+      </p:nvGrpSpPr>
+      <p:grpSpPr>
+        <a:xfrm>
+          <a:off x="0" y="0"/>
+          <a:ext cx="0" cy="0"/>
+          <a:chOff x="0" y="0"/>
+          <a:chExt cx="0" cy="0"/>
+        </a:xfrm>
+      </p:grpSpPr>
+      <p:sp>
+        <p:nvSpPr>
+          <p:cNvPr id="2" name="Slide Image Placeholder 1"/>
+          <p:cNvSpPr>
+            <a:spLocks noGrp="1" noRot="1" noChangeAspect="1"/>
+          </p:cNvSpPr>
+          <p:nvPr>
+            <p:ph type="sldImg"/>
+          </p:nvPr>
+        </p:nvSpPr>
+        <p:spPr/>
+      </p:sp>
+      <p:sp>
+        <p:nvSpPr>
+          <p:cNvPr id="3" name="Notes Placeholder 2"/>
+          <p:cNvSpPr>
+            <a:spLocks noGrp="1"/>
+          </p:cNvSpPr>
+          <p:nvPr>
+            <p:ph type="body" idx="1"/>
+          </p:nvPr>
+        </p:nvSpPr>
+        <p:spPr/>
+        <p:txBody>
+          <a:bodyPr/>
+          <a:lstStyle/>
+          <a:p>
+            <a:r>
+              <a:rPr lang="en-US" dirty="0"/>
+              <a:t/>
+            </a:r>
+            <a:endParaRPr lang="en-US" dirty="0"/>
+          </a:p>
+        </p:txBody>
+      </p:sp>
+      <p:sp>
+        <p:nvSpPr>
+          <p:cNvPr id="4" name="Slide Number Placeholder 3"/>
+          <p:cNvSpPr>
+            <a:spLocks noGrp="1"/>
+          </p:cNvSpPr>
+          <p:nvPr>
+            <p:ph type="sldNum" sz="quarter" idx="10"/>
+          </p:nvPr>
+        </p:nvSpPr>
+        <p:spPr/>
+        <p:txBody>
+          <a:bodyPr/>
+          <a:lstStyle/>
+          <a:p>
+            <a:fld id="{F7021451-1387-4CA6-816F-3879F97B5CBC}" type="slidenum">
+              <a:rPr lang="en-US"/>
+              <a:t>30</a:t>
+            </a:fld>
+            <a:endParaRPr lang="en-US"/>
+          </a:p>
+        </p:txBody>
+      </p:sp>
+    </p:spTree>
+    <p:extLst>
+      <p:ext uri="{BB962C8B-B14F-4D97-AF65-F5344CB8AC3E}">
+        <p14:creationId xmlns:p14="http://schemas.microsoft.com/office/powerpoint/2010/main" val="1024086991"/>
+      </p:ext>
+    </p:extLst>
+  </p:cSld>
+  <p:clrMapOvr>
+    <a:masterClrMapping/>
+  </p:clrMapOvr>
+</p:notes>
+</file>
+
+<file path=ppt/notesSlides/notesSlide31.xml><?xml version="1.0" encoding="utf-8"?>
+<p:notes xmlns:a="http://schemas.openxmlformats.org/drawingml/2006/main" xmlns:r="http://schemas.openxmlformats.org/officeDocument/2006/relationships" xmlns:p="http://schemas.openxmlformats.org/presentationml/2006/main">
+  <p:cSld>
+    <p:spTree>
+      <p:nvGrpSpPr>
+        <p:cNvPr id="1" name=""/>
+        <p:cNvGrpSpPr/>
+        <p:nvPr/>
+      </p:nvGrpSpPr>
+      <p:grpSpPr>
+        <a:xfrm>
+          <a:off x="0" y="0"/>
+          <a:ext cx="0" cy="0"/>
+          <a:chOff x="0" y="0"/>
+          <a:chExt cx="0" cy="0"/>
+        </a:xfrm>
+      </p:grpSpPr>
+      <p:sp>
+        <p:nvSpPr>
+          <p:cNvPr id="2" name="Slide Image Placeholder 1"/>
+          <p:cNvSpPr>
+            <a:spLocks noGrp="1" noRot="1" noChangeAspect="1"/>
+          </p:cNvSpPr>
+          <p:nvPr>
+            <p:ph type="sldImg"/>
+          </p:nvPr>
+        </p:nvSpPr>
+        <p:spPr/>
+      </p:sp>
+      <p:sp>
+        <p:nvSpPr>
+          <p:cNvPr id="3" name="Notes Placeholder 2"/>
+          <p:cNvSpPr>
+            <a:spLocks noGrp="1"/>
+          </p:cNvSpPr>
+          <p:nvPr>
+            <p:ph type="body" idx="1"/>
+          </p:nvPr>
+        </p:nvSpPr>
+        <p:spPr/>
+        <p:txBody>
+          <a:bodyPr/>
+          <a:lstStyle/>
+          <a:p>
+            <a:r>
+              <a:rPr lang="en-US" dirty="0"/>
+              <a:t/>
+            </a:r>
+            <a:endParaRPr lang="en-US" dirty="0"/>
+          </a:p>
+        </p:txBody>
+      </p:sp>
+      <p:sp>
+        <p:nvSpPr>
+          <p:cNvPr id="4" name="Slide Number Placeholder 3"/>
+          <p:cNvSpPr>
+            <a:spLocks noGrp="1"/>
+          </p:cNvSpPr>
+          <p:nvPr>
+            <p:ph type="sldNum" sz="quarter" idx="10"/>
+          </p:nvPr>
+        </p:nvSpPr>
+        <p:spPr/>
+        <p:txBody>
+          <a:bodyPr/>
+          <a:lstStyle/>
+          <a:p>
+            <a:fld id="{F7021451-1387-4CA6-816F-3879F97B5CBC}" type="slidenum">
+              <a:rPr lang="en-US"/>
+              <a:t>31</a:t>
+            </a:fld>
+            <a:endParaRPr lang="en-US"/>
+          </a:p>
+        </p:txBody>
+      </p:sp>
+    </p:spTree>
+    <p:extLst>
+      <p:ext uri="{BB962C8B-B14F-4D97-AF65-F5344CB8AC3E}">
+        <p14:creationId xmlns:p14="http://schemas.microsoft.com/office/powerpoint/2010/main" val="1024086991"/>
+      </p:ext>
+    </p:extLst>
+  </p:cSld>
+  <p:clrMapOvr>
+    <a:masterClrMapping/>
+  </p:clrMapOvr>
+</p:notes>
+</file>
+
+<file path=ppt/notesSlides/notesSlide32.xml><?xml version="1.0" encoding="utf-8"?>
+<p:notes xmlns:a="http://schemas.openxmlformats.org/drawingml/2006/main" xmlns:r="http://schemas.openxmlformats.org/officeDocument/2006/relationships" xmlns:p="http://schemas.openxmlformats.org/presentationml/2006/main">
+  <p:cSld>
+    <p:spTree>
+      <p:nvGrpSpPr>
+        <p:cNvPr id="1" name=""/>
+        <p:cNvGrpSpPr/>
+        <p:nvPr/>
+      </p:nvGrpSpPr>
+      <p:grpSpPr>
+        <a:xfrm>
+          <a:off x="0" y="0"/>
+          <a:ext cx="0" cy="0"/>
+          <a:chOff x="0" y="0"/>
+          <a:chExt cx="0" cy="0"/>
+        </a:xfrm>
+      </p:grpSpPr>
+      <p:sp>
+        <p:nvSpPr>
+          <p:cNvPr id="2" name="Slide Image Placeholder 1"/>
+          <p:cNvSpPr>
+            <a:spLocks noGrp="1" noRot="1" noChangeAspect="1"/>
+          </p:cNvSpPr>
+          <p:nvPr>
+            <p:ph type="sldImg"/>
+          </p:nvPr>
+        </p:nvSpPr>
+        <p:spPr/>
+      </p:sp>
+      <p:sp>
+        <p:nvSpPr>
+          <p:cNvPr id="3" name="Notes Placeholder 2"/>
+          <p:cNvSpPr>
+            <a:spLocks noGrp="1"/>
+          </p:cNvSpPr>
+          <p:nvPr>
+            <p:ph type="body" idx="1"/>
+          </p:nvPr>
+        </p:nvSpPr>
+        <p:spPr/>
+        <p:txBody>
+          <a:bodyPr/>
+          <a:lstStyle/>
+          <a:p>
+            <a:r>
+              <a:rPr lang="en-US" dirty="0"/>
+              <a:t/>
+            </a:r>
+            <a:endParaRPr lang="en-US" dirty="0"/>
+          </a:p>
+        </p:txBody>
+      </p:sp>
+      <p:sp>
+        <p:nvSpPr>
+          <p:cNvPr id="4" name="Slide Number Placeholder 3"/>
+          <p:cNvSpPr>
+            <a:spLocks noGrp="1"/>
+          </p:cNvSpPr>
+          <p:nvPr>
+            <p:ph type="sldNum" sz="quarter" idx="10"/>
+          </p:nvPr>
+        </p:nvSpPr>
+        <p:spPr/>
+        <p:txBody>
+          <a:bodyPr/>
+          <a:lstStyle/>
+          <a:p>
+            <a:fld id="{F7021451-1387-4CA6-816F-3879F97B5CBC}" type="slidenum">
+              <a:rPr lang="en-US"/>
+              <a:t>32</a:t>
             </a:fld>
             <a:endParaRPr lang="en-US"/>
           </a:p>
@@ -3146,7 +4125,7 @@
                 <a:ea typeface="Calibri" pitchFamily="34" charset="-122"/>
                 <a:cs typeface="Calibri" pitchFamily="34" charset="-120"/>
               </a:rPr>
-              <a:t>10 / 21</a:t>
+              <a:t>10 / 32</a:t>
             </a:r>
             <a:endParaRPr lang="en-US" sz="1100" dirty="0"/>
           </a:p>
@@ -3760,7 +4739,7 @@
                 <a:ea typeface="Calibri" pitchFamily="34" charset="-122"/>
                 <a:cs typeface="Calibri" pitchFamily="34" charset="-120"/>
               </a:rPr>
-              <a:t>11 / 21</a:t>
+              <a:t>11 / 32</a:t>
             </a:r>
             <a:endParaRPr lang="en-US" sz="1100" dirty="0"/>
           </a:p>
@@ -4393,7 +5372,7 @@
                 <a:ea typeface="Calibri" pitchFamily="34" charset="-122"/>
                 <a:cs typeface="Calibri" pitchFamily="34" charset="-120"/>
               </a:rPr>
-              <a:t>12 / 21</a:t>
+              <a:t>12 / 32</a:t>
             </a:r>
             <a:endParaRPr lang="en-US" sz="1100" dirty="0"/>
           </a:p>
@@ -5026,7 +6005,7 @@
                 <a:ea typeface="Calibri" pitchFamily="34" charset="-122"/>
                 <a:cs typeface="Calibri" pitchFamily="34" charset="-120"/>
               </a:rPr>
-              <a:t>13 / 21</a:t>
+              <a:t>13 / 32</a:t>
             </a:r>
             <a:endParaRPr lang="en-US" sz="1100" dirty="0"/>
           </a:p>
@@ -5659,7 +6638,7 @@
                 <a:ea typeface="Calibri" pitchFamily="34" charset="-122"/>
                 <a:cs typeface="Calibri" pitchFamily="34" charset="-120"/>
               </a:rPr>
-              <a:t>14 / 21</a:t>
+              <a:t>14 / 32</a:t>
             </a:r>
             <a:endParaRPr lang="en-US" sz="1100" dirty="0"/>
           </a:p>
@@ -6333,7 +7312,7 @@
                 <a:ea typeface="Calibri" pitchFamily="34" charset="-122"/>
                 <a:cs typeface="Calibri" pitchFamily="34" charset="-120"/>
               </a:rPr>
-              <a:t>15 / 21</a:t>
+              <a:t>15 / 32</a:t>
             </a:r>
             <a:endParaRPr lang="en-US" sz="1100" dirty="0"/>
           </a:p>
@@ -6985,7 +7964,7 @@
                 <a:ea typeface="Calibri" pitchFamily="34" charset="-122"/>
                 <a:cs typeface="Calibri" pitchFamily="34" charset="-120"/>
               </a:rPr>
-              <a:t>16 / 21</a:t>
+              <a:t>16 / 32</a:t>
             </a:r>
             <a:endParaRPr lang="en-US" sz="1100" dirty="0"/>
           </a:p>
@@ -7610,7 +8589,7 @@
                 <a:ea typeface="Calibri" pitchFamily="34" charset="-122"/>
                 <a:cs typeface="Calibri" pitchFamily="34" charset="-120"/>
               </a:rPr>
-              <a:t>17 / 21</a:t>
+              <a:t>17 / 32</a:t>
             </a:r>
             <a:endParaRPr lang="en-US" sz="1100" dirty="0"/>
           </a:p>
@@ -8216,7 +9195,7 @@
                 <a:ea typeface="Calibri" pitchFamily="34" charset="-122"/>
                 <a:cs typeface="Calibri" pitchFamily="34" charset="-120"/>
               </a:rPr>
-              <a:t>18 / 21</a:t>
+              <a:t>18 / 32</a:t>
             </a:r>
             <a:endParaRPr lang="en-US" sz="1100" dirty="0"/>
           </a:p>
@@ -8841,7 +9820,7 @@
                 <a:ea typeface="Calibri" pitchFamily="34" charset="-122"/>
                 <a:cs typeface="Calibri" pitchFamily="34" charset="-120"/>
               </a:rPr>
-              <a:t>19 / 21</a:t>
+              <a:t>19 / 32</a:t>
             </a:r>
             <a:endParaRPr lang="en-US" sz="1100" dirty="0"/>
           </a:p>
@@ -9466,7 +10445,7 @@
                 <a:ea typeface="Calibri" pitchFamily="34" charset="-122"/>
                 <a:cs typeface="Calibri" pitchFamily="34" charset="-120"/>
               </a:rPr>
-              <a:t>2 / 21</a:t>
+              <a:t>2 / 32</a:t>
             </a:r>
             <a:endParaRPr lang="en-US" sz="1100" dirty="0"/>
           </a:p>
@@ -10515,7 +11494,7 @@
                 <a:ea typeface="Calibri" pitchFamily="34" charset="-122"/>
                 <a:cs typeface="Calibri" pitchFamily="34" charset="-120"/>
               </a:rPr>
-              <a:t>20 / 21</a:t>
+              <a:t>20 / 32</a:t>
             </a:r>
             <a:endParaRPr lang="en-US" sz="1100" dirty="0"/>
           </a:p>
@@ -11101,7 +12080,7 @@
                 <a:ea typeface="Calibri" pitchFamily="34" charset="-122"/>
                 <a:cs typeface="Calibri" pitchFamily="34" charset="-120"/>
               </a:rPr>
-              <a:t>Shipping evidence</a:t>
+              <a:t>Viwase — Tab Hành chính</a:t>
             </a:r>
             <a:endParaRPr lang="en-US" sz="1100" dirty="0"/>
           </a:p>
@@ -11140,7 +12119,7 @@
                 <a:ea typeface="Calibri" pitchFamily="34" charset="-122"/>
                 <a:cs typeface="Calibri" pitchFamily="34" charset="-120"/>
               </a:rPr>
-              <a:t>21 / 21</a:t>
+              <a:t>21 / 32</a:t>
             </a:r>
             <a:endParaRPr lang="en-US" sz="1100" dirty="0"/>
           </a:p>
@@ -11154,8 +12133,8 @@
         </p:nvSpPr>
         <p:spPr>
           <a:xfrm>
-            <a:off x="548640" y="914400"/>
-            <a:ext cx="11064240" cy="640080"/>
+            <a:off x="457200" y="822960"/>
+            <a:ext cx="11247120" cy="502920"/>
           </a:xfrm>
           <a:prstGeom prst="rect">
             <a:avLst/>
@@ -11171,17 +12150,17 @@
               <a:buNone/>
             </a:pPr>
             <a:r>
-              <a:rPr lang="en-US" sz="3600" b="1" dirty="0">
-                <a:solidFill>
-                  <a:srgbClr val="F1F5F9"/>
-                </a:solidFill>
-                <a:latin typeface="Calibri" pitchFamily="34" charset="0"/>
-                <a:ea typeface="Calibri" pitchFamily="34" charset="-122"/>
-                <a:cs typeface="Calibri" pitchFamily="34" charset="-120"/>
-              </a:rPr>
-              <a:t>Atlas AEC · v2 shipped 19/05/2026</a:t>
-            </a:r>
-            <a:endParaRPr lang="en-US" sz="3600" dirty="0"/>
+              <a:rPr lang="en-US" sz="2600" b="1" dirty="0">
+                <a:solidFill>
+                  <a:srgbClr val="F1F5F9"/>
+                </a:solidFill>
+                <a:latin typeface="Calibri" pitchFamily="34" charset="0"/>
+                <a:ea typeface="Calibri" pitchFamily="34" charset="-122"/>
+                <a:cs typeface="Calibri" pitchFamily="34" charset="-120"/>
+              </a:rPr>
+              <a:t>Tab Hành chính · 4 widget gọn</a:t>
+            </a:r>
+            <a:endParaRPr lang="en-US" sz="2600" dirty="0"/>
           </a:p>
         </p:txBody>
       </p:sp>
@@ -11193,8 +12172,8 @@
         </p:nvSpPr>
         <p:spPr>
           <a:xfrm>
-            <a:off x="548640" y="1554480"/>
-            <a:ext cx="11064240" cy="365760"/>
+            <a:off x="457200" y="1325880"/>
+            <a:ext cx="11247120" cy="292608"/>
           </a:xfrm>
           <a:prstGeom prst="rect">
             <a:avLst/>
@@ -11218,7 +12197,7 @@
                 <a:ea typeface="Calibri" pitchFamily="34" charset="-122"/>
                 <a:cs typeface="Calibri" pitchFamily="34" charset="-120"/>
               </a:rPr>
-              <a:t>Mỗi gate đều tự re-run được — không phải lời hứa, là làm rồi.</a:t>
+              <a:t>Công văn · Văn bản nội bộ · Theo dõi BHXH · Điều phối xe — count + 3 entry mới nhất</a:t>
             </a:r>
             <a:endParaRPr lang="en-US" sz="1400" dirty="0"/>
           </a:p>
@@ -11232,8 +12211,8 @@
         </p:nvSpPr>
         <p:spPr>
           <a:xfrm>
-            <a:off x="411480" y="2194560"/>
-            <a:ext cx="3657600" cy="1280160"/>
+            <a:off x="594360" y="1737360"/>
+            <a:ext cx="7863840" cy="4663440"/>
           </a:xfrm>
           <a:prstGeom prst="rect">
             <a:avLst/>
@@ -11249,26 +12228,302 @@
           </a:ln>
         </p:spPr>
       </p:sp>
-      <p:sp>
-        <p:nvSpPr>
-          <p:cNvPr id="10" name="Shape 8"/>
-          <p:cNvSpPr/>
-          <p:nvPr/>
-        </p:nvSpPr>
-        <p:spPr>
-          <a:xfrm>
-            <a:off x="411480" y="2194560"/>
-            <a:ext cx="73152" cy="1280160"/>
+      <p:pic>
+        <p:nvPicPr>
+          <p:cNvPr id="10" name="Image 0" descr="/Users/vsf-thuynt519-l/Documents/GitHub/atlas-aec/docs/demo-screens/20-home-hanh-chinh.png">    </p:cNvPr>
+          <p:cNvPicPr>
+            <a:picLocks noChangeAspect="1"/>
+          </p:cNvPicPr>
+          <p:nvPr/>
+        </p:nvPicPr>
+        <p:blipFill>
+          <a:blip r:embed="rId1"/>
+          <a:srcRect l="0" r="0" t="0" b="0"/>
+          <a:stretch/>
+        </p:blipFill>
+        <p:spPr>
+          <a:xfrm>
+            <a:off x="640080" y="1783080"/>
+            <a:ext cx="7772400" cy="4572000"/>
+          </a:xfrm>
+          <a:prstGeom prst="rect">
+            <a:avLst/>
+          </a:prstGeom>
+        </p:spPr>
+      </p:pic>
+      <p:sp>
+        <p:nvSpPr>
+          <p:cNvPr id="11" name="Text 8"/>
+          <p:cNvSpPr/>
+          <p:nvPr/>
+        </p:nvSpPr>
+        <p:spPr>
+          <a:xfrm>
+            <a:off x="8778240" y="1783080"/>
+            <a:ext cx="2926080" cy="4572000"/>
+          </a:xfrm>
+          <a:prstGeom prst="rect">
+            <a:avLst/>
+          </a:prstGeom>
+          <a:noFill/>
+          <a:ln/>
+        </p:spPr>
+        <p:txBody>
+          <a:bodyPr wrap="square" lIns="0" tIns="0" rIns="0" bIns="0" rtlCol="0" anchor="t"/>
+          <a:lstStyle/>
+          <a:p>
+            <a:pPr>
+              <a:spcAft>
+                <a:spcPts val="600"/>
+              </a:spcAft>
+            </a:pPr>
+            <a:r>
+              <a:rPr lang="en-US" sz="1300" dirty="0">
+                <a:solidFill>
+                  <a:srgbClr val="F1F5F9"/>
+                </a:solidFill>
+                <a:latin typeface="Calibri" pitchFamily="34" charset="0"/>
+                <a:ea typeface="Calibri" pitchFamily="34" charset="-122"/>
+                <a:cs typeface="Calibri" pitchFamily="34" charset="-120"/>
+              </a:rPr>
+              <a:t>4 widget cards live:</a:t>
+            </a:r>
+            <a:endParaRPr lang="en-US" sz="1300" dirty="0"/>
+          </a:p>
+          <a:p>
+            <a:pPr>
+              <a:spcAft>
+                <a:spcPts val="600"/>
+              </a:spcAft>
+            </a:pPr>
+            <a:r>
+              <a:rPr lang="en-US" sz="1300" dirty="0">
+                <a:solidFill>
+                  <a:srgbClr val="F1F5F9"/>
+                </a:solidFill>
+                <a:latin typeface="Calibri" pitchFamily="34" charset="0"/>
+                <a:ea typeface="Calibri" pitchFamily="34" charset="-122"/>
+                <a:cs typeface="Calibri" pitchFamily="34" charset="-120"/>
+              </a:rPr>
+              <a:t>  Công văn → /stakeholders</a:t>
+            </a:r>
+            <a:endParaRPr lang="en-US" sz="1300" dirty="0"/>
+          </a:p>
+          <a:p>
+            <a:pPr>
+              <a:spcAft>
+                <a:spcPts val="600"/>
+              </a:spcAft>
+            </a:pPr>
+            <a:r>
+              <a:rPr lang="en-US" sz="1300" dirty="0">
+                <a:solidFill>
+                  <a:srgbClr val="F1F5F9"/>
+                </a:solidFill>
+                <a:latin typeface="Calibri" pitchFamily="34" charset="0"/>
+                <a:ea typeface="Calibri" pitchFamily="34" charset="-122"/>
+                <a:cs typeface="Calibri" pitchFamily="34" charset="-120"/>
+              </a:rPr>
+              <a:t>  Văn bản → /internaldocs</a:t>
+            </a:r>
+            <a:endParaRPr lang="en-US" sz="1300" dirty="0"/>
+          </a:p>
+          <a:p>
+            <a:pPr>
+              <a:spcAft>
+                <a:spcPts val="600"/>
+              </a:spcAft>
+            </a:pPr>
+            <a:r>
+              <a:rPr lang="en-US" sz="1300" dirty="0">
+                <a:solidFill>
+                  <a:srgbClr val="F1F5F9"/>
+                </a:solidFill>
+                <a:latin typeface="Calibri" pitchFamily="34" charset="0"/>
+                <a:ea typeface="Calibri" pitchFamily="34" charset="-122"/>
+                <a:cs typeface="Calibri" pitchFamily="34" charset="-120"/>
+              </a:rPr>
+              <a:t>  BHXH → /bhxh</a:t>
+            </a:r>
+            <a:endParaRPr lang="en-US" sz="1300" dirty="0"/>
+          </a:p>
+          <a:p>
+            <a:pPr>
+              <a:spcAft>
+                <a:spcPts val="600"/>
+              </a:spcAft>
+            </a:pPr>
+            <a:r>
+              <a:rPr lang="en-US" sz="1300" dirty="0">
+                <a:solidFill>
+                  <a:srgbClr val="F1F5F9"/>
+                </a:solidFill>
+                <a:latin typeface="Calibri" pitchFamily="34" charset="0"/>
+                <a:ea typeface="Calibri" pitchFamily="34" charset="-122"/>
+                <a:cs typeface="Calibri" pitchFamily="34" charset="-120"/>
+              </a:rPr>
+              <a:t>  Xe → /vehicledispatch</a:t>
+            </a:r>
+            <a:endParaRPr lang="en-US" sz="1300" dirty="0"/>
+          </a:p>
+          <a:p>
+            <a:pPr>
+              <a:spcAft>
+                <a:spcPts val="600"/>
+              </a:spcAft>
+            </a:pPr>
+            <a:endParaRPr lang="en-US" sz="1300" dirty="0"/>
+          </a:p>
+          <a:p>
+            <a:pPr>
+              <a:spcAft>
+                <a:spcPts val="600"/>
+              </a:spcAft>
+            </a:pPr>
+            <a:r>
+              <a:rPr lang="en-US" sz="1300" dirty="0">
+                <a:solidFill>
+                  <a:srgbClr val="F1F5F9"/>
+                </a:solidFill>
+                <a:latin typeface="Calibri" pitchFamily="34" charset="0"/>
+                <a:ea typeface="Calibri" pitchFamily="34" charset="-122"/>
+                <a:cs typeface="Calibri" pitchFamily="34" charset="-120"/>
+              </a:rPr>
+              <a:t>Project table phía dưới</a:t>
+            </a:r>
+            <a:endParaRPr lang="en-US" sz="1300" dirty="0"/>
+          </a:p>
+          <a:p>
+            <a:pPr>
+              <a:spcAft>
+                <a:spcPts val="600"/>
+              </a:spcAft>
+            </a:pPr>
+            <a:r>
+              <a:rPr lang="en-US" sz="1300" dirty="0">
+                <a:solidFill>
+                  <a:srgbClr val="F1F5F9"/>
+                </a:solidFill>
+                <a:latin typeface="Calibri" pitchFamily="34" charset="0"/>
+                <a:ea typeface="Calibri" pitchFamily="34" charset="-122"/>
+                <a:cs typeface="Calibri" pitchFamily="34" charset="-120"/>
+              </a:rPr>
+              <a:t>lọc projects dept=</a:t>
+            </a:r>
+            <a:endParaRPr lang="en-US" sz="1300" dirty="0"/>
+          </a:p>
+          <a:p>
+            <a:pPr>
+              <a:spcAft>
+                <a:spcPts val="600"/>
+              </a:spcAft>
+            </a:pPr>
+            <a:r>
+              <a:rPr lang="en-US" sz="1300" dirty="0">
+                <a:solidFill>
+                  <a:srgbClr val="F1F5F9"/>
+                </a:solidFill>
+                <a:latin typeface="Calibri" pitchFamily="34" charset="0"/>
+                <a:ea typeface="Calibri" pitchFamily="34" charset="-122"/>
+                <a:cs typeface="Calibri" pitchFamily="34" charset="-120"/>
+              </a:rPr>
+              <a:t>HANH_CHINH (2 dự án).</a:t>
+            </a:r>
+            <a:endParaRPr lang="en-US" sz="1300" dirty="0"/>
+          </a:p>
+        </p:txBody>
+      </p:sp>
+      <p:sp>
+        <p:nvSpPr>
+          <p:cNvPr id="12" name="Text 9"/>
+          <p:cNvSpPr/>
+          <p:nvPr/>
+        </p:nvSpPr>
+        <p:spPr>
+          <a:xfrm>
+            <a:off x="457200" y="6446520"/>
+            <a:ext cx="11247120" cy="274320"/>
+          </a:xfrm>
+          <a:prstGeom prst="rect">
+            <a:avLst/>
+          </a:prstGeom>
+          <a:noFill/>
+          <a:ln/>
+        </p:spPr>
+        <p:txBody>
+          <a:bodyPr wrap="square" lIns="0" tIns="0" rIns="0" bIns="0" rtlCol="0" anchor="ctr"/>
+          <a:lstStyle/>
+          <a:p>
+            <a:pPr indent="0" marL="0">
+              <a:buNone/>
+            </a:pPr>
+            <a:r>
+              <a:rPr lang="en-US" sz="1000" dirty="0">
+                <a:solidFill>
+                  <a:srgbClr val="475569"/>
+                </a:solidFill>
+                <a:latin typeface="Calibri" pitchFamily="34" charset="0"/>
+                <a:ea typeface="Calibri" pitchFamily="34" charset="-122"/>
+                <a:cs typeface="Calibri" pitchFamily="34" charset="-120"/>
+              </a:rPr>
+              <a:t>atlas-aec · v2 · live demo</a:t>
+            </a:r>
+            <a:endParaRPr lang="en-US" sz="1000" dirty="0"/>
+          </a:p>
+        </p:txBody>
+      </p:sp>
+    </p:spTree>
+  </p:cSld>
+  <p:clrMapOvr>
+    <a:masterClrMapping/>
+  </p:clrMapOvr>
+</p:sld>
+</file>
+
+<file path=ppt/slides/slide22.xml><?xml version="1.0" encoding="utf-8"?>
+<p:sld xmlns:a="http://schemas.openxmlformats.org/drawingml/2006/main" xmlns:r="http://schemas.openxmlformats.org/officeDocument/2006/relationships" xmlns:p="http://schemas.openxmlformats.org/presentationml/2006/main">
+  <p:cSld name="Slide 22">
+    <p:bg>
+      <p:bgPr>
+        <a:solidFill>
+          <a:srgbClr val="0B1220"/>
+        </a:solidFill>
+      </p:bgPr>
+    </p:bg>
+    <p:spTree>
+      <p:nvGrpSpPr>
+        <p:cNvPr id="1" name=""/>
+        <p:cNvGrpSpPr/>
+        <p:nvPr/>
+      </p:nvGrpSpPr>
+      <p:grpSpPr>
+        <a:xfrm>
+          <a:off x="0" y="0"/>
+          <a:ext cx="0" cy="0"/>
+          <a:chOff x="0" y="0"/>
+          <a:chExt cx="0" cy="0"/>
+        </a:xfrm>
+      </p:grpSpPr>
+      <p:sp>
+        <p:nvSpPr>
+          <p:cNvPr id="2" name="Shape 0"/>
+          <p:cNvSpPr/>
+          <p:nvPr/>
+        </p:nvSpPr>
+        <p:spPr>
+          <a:xfrm>
+            <a:off x="457200" y="320040"/>
+            <a:ext cx="292608" cy="292608"/>
           </a:xfrm>
           <a:prstGeom prst="rect">
             <a:avLst/>
           </a:prstGeom>
           <a:solidFill>
-            <a:srgbClr val="10B981"/>
+            <a:srgbClr val="3B82F6"/>
           </a:solidFill>
           <a:ln w="12700">
             <a:solidFill>
-              <a:srgbClr val="10B981"/>
+              <a:srgbClr val="3B82F6"/>
             </a:solidFill>
             <a:prstDash val="solid"/>
           </a:ln>
@@ -11276,14 +12531,53 @@
       </p:sp>
       <p:sp>
         <p:nvSpPr>
-          <p:cNvPr id="11" name="Text 9"/>
-          <p:cNvSpPr/>
-          <p:nvPr/>
-        </p:nvSpPr>
-        <p:spPr>
-          <a:xfrm>
-            <a:off x="640080" y="2331720"/>
-            <a:ext cx="3200400" cy="457200"/>
+          <p:cNvPr id="3" name="Text 1"/>
+          <p:cNvSpPr/>
+          <p:nvPr/>
+        </p:nvSpPr>
+        <p:spPr>
+          <a:xfrm>
+            <a:off x="457200" y="320040"/>
+            <a:ext cx="292608" cy="292608"/>
+          </a:xfrm>
+          <a:prstGeom prst="rect">
+            <a:avLst/>
+          </a:prstGeom>
+          <a:noFill/>
+          <a:ln/>
+        </p:spPr>
+        <p:txBody>
+          <a:bodyPr wrap="square" lIns="0" tIns="0" rIns="0" bIns="0" rtlCol="0" anchor="ctr"/>
+          <a:lstStyle/>
+          <a:p>
+            <a:pPr algn="ctr" indent="0" marL="0">
+              <a:buNone/>
+            </a:pPr>
+            <a:r>
+              <a:rPr lang="en-US" sz="1600" b="1" dirty="0">
+                <a:solidFill>
+                  <a:srgbClr val="FFFFFF"/>
+                </a:solidFill>
+                <a:latin typeface="Calibri" pitchFamily="34" charset="0"/>
+                <a:ea typeface="Calibri" pitchFamily="34" charset="-122"/>
+                <a:cs typeface="Calibri" pitchFamily="34" charset="-120"/>
+              </a:rPr>
+              <a:t>A</a:t>
+            </a:r>
+            <a:endParaRPr lang="en-US" sz="1600" dirty="0"/>
+          </a:p>
+        </p:txBody>
+      </p:sp>
+      <p:sp>
+        <p:nvSpPr>
+          <p:cNvPr id="4" name="Text 2"/>
+          <p:cNvSpPr/>
+          <p:nvPr/>
+        </p:nvSpPr>
+        <p:spPr>
+          <a:xfrm>
+            <a:off x="822960" y="320040"/>
+            <a:ext cx="2743200" cy="292608"/>
           </a:xfrm>
           <a:prstGeom prst="rect">
             <a:avLst/>
@@ -11299,15 +12593,132 @@
               <a:buNone/>
             </a:pPr>
             <a:r>
+              <a:rPr lang="en-US" sz="1300" b="1" dirty="0">
+                <a:solidFill>
+                  <a:srgbClr val="F1F5F9"/>
+                </a:solidFill>
+                <a:latin typeface="Calibri" pitchFamily="34" charset="0"/>
+                <a:ea typeface="Calibri" pitchFamily="34" charset="-122"/>
+                <a:cs typeface="Calibri" pitchFamily="34" charset="-120"/>
+              </a:rPr>
+              <a:t>Atlas AEC</a:t>
+            </a:r>
+            <a:endParaRPr lang="en-US" sz="1300" dirty="0"/>
+          </a:p>
+        </p:txBody>
+      </p:sp>
+      <p:sp>
+        <p:nvSpPr>
+          <p:cNvPr id="5" name="Text 3"/>
+          <p:cNvSpPr/>
+          <p:nvPr/>
+        </p:nvSpPr>
+        <p:spPr>
+          <a:xfrm>
+            <a:off x="3566160" y="356616"/>
+            <a:ext cx="5486400" cy="256032"/>
+          </a:xfrm>
+          <a:prstGeom prst="rect">
+            <a:avLst/>
+          </a:prstGeom>
+          <a:noFill/>
+          <a:ln/>
+        </p:spPr>
+        <p:txBody>
+          <a:bodyPr wrap="square" lIns="0" tIns="0" rIns="0" bIns="0" rtlCol="0" anchor="ctr"/>
+          <a:lstStyle/>
+          <a:p>
+            <a:pPr indent="0" marL="0">
+              <a:buNone/>
+            </a:pPr>
+            <a:r>
+              <a:rPr lang="en-US" sz="1100" dirty="0">
+                <a:solidFill>
+                  <a:srgbClr val="8B9BB4"/>
+                </a:solidFill>
+                <a:latin typeface="Calibri" pitchFamily="34" charset="0"/>
+                <a:ea typeface="Calibri" pitchFamily="34" charset="-122"/>
+                <a:cs typeface="Calibri" pitchFamily="34" charset="-120"/>
+              </a:rPr>
+              <a:t>Viwase — Tab Tài chính kế toán</a:t>
+            </a:r>
+            <a:endParaRPr lang="en-US" sz="1100" dirty="0"/>
+          </a:p>
+        </p:txBody>
+      </p:sp>
+      <p:sp>
+        <p:nvSpPr>
+          <p:cNvPr id="6" name="Text 4"/>
+          <p:cNvSpPr/>
+          <p:nvPr/>
+        </p:nvSpPr>
+        <p:spPr>
+          <a:xfrm>
+            <a:off x="10881360" y="320040"/>
+            <a:ext cx="822960" cy="292608"/>
+          </a:xfrm>
+          <a:prstGeom prst="rect">
+            <a:avLst/>
+          </a:prstGeom>
+          <a:noFill/>
+          <a:ln/>
+        </p:spPr>
+        <p:txBody>
+          <a:bodyPr wrap="square" lIns="0" tIns="0" rIns="0" bIns="0" rtlCol="0" anchor="ctr"/>
+          <a:lstStyle/>
+          <a:p>
+            <a:pPr algn="r" indent="0" marL="0">
+              <a:buNone/>
+            </a:pPr>
+            <a:r>
+              <a:rPr lang="en-US" sz="1100" dirty="0">
+                <a:solidFill>
+                  <a:srgbClr val="8B9BB4"/>
+                </a:solidFill>
+                <a:latin typeface="Calibri" pitchFamily="34" charset="0"/>
+                <a:ea typeface="Calibri" pitchFamily="34" charset="-122"/>
+                <a:cs typeface="Calibri" pitchFamily="34" charset="-120"/>
+              </a:rPr>
+              <a:t>22 / 32</a:t>
+            </a:r>
+            <a:endParaRPr lang="en-US" sz="1100" dirty="0"/>
+          </a:p>
+        </p:txBody>
+      </p:sp>
+      <p:sp>
+        <p:nvSpPr>
+          <p:cNvPr id="7" name="Text 5"/>
+          <p:cNvSpPr/>
+          <p:nvPr/>
+        </p:nvSpPr>
+        <p:spPr>
+          <a:xfrm>
+            <a:off x="457200" y="822960"/>
+            <a:ext cx="11247120" cy="502920"/>
+          </a:xfrm>
+          <a:prstGeom prst="rect">
+            <a:avLst/>
+          </a:prstGeom>
+          <a:noFill/>
+          <a:ln/>
+        </p:spPr>
+        <p:txBody>
+          <a:bodyPr wrap="square" lIns="0" tIns="0" rIns="0" bIns="0" rtlCol="0" anchor="ctr"/>
+          <a:lstStyle/>
+          <a:p>
+            <a:pPr indent="0" marL="0">
+              <a:buNone/>
+            </a:pPr>
+            <a:r>
               <a:rPr lang="en-US" sz="2600" b="1" dirty="0">
                 <a:solidFill>
-                  <a:srgbClr val="10B981"/>
-                </a:solidFill>
-                <a:latin typeface="Calibri" pitchFamily="34" charset="0"/>
-                <a:ea typeface="Calibri" pitchFamily="34" charset="-122"/>
-                <a:cs typeface="Calibri" pitchFamily="34" charset="-120"/>
-              </a:rPr>
-              <a:t>9 / 9</a:t>
+                  <a:srgbClr val="F1F5F9"/>
+                </a:solidFill>
+                <a:latin typeface="Calibri" pitchFamily="34" charset="0"/>
+                <a:ea typeface="Calibri" pitchFamily="34" charset="-122"/>
+                <a:cs typeface="Calibri" pitchFamily="34" charset="-120"/>
+              </a:rPr>
+              <a:t>Tab Tài chính KT · Tạm ứng + Giao khoán</a:t>
             </a:r>
             <a:endParaRPr lang="en-US" sz="2600" dirty="0"/>
           </a:p>
@@ -11315,14 +12726,14 @@
       </p:sp>
       <p:sp>
         <p:nvSpPr>
-          <p:cNvPr id="12" name="Text 10"/>
-          <p:cNvSpPr/>
-          <p:nvPr/>
-        </p:nvSpPr>
-        <p:spPr>
-          <a:xfrm>
-            <a:off x="640080" y="2788920"/>
-            <a:ext cx="3200400" cy="292608"/>
+          <p:cNvPr id="8" name="Text 6"/>
+          <p:cNvSpPr/>
+          <p:nvPr/>
+        </p:nvSpPr>
+        <p:spPr>
+          <a:xfrm>
+            <a:off x="457200" y="1325880"/>
+            <a:ext cx="11247120" cy="292608"/>
           </a:xfrm>
           <a:prstGeom prst="rect">
             <a:avLst/>
@@ -11338,69 +12749,30 @@
               <a:buNone/>
             </a:pPr>
             <a:r>
-              <a:rPr lang="en-US" sz="1300" b="1" dirty="0">
-                <a:solidFill>
-                  <a:srgbClr val="F1F5F9"/>
-                </a:solidFill>
-                <a:latin typeface="Calibri" pitchFamily="34" charset="0"/>
-                <a:ea typeface="Calibri" pitchFamily="34" charset="-122"/>
-                <a:cs typeface="Calibri" pitchFamily="34" charset="-120"/>
-              </a:rPr>
-              <a:t>Packages typecheck</a:t>
-            </a:r>
-            <a:endParaRPr lang="en-US" sz="1300" dirty="0"/>
-          </a:p>
-        </p:txBody>
-      </p:sp>
-      <p:sp>
-        <p:nvSpPr>
-          <p:cNvPr id="13" name="Text 11"/>
-          <p:cNvSpPr/>
-          <p:nvPr/>
-        </p:nvSpPr>
-        <p:spPr>
-          <a:xfrm>
-            <a:off x="640080" y="3063240"/>
-            <a:ext cx="3200400" cy="320040"/>
-          </a:xfrm>
-          <a:prstGeom prst="rect">
-            <a:avLst/>
-          </a:prstGeom>
-          <a:noFill/>
-          <a:ln/>
-        </p:spPr>
-        <p:txBody>
-          <a:bodyPr wrap="square" lIns="0" tIns="0" rIns="0" bIns="0" rtlCol="0" anchor="ctr"/>
-          <a:lstStyle/>
-          <a:p>
-            <a:pPr indent="0" marL="0">
-              <a:buNone/>
-            </a:pPr>
-            <a:r>
-              <a:rPr lang="en-US" sz="1100" dirty="0">
+              <a:rPr lang="en-US" sz="1400" i="1" dirty="0">
                 <a:solidFill>
                   <a:srgbClr val="8B9BB4"/>
                 </a:solidFill>
-                <a:latin typeface="Consolas" pitchFamily="34" charset="0"/>
-                <a:ea typeface="Consolas" pitchFamily="34" charset="-122"/>
-                <a:cs typeface="Consolas" pitchFamily="34" charset="-120"/>
-              </a:rPr>
-              <a:t>pnpm typecheck</a:t>
-            </a:r>
-            <a:endParaRPr lang="en-US" sz="1100" dirty="0"/>
-          </a:p>
-        </p:txBody>
-      </p:sp>
-      <p:sp>
-        <p:nvSpPr>
-          <p:cNvPr id="14" name="Shape 12"/>
-          <p:cNvSpPr/>
-          <p:nvPr/>
-        </p:nvSpPr>
-        <p:spPr>
-          <a:xfrm>
-            <a:off x="4251960" y="2194560"/>
-            <a:ext cx="3657600" cy="1280160"/>
+                <a:latin typeface="Calibri" pitchFamily="34" charset="0"/>
+                <a:ea typeface="Calibri" pitchFamily="34" charset="-122"/>
+                <a:cs typeface="Calibri" pitchFamily="34" charset="-120"/>
+              </a:rPr>
+              <a:t>AdvanceTransaction (TAM_UNG / THANH_TOAN / HOAN_UNG) · ContractorAssignment khoán gọn theo DA</a:t>
+            </a:r>
+            <a:endParaRPr lang="en-US" sz="1400" dirty="0"/>
+          </a:p>
+        </p:txBody>
+      </p:sp>
+      <p:sp>
+        <p:nvSpPr>
+          <p:cNvPr id="9" name="Shape 7"/>
+          <p:cNvSpPr/>
+          <p:nvPr/>
+        </p:nvSpPr>
+        <p:spPr>
+          <a:xfrm>
+            <a:off x="594360" y="1737360"/>
+            <a:ext cx="7863840" cy="4663440"/>
           </a:xfrm>
           <a:prstGeom prst="rect">
             <a:avLst/>
@@ -11416,26 +12788,264 @@
           </a:ln>
         </p:spPr>
       </p:sp>
-      <p:sp>
-        <p:nvSpPr>
-          <p:cNvPr id="15" name="Shape 13"/>
-          <p:cNvSpPr/>
-          <p:nvPr/>
-        </p:nvSpPr>
-        <p:spPr>
-          <a:xfrm>
-            <a:off x="4251960" y="2194560"/>
-            <a:ext cx="73152" cy="1280160"/>
+      <p:pic>
+        <p:nvPicPr>
+          <p:cNvPr id="10" name="Image 0" descr="/Users/vsf-thuynt519-l/Documents/GitHub/atlas-aec/docs/demo-screens/21-home-tckt.png">    </p:cNvPr>
+          <p:cNvPicPr>
+            <a:picLocks noChangeAspect="1"/>
+          </p:cNvPicPr>
+          <p:nvPr/>
+        </p:nvPicPr>
+        <p:blipFill>
+          <a:blip r:embed="rId1"/>
+          <a:srcRect l="0" r="0" t="0" b="0"/>
+          <a:stretch/>
+        </p:blipFill>
+        <p:spPr>
+          <a:xfrm>
+            <a:off x="640080" y="1783080"/>
+            <a:ext cx="7772400" cy="4572000"/>
+          </a:xfrm>
+          <a:prstGeom prst="rect">
+            <a:avLst/>
+          </a:prstGeom>
+        </p:spPr>
+      </p:pic>
+      <p:sp>
+        <p:nvSpPr>
+          <p:cNvPr id="11" name="Text 8"/>
+          <p:cNvSpPr/>
+          <p:nvPr/>
+        </p:nvSpPr>
+        <p:spPr>
+          <a:xfrm>
+            <a:off x="8778240" y="1783080"/>
+            <a:ext cx="2926080" cy="4572000"/>
+          </a:xfrm>
+          <a:prstGeom prst="rect">
+            <a:avLst/>
+          </a:prstGeom>
+          <a:noFill/>
+          <a:ln/>
+        </p:spPr>
+        <p:txBody>
+          <a:bodyPr wrap="square" lIns="0" tIns="0" rIns="0" bIns="0" rtlCol="0" anchor="t"/>
+          <a:lstStyle/>
+          <a:p>
+            <a:pPr>
+              <a:spcAft>
+                <a:spcPts val="600"/>
+              </a:spcAft>
+            </a:pPr>
+            <a:r>
+              <a:rPr lang="en-US" sz="1300" dirty="0">
+                <a:solidFill>
+                  <a:srgbClr val="F1F5F9"/>
+                </a:solidFill>
+                <a:latin typeface="Calibri" pitchFamily="34" charset="0"/>
+                <a:ea typeface="Calibri" pitchFamily="34" charset="-122"/>
+                <a:cs typeface="Calibri" pitchFamily="34" charset="-120"/>
+              </a:rPr>
+              <a:t>Widget cards:</a:t>
+            </a:r>
+            <a:endParaRPr lang="en-US" sz="1300" dirty="0"/>
+          </a:p>
+          <a:p>
+            <a:pPr>
+              <a:spcAft>
+                <a:spcPts val="600"/>
+              </a:spcAft>
+            </a:pPr>
+            <a:r>
+              <a:rPr lang="en-US" sz="1300" dirty="0">
+                <a:solidFill>
+                  <a:srgbClr val="F1F5F9"/>
+                </a:solidFill>
+                <a:latin typeface="Calibri" pitchFamily="34" charset="0"/>
+                <a:ea typeface="Calibri" pitchFamily="34" charset="-122"/>
+                <a:cs typeface="Calibri" pitchFamily="34" charset="-120"/>
+              </a:rPr>
+              <a:t>  Tạm ứng/Thanh toán</a:t>
+            </a:r>
+            <a:endParaRPr lang="en-US" sz="1300" dirty="0"/>
+          </a:p>
+          <a:p>
+            <a:pPr>
+              <a:spcAft>
+                <a:spcPts val="600"/>
+              </a:spcAft>
+            </a:pPr>
+            <a:r>
+              <a:rPr lang="en-US" sz="1300" dirty="0">
+                <a:solidFill>
+                  <a:srgbClr val="F1F5F9"/>
+                </a:solidFill>
+                <a:latin typeface="Calibri" pitchFamily="34" charset="0"/>
+                <a:ea typeface="Calibri" pitchFamily="34" charset="-122"/>
+                <a:cs typeface="Calibri" pitchFamily="34" charset="-120"/>
+              </a:rPr>
+              <a:t>  Bảng giao khoán</a:t>
+            </a:r>
+            <a:endParaRPr lang="en-US" sz="1300" dirty="0"/>
+          </a:p>
+          <a:p>
+            <a:pPr>
+              <a:spcAft>
+                <a:spcPts val="600"/>
+              </a:spcAft>
+            </a:pPr>
+            <a:endParaRPr lang="en-US" sz="1300" dirty="0"/>
+          </a:p>
+          <a:p>
+            <a:pPr>
+              <a:spcAft>
+                <a:spcPts val="600"/>
+              </a:spcAft>
+            </a:pPr>
+            <a:r>
+              <a:rPr lang="en-US" sz="1300" dirty="0">
+                <a:solidFill>
+                  <a:srgbClr val="F1F5F9"/>
+                </a:solidFill>
+                <a:latin typeface="Calibri" pitchFamily="34" charset="0"/>
+                <a:ea typeface="Calibri" pitchFamily="34" charset="-122"/>
+                <a:cs typeface="Calibri" pitchFamily="34" charset="-120"/>
+              </a:rPr>
+              <a:t>Hoàn ứng có parentTxnId</a:t>
+            </a:r>
+            <a:endParaRPr lang="en-US" sz="1300" dirty="0"/>
+          </a:p>
+          <a:p>
+            <a:pPr>
+              <a:spcAft>
+                <a:spcPts val="600"/>
+              </a:spcAft>
+            </a:pPr>
+            <a:r>
+              <a:rPr lang="en-US" sz="1300" dirty="0">
+                <a:solidFill>
+                  <a:srgbClr val="F1F5F9"/>
+                </a:solidFill>
+                <a:latin typeface="Calibri" pitchFamily="34" charset="0"/>
+                <a:ea typeface="Calibri" pitchFamily="34" charset="-122"/>
+                <a:cs typeface="Calibri" pitchFamily="34" charset="-120"/>
+              </a:rPr>
+              <a:t>→ lineage tạm ứng gốc</a:t>
+            </a:r>
+            <a:endParaRPr lang="en-US" sz="1300" dirty="0"/>
+          </a:p>
+          <a:p>
+            <a:pPr>
+              <a:spcAft>
+                <a:spcPts val="600"/>
+              </a:spcAft>
+            </a:pPr>
+            <a:r>
+              <a:rPr lang="en-US" sz="1300" dirty="0">
+                <a:solidFill>
+                  <a:srgbClr val="F1F5F9"/>
+                </a:solidFill>
+                <a:latin typeface="Calibri" pitchFamily="34" charset="0"/>
+                <a:ea typeface="Calibri" pitchFamily="34" charset="-122"/>
+                <a:cs typeface="Calibri" pitchFamily="34" charset="-120"/>
+              </a:rPr>
+              <a:t>cho quyết toán.</a:t>
+            </a:r>
+            <a:endParaRPr lang="en-US" sz="1300" dirty="0"/>
+          </a:p>
+        </p:txBody>
+      </p:sp>
+      <p:sp>
+        <p:nvSpPr>
+          <p:cNvPr id="12" name="Text 9"/>
+          <p:cNvSpPr/>
+          <p:nvPr/>
+        </p:nvSpPr>
+        <p:spPr>
+          <a:xfrm>
+            <a:off x="457200" y="6446520"/>
+            <a:ext cx="11247120" cy="274320"/>
+          </a:xfrm>
+          <a:prstGeom prst="rect">
+            <a:avLst/>
+          </a:prstGeom>
+          <a:noFill/>
+          <a:ln/>
+        </p:spPr>
+        <p:txBody>
+          <a:bodyPr wrap="square" lIns="0" tIns="0" rIns="0" bIns="0" rtlCol="0" anchor="ctr"/>
+          <a:lstStyle/>
+          <a:p>
+            <a:pPr indent="0" marL="0">
+              <a:buNone/>
+            </a:pPr>
+            <a:r>
+              <a:rPr lang="en-US" sz="1000" dirty="0">
+                <a:solidFill>
+                  <a:srgbClr val="475569"/>
+                </a:solidFill>
+                <a:latin typeface="Calibri" pitchFamily="34" charset="0"/>
+                <a:ea typeface="Calibri" pitchFamily="34" charset="-122"/>
+                <a:cs typeface="Calibri" pitchFamily="34" charset="-120"/>
+              </a:rPr>
+              <a:t>atlas-aec · v2 · live demo</a:t>
+            </a:r>
+            <a:endParaRPr lang="en-US" sz="1000" dirty="0"/>
+          </a:p>
+        </p:txBody>
+      </p:sp>
+    </p:spTree>
+  </p:cSld>
+  <p:clrMapOvr>
+    <a:masterClrMapping/>
+  </p:clrMapOvr>
+</p:sld>
+</file>
+
+<file path=ppt/slides/slide23.xml><?xml version="1.0" encoding="utf-8"?>
+<p:sld xmlns:a="http://schemas.openxmlformats.org/drawingml/2006/main" xmlns:r="http://schemas.openxmlformats.org/officeDocument/2006/relationships" xmlns:p="http://schemas.openxmlformats.org/presentationml/2006/main">
+  <p:cSld name="Slide 23">
+    <p:bg>
+      <p:bgPr>
+        <a:solidFill>
+          <a:srgbClr val="0B1220"/>
+        </a:solidFill>
+      </p:bgPr>
+    </p:bg>
+    <p:spTree>
+      <p:nvGrpSpPr>
+        <p:cNvPr id="1" name=""/>
+        <p:cNvGrpSpPr/>
+        <p:nvPr/>
+      </p:nvGrpSpPr>
+      <p:grpSpPr>
+        <a:xfrm>
+          <a:off x="0" y="0"/>
+          <a:ext cx="0" cy="0"/>
+          <a:chOff x="0" y="0"/>
+          <a:chExt cx="0" cy="0"/>
+        </a:xfrm>
+      </p:grpSpPr>
+      <p:sp>
+        <p:nvSpPr>
+          <p:cNvPr id="2" name="Shape 0"/>
+          <p:cNvSpPr/>
+          <p:nvPr/>
+        </p:nvSpPr>
+        <p:spPr>
+          <a:xfrm>
+            <a:off x="457200" y="320040"/>
+            <a:ext cx="292608" cy="292608"/>
           </a:xfrm>
           <a:prstGeom prst="rect">
             <a:avLst/>
           </a:prstGeom>
           <a:solidFill>
-            <a:srgbClr val="10B981"/>
+            <a:srgbClr val="3B82F6"/>
           </a:solidFill>
           <a:ln w="12700">
             <a:solidFill>
-              <a:srgbClr val="10B981"/>
+              <a:srgbClr val="3B82F6"/>
             </a:solidFill>
             <a:prstDash val="solid"/>
           </a:ln>
@@ -11443,14 +13053,53 @@
       </p:sp>
       <p:sp>
         <p:nvSpPr>
-          <p:cNvPr id="16" name="Text 14"/>
-          <p:cNvSpPr/>
-          <p:nvPr/>
-        </p:nvSpPr>
-        <p:spPr>
-          <a:xfrm>
-            <a:off x="4480560" y="2331720"/>
-            <a:ext cx="3200400" cy="457200"/>
+          <p:cNvPr id="3" name="Text 1"/>
+          <p:cNvSpPr/>
+          <p:nvPr/>
+        </p:nvSpPr>
+        <p:spPr>
+          <a:xfrm>
+            <a:off x="457200" y="320040"/>
+            <a:ext cx="292608" cy="292608"/>
+          </a:xfrm>
+          <a:prstGeom prst="rect">
+            <a:avLst/>
+          </a:prstGeom>
+          <a:noFill/>
+          <a:ln/>
+        </p:spPr>
+        <p:txBody>
+          <a:bodyPr wrap="square" lIns="0" tIns="0" rIns="0" bIns="0" rtlCol="0" anchor="ctr"/>
+          <a:lstStyle/>
+          <a:p>
+            <a:pPr algn="ctr" indent="0" marL="0">
+              <a:buNone/>
+            </a:pPr>
+            <a:r>
+              <a:rPr lang="en-US" sz="1600" b="1" dirty="0">
+                <a:solidFill>
+                  <a:srgbClr val="FFFFFF"/>
+                </a:solidFill>
+                <a:latin typeface="Calibri" pitchFamily="34" charset="0"/>
+                <a:ea typeface="Calibri" pitchFamily="34" charset="-122"/>
+                <a:cs typeface="Calibri" pitchFamily="34" charset="-120"/>
+              </a:rPr>
+              <a:t>A</a:t>
+            </a:r>
+            <a:endParaRPr lang="en-US" sz="1600" dirty="0"/>
+          </a:p>
+        </p:txBody>
+      </p:sp>
+      <p:sp>
+        <p:nvSpPr>
+          <p:cNvPr id="4" name="Text 2"/>
+          <p:cNvSpPr/>
+          <p:nvPr/>
+        </p:nvSpPr>
+        <p:spPr>
+          <a:xfrm>
+            <a:off x="822960" y="320040"/>
+            <a:ext cx="2743200" cy="292608"/>
           </a:xfrm>
           <a:prstGeom prst="rect">
             <a:avLst/>
@@ -11466,15 +13115,132 @@
               <a:buNone/>
             </a:pPr>
             <a:r>
+              <a:rPr lang="en-US" sz="1300" b="1" dirty="0">
+                <a:solidFill>
+                  <a:srgbClr val="F1F5F9"/>
+                </a:solidFill>
+                <a:latin typeface="Calibri" pitchFamily="34" charset="0"/>
+                <a:ea typeface="Calibri" pitchFamily="34" charset="-122"/>
+                <a:cs typeface="Calibri" pitchFamily="34" charset="-120"/>
+              </a:rPr>
+              <a:t>Atlas AEC</a:t>
+            </a:r>
+            <a:endParaRPr lang="en-US" sz="1300" dirty="0"/>
+          </a:p>
+        </p:txBody>
+      </p:sp>
+      <p:sp>
+        <p:nvSpPr>
+          <p:cNvPr id="5" name="Text 3"/>
+          <p:cNvSpPr/>
+          <p:nvPr/>
+        </p:nvSpPr>
+        <p:spPr>
+          <a:xfrm>
+            <a:off x="3566160" y="356616"/>
+            <a:ext cx="5486400" cy="256032"/>
+          </a:xfrm>
+          <a:prstGeom prst="rect">
+            <a:avLst/>
+          </a:prstGeom>
+          <a:noFill/>
+          <a:ln/>
+        </p:spPr>
+        <p:txBody>
+          <a:bodyPr wrap="square" lIns="0" tIns="0" rIns="0" bIns="0" rtlCol="0" anchor="ctr"/>
+          <a:lstStyle/>
+          <a:p>
+            <a:pPr indent="0" marL="0">
+              <a:buNone/>
+            </a:pPr>
+            <a:r>
+              <a:rPr lang="en-US" sz="1100" dirty="0">
+                <a:solidFill>
+                  <a:srgbClr val="8B9BB4"/>
+                </a:solidFill>
+                <a:latin typeface="Calibri" pitchFamily="34" charset="0"/>
+                <a:ea typeface="Calibri" pitchFamily="34" charset="-122"/>
+                <a:cs typeface="Calibri" pitchFamily="34" charset="-120"/>
+              </a:rPr>
+              <a:t>Viwase — Tab Phát triển thị trường</a:t>
+            </a:r>
+            <a:endParaRPr lang="en-US" sz="1100" dirty="0"/>
+          </a:p>
+        </p:txBody>
+      </p:sp>
+      <p:sp>
+        <p:nvSpPr>
+          <p:cNvPr id="6" name="Text 4"/>
+          <p:cNvSpPr/>
+          <p:nvPr/>
+        </p:nvSpPr>
+        <p:spPr>
+          <a:xfrm>
+            <a:off x="10881360" y="320040"/>
+            <a:ext cx="822960" cy="292608"/>
+          </a:xfrm>
+          <a:prstGeom prst="rect">
+            <a:avLst/>
+          </a:prstGeom>
+          <a:noFill/>
+          <a:ln/>
+        </p:spPr>
+        <p:txBody>
+          <a:bodyPr wrap="square" lIns="0" tIns="0" rIns="0" bIns="0" rtlCol="0" anchor="ctr"/>
+          <a:lstStyle/>
+          <a:p>
+            <a:pPr algn="r" indent="0" marL="0">
+              <a:buNone/>
+            </a:pPr>
+            <a:r>
+              <a:rPr lang="en-US" sz="1100" dirty="0">
+                <a:solidFill>
+                  <a:srgbClr val="8B9BB4"/>
+                </a:solidFill>
+                <a:latin typeface="Calibri" pitchFamily="34" charset="0"/>
+                <a:ea typeface="Calibri" pitchFamily="34" charset="-122"/>
+                <a:cs typeface="Calibri" pitchFamily="34" charset="-120"/>
+              </a:rPr>
+              <a:t>23 / 32</a:t>
+            </a:r>
+            <a:endParaRPr lang="en-US" sz="1100" dirty="0"/>
+          </a:p>
+        </p:txBody>
+      </p:sp>
+      <p:sp>
+        <p:nvSpPr>
+          <p:cNvPr id="7" name="Text 5"/>
+          <p:cNvSpPr/>
+          <p:nvPr/>
+        </p:nvSpPr>
+        <p:spPr>
+          <a:xfrm>
+            <a:off x="457200" y="822960"/>
+            <a:ext cx="11247120" cy="502920"/>
+          </a:xfrm>
+          <a:prstGeom prst="rect">
+            <a:avLst/>
+          </a:prstGeom>
+          <a:noFill/>
+          <a:ln/>
+        </p:spPr>
+        <p:txBody>
+          <a:bodyPr wrap="square" lIns="0" tIns="0" rIns="0" bIns="0" rtlCol="0" anchor="ctr"/>
+          <a:lstStyle/>
+          <a:p>
+            <a:pPr indent="0" marL="0">
+              <a:buNone/>
+            </a:pPr>
+            <a:r>
               <a:rPr lang="en-US" sz="2600" b="1" dirty="0">
                 <a:solidFill>
-                  <a:srgbClr val="10B981"/>
-                </a:solidFill>
-                <a:latin typeface="Calibri" pitchFamily="34" charset="0"/>
-                <a:ea typeface="Calibri" pitchFamily="34" charset="-122"/>
-                <a:cs typeface="Calibri" pitchFamily="34" charset="-120"/>
-              </a:rPr>
-              <a:t>2 / 2</a:t>
+                  <a:srgbClr val="F1F5F9"/>
+                </a:solidFill>
+                <a:latin typeface="Calibri" pitchFamily="34" charset="0"/>
+                <a:ea typeface="Calibri" pitchFamily="34" charset="-122"/>
+                <a:cs typeface="Calibri" pitchFamily="34" charset="-120"/>
+              </a:rPr>
+              <a:t>Tab PTTT · Địa bàn + Pipeline</a:t>
             </a:r>
             <a:endParaRPr lang="en-US" sz="2600" dirty="0"/>
           </a:p>
@@ -11482,14 +13248,14 @@
       </p:sp>
       <p:sp>
         <p:nvSpPr>
-          <p:cNvPr id="17" name="Text 15"/>
-          <p:cNvSpPr/>
-          <p:nvPr/>
-        </p:nvSpPr>
-        <p:spPr>
-          <a:xfrm>
-            <a:off x="4480560" y="2788920"/>
-            <a:ext cx="3200400" cy="292608"/>
+          <p:cNvPr id="8" name="Text 6"/>
+          <p:cNvSpPr/>
+          <p:nvPr/>
+        </p:nvSpPr>
+        <p:spPr>
+          <a:xfrm>
+            <a:off x="457200" y="1325880"/>
+            <a:ext cx="11247120" cy="292608"/>
           </a:xfrm>
           <a:prstGeom prst="rect">
             <a:avLst/>
@@ -11505,69 +13271,30 @@
               <a:buNone/>
             </a:pPr>
             <a:r>
-              <a:rPr lang="en-US" sz="1300" b="1" dirty="0">
-                <a:solidFill>
-                  <a:srgbClr val="F1F5F9"/>
-                </a:solidFill>
-                <a:latin typeface="Calibri" pitchFamily="34" charset="0"/>
-                <a:ea typeface="Calibri" pitchFamily="34" charset="-122"/>
-                <a:cs typeface="Calibri" pitchFamily="34" charset="-120"/>
-              </a:rPr>
-              <a:t>Next apps lint clean</a:t>
-            </a:r>
-            <a:endParaRPr lang="en-US" sz="1300" dirty="0"/>
-          </a:p>
-        </p:txBody>
-      </p:sp>
-      <p:sp>
-        <p:nvSpPr>
-          <p:cNvPr id="18" name="Text 16"/>
-          <p:cNvSpPr/>
-          <p:nvPr/>
-        </p:nvSpPr>
-        <p:spPr>
-          <a:xfrm>
-            <a:off x="4480560" y="3063240"/>
-            <a:ext cx="3200400" cy="320040"/>
-          </a:xfrm>
-          <a:prstGeom prst="rect">
-            <a:avLst/>
-          </a:prstGeom>
-          <a:noFill/>
-          <a:ln/>
-        </p:spPr>
-        <p:txBody>
-          <a:bodyPr wrap="square" lIns="0" tIns="0" rIns="0" bIns="0" rtlCol="0" anchor="ctr"/>
-          <a:lstStyle/>
-          <a:p>
-            <a:pPr indent="0" marL="0">
-              <a:buNone/>
-            </a:pPr>
-            <a:r>
-              <a:rPr lang="en-US" sz="1100" dirty="0">
+              <a:rPr lang="en-US" sz="1400" i="1" dirty="0">
                 <a:solidFill>
                   <a:srgbClr val="8B9BB4"/>
                 </a:solidFill>
-                <a:latin typeface="Consolas" pitchFamily="34" charset="0"/>
-                <a:ea typeface="Consolas" pitchFamily="34" charset="-122"/>
-                <a:cs typeface="Consolas" pitchFamily="34" charset="-120"/>
-              </a:rPr>
-              <a:t>pnpm lint</a:t>
-            </a:r>
-            <a:endParaRPr lang="en-US" sz="1100" dirty="0"/>
-          </a:p>
-        </p:txBody>
-      </p:sp>
-      <p:sp>
-        <p:nvSpPr>
-          <p:cNvPr id="19" name="Shape 17"/>
-          <p:cNvSpPr/>
-          <p:nvPr/>
-        </p:nvSpPr>
-        <p:spPr>
-          <a:xfrm>
-            <a:off x="8092440" y="2194560"/>
-            <a:ext cx="3657600" cy="1280160"/>
+                <a:latin typeface="Calibri" pitchFamily="34" charset="0"/>
+                <a:ea typeface="Calibri" pitchFamily="34" charset="-122"/>
+                <a:cs typeface="Calibri" pitchFamily="34" charset="-120"/>
+              </a:rPr>
+              <a:t>MarketTerritory phân vùng + ProjectLead pipeline POTENTIAL → TRACKING → WON/LOST</a:t>
+            </a:r>
+            <a:endParaRPr lang="en-US" sz="1400" dirty="0"/>
+          </a:p>
+        </p:txBody>
+      </p:sp>
+      <p:sp>
+        <p:nvSpPr>
+          <p:cNvPr id="9" name="Shape 7"/>
+          <p:cNvSpPr/>
+          <p:nvPr/>
+        </p:nvSpPr>
+        <p:spPr>
+          <a:xfrm>
+            <a:off x="594360" y="1737360"/>
+            <a:ext cx="7863840" cy="4663440"/>
           </a:xfrm>
           <a:prstGeom prst="rect">
             <a:avLst/>
@@ -11583,26 +13310,245 @@
           </a:ln>
         </p:spPr>
       </p:sp>
-      <p:sp>
-        <p:nvSpPr>
-          <p:cNvPr id="20" name="Shape 18"/>
-          <p:cNvSpPr/>
-          <p:nvPr/>
-        </p:nvSpPr>
-        <p:spPr>
-          <a:xfrm>
-            <a:off x="8092440" y="2194560"/>
-            <a:ext cx="73152" cy="1280160"/>
+      <p:pic>
+        <p:nvPicPr>
+          <p:cNvPr id="10" name="Image 0" descr="/Users/vsf-thuynt519-l/Documents/GitHub/atlas-aec/docs/demo-screens/22-home-pttt.png">    </p:cNvPr>
+          <p:cNvPicPr>
+            <a:picLocks noChangeAspect="1"/>
+          </p:cNvPicPr>
+          <p:nvPr/>
+        </p:nvPicPr>
+        <p:blipFill>
+          <a:blip r:embed="rId1"/>
+          <a:srcRect l="0" r="0" t="0" b="0"/>
+          <a:stretch/>
+        </p:blipFill>
+        <p:spPr>
+          <a:xfrm>
+            <a:off x="640080" y="1783080"/>
+            <a:ext cx="7772400" cy="4572000"/>
+          </a:xfrm>
+          <a:prstGeom prst="rect">
+            <a:avLst/>
+          </a:prstGeom>
+        </p:spPr>
+      </p:pic>
+      <p:sp>
+        <p:nvSpPr>
+          <p:cNvPr id="11" name="Text 8"/>
+          <p:cNvSpPr/>
+          <p:nvPr/>
+        </p:nvSpPr>
+        <p:spPr>
+          <a:xfrm>
+            <a:off x="8778240" y="1783080"/>
+            <a:ext cx="2926080" cy="4572000"/>
+          </a:xfrm>
+          <a:prstGeom prst="rect">
+            <a:avLst/>
+          </a:prstGeom>
+          <a:noFill/>
+          <a:ln/>
+        </p:spPr>
+        <p:txBody>
+          <a:bodyPr wrap="square" lIns="0" tIns="0" rIns="0" bIns="0" rtlCol="0" anchor="t"/>
+          <a:lstStyle/>
+          <a:p>
+            <a:pPr>
+              <a:spcAft>
+                <a:spcPts val="600"/>
+              </a:spcAft>
+            </a:pPr>
+            <a:r>
+              <a:rPr lang="en-US" sz="1300" dirty="0">
+                <a:solidFill>
+                  <a:srgbClr val="F1F5F9"/>
+                </a:solidFill>
+                <a:latin typeface="Calibri" pitchFamily="34" charset="0"/>
+                <a:ea typeface="Calibri" pitchFamily="34" charset="-122"/>
+                <a:cs typeface="Calibri" pitchFamily="34" charset="-120"/>
+              </a:rPr>
+              <a:t>Widget cards:</a:t>
+            </a:r>
+            <a:endParaRPr lang="en-US" sz="1300" dirty="0"/>
+          </a:p>
+          <a:p>
+            <a:pPr>
+              <a:spcAft>
+                <a:spcPts val="600"/>
+              </a:spcAft>
+            </a:pPr>
+            <a:r>
+              <a:rPr lang="en-US" sz="1300" dirty="0">
+                <a:solidFill>
+                  <a:srgbClr val="F1F5F9"/>
+                </a:solidFill>
+                <a:latin typeface="Calibri" pitchFamily="34" charset="0"/>
+                <a:ea typeface="Calibri" pitchFamily="34" charset="-122"/>
+                <a:cs typeface="Calibri" pitchFamily="34" charset="-120"/>
+              </a:rPr>
+              <a:t>  Địa bàn + lead count</a:t>
+            </a:r>
+            <a:endParaRPr lang="en-US" sz="1300" dirty="0"/>
+          </a:p>
+          <a:p>
+            <a:pPr>
+              <a:spcAft>
+                <a:spcPts val="600"/>
+              </a:spcAft>
+            </a:pPr>
+            <a:r>
+              <a:rPr lang="en-US" sz="1300" dirty="0">
+                <a:solidFill>
+                  <a:srgbClr val="F1F5F9"/>
+                </a:solidFill>
+                <a:latin typeface="Calibri" pitchFamily="34" charset="0"/>
+                <a:ea typeface="Calibri" pitchFamily="34" charset="-122"/>
+                <a:cs typeface="Calibri" pitchFamily="34" charset="-120"/>
+              </a:rPr>
+              <a:t>  Pipeline (Track+Pot.)</a:t>
+            </a:r>
+            <a:endParaRPr lang="en-US" sz="1300" dirty="0"/>
+          </a:p>
+          <a:p>
+            <a:pPr>
+              <a:spcAft>
+                <a:spcPts val="600"/>
+              </a:spcAft>
+            </a:pPr>
+            <a:endParaRPr lang="en-US" sz="1300" dirty="0"/>
+          </a:p>
+          <a:p>
+            <a:pPr>
+              <a:spcAft>
+                <a:spcPts val="600"/>
+              </a:spcAft>
+            </a:pPr>
+            <a:r>
+              <a:rPr lang="en-US" sz="1300" dirty="0">
+                <a:solidFill>
+                  <a:srgbClr val="F1F5F9"/>
+                </a:solidFill>
+                <a:latin typeface="Calibri" pitchFamily="34" charset="0"/>
+                <a:ea typeface="Calibri" pitchFamily="34" charset="-122"/>
+                <a:cs typeface="Calibri" pitchFamily="34" charset="-120"/>
+              </a:rPr>
+              <a:t>Khi WON → có thể chuyển</a:t>
+            </a:r>
+            <a:endParaRPr lang="en-US" sz="1300" dirty="0"/>
+          </a:p>
+          <a:p>
+            <a:pPr>
+              <a:spcAft>
+                <a:spcPts val="600"/>
+              </a:spcAft>
+            </a:pPr>
+            <a:r>
+              <a:rPr lang="en-US" sz="1300" dirty="0">
+                <a:solidFill>
+                  <a:srgbClr val="F1F5F9"/>
+                </a:solidFill>
+                <a:latin typeface="Calibri" pitchFamily="34" charset="0"/>
+                <a:ea typeface="Calibri" pitchFamily="34" charset="-122"/>
+                <a:cs typeface="Calibri" pitchFamily="34" charset="-120"/>
+              </a:rPr>
+              <a:t>thành Project chính thức.</a:t>
+            </a:r>
+            <a:endParaRPr lang="en-US" sz="1300" dirty="0"/>
+          </a:p>
+        </p:txBody>
+      </p:sp>
+      <p:sp>
+        <p:nvSpPr>
+          <p:cNvPr id="12" name="Text 9"/>
+          <p:cNvSpPr/>
+          <p:nvPr/>
+        </p:nvSpPr>
+        <p:spPr>
+          <a:xfrm>
+            <a:off x="457200" y="6446520"/>
+            <a:ext cx="11247120" cy="274320"/>
+          </a:xfrm>
+          <a:prstGeom prst="rect">
+            <a:avLst/>
+          </a:prstGeom>
+          <a:noFill/>
+          <a:ln/>
+        </p:spPr>
+        <p:txBody>
+          <a:bodyPr wrap="square" lIns="0" tIns="0" rIns="0" bIns="0" rtlCol="0" anchor="ctr"/>
+          <a:lstStyle/>
+          <a:p>
+            <a:pPr indent="0" marL="0">
+              <a:buNone/>
+            </a:pPr>
+            <a:r>
+              <a:rPr lang="en-US" sz="1000" dirty="0">
+                <a:solidFill>
+                  <a:srgbClr val="475569"/>
+                </a:solidFill>
+                <a:latin typeface="Calibri" pitchFamily="34" charset="0"/>
+                <a:ea typeface="Calibri" pitchFamily="34" charset="-122"/>
+                <a:cs typeface="Calibri" pitchFamily="34" charset="-120"/>
+              </a:rPr>
+              <a:t>atlas-aec · v2 · live demo</a:t>
+            </a:r>
+            <a:endParaRPr lang="en-US" sz="1000" dirty="0"/>
+          </a:p>
+        </p:txBody>
+      </p:sp>
+    </p:spTree>
+  </p:cSld>
+  <p:clrMapOvr>
+    <a:masterClrMapping/>
+  </p:clrMapOvr>
+</p:sld>
+</file>
+
+<file path=ppt/slides/slide24.xml><?xml version="1.0" encoding="utf-8"?>
+<p:sld xmlns:a="http://schemas.openxmlformats.org/drawingml/2006/main" xmlns:r="http://schemas.openxmlformats.org/officeDocument/2006/relationships" xmlns:p="http://schemas.openxmlformats.org/presentationml/2006/main">
+  <p:cSld name="Slide 24">
+    <p:bg>
+      <p:bgPr>
+        <a:solidFill>
+          <a:srgbClr val="0B1220"/>
+        </a:solidFill>
+      </p:bgPr>
+    </p:bg>
+    <p:spTree>
+      <p:nvGrpSpPr>
+        <p:cNvPr id="1" name=""/>
+        <p:cNvGrpSpPr/>
+        <p:nvPr/>
+      </p:nvGrpSpPr>
+      <p:grpSpPr>
+        <a:xfrm>
+          <a:off x="0" y="0"/>
+          <a:ext cx="0" cy="0"/>
+          <a:chOff x="0" y="0"/>
+          <a:chExt cx="0" cy="0"/>
+        </a:xfrm>
+      </p:grpSpPr>
+      <p:sp>
+        <p:nvSpPr>
+          <p:cNvPr id="2" name="Shape 0"/>
+          <p:cNvSpPr/>
+          <p:nvPr/>
+        </p:nvSpPr>
+        <p:spPr>
+          <a:xfrm>
+            <a:off x="457200" y="320040"/>
+            <a:ext cx="292608" cy="292608"/>
           </a:xfrm>
           <a:prstGeom prst="rect">
             <a:avLst/>
           </a:prstGeom>
           <a:solidFill>
-            <a:srgbClr val="10B981"/>
+            <a:srgbClr val="3B82F6"/>
           </a:solidFill>
           <a:ln w="12700">
             <a:solidFill>
-              <a:srgbClr val="10B981"/>
+              <a:srgbClr val="3B82F6"/>
             </a:solidFill>
             <a:prstDash val="solid"/>
           </a:ln>
@@ -11610,14 +13556,53 @@
       </p:sp>
       <p:sp>
         <p:nvSpPr>
-          <p:cNvPr id="21" name="Text 19"/>
-          <p:cNvSpPr/>
-          <p:nvPr/>
-        </p:nvSpPr>
-        <p:spPr>
-          <a:xfrm>
-            <a:off x="8321040" y="2331720"/>
-            <a:ext cx="3200400" cy="457200"/>
+          <p:cNvPr id="3" name="Text 1"/>
+          <p:cNvSpPr/>
+          <p:nvPr/>
+        </p:nvSpPr>
+        <p:spPr>
+          <a:xfrm>
+            <a:off x="457200" y="320040"/>
+            <a:ext cx="292608" cy="292608"/>
+          </a:xfrm>
+          <a:prstGeom prst="rect">
+            <a:avLst/>
+          </a:prstGeom>
+          <a:noFill/>
+          <a:ln/>
+        </p:spPr>
+        <p:txBody>
+          <a:bodyPr wrap="square" lIns="0" tIns="0" rIns="0" bIns="0" rtlCol="0" anchor="ctr"/>
+          <a:lstStyle/>
+          <a:p>
+            <a:pPr algn="ctr" indent="0" marL="0">
+              <a:buNone/>
+            </a:pPr>
+            <a:r>
+              <a:rPr lang="en-US" sz="1600" b="1" dirty="0">
+                <a:solidFill>
+                  <a:srgbClr val="FFFFFF"/>
+                </a:solidFill>
+                <a:latin typeface="Calibri" pitchFamily="34" charset="0"/>
+                <a:ea typeface="Calibri" pitchFamily="34" charset="-122"/>
+                <a:cs typeface="Calibri" pitchFamily="34" charset="-120"/>
+              </a:rPr>
+              <a:t>A</a:t>
+            </a:r>
+            <a:endParaRPr lang="en-US" sz="1600" dirty="0"/>
+          </a:p>
+        </p:txBody>
+      </p:sp>
+      <p:sp>
+        <p:nvSpPr>
+          <p:cNvPr id="4" name="Text 2"/>
+          <p:cNvSpPr/>
+          <p:nvPr/>
+        </p:nvSpPr>
+        <p:spPr>
+          <a:xfrm>
+            <a:off x="822960" y="320040"/>
+            <a:ext cx="2743200" cy="292608"/>
           </a:xfrm>
           <a:prstGeom prst="rect">
             <a:avLst/>
@@ -11633,15 +13618,132 @@
               <a:buNone/>
             </a:pPr>
             <a:r>
+              <a:rPr lang="en-US" sz="1300" b="1" dirty="0">
+                <a:solidFill>
+                  <a:srgbClr val="F1F5F9"/>
+                </a:solidFill>
+                <a:latin typeface="Calibri" pitchFamily="34" charset="0"/>
+                <a:ea typeface="Calibri" pitchFamily="34" charset="-122"/>
+                <a:cs typeface="Calibri" pitchFamily="34" charset="-120"/>
+              </a:rPr>
+              <a:t>Atlas AEC</a:t>
+            </a:r>
+            <a:endParaRPr lang="en-US" sz="1300" dirty="0"/>
+          </a:p>
+        </p:txBody>
+      </p:sp>
+      <p:sp>
+        <p:nvSpPr>
+          <p:cNvPr id="5" name="Text 3"/>
+          <p:cNvSpPr/>
+          <p:nvPr/>
+        </p:nvSpPr>
+        <p:spPr>
+          <a:xfrm>
+            <a:off x="3566160" y="356616"/>
+            <a:ext cx="5486400" cy="256032"/>
+          </a:xfrm>
+          <a:prstGeom prst="rect">
+            <a:avLst/>
+          </a:prstGeom>
+          <a:noFill/>
+          <a:ln/>
+        </p:spPr>
+        <p:txBody>
+          <a:bodyPr wrap="square" lIns="0" tIns="0" rIns="0" bIns="0" rtlCol="0" anchor="ctr"/>
+          <a:lstStyle/>
+          <a:p>
+            <a:pPr indent="0" marL="0">
+              <a:buNone/>
+            </a:pPr>
+            <a:r>
+              <a:rPr lang="en-US" sz="1100" dirty="0">
+                <a:solidFill>
+                  <a:srgbClr val="8B9BB4"/>
+                </a:solidFill>
+                <a:latin typeface="Calibri" pitchFamily="34" charset="0"/>
+                <a:ea typeface="Calibri" pitchFamily="34" charset="-122"/>
+                <a:cs typeface="Calibri" pitchFamily="34" charset="-120"/>
+              </a:rPr>
+              <a:t>Viwase — Tình hình thực hiện</a:t>
+            </a:r>
+            <a:endParaRPr lang="en-US" sz="1100" dirty="0"/>
+          </a:p>
+        </p:txBody>
+      </p:sp>
+      <p:sp>
+        <p:nvSpPr>
+          <p:cNvPr id="6" name="Text 4"/>
+          <p:cNvSpPr/>
+          <p:nvPr/>
+        </p:nvSpPr>
+        <p:spPr>
+          <a:xfrm>
+            <a:off x="10881360" y="320040"/>
+            <a:ext cx="822960" cy="292608"/>
+          </a:xfrm>
+          <a:prstGeom prst="rect">
+            <a:avLst/>
+          </a:prstGeom>
+          <a:noFill/>
+          <a:ln/>
+        </p:spPr>
+        <p:txBody>
+          <a:bodyPr wrap="square" lIns="0" tIns="0" rIns="0" bIns="0" rtlCol="0" anchor="ctr"/>
+          <a:lstStyle/>
+          <a:p>
+            <a:pPr algn="r" indent="0" marL="0">
+              <a:buNone/>
+            </a:pPr>
+            <a:r>
+              <a:rPr lang="en-US" sz="1100" dirty="0">
+                <a:solidFill>
+                  <a:srgbClr val="8B9BB4"/>
+                </a:solidFill>
+                <a:latin typeface="Calibri" pitchFamily="34" charset="0"/>
+                <a:ea typeface="Calibri" pitchFamily="34" charset="-122"/>
+                <a:cs typeface="Calibri" pitchFamily="34" charset="-120"/>
+              </a:rPr>
+              <a:t>24 / 32</a:t>
+            </a:r>
+            <a:endParaRPr lang="en-US" sz="1100" dirty="0"/>
+          </a:p>
+        </p:txBody>
+      </p:sp>
+      <p:sp>
+        <p:nvSpPr>
+          <p:cNvPr id="7" name="Text 5"/>
+          <p:cNvSpPr/>
+          <p:nvPr/>
+        </p:nvSpPr>
+        <p:spPr>
+          <a:xfrm>
+            <a:off x="457200" y="822960"/>
+            <a:ext cx="11247120" cy="502920"/>
+          </a:xfrm>
+          <a:prstGeom prst="rect">
+            <a:avLst/>
+          </a:prstGeom>
+          <a:noFill/>
+          <a:ln/>
+        </p:spPr>
+        <p:txBody>
+          <a:bodyPr wrap="square" lIns="0" tIns="0" rIns="0" bIns="0" rtlCol="0" anchor="ctr"/>
+          <a:lstStyle/>
+          <a:p>
+            <a:pPr indent="0" marL="0">
+              <a:buNone/>
+            </a:pPr>
+            <a:r>
               <a:rPr lang="en-US" sz="2600" b="1" dirty="0">
                 <a:solidFill>
-                  <a:srgbClr val="10B981"/>
-                </a:solidFill>
-                <a:latin typeface="Calibri" pitchFamily="34" charset="0"/>
-                <a:ea typeface="Calibri" pitchFamily="34" charset="-122"/>
-                <a:cs typeface="Calibri" pitchFamily="34" charset="-120"/>
-              </a:rPr>
-              <a:t>10 / 10</a:t>
+                  <a:srgbClr val="F1F5F9"/>
+                </a:solidFill>
+                <a:latin typeface="Calibri" pitchFamily="34" charset="0"/>
+                <a:ea typeface="Calibri" pitchFamily="34" charset="-122"/>
+                <a:cs typeface="Calibri" pitchFamily="34" charset="-120"/>
+              </a:rPr>
+              <a:t>Per-project drill-down · Tab 1 detail (handwritten spec)</a:t>
             </a:r>
             <a:endParaRPr lang="en-US" sz="2600" dirty="0"/>
           </a:p>
@@ -11649,14 +13751,14 @@
       </p:sp>
       <p:sp>
         <p:nvSpPr>
-          <p:cNvPr id="22" name="Text 20"/>
-          <p:cNvSpPr/>
-          <p:nvPr/>
-        </p:nvSpPr>
-        <p:spPr>
-          <a:xfrm>
-            <a:off x="8321040" y="2788920"/>
-            <a:ext cx="3200400" cy="292608"/>
+          <p:cNvPr id="8" name="Text 6"/>
+          <p:cNvSpPr/>
+          <p:nvPr/>
+        </p:nvSpPr>
+        <p:spPr>
+          <a:xfrm>
+            <a:off x="457200" y="1325880"/>
+            <a:ext cx="11247120" cy="292608"/>
           </a:xfrm>
           <a:prstGeom prst="rect">
             <a:avLst/>
@@ -11672,69 +13774,30 @@
               <a:buNone/>
             </a:pPr>
             <a:r>
-              <a:rPr lang="en-US" sz="1300" b="1" dirty="0">
-                <a:solidFill>
-                  <a:srgbClr val="F1F5F9"/>
-                </a:solidFill>
-                <a:latin typeface="Calibri" pitchFamily="34" charset="0"/>
-                <a:ea typeface="Calibri" pitchFamily="34" charset="-122"/>
-                <a:cs typeface="Calibri" pitchFamily="34" charset="-120"/>
-              </a:rPr>
-              <a:t>Vitest FSM tests pass</a:t>
-            </a:r>
-            <a:endParaRPr lang="en-US" sz="1300" dirty="0"/>
-          </a:p>
-        </p:txBody>
-      </p:sp>
-      <p:sp>
-        <p:nvSpPr>
-          <p:cNvPr id="23" name="Text 21"/>
-          <p:cNvSpPr/>
-          <p:nvPr/>
-        </p:nvSpPr>
-        <p:spPr>
-          <a:xfrm>
-            <a:off x="8321040" y="3063240"/>
-            <a:ext cx="3200400" cy="320040"/>
-          </a:xfrm>
-          <a:prstGeom prst="rect">
-            <a:avLst/>
-          </a:prstGeom>
-          <a:noFill/>
-          <a:ln/>
-        </p:spPr>
-        <p:txBody>
-          <a:bodyPr wrap="square" lIns="0" tIns="0" rIns="0" bIns="0" rtlCol="0" anchor="ctr"/>
-          <a:lstStyle/>
-          <a:p>
-            <a:pPr indent="0" marL="0">
-              <a:buNone/>
-            </a:pPr>
-            <a:r>
-              <a:rPr lang="en-US" sz="1100" dirty="0">
+              <a:rPr lang="en-US" sz="1400" i="1" dirty="0">
                 <a:solidFill>
                   <a:srgbClr val="8B9BB4"/>
                 </a:solidFill>
-                <a:latin typeface="Consolas" pitchFamily="34" charset="0"/>
-                <a:ea typeface="Consolas" pitchFamily="34" charset="-122"/>
-                <a:cs typeface="Consolas" pitchFamily="34" charset="-120"/>
-              </a:rPr>
-              <a:t>pnpm test</a:t>
-            </a:r>
-            <a:endParaRPr lang="en-US" sz="1100" dirty="0"/>
-          </a:p>
-        </p:txBody>
-      </p:sp>
-      <p:sp>
-        <p:nvSpPr>
-          <p:cNvPr id="24" name="Shape 22"/>
-          <p:cNvSpPr/>
-          <p:nvPr/>
-        </p:nvSpPr>
-        <p:spPr>
-          <a:xfrm>
-            <a:off x="411480" y="3657600"/>
-            <a:ext cx="3657600" cy="1280160"/>
+                <a:latin typeface="Calibri" pitchFamily="34" charset="0"/>
+                <a:ea typeface="Calibri" pitchFamily="34" charset="-122"/>
+                <a:cs typeface="Calibri" pitchFamily="34" charset="-120"/>
+              </a:rPr>
+              <a:t>Tên · Nội dung công việc theo HĐ (inline-edit) · Các đơn vị thực hiện · Timeline cập nhật</a:t>
+            </a:r>
+            <a:endParaRPr lang="en-US" sz="1400" dirty="0"/>
+          </a:p>
+        </p:txBody>
+      </p:sp>
+      <p:sp>
+        <p:nvSpPr>
+          <p:cNvPr id="9" name="Shape 7"/>
+          <p:cNvSpPr/>
+          <p:nvPr/>
+        </p:nvSpPr>
+        <p:spPr>
+          <a:xfrm>
+            <a:off x="594360" y="1737360"/>
+            <a:ext cx="7863840" cy="4663440"/>
           </a:xfrm>
           <a:prstGeom prst="rect">
             <a:avLst/>
@@ -11750,26 +13813,359 @@
           </a:ln>
         </p:spPr>
       </p:sp>
-      <p:sp>
-        <p:nvSpPr>
-          <p:cNvPr id="25" name="Shape 23"/>
-          <p:cNvSpPr/>
-          <p:nvPr/>
-        </p:nvSpPr>
-        <p:spPr>
-          <a:xfrm>
-            <a:off x="411480" y="3657600"/>
-            <a:ext cx="73152" cy="1280160"/>
+      <p:pic>
+        <p:nvPicPr>
+          <p:cNvPr id="10" name="Image 0" descr="/Users/vsf-thuynt519-l/Documents/GitHub/atlas-aec/docs/demo-screens/23-tinh-hinh.png">    </p:cNvPr>
+          <p:cNvPicPr>
+            <a:picLocks noChangeAspect="1"/>
+          </p:cNvPicPr>
+          <p:nvPr/>
+        </p:nvPicPr>
+        <p:blipFill>
+          <a:blip r:embed="rId1"/>
+          <a:srcRect l="0" r="0" t="0" b="0"/>
+          <a:stretch/>
+        </p:blipFill>
+        <p:spPr>
+          <a:xfrm>
+            <a:off x="640080" y="1783080"/>
+            <a:ext cx="7772400" cy="4572000"/>
+          </a:xfrm>
+          <a:prstGeom prst="rect">
+            <a:avLst/>
+          </a:prstGeom>
+        </p:spPr>
+      </p:pic>
+      <p:sp>
+        <p:nvSpPr>
+          <p:cNvPr id="11" name="Text 8"/>
+          <p:cNvSpPr/>
+          <p:nvPr/>
+        </p:nvSpPr>
+        <p:spPr>
+          <a:xfrm>
+            <a:off x="8778240" y="1783080"/>
+            <a:ext cx="2926080" cy="4572000"/>
+          </a:xfrm>
+          <a:prstGeom prst="rect">
+            <a:avLst/>
+          </a:prstGeom>
+          <a:noFill/>
+          <a:ln/>
+        </p:spPr>
+        <p:txBody>
+          <a:bodyPr wrap="square" lIns="0" tIns="0" rIns="0" bIns="0" rtlCol="0" anchor="t"/>
+          <a:lstStyle/>
+          <a:p>
+            <a:pPr>
+              <a:spcAft>
+                <a:spcPts val="600"/>
+              </a:spcAft>
+            </a:pPr>
+            <a:r>
+              <a:rPr lang="en-US" sz="1300" dirty="0">
+                <a:solidFill>
+                  <a:srgbClr val="F1F5F9"/>
+                </a:solidFill>
+                <a:latin typeface="Calibri" pitchFamily="34" charset="0"/>
+                <a:ea typeface="Calibri" pitchFamily="34" charset="-122"/>
+                <a:cs typeface="Calibri" pitchFamily="34" charset="-120"/>
+              </a:rPr>
+              <a:t>4 mục theo ghi chú:</a:t>
+            </a:r>
+            <a:endParaRPr lang="en-US" sz="1300" dirty="0"/>
+          </a:p>
+          <a:p>
+            <a:pPr>
+              <a:spcAft>
+                <a:spcPts val="600"/>
+              </a:spcAft>
+            </a:pPr>
+            <a:r>
+              <a:rPr lang="en-US" sz="1300" dirty="0">
+                <a:solidFill>
+                  <a:srgbClr val="F1F5F9"/>
+                </a:solidFill>
+                <a:latin typeface="Calibri" pitchFamily="34" charset="0"/>
+                <a:ea typeface="Calibri" pitchFamily="34" charset="-122"/>
+                <a:cs typeface="Calibri" pitchFamily="34" charset="-120"/>
+              </a:rPr>
+              <a:t>  Tên dự án (header)</a:t>
+            </a:r>
+            <a:endParaRPr lang="en-US" sz="1300" dirty="0"/>
+          </a:p>
+          <a:p>
+            <a:pPr>
+              <a:spcAft>
+                <a:spcPts val="600"/>
+              </a:spcAft>
+            </a:pPr>
+            <a:r>
+              <a:rPr lang="en-US" sz="1300" dirty="0">
+                <a:solidFill>
+                  <a:srgbClr val="F1F5F9"/>
+                </a:solidFill>
+                <a:latin typeface="Calibri" pitchFamily="34" charset="0"/>
+                <a:ea typeface="Calibri" pitchFamily="34" charset="-122"/>
+                <a:cs typeface="Calibri" pitchFamily="34" charset="-120"/>
+              </a:rPr>
+              <a:t>  Nội dung HĐ (textarea</a:t>
+            </a:r>
+            <a:endParaRPr lang="en-US" sz="1300" dirty="0"/>
+          </a:p>
+          <a:p>
+            <a:pPr>
+              <a:spcAft>
+                <a:spcPts val="600"/>
+              </a:spcAft>
+            </a:pPr>
+            <a:r>
+              <a:rPr lang="en-US" sz="1300" dirty="0">
+                <a:solidFill>
+                  <a:srgbClr val="F1F5F9"/>
+                </a:solidFill>
+                <a:latin typeface="Calibri" pitchFamily="34" charset="0"/>
+                <a:ea typeface="Calibri" pitchFamily="34" charset="-122"/>
+                <a:cs typeface="Calibri" pitchFamily="34" charset="-120"/>
+              </a:rPr>
+              <a:t>    inline-edit PATCH)</a:t>
+            </a:r>
+            <a:endParaRPr lang="en-US" sz="1300" dirty="0"/>
+          </a:p>
+          <a:p>
+            <a:pPr>
+              <a:spcAft>
+                <a:spcPts val="600"/>
+              </a:spcAft>
+            </a:pPr>
+            <a:r>
+              <a:rPr lang="en-US" sz="1300" dirty="0">
+                <a:solidFill>
+                  <a:srgbClr val="F1F5F9"/>
+                </a:solidFill>
+                <a:latin typeface="Calibri" pitchFamily="34" charset="0"/>
+                <a:ea typeface="Calibri" pitchFamily="34" charset="-122"/>
+                <a:cs typeface="Calibri" pitchFamily="34" charset="-120"/>
+              </a:rPr>
+              <a:t>  Đơn vị (stakeholders)</a:t>
+            </a:r>
+            <a:endParaRPr lang="en-US" sz="1300" dirty="0"/>
+          </a:p>
+          <a:p>
+            <a:pPr>
+              <a:spcAft>
+                <a:spcPts val="600"/>
+              </a:spcAft>
+            </a:pPr>
+            <a:r>
+              <a:rPr lang="en-US" sz="1300" dirty="0">
+                <a:solidFill>
+                  <a:srgbClr val="F1F5F9"/>
+                </a:solidFill>
+                <a:latin typeface="Calibri" pitchFamily="34" charset="0"/>
+                <a:ea typeface="Calibri" pitchFamily="34" charset="-122"/>
+                <a:cs typeface="Calibri" pitchFamily="34" charset="-120"/>
+              </a:rPr>
+              <a:t>  Tình hình (timeline)</a:t>
+            </a:r>
+            <a:endParaRPr lang="en-US" sz="1300" dirty="0"/>
+          </a:p>
+          <a:p>
+            <a:pPr>
+              <a:spcAft>
+                <a:spcPts val="600"/>
+              </a:spcAft>
+            </a:pPr>
+            <a:endParaRPr lang="en-US" sz="1300" dirty="0"/>
+          </a:p>
+          <a:p>
+            <a:pPr>
+              <a:spcAft>
+                <a:spcPts val="600"/>
+              </a:spcAft>
+            </a:pPr>
+            <a:r>
+              <a:rPr lang="en-US" sz="1300" dirty="0">
+                <a:solidFill>
+                  <a:srgbClr val="F1F5F9"/>
+                </a:solidFill>
+                <a:latin typeface="Calibri" pitchFamily="34" charset="0"/>
+                <a:ea typeface="Calibri" pitchFamily="34" charset="-122"/>
+                <a:cs typeface="Calibri" pitchFamily="34" charset="-120"/>
+              </a:rPr>
+              <a:t>ProjectNav dept-aware:</a:t>
+            </a:r>
+            <a:endParaRPr lang="en-US" sz="1300" dirty="0"/>
+          </a:p>
+          <a:p>
+            <a:pPr>
+              <a:spcAft>
+                <a:spcPts val="600"/>
+              </a:spcAft>
+            </a:pPr>
+            <a:r>
+              <a:rPr lang="en-US" sz="1300" dirty="0">
+                <a:solidFill>
+                  <a:srgbClr val="F1F5F9"/>
+                </a:solidFill>
+                <a:latin typeface="Calibri" pitchFamily="34" charset="0"/>
+                <a:ea typeface="Calibri" pitchFamily="34" charset="-122"/>
+                <a:cs typeface="Calibri" pitchFamily="34" charset="-120"/>
+              </a:rPr>
+              <a:t>chỉ AEC tabs cho</a:t>
+            </a:r>
+            <a:endParaRPr lang="en-US" sz="1300" dirty="0"/>
+          </a:p>
+          <a:p>
+            <a:pPr>
+              <a:spcAft>
+                <a:spcPts val="600"/>
+              </a:spcAft>
+            </a:pPr>
+            <a:r>
+              <a:rPr lang="en-US" sz="1300" dirty="0">
+                <a:solidFill>
+                  <a:srgbClr val="F1F5F9"/>
+                </a:solidFill>
+                <a:latin typeface="Calibri" pitchFamily="34" charset="0"/>
+                <a:ea typeface="Calibri" pitchFamily="34" charset="-122"/>
+                <a:cs typeface="Calibri" pitchFamily="34" charset="-120"/>
+              </a:rPr>
+              <a:t>CONG_VIEC; ẩn cho phòng</a:t>
+            </a:r>
+            <a:endParaRPr lang="en-US" sz="1300" dirty="0"/>
+          </a:p>
+          <a:p>
+            <a:pPr>
+              <a:spcAft>
+                <a:spcPts val="600"/>
+              </a:spcAft>
+            </a:pPr>
+            <a:r>
+              <a:rPr lang="en-US" sz="1300" dirty="0">
+                <a:solidFill>
+                  <a:srgbClr val="F1F5F9"/>
+                </a:solidFill>
+                <a:latin typeface="Calibri" pitchFamily="34" charset="0"/>
+                <a:ea typeface="Calibri" pitchFamily="34" charset="-122"/>
+                <a:cs typeface="Calibri" pitchFamily="34" charset="-120"/>
+              </a:rPr>
+              <a:t>khác (HANH_CHINH/TCKT/</a:t>
+            </a:r>
+            <a:endParaRPr lang="en-US" sz="1300" dirty="0"/>
+          </a:p>
+          <a:p>
+            <a:pPr>
+              <a:spcAft>
+                <a:spcPts val="600"/>
+              </a:spcAft>
+            </a:pPr>
+            <a:r>
+              <a:rPr lang="en-US" sz="1300" dirty="0">
+                <a:solidFill>
+                  <a:srgbClr val="F1F5F9"/>
+                </a:solidFill>
+                <a:latin typeface="Calibri" pitchFamily="34" charset="0"/>
+                <a:ea typeface="Calibri" pitchFamily="34" charset="-122"/>
+                <a:cs typeface="Calibri" pitchFamily="34" charset="-120"/>
+              </a:rPr>
+              <a:t>PTTT/CONG_VIEC_KHAC).</a:t>
+            </a:r>
+            <a:endParaRPr lang="en-US" sz="1300" dirty="0"/>
+          </a:p>
+        </p:txBody>
+      </p:sp>
+      <p:sp>
+        <p:nvSpPr>
+          <p:cNvPr id="12" name="Text 9"/>
+          <p:cNvSpPr/>
+          <p:nvPr/>
+        </p:nvSpPr>
+        <p:spPr>
+          <a:xfrm>
+            <a:off x="457200" y="6446520"/>
+            <a:ext cx="11247120" cy="274320"/>
+          </a:xfrm>
+          <a:prstGeom prst="rect">
+            <a:avLst/>
+          </a:prstGeom>
+          <a:noFill/>
+          <a:ln/>
+        </p:spPr>
+        <p:txBody>
+          <a:bodyPr wrap="square" lIns="0" tIns="0" rIns="0" bIns="0" rtlCol="0" anchor="ctr"/>
+          <a:lstStyle/>
+          <a:p>
+            <a:pPr indent="0" marL="0">
+              <a:buNone/>
+            </a:pPr>
+            <a:r>
+              <a:rPr lang="en-US" sz="1000" dirty="0">
+                <a:solidFill>
+                  <a:srgbClr val="475569"/>
+                </a:solidFill>
+                <a:latin typeface="Calibri" pitchFamily="34" charset="0"/>
+                <a:ea typeface="Calibri" pitchFamily="34" charset="-122"/>
+                <a:cs typeface="Calibri" pitchFamily="34" charset="-120"/>
+              </a:rPr>
+              <a:t>atlas-aec · v2 · live demo</a:t>
+            </a:r>
+            <a:endParaRPr lang="en-US" sz="1000" dirty="0"/>
+          </a:p>
+        </p:txBody>
+      </p:sp>
+    </p:spTree>
+  </p:cSld>
+  <p:clrMapOvr>
+    <a:masterClrMapping/>
+  </p:clrMapOvr>
+</p:sld>
+</file>
+
+<file path=ppt/slides/slide25.xml><?xml version="1.0" encoding="utf-8"?>
+<p:sld xmlns:a="http://schemas.openxmlformats.org/drawingml/2006/main" xmlns:r="http://schemas.openxmlformats.org/officeDocument/2006/relationships" xmlns:p="http://schemas.openxmlformats.org/presentationml/2006/main">
+  <p:cSld name="Slide 25">
+    <p:bg>
+      <p:bgPr>
+        <a:solidFill>
+          <a:srgbClr val="0B1220"/>
+        </a:solidFill>
+      </p:bgPr>
+    </p:bg>
+    <p:spTree>
+      <p:nvGrpSpPr>
+        <p:cNvPr id="1" name=""/>
+        <p:cNvGrpSpPr/>
+        <p:nvPr/>
+      </p:nvGrpSpPr>
+      <p:grpSpPr>
+        <a:xfrm>
+          <a:off x="0" y="0"/>
+          <a:ext cx="0" cy="0"/>
+          <a:chOff x="0" y="0"/>
+          <a:chExt cx="0" cy="0"/>
+        </a:xfrm>
+      </p:grpSpPr>
+      <p:sp>
+        <p:nvSpPr>
+          <p:cNvPr id="2" name="Shape 0"/>
+          <p:cNvSpPr/>
+          <p:nvPr/>
+        </p:nvSpPr>
+        <p:spPr>
+          <a:xfrm>
+            <a:off x="457200" y="320040"/>
+            <a:ext cx="292608" cy="292608"/>
           </a:xfrm>
           <a:prstGeom prst="rect">
             <a:avLst/>
           </a:prstGeom>
           <a:solidFill>
-            <a:srgbClr val="10B981"/>
+            <a:srgbClr val="3B82F6"/>
           </a:solidFill>
           <a:ln w="12700">
             <a:solidFill>
-              <a:srgbClr val="10B981"/>
+              <a:srgbClr val="3B82F6"/>
             </a:solidFill>
             <a:prstDash val="solid"/>
           </a:ln>
@@ -11777,14 +14173,53 @@
       </p:sp>
       <p:sp>
         <p:nvSpPr>
-          <p:cNvPr id="26" name="Text 24"/>
-          <p:cNvSpPr/>
-          <p:nvPr/>
-        </p:nvSpPr>
-        <p:spPr>
-          <a:xfrm>
-            <a:off x="640080" y="3794760"/>
-            <a:ext cx="3200400" cy="457200"/>
+          <p:cNvPr id="3" name="Text 1"/>
+          <p:cNvSpPr/>
+          <p:nvPr/>
+        </p:nvSpPr>
+        <p:spPr>
+          <a:xfrm>
+            <a:off x="457200" y="320040"/>
+            <a:ext cx="292608" cy="292608"/>
+          </a:xfrm>
+          <a:prstGeom prst="rect">
+            <a:avLst/>
+          </a:prstGeom>
+          <a:noFill/>
+          <a:ln/>
+        </p:spPr>
+        <p:txBody>
+          <a:bodyPr wrap="square" lIns="0" tIns="0" rIns="0" bIns="0" rtlCol="0" anchor="ctr"/>
+          <a:lstStyle/>
+          <a:p>
+            <a:pPr algn="ctr" indent="0" marL="0">
+              <a:buNone/>
+            </a:pPr>
+            <a:r>
+              <a:rPr lang="en-US" sz="1600" b="1" dirty="0">
+                <a:solidFill>
+                  <a:srgbClr val="FFFFFF"/>
+                </a:solidFill>
+                <a:latin typeface="Calibri" pitchFamily="34" charset="0"/>
+                <a:ea typeface="Calibri" pitchFamily="34" charset="-122"/>
+                <a:cs typeface="Calibri" pitchFamily="34" charset="-120"/>
+              </a:rPr>
+              <a:t>A</a:t>
+            </a:r>
+            <a:endParaRPr lang="en-US" sz="1600" dirty="0"/>
+          </a:p>
+        </p:txBody>
+      </p:sp>
+      <p:sp>
+        <p:nvSpPr>
+          <p:cNvPr id="4" name="Text 2"/>
+          <p:cNvSpPr/>
+          <p:nvPr/>
+        </p:nvSpPr>
+        <p:spPr>
+          <a:xfrm>
+            <a:off x="822960" y="320040"/>
+            <a:ext cx="2743200" cy="292608"/>
           </a:xfrm>
           <a:prstGeom prst="rect">
             <a:avLst/>
@@ -11800,15 +14235,132 @@
               <a:buNone/>
             </a:pPr>
             <a:r>
+              <a:rPr lang="en-US" sz="1300" b="1" dirty="0">
+                <a:solidFill>
+                  <a:srgbClr val="F1F5F9"/>
+                </a:solidFill>
+                <a:latin typeface="Calibri" pitchFamily="34" charset="0"/>
+                <a:ea typeface="Calibri" pitchFamily="34" charset="-122"/>
+                <a:cs typeface="Calibri" pitchFamily="34" charset="-120"/>
+              </a:rPr>
+              <a:t>Atlas AEC</a:t>
+            </a:r>
+            <a:endParaRPr lang="en-US" sz="1300" dirty="0"/>
+          </a:p>
+        </p:txBody>
+      </p:sp>
+      <p:sp>
+        <p:nvSpPr>
+          <p:cNvPr id="5" name="Text 3"/>
+          <p:cNvSpPr/>
+          <p:nvPr/>
+        </p:nvSpPr>
+        <p:spPr>
+          <a:xfrm>
+            <a:off x="3566160" y="356616"/>
+            <a:ext cx="5486400" cy="256032"/>
+          </a:xfrm>
+          <a:prstGeom prst="rect">
+            <a:avLst/>
+          </a:prstGeom>
+          <a:noFill/>
+          <a:ln/>
+        </p:spPr>
+        <p:txBody>
+          <a:bodyPr wrap="square" lIns="0" tIns="0" rIns="0" bIns="0" rtlCol="0" anchor="ctr"/>
+          <a:lstStyle/>
+          <a:p>
+            <a:pPr indent="0" marL="0">
+              <a:buNone/>
+            </a:pPr>
+            <a:r>
+              <a:rPr lang="en-US" sz="1100" dirty="0">
+                <a:solidFill>
+                  <a:srgbClr val="8B9BB4"/>
+                </a:solidFill>
+                <a:latin typeface="Calibri" pitchFamily="34" charset="0"/>
+                <a:ea typeface="Calibri" pitchFamily="34" charset="-122"/>
+                <a:cs typeface="Calibri" pitchFamily="34" charset="-120"/>
+              </a:rPr>
+              <a:t>Hành chính — Văn bản nội bộ</a:t>
+            </a:r>
+            <a:endParaRPr lang="en-US" sz="1100" dirty="0"/>
+          </a:p>
+        </p:txBody>
+      </p:sp>
+      <p:sp>
+        <p:nvSpPr>
+          <p:cNvPr id="6" name="Text 4"/>
+          <p:cNvSpPr/>
+          <p:nvPr/>
+        </p:nvSpPr>
+        <p:spPr>
+          <a:xfrm>
+            <a:off x="10881360" y="320040"/>
+            <a:ext cx="822960" cy="292608"/>
+          </a:xfrm>
+          <a:prstGeom prst="rect">
+            <a:avLst/>
+          </a:prstGeom>
+          <a:noFill/>
+          <a:ln/>
+        </p:spPr>
+        <p:txBody>
+          <a:bodyPr wrap="square" lIns="0" tIns="0" rIns="0" bIns="0" rtlCol="0" anchor="ctr"/>
+          <a:lstStyle/>
+          <a:p>
+            <a:pPr algn="r" indent="0" marL="0">
+              <a:buNone/>
+            </a:pPr>
+            <a:r>
+              <a:rPr lang="en-US" sz="1100" dirty="0">
+                <a:solidFill>
+                  <a:srgbClr val="8B9BB4"/>
+                </a:solidFill>
+                <a:latin typeface="Calibri" pitchFamily="34" charset="0"/>
+                <a:ea typeface="Calibri" pitchFamily="34" charset="-122"/>
+                <a:cs typeface="Calibri" pitchFamily="34" charset="-120"/>
+              </a:rPr>
+              <a:t>25 / 32</a:t>
+            </a:r>
+            <a:endParaRPr lang="en-US" sz="1100" dirty="0"/>
+          </a:p>
+        </p:txBody>
+      </p:sp>
+      <p:sp>
+        <p:nvSpPr>
+          <p:cNvPr id="7" name="Text 5"/>
+          <p:cNvSpPr/>
+          <p:nvPr/>
+        </p:nvSpPr>
+        <p:spPr>
+          <a:xfrm>
+            <a:off x="457200" y="822960"/>
+            <a:ext cx="11247120" cy="502920"/>
+          </a:xfrm>
+          <a:prstGeom prst="rect">
+            <a:avLst/>
+          </a:prstGeom>
+          <a:noFill/>
+          <a:ln/>
+        </p:spPr>
+        <p:txBody>
+          <a:bodyPr wrap="square" lIns="0" tIns="0" rIns="0" bIns="0" rtlCol="0" anchor="ctr"/>
+          <a:lstStyle/>
+          <a:p>
+            <a:pPr indent="0" marL="0">
+              <a:buNone/>
+            </a:pPr>
+            <a:r>
               <a:rPr lang="en-US" sz="2600" b="1" dirty="0">
                 <a:solidFill>
-                  <a:srgbClr val="10B981"/>
-                </a:solidFill>
-                <a:latin typeface="Calibri" pitchFamily="34" charset="0"/>
-                <a:ea typeface="Calibri" pitchFamily="34" charset="-122"/>
-                <a:cs typeface="Calibri" pitchFamily="34" charset="-120"/>
-              </a:rPr>
-              <a:t>58 routes</a:t>
+                  <a:srgbClr val="F1F5F9"/>
+                </a:solidFill>
+                <a:latin typeface="Calibri" pitchFamily="34" charset="0"/>
+                <a:ea typeface="Calibri" pitchFamily="34" charset="-122"/>
+                <a:cs typeface="Calibri" pitchFamily="34" charset="-120"/>
+              </a:rPr>
+              <a:t>Văn bản nội bộ · Quyết định · Thông báo · Quy chế</a:t>
             </a:r>
             <a:endParaRPr lang="en-US" sz="2600" dirty="0"/>
           </a:p>
@@ -11816,14 +14368,14 @@
       </p:sp>
       <p:sp>
         <p:nvSpPr>
-          <p:cNvPr id="27" name="Text 25"/>
-          <p:cNvSpPr/>
-          <p:nvPr/>
-        </p:nvSpPr>
-        <p:spPr>
-          <a:xfrm>
-            <a:off x="640080" y="4251960"/>
-            <a:ext cx="3200400" cy="292608"/>
+          <p:cNvPr id="8" name="Text 6"/>
+          <p:cNvSpPr/>
+          <p:nvPr/>
+        </p:nvSpPr>
+        <p:spPr>
+          <a:xfrm>
+            <a:off x="457200" y="1325880"/>
+            <a:ext cx="11247120" cy="292608"/>
           </a:xfrm>
           <a:prstGeom prst="rect">
             <a:avLst/>
@@ -11839,69 +14391,30 @@
               <a:buNone/>
             </a:pPr>
             <a:r>
-              <a:rPr lang="en-US" sz="1300" b="1" dirty="0">
-                <a:solidFill>
-                  <a:srgbClr val="F1F5F9"/>
-                </a:solidFill>
-                <a:latin typeface="Calibri" pitchFamily="34" charset="0"/>
-                <a:ea typeface="Calibri" pitchFamily="34" charset="-122"/>
-                <a:cs typeface="Calibri" pitchFamily="34" charset="-120"/>
-              </a:rPr>
-              <a:t>Production build OK</a:t>
-            </a:r>
-            <a:endParaRPr lang="en-US" sz="1300" dirty="0"/>
-          </a:p>
-        </p:txBody>
-      </p:sp>
-      <p:sp>
-        <p:nvSpPr>
-          <p:cNvPr id="28" name="Text 26"/>
-          <p:cNvSpPr/>
-          <p:nvPr/>
-        </p:nvSpPr>
-        <p:spPr>
-          <a:xfrm>
-            <a:off x="640080" y="4526280"/>
-            <a:ext cx="3200400" cy="320040"/>
-          </a:xfrm>
-          <a:prstGeom prst="rect">
-            <a:avLst/>
-          </a:prstGeom>
-          <a:noFill/>
-          <a:ln/>
-        </p:spPr>
-        <p:txBody>
-          <a:bodyPr wrap="square" lIns="0" tIns="0" rIns="0" bIns="0" rtlCol="0" anchor="ctr"/>
-          <a:lstStyle/>
-          <a:p>
-            <a:pPr indent="0" marL="0">
-              <a:buNone/>
-            </a:pPr>
-            <a:r>
-              <a:rPr lang="en-US" sz="1100" dirty="0">
+              <a:rPr lang="en-US" sz="1400" i="1" dirty="0">
                 <a:solidFill>
                   <a:srgbClr val="8B9BB4"/>
                 </a:solidFill>
-                <a:latin typeface="Consolas" pitchFamily="34" charset="0"/>
-                <a:ea typeface="Consolas" pitchFamily="34" charset="-122"/>
-                <a:cs typeface="Consolas" pitchFamily="34" charset="-120"/>
-              </a:rPr>
-              <a:t>pnpm build</a:t>
-            </a:r>
-            <a:endParaRPr lang="en-US" sz="1100" dirty="0"/>
-          </a:p>
-        </p:txBody>
-      </p:sp>
-      <p:sp>
-        <p:nvSpPr>
-          <p:cNvPr id="29" name="Shape 27"/>
-          <p:cNvSpPr/>
-          <p:nvPr/>
-        </p:nvSpPr>
-        <p:spPr>
-          <a:xfrm>
-            <a:off x="4251960" y="3657600"/>
-            <a:ext cx="3657600" cy="1280160"/>
+                <a:latin typeface="Calibri" pitchFamily="34" charset="0"/>
+                <a:ea typeface="Calibri" pitchFamily="34" charset="-122"/>
+                <a:cs typeface="Calibri" pitchFamily="34" charset="-120"/>
+              </a:rPr>
+              <a:t>InternalDocument · 6 category (QUYET_DINH/THONG_BAO/QUY_CHE/QUY_TRINH/BIEN_BAN/KHAC)</a:t>
+            </a:r>
+            <a:endParaRPr lang="en-US" sz="1400" dirty="0"/>
+          </a:p>
+        </p:txBody>
+      </p:sp>
+      <p:sp>
+        <p:nvSpPr>
+          <p:cNvPr id="9" name="Shape 7"/>
+          <p:cNvSpPr/>
+          <p:nvPr/>
+        </p:nvSpPr>
+        <p:spPr>
+          <a:xfrm>
+            <a:off x="594360" y="1737360"/>
+            <a:ext cx="7863840" cy="4663440"/>
           </a:xfrm>
           <a:prstGeom prst="rect">
             <a:avLst/>
@@ -11917,26 +14430,310 @@
           </a:ln>
         </p:spPr>
       </p:sp>
-      <p:sp>
-        <p:nvSpPr>
-          <p:cNvPr id="30" name="Shape 28"/>
-          <p:cNvSpPr/>
-          <p:nvPr/>
-        </p:nvSpPr>
-        <p:spPr>
-          <a:xfrm>
-            <a:off x="4251960" y="3657600"/>
-            <a:ext cx="73152" cy="1280160"/>
+      <p:pic>
+        <p:nvPicPr>
+          <p:cNvPr id="10" name="Image 0" descr="/Users/vsf-thuynt519-l/Documents/GitHub/atlas-aec/docs/demo-screens/24-internaldocs.png">    </p:cNvPr>
+          <p:cNvPicPr>
+            <a:picLocks noChangeAspect="1"/>
+          </p:cNvPicPr>
+          <p:nvPr/>
+        </p:nvPicPr>
+        <p:blipFill>
+          <a:blip r:embed="rId1"/>
+          <a:srcRect l="0" r="0" t="0" b="0"/>
+          <a:stretch/>
+        </p:blipFill>
+        <p:spPr>
+          <a:xfrm>
+            <a:off x="640080" y="1783080"/>
+            <a:ext cx="7772400" cy="4572000"/>
+          </a:xfrm>
+          <a:prstGeom prst="rect">
+            <a:avLst/>
+          </a:prstGeom>
+        </p:spPr>
+      </p:pic>
+      <p:sp>
+        <p:nvSpPr>
+          <p:cNvPr id="11" name="Text 8"/>
+          <p:cNvSpPr/>
+          <p:nvPr/>
+        </p:nvSpPr>
+        <p:spPr>
+          <a:xfrm>
+            <a:off x="8778240" y="1783080"/>
+            <a:ext cx="2926080" cy="4572000"/>
+          </a:xfrm>
+          <a:prstGeom prst="rect">
+            <a:avLst/>
+          </a:prstGeom>
+          <a:noFill/>
+          <a:ln/>
+        </p:spPr>
+        <p:txBody>
+          <a:bodyPr wrap="square" lIns="0" tIns="0" rIns="0" bIns="0" rtlCol="0" anchor="t"/>
+          <a:lstStyle/>
+          <a:p>
+            <a:pPr>
+              <a:spcAft>
+                <a:spcPts val="600"/>
+              </a:spcAft>
+            </a:pPr>
+            <a:r>
+              <a:rPr lang="en-US" sz="1300" dirty="0">
+                <a:solidFill>
+                  <a:srgbClr val="F1F5F9"/>
+                </a:solidFill>
+                <a:latin typeface="Calibri" pitchFamily="34" charset="0"/>
+                <a:ea typeface="Calibri" pitchFamily="34" charset="-122"/>
+                <a:cs typeface="Calibri" pitchFamily="34" charset="-120"/>
+              </a:rPr>
+              <a:t>KPI: Tổng / QĐ / Thông</a:t>
+            </a:r>
+            <a:endParaRPr lang="en-US" sz="1300" dirty="0"/>
+          </a:p>
+          <a:p>
+            <a:pPr>
+              <a:spcAft>
+                <a:spcPts val="600"/>
+              </a:spcAft>
+            </a:pPr>
+            <a:r>
+              <a:rPr lang="en-US" sz="1300" dirty="0">
+                <a:solidFill>
+                  <a:srgbClr val="F1F5F9"/>
+                </a:solidFill>
+                <a:latin typeface="Calibri" pitchFamily="34" charset="0"/>
+                <a:ea typeface="Calibri" pitchFamily="34" charset="-122"/>
+                <a:cs typeface="Calibri" pitchFamily="34" charset="-120"/>
+              </a:rPr>
+              <a:t>báo / 30d qua</a:t>
+            </a:r>
+            <a:endParaRPr lang="en-US" sz="1300" dirty="0"/>
+          </a:p>
+          <a:p>
+            <a:pPr>
+              <a:spcAft>
+                <a:spcPts val="600"/>
+              </a:spcAft>
+            </a:pPr>
+            <a:endParaRPr lang="en-US" sz="1300" dirty="0"/>
+          </a:p>
+          <a:p>
+            <a:pPr>
+              <a:spcAft>
+                <a:spcPts val="600"/>
+              </a:spcAft>
+            </a:pPr>
+            <a:r>
+              <a:rPr lang="en-US" sz="1300" dirty="0">
+                <a:solidFill>
+                  <a:srgbClr val="F1F5F9"/>
+                </a:solidFill>
+                <a:latin typeface="Calibri" pitchFamily="34" charset="0"/>
+                <a:ea typeface="Calibri" pitchFamily="34" charset="-122"/>
+                <a:cs typeface="Calibri" pitchFamily="34" charset="-120"/>
+              </a:rPr>
+              <a:t>Form CRUD:</a:t>
+            </a:r>
+            <a:endParaRPr lang="en-US" sz="1300" dirty="0"/>
+          </a:p>
+          <a:p>
+            <a:pPr>
+              <a:spcAft>
+                <a:spcPts val="600"/>
+              </a:spcAft>
+            </a:pPr>
+            <a:r>
+              <a:rPr lang="en-US" sz="1300" dirty="0">
+                <a:solidFill>
+                  <a:srgbClr val="F1F5F9"/>
+                </a:solidFill>
+                <a:latin typeface="Calibri" pitchFamily="34" charset="0"/>
+                <a:ea typeface="Calibri" pitchFamily="34" charset="-122"/>
+                <a:cs typeface="Calibri" pitchFamily="34" charset="-120"/>
+              </a:rPr>
+              <a:t>  + Thêm văn bản nội bộ</a:t>
+            </a:r>
+            <a:endParaRPr lang="en-US" sz="1300" dirty="0"/>
+          </a:p>
+          <a:p>
+            <a:pPr>
+              <a:spcAft>
+                <a:spcPts val="600"/>
+              </a:spcAft>
+            </a:pPr>
+            <a:r>
+              <a:rPr lang="en-US" sz="1300" dirty="0">
+                <a:solidFill>
+                  <a:srgbClr val="F1F5F9"/>
+                </a:solidFill>
+                <a:latin typeface="Calibri" pitchFamily="34" charset="0"/>
+                <a:ea typeface="Calibri" pitchFamily="34" charset="-122"/>
+                <a:cs typeface="Calibri" pitchFamily="34" charset="-120"/>
+              </a:rPr>
+              <a:t>  Số · Loại · Tiêu đề</a:t>
+            </a:r>
+            <a:endParaRPr lang="en-US" sz="1300" dirty="0"/>
+          </a:p>
+          <a:p>
+            <a:pPr>
+              <a:spcAft>
+                <a:spcPts val="600"/>
+              </a:spcAft>
+            </a:pPr>
+            <a:r>
+              <a:rPr lang="en-US" sz="1300" dirty="0">
+                <a:solidFill>
+                  <a:srgbClr val="F1F5F9"/>
+                </a:solidFill>
+                <a:latin typeface="Calibri" pitchFamily="34" charset="0"/>
+                <a:ea typeface="Calibri" pitchFamily="34" charset="-122"/>
+                <a:cs typeface="Calibri" pitchFamily="34" charset="-120"/>
+              </a:rPr>
+              <a:t>  Ngày BH · Nội dung</a:t>
+            </a:r>
+            <a:endParaRPr lang="en-US" sz="1300" dirty="0"/>
+          </a:p>
+          <a:p>
+            <a:pPr>
+              <a:spcAft>
+                <a:spcPts val="600"/>
+              </a:spcAft>
+            </a:pPr>
+            <a:endParaRPr lang="en-US" sz="1300" dirty="0"/>
+          </a:p>
+          <a:p>
+            <a:pPr>
+              <a:spcAft>
+                <a:spcPts val="600"/>
+              </a:spcAft>
+            </a:pPr>
+            <a:r>
+              <a:rPr lang="en-US" sz="1300" dirty="0">
+                <a:solidFill>
+                  <a:srgbClr val="F1F5F9"/>
+                </a:solidFill>
+                <a:latin typeface="Calibri" pitchFamily="34" charset="0"/>
+                <a:ea typeface="Calibri" pitchFamily="34" charset="-122"/>
+                <a:cs typeface="Calibri" pitchFamily="34" charset="-120"/>
+              </a:rPr>
+              <a:t>requireOrgMember chặn</a:t>
+            </a:r>
+            <a:endParaRPr lang="en-US" sz="1300" dirty="0"/>
+          </a:p>
+          <a:p>
+            <a:pPr>
+              <a:spcAft>
+                <a:spcPts val="600"/>
+              </a:spcAft>
+            </a:pPr>
+            <a:r>
+              <a:rPr lang="en-US" sz="1300" dirty="0">
+                <a:solidFill>
+                  <a:srgbClr val="F1F5F9"/>
+                </a:solidFill>
+                <a:latin typeface="Calibri" pitchFamily="34" charset="0"/>
+                <a:ea typeface="Calibri" pitchFamily="34" charset="-122"/>
+                <a:cs typeface="Calibri" pitchFamily="34" charset="-120"/>
+              </a:rPr>
+              <a:t>cross-org write.</a:t>
+            </a:r>
+            <a:endParaRPr lang="en-US" sz="1300" dirty="0"/>
+          </a:p>
+        </p:txBody>
+      </p:sp>
+      <p:sp>
+        <p:nvSpPr>
+          <p:cNvPr id="12" name="Text 9"/>
+          <p:cNvSpPr/>
+          <p:nvPr/>
+        </p:nvSpPr>
+        <p:spPr>
+          <a:xfrm>
+            <a:off x="457200" y="6446520"/>
+            <a:ext cx="11247120" cy="274320"/>
+          </a:xfrm>
+          <a:prstGeom prst="rect">
+            <a:avLst/>
+          </a:prstGeom>
+          <a:noFill/>
+          <a:ln/>
+        </p:spPr>
+        <p:txBody>
+          <a:bodyPr wrap="square" lIns="0" tIns="0" rIns="0" bIns="0" rtlCol="0" anchor="ctr"/>
+          <a:lstStyle/>
+          <a:p>
+            <a:pPr indent="0" marL="0">
+              <a:buNone/>
+            </a:pPr>
+            <a:r>
+              <a:rPr lang="en-US" sz="1000" dirty="0">
+                <a:solidFill>
+                  <a:srgbClr val="475569"/>
+                </a:solidFill>
+                <a:latin typeface="Calibri" pitchFamily="34" charset="0"/>
+                <a:ea typeface="Calibri" pitchFamily="34" charset="-122"/>
+                <a:cs typeface="Calibri" pitchFamily="34" charset="-120"/>
+              </a:rPr>
+              <a:t>atlas-aec · v2 · live demo</a:t>
+            </a:r>
+            <a:endParaRPr lang="en-US" sz="1000" dirty="0"/>
+          </a:p>
+        </p:txBody>
+      </p:sp>
+    </p:spTree>
+  </p:cSld>
+  <p:clrMapOvr>
+    <a:masterClrMapping/>
+  </p:clrMapOvr>
+</p:sld>
+</file>
+
+<file path=ppt/slides/slide26.xml><?xml version="1.0" encoding="utf-8"?>
+<p:sld xmlns:a="http://schemas.openxmlformats.org/drawingml/2006/main" xmlns:r="http://schemas.openxmlformats.org/officeDocument/2006/relationships" xmlns:p="http://schemas.openxmlformats.org/presentationml/2006/main">
+  <p:cSld name="Slide 26">
+    <p:bg>
+      <p:bgPr>
+        <a:solidFill>
+          <a:srgbClr val="0B1220"/>
+        </a:solidFill>
+      </p:bgPr>
+    </p:bg>
+    <p:spTree>
+      <p:nvGrpSpPr>
+        <p:cNvPr id="1" name=""/>
+        <p:cNvGrpSpPr/>
+        <p:nvPr/>
+      </p:nvGrpSpPr>
+      <p:grpSpPr>
+        <a:xfrm>
+          <a:off x="0" y="0"/>
+          <a:ext cx="0" cy="0"/>
+          <a:chOff x="0" y="0"/>
+          <a:chExt cx="0" cy="0"/>
+        </a:xfrm>
+      </p:grpSpPr>
+      <p:sp>
+        <p:nvSpPr>
+          <p:cNvPr id="2" name="Shape 0"/>
+          <p:cNvSpPr/>
+          <p:nvPr/>
+        </p:nvSpPr>
+        <p:spPr>
+          <a:xfrm>
+            <a:off x="457200" y="320040"/>
+            <a:ext cx="292608" cy="292608"/>
           </a:xfrm>
           <a:prstGeom prst="rect">
             <a:avLst/>
           </a:prstGeom>
           <a:solidFill>
-            <a:srgbClr val="60A5FA"/>
+            <a:srgbClr val="3B82F6"/>
           </a:solidFill>
           <a:ln w="12700">
             <a:solidFill>
-              <a:srgbClr val="60A5FA"/>
+              <a:srgbClr val="3B82F6"/>
             </a:solidFill>
             <a:prstDash val="solid"/>
           </a:ln>
@@ -11944,14 +14741,53 @@
       </p:sp>
       <p:sp>
         <p:nvSpPr>
-          <p:cNvPr id="31" name="Text 29"/>
-          <p:cNvSpPr/>
-          <p:nvPr/>
-        </p:nvSpPr>
-        <p:spPr>
-          <a:xfrm>
-            <a:off x="4480560" y="3794760"/>
-            <a:ext cx="3200400" cy="457200"/>
+          <p:cNvPr id="3" name="Text 1"/>
+          <p:cNvSpPr/>
+          <p:nvPr/>
+        </p:nvSpPr>
+        <p:spPr>
+          <a:xfrm>
+            <a:off x="457200" y="320040"/>
+            <a:ext cx="292608" cy="292608"/>
+          </a:xfrm>
+          <a:prstGeom prst="rect">
+            <a:avLst/>
+          </a:prstGeom>
+          <a:noFill/>
+          <a:ln/>
+        </p:spPr>
+        <p:txBody>
+          <a:bodyPr wrap="square" lIns="0" tIns="0" rIns="0" bIns="0" rtlCol="0" anchor="ctr"/>
+          <a:lstStyle/>
+          <a:p>
+            <a:pPr algn="ctr" indent="0" marL="0">
+              <a:buNone/>
+            </a:pPr>
+            <a:r>
+              <a:rPr lang="en-US" sz="1600" b="1" dirty="0">
+                <a:solidFill>
+                  <a:srgbClr val="FFFFFF"/>
+                </a:solidFill>
+                <a:latin typeface="Calibri" pitchFamily="34" charset="0"/>
+                <a:ea typeface="Calibri" pitchFamily="34" charset="-122"/>
+                <a:cs typeface="Calibri" pitchFamily="34" charset="-120"/>
+              </a:rPr>
+              <a:t>A</a:t>
+            </a:r>
+            <a:endParaRPr lang="en-US" sz="1600" dirty="0"/>
+          </a:p>
+        </p:txBody>
+      </p:sp>
+      <p:sp>
+        <p:nvSpPr>
+          <p:cNvPr id="4" name="Text 2"/>
+          <p:cNvSpPr/>
+          <p:nvPr/>
+        </p:nvSpPr>
+        <p:spPr>
+          <a:xfrm>
+            <a:off x="822960" y="320040"/>
+            <a:ext cx="2743200" cy="292608"/>
           </a:xfrm>
           <a:prstGeom prst="rect">
             <a:avLst/>
@@ -11967,15 +14803,132 @@
               <a:buNone/>
             </a:pPr>
             <a:r>
+              <a:rPr lang="en-US" sz="1300" b="1" dirty="0">
+                <a:solidFill>
+                  <a:srgbClr val="F1F5F9"/>
+                </a:solidFill>
+                <a:latin typeface="Calibri" pitchFamily="34" charset="0"/>
+                <a:ea typeface="Calibri" pitchFamily="34" charset="-122"/>
+                <a:cs typeface="Calibri" pitchFamily="34" charset="-120"/>
+              </a:rPr>
+              <a:t>Atlas AEC</a:t>
+            </a:r>
+            <a:endParaRPr lang="en-US" sz="1300" dirty="0"/>
+          </a:p>
+        </p:txBody>
+      </p:sp>
+      <p:sp>
+        <p:nvSpPr>
+          <p:cNvPr id="5" name="Text 3"/>
+          <p:cNvSpPr/>
+          <p:nvPr/>
+        </p:nvSpPr>
+        <p:spPr>
+          <a:xfrm>
+            <a:off x="3566160" y="356616"/>
+            <a:ext cx="5486400" cy="256032"/>
+          </a:xfrm>
+          <a:prstGeom prst="rect">
+            <a:avLst/>
+          </a:prstGeom>
+          <a:noFill/>
+          <a:ln/>
+        </p:spPr>
+        <p:txBody>
+          <a:bodyPr wrap="square" lIns="0" tIns="0" rIns="0" bIns="0" rtlCol="0" anchor="ctr"/>
+          <a:lstStyle/>
+          <a:p>
+            <a:pPr indent="0" marL="0">
+              <a:buNone/>
+            </a:pPr>
+            <a:r>
+              <a:rPr lang="en-US" sz="1100" dirty="0">
+                <a:solidFill>
+                  <a:srgbClr val="8B9BB4"/>
+                </a:solidFill>
+                <a:latin typeface="Calibri" pitchFamily="34" charset="0"/>
+                <a:ea typeface="Calibri" pitchFamily="34" charset="-122"/>
+                <a:cs typeface="Calibri" pitchFamily="34" charset="-120"/>
+              </a:rPr>
+              <a:t>Hành chính — Theo dõi BHXH</a:t>
+            </a:r>
+            <a:endParaRPr lang="en-US" sz="1100" dirty="0"/>
+          </a:p>
+        </p:txBody>
+      </p:sp>
+      <p:sp>
+        <p:nvSpPr>
+          <p:cNvPr id="6" name="Text 4"/>
+          <p:cNvSpPr/>
+          <p:nvPr/>
+        </p:nvSpPr>
+        <p:spPr>
+          <a:xfrm>
+            <a:off x="10881360" y="320040"/>
+            <a:ext cx="822960" cy="292608"/>
+          </a:xfrm>
+          <a:prstGeom prst="rect">
+            <a:avLst/>
+          </a:prstGeom>
+          <a:noFill/>
+          <a:ln/>
+        </p:spPr>
+        <p:txBody>
+          <a:bodyPr wrap="square" lIns="0" tIns="0" rIns="0" bIns="0" rtlCol="0" anchor="ctr"/>
+          <a:lstStyle/>
+          <a:p>
+            <a:pPr algn="r" indent="0" marL="0">
+              <a:buNone/>
+            </a:pPr>
+            <a:r>
+              <a:rPr lang="en-US" sz="1100" dirty="0">
+                <a:solidFill>
+                  <a:srgbClr val="8B9BB4"/>
+                </a:solidFill>
+                <a:latin typeface="Calibri" pitchFamily="34" charset="0"/>
+                <a:ea typeface="Calibri" pitchFamily="34" charset="-122"/>
+                <a:cs typeface="Calibri" pitchFamily="34" charset="-120"/>
+              </a:rPr>
+              <a:t>26 / 32</a:t>
+            </a:r>
+            <a:endParaRPr lang="en-US" sz="1100" dirty="0"/>
+          </a:p>
+        </p:txBody>
+      </p:sp>
+      <p:sp>
+        <p:nvSpPr>
+          <p:cNvPr id="7" name="Text 5"/>
+          <p:cNvSpPr/>
+          <p:nvPr/>
+        </p:nvSpPr>
+        <p:spPr>
+          <a:xfrm>
+            <a:off x="457200" y="822960"/>
+            <a:ext cx="11247120" cy="502920"/>
+          </a:xfrm>
+          <a:prstGeom prst="rect">
+            <a:avLst/>
+          </a:prstGeom>
+          <a:noFill/>
+          <a:ln/>
+        </p:spPr>
+        <p:txBody>
+          <a:bodyPr wrap="square" lIns="0" tIns="0" rIns="0" bIns="0" rtlCol="0" anchor="ctr"/>
+          <a:lstStyle/>
+          <a:p>
+            <a:pPr indent="0" marL="0">
+              <a:buNone/>
+            </a:pPr>
+            <a:r>
               <a:rPr lang="en-US" sz="2600" b="1" dirty="0">
                 <a:solidFill>
-                  <a:srgbClr val="60A5FA"/>
-                </a:solidFill>
-                <a:latin typeface="Calibri" pitchFamily="34" charset="0"/>
-                <a:ea typeface="Calibri" pitchFamily="34" charset="-122"/>
-                <a:cs typeface="Calibri" pitchFamily="34" charset="-120"/>
-              </a:rPr>
-              <a:t>35+ models</a:t>
+                  <a:srgbClr val="F1F5F9"/>
+                </a:solidFill>
+                <a:latin typeface="Calibri" pitchFamily="34" charset="0"/>
+                <a:ea typeface="Calibri" pitchFamily="34" charset="-122"/>
+                <a:cs typeface="Calibri" pitchFamily="34" charset="-120"/>
+              </a:rPr>
+              <a:t>Theo dõi BHXH · Sổ NLĐ tham gia bảo hiểm XH</a:t>
             </a:r>
             <a:endParaRPr lang="en-US" sz="2600" dirty="0"/>
           </a:p>
@@ -11983,14 +14936,14 @@
       </p:sp>
       <p:sp>
         <p:nvSpPr>
-          <p:cNvPr id="32" name="Text 30"/>
-          <p:cNvSpPr/>
-          <p:nvPr/>
-        </p:nvSpPr>
-        <p:spPr>
-          <a:xfrm>
-            <a:off x="4480560" y="4251960"/>
-            <a:ext cx="3200400" cy="292608"/>
+          <p:cNvPr id="8" name="Text 6"/>
+          <p:cNvSpPr/>
+          <p:nvPr/>
+        </p:nvSpPr>
+        <p:spPr>
+          <a:xfrm>
+            <a:off x="457200" y="1325880"/>
+            <a:ext cx="11247120" cy="292608"/>
           </a:xfrm>
           <a:prstGeom prst="rect">
             <a:avLst/>
@@ -12006,69 +14959,30 @@
               <a:buNone/>
             </a:pPr>
             <a:r>
-              <a:rPr lang="en-US" sz="1300" b="1" dirty="0">
-                <a:solidFill>
-                  <a:srgbClr val="F1F5F9"/>
-                </a:solidFill>
-                <a:latin typeface="Calibri" pitchFamily="34" charset="0"/>
-                <a:ea typeface="Calibri" pitchFamily="34" charset="-122"/>
-                <a:cs typeface="Calibri" pitchFamily="34" charset="-120"/>
-              </a:rPr>
-              <a:t>Prisma schema applied</a:t>
-            </a:r>
-            <a:endParaRPr lang="en-US" sz="1300" dirty="0"/>
-          </a:p>
-        </p:txBody>
-      </p:sp>
-      <p:sp>
-        <p:nvSpPr>
-          <p:cNvPr id="33" name="Text 31"/>
-          <p:cNvSpPr/>
-          <p:nvPr/>
-        </p:nvSpPr>
-        <p:spPr>
-          <a:xfrm>
-            <a:off x="4480560" y="4526280"/>
-            <a:ext cx="3200400" cy="320040"/>
-          </a:xfrm>
-          <a:prstGeom prst="rect">
-            <a:avLst/>
-          </a:prstGeom>
-          <a:noFill/>
-          <a:ln/>
-        </p:spPr>
-        <p:txBody>
-          <a:bodyPr wrap="square" lIns="0" tIns="0" rIns="0" bIns="0" rtlCol="0" anchor="ctr"/>
-          <a:lstStyle/>
-          <a:p>
-            <a:pPr indent="0" marL="0">
-              <a:buNone/>
-            </a:pPr>
-            <a:r>
-              <a:rPr lang="en-US" sz="1100" dirty="0">
+              <a:rPr lang="en-US" sz="1400" i="1" dirty="0">
                 <a:solidFill>
                   <a:srgbClr val="8B9BB4"/>
                 </a:solidFill>
-                <a:latin typeface="Consolas" pitchFamily="34" charset="0"/>
-                <a:ea typeface="Consolas" pitchFamily="34" charset="-122"/>
-                <a:cs typeface="Consolas" pitchFamily="34" charset="-120"/>
-              </a:rPr>
-              <a:t>pnpm db:push</a:t>
-            </a:r>
-            <a:endParaRPr lang="en-US" sz="1100" dirty="0"/>
-          </a:p>
-        </p:txBody>
-      </p:sp>
-      <p:sp>
-        <p:nvSpPr>
-          <p:cNvPr id="34" name="Shape 32"/>
-          <p:cNvSpPr/>
-          <p:nvPr/>
-        </p:nvSpPr>
-        <p:spPr>
-          <a:xfrm>
-            <a:off x="8092440" y="3657600"/>
-            <a:ext cx="3657600" cy="1280160"/>
+                <a:latin typeface="Calibri" pitchFamily="34" charset="0"/>
+                <a:ea typeface="Calibri" pitchFamily="34" charset="-122"/>
+                <a:cs typeface="Calibri" pitchFamily="34" charset="-120"/>
+              </a:rPr>
+              <a:t>SocialInsuranceRecord · 5 trạng thái (Đang đóng / Tạm dừng / Chờ đăng ký / Đã nghỉ / Khác)</a:t>
+            </a:r>
+            <a:endParaRPr lang="en-US" sz="1400" dirty="0"/>
+          </a:p>
+        </p:txBody>
+      </p:sp>
+      <p:sp>
+        <p:nvSpPr>
+          <p:cNvPr id="9" name="Shape 7"/>
+          <p:cNvSpPr/>
+          <p:nvPr/>
+        </p:nvSpPr>
+        <p:spPr>
+          <a:xfrm>
+            <a:off x="594360" y="1737360"/>
+            <a:ext cx="7863840" cy="4663440"/>
           </a:xfrm>
           <a:prstGeom prst="rect">
             <a:avLst/>
@@ -12084,166 +14998,308 @@
           </a:ln>
         </p:spPr>
       </p:sp>
-      <p:sp>
-        <p:nvSpPr>
-          <p:cNvPr id="35" name="Shape 33"/>
-          <p:cNvSpPr/>
-          <p:nvPr/>
-        </p:nvSpPr>
-        <p:spPr>
-          <a:xfrm>
-            <a:off x="8092440" y="3657600"/>
-            <a:ext cx="73152" cy="1280160"/>
+      <p:pic>
+        <p:nvPicPr>
+          <p:cNvPr id="10" name="Image 0" descr="/Users/vsf-thuynt519-l/Documents/GitHub/atlas-aec/docs/demo-screens/25-bhxh.png">    </p:cNvPr>
+          <p:cNvPicPr>
+            <a:picLocks noChangeAspect="1"/>
+          </p:cNvPicPr>
+          <p:nvPr/>
+        </p:nvPicPr>
+        <p:blipFill>
+          <a:blip r:embed="rId1"/>
+          <a:srcRect l="0" r="0" t="0" b="0"/>
+          <a:stretch/>
+        </p:blipFill>
+        <p:spPr>
+          <a:xfrm>
+            <a:off x="640080" y="1783080"/>
+            <a:ext cx="7772400" cy="4572000"/>
+          </a:xfrm>
+          <a:prstGeom prst="rect">
+            <a:avLst/>
+          </a:prstGeom>
+        </p:spPr>
+      </p:pic>
+      <p:sp>
+        <p:nvSpPr>
+          <p:cNvPr id="11" name="Text 8"/>
+          <p:cNvSpPr/>
+          <p:nvPr/>
+        </p:nvSpPr>
+        <p:spPr>
+          <a:xfrm>
+            <a:off x="8778240" y="1783080"/>
+            <a:ext cx="2926080" cy="4572000"/>
+          </a:xfrm>
+          <a:prstGeom prst="rect">
+            <a:avLst/>
+          </a:prstGeom>
+          <a:noFill/>
+          <a:ln/>
+        </p:spPr>
+        <p:txBody>
+          <a:bodyPr wrap="square" lIns="0" tIns="0" rIns="0" bIns="0" rtlCol="0" anchor="t"/>
+          <a:lstStyle/>
+          <a:p>
+            <a:pPr>
+              <a:spcAft>
+                <a:spcPts val="600"/>
+              </a:spcAft>
+            </a:pPr>
+            <a:r>
+              <a:rPr lang="en-US" sz="1300" dirty="0">
+                <a:solidFill>
+                  <a:srgbClr val="F1F5F9"/>
+                </a:solidFill>
+                <a:latin typeface="Calibri" pitchFamily="34" charset="0"/>
+                <a:ea typeface="Calibri" pitchFamily="34" charset="-122"/>
+                <a:cs typeface="Calibri" pitchFamily="34" charset="-120"/>
+              </a:rPr>
+              <a:t>KPI: Tổng / Đang đóng /</a:t>
+            </a:r>
+            <a:endParaRPr lang="en-US" sz="1300" dirty="0"/>
+          </a:p>
+          <a:p>
+            <a:pPr>
+              <a:spcAft>
+                <a:spcPts val="600"/>
+              </a:spcAft>
+            </a:pPr>
+            <a:r>
+              <a:rPr lang="en-US" sz="1300" dirty="0">
+                <a:solidFill>
+                  <a:srgbClr val="F1F5F9"/>
+                </a:solidFill>
+                <a:latin typeface="Calibri" pitchFamily="34" charset="0"/>
+                <a:ea typeface="Calibri" pitchFamily="34" charset="-122"/>
+                <a:cs typeface="Calibri" pitchFamily="34" charset="-120"/>
+              </a:rPr>
+              <a:t>Chờ ĐK / Mức/tháng</a:t>
+            </a:r>
+            <a:endParaRPr lang="en-US" sz="1300" dirty="0"/>
+          </a:p>
+          <a:p>
+            <a:pPr>
+              <a:spcAft>
+                <a:spcPts val="600"/>
+              </a:spcAft>
+            </a:pPr>
+            <a:endParaRPr lang="en-US" sz="1300" dirty="0"/>
+          </a:p>
+          <a:p>
+            <a:pPr>
+              <a:spcAft>
+                <a:spcPts val="600"/>
+              </a:spcAft>
+            </a:pPr>
+            <a:r>
+              <a:rPr lang="en-US" sz="1300" dirty="0">
+                <a:solidFill>
+                  <a:srgbClr val="F1F5F9"/>
+                </a:solidFill>
+                <a:latin typeface="Calibri" pitchFamily="34" charset="0"/>
+                <a:ea typeface="Calibri" pitchFamily="34" charset="-122"/>
+                <a:cs typeface="Calibri" pitchFamily="34" charset="-120"/>
+              </a:rPr>
+              <a:t>Form CRUD:</a:t>
+            </a:r>
+            <a:endParaRPr lang="en-US" sz="1300" dirty="0"/>
+          </a:p>
+          <a:p>
+            <a:pPr>
+              <a:spcAft>
+                <a:spcPts val="600"/>
+              </a:spcAft>
+            </a:pPr>
+            <a:r>
+              <a:rPr lang="en-US" sz="1300" dirty="0">
+                <a:solidFill>
+                  <a:srgbClr val="F1F5F9"/>
+                </a:solidFill>
+                <a:latin typeface="Calibri" pitchFamily="34" charset="0"/>
+                <a:ea typeface="Calibri" pitchFamily="34" charset="-122"/>
+                <a:cs typeface="Calibri" pitchFamily="34" charset="-120"/>
+              </a:rPr>
+              <a:t>  + Thêm bản ghi BHXH</a:t>
+            </a:r>
+            <a:endParaRPr lang="en-US" sz="1300" dirty="0"/>
+          </a:p>
+          <a:p>
+            <a:pPr>
+              <a:spcAft>
+                <a:spcPts val="600"/>
+              </a:spcAft>
+            </a:pPr>
+            <a:r>
+              <a:rPr lang="en-US" sz="1300" dirty="0">
+                <a:solidFill>
+                  <a:srgbClr val="F1F5F9"/>
+                </a:solidFill>
+                <a:latin typeface="Calibri" pitchFamily="34" charset="0"/>
+                <a:ea typeface="Calibri" pitchFamily="34" charset="-122"/>
+                <a:cs typeface="Calibri" pitchFamily="34" charset="-120"/>
+              </a:rPr>
+              <a:t>  Họ tên · CCCD · Số sổ</a:t>
+            </a:r>
+            <a:endParaRPr lang="en-US" sz="1300" dirty="0"/>
+          </a:p>
+          <a:p>
+            <a:pPr>
+              <a:spcAft>
+                <a:spcPts val="600"/>
+              </a:spcAft>
+            </a:pPr>
+            <a:r>
+              <a:rPr lang="en-US" sz="1300" dirty="0">
+                <a:solidFill>
+                  <a:srgbClr val="F1F5F9"/>
+                </a:solidFill>
+                <a:latin typeface="Calibri" pitchFamily="34" charset="0"/>
+                <a:ea typeface="Calibri" pitchFamily="34" charset="-122"/>
+                <a:cs typeface="Calibri" pitchFamily="34" charset="-120"/>
+              </a:rPr>
+              <a:t>  Mức đóng · Bắt đầu</a:t>
+            </a:r>
+            <a:endParaRPr lang="en-US" sz="1300" dirty="0"/>
+          </a:p>
+          <a:p>
+            <a:pPr>
+              <a:spcAft>
+                <a:spcPts val="600"/>
+              </a:spcAft>
+            </a:pPr>
+            <a:endParaRPr lang="en-US" sz="1300" dirty="0"/>
+          </a:p>
+          <a:p>
+            <a:pPr>
+              <a:spcAft>
+                <a:spcPts val="600"/>
+              </a:spcAft>
+            </a:pPr>
+            <a:r>
+              <a:rPr lang="en-US" sz="1300" dirty="0">
+                <a:solidFill>
+                  <a:srgbClr val="F1F5F9"/>
+                </a:solidFill>
+                <a:latin typeface="Calibri" pitchFamily="34" charset="0"/>
+                <a:ea typeface="Calibri" pitchFamily="34" charset="-122"/>
+                <a:cs typeface="Calibri" pitchFamily="34" charset="-120"/>
+              </a:rPr>
+              <a:t>Track nội bộ, không</a:t>
+            </a:r>
+            <a:endParaRPr lang="en-US" sz="1300" dirty="0"/>
+          </a:p>
+          <a:p>
+            <a:pPr>
+              <a:spcAft>
+                <a:spcPts val="600"/>
+              </a:spcAft>
+            </a:pPr>
+            <a:r>
+              <a:rPr lang="en-US" sz="1300" dirty="0">
+                <a:solidFill>
+                  <a:srgbClr val="F1F5F9"/>
+                </a:solidFill>
+                <a:latin typeface="Calibri" pitchFamily="34" charset="0"/>
+                <a:ea typeface="Calibri" pitchFamily="34" charset="-122"/>
+                <a:cs typeface="Calibri" pitchFamily="34" charset="-120"/>
+              </a:rPr>
+              <a:t>thay BHXH gov system.</a:t>
+            </a:r>
+            <a:endParaRPr lang="en-US" sz="1300" dirty="0"/>
+          </a:p>
+        </p:txBody>
+      </p:sp>
+      <p:sp>
+        <p:nvSpPr>
+          <p:cNvPr id="12" name="Text 9"/>
+          <p:cNvSpPr/>
+          <p:nvPr/>
+        </p:nvSpPr>
+        <p:spPr>
+          <a:xfrm>
+            <a:off x="457200" y="6446520"/>
+            <a:ext cx="11247120" cy="274320"/>
+          </a:xfrm>
+          <a:prstGeom prst="rect">
+            <a:avLst/>
+          </a:prstGeom>
+          <a:noFill/>
+          <a:ln/>
+        </p:spPr>
+        <p:txBody>
+          <a:bodyPr wrap="square" lIns="0" tIns="0" rIns="0" bIns="0" rtlCol="0" anchor="ctr"/>
+          <a:lstStyle/>
+          <a:p>
+            <a:pPr indent="0" marL="0">
+              <a:buNone/>
+            </a:pPr>
+            <a:r>
+              <a:rPr lang="en-US" sz="1000" dirty="0">
+                <a:solidFill>
+                  <a:srgbClr val="475569"/>
+                </a:solidFill>
+                <a:latin typeface="Calibri" pitchFamily="34" charset="0"/>
+                <a:ea typeface="Calibri" pitchFamily="34" charset="-122"/>
+                <a:cs typeface="Calibri" pitchFamily="34" charset="-120"/>
+              </a:rPr>
+              <a:t>atlas-aec · v2 · live demo</a:t>
+            </a:r>
+            <a:endParaRPr lang="en-US" sz="1000" dirty="0"/>
+          </a:p>
+        </p:txBody>
+      </p:sp>
+    </p:spTree>
+  </p:cSld>
+  <p:clrMapOvr>
+    <a:masterClrMapping/>
+  </p:clrMapOvr>
+</p:sld>
+</file>
+
+<file path=ppt/slides/slide27.xml><?xml version="1.0" encoding="utf-8"?>
+<p:sld xmlns:a="http://schemas.openxmlformats.org/drawingml/2006/main" xmlns:r="http://schemas.openxmlformats.org/officeDocument/2006/relationships" xmlns:p="http://schemas.openxmlformats.org/presentationml/2006/main">
+  <p:cSld name="Slide 27">
+    <p:bg>
+      <p:bgPr>
+        <a:solidFill>
+          <a:srgbClr val="0B1220"/>
+        </a:solidFill>
+      </p:bgPr>
+    </p:bg>
+    <p:spTree>
+      <p:nvGrpSpPr>
+        <p:cNvPr id="1" name=""/>
+        <p:cNvGrpSpPr/>
+        <p:nvPr/>
+      </p:nvGrpSpPr>
+      <p:grpSpPr>
+        <a:xfrm>
+          <a:off x="0" y="0"/>
+          <a:ext cx="0" cy="0"/>
+          <a:chOff x="0" y="0"/>
+          <a:chExt cx="0" cy="0"/>
+        </a:xfrm>
+      </p:grpSpPr>
+      <p:sp>
+        <p:nvSpPr>
+          <p:cNvPr id="2" name="Shape 0"/>
+          <p:cNvSpPr/>
+          <p:nvPr/>
+        </p:nvSpPr>
+        <p:spPr>
+          <a:xfrm>
+            <a:off x="457200" y="320040"/>
+            <a:ext cx="292608" cy="292608"/>
           </a:xfrm>
           <a:prstGeom prst="rect">
             <a:avLst/>
           </a:prstGeom>
           <a:solidFill>
-            <a:srgbClr val="60A5FA"/>
+            <a:srgbClr val="3B82F6"/>
           </a:solidFill>
           <a:ln w="12700">
-            <a:solidFill>
-              <a:srgbClr val="60A5FA"/>
-            </a:solidFill>
-            <a:prstDash val="solid"/>
-          </a:ln>
-        </p:spPr>
-      </p:sp>
-      <p:sp>
-        <p:nvSpPr>
-          <p:cNvPr id="36" name="Text 34"/>
-          <p:cNvSpPr/>
-          <p:nvPr/>
-        </p:nvSpPr>
-        <p:spPr>
-          <a:xfrm>
-            <a:off x="8321040" y="3794760"/>
-            <a:ext cx="3200400" cy="457200"/>
-          </a:xfrm>
-          <a:prstGeom prst="rect">
-            <a:avLst/>
-          </a:prstGeom>
-          <a:noFill/>
-          <a:ln/>
-        </p:spPr>
-        <p:txBody>
-          <a:bodyPr wrap="square" lIns="0" tIns="0" rIns="0" bIns="0" rtlCol="0" anchor="ctr"/>
-          <a:lstStyle/>
-          <a:p>
-            <a:pPr indent="0" marL="0">
-              <a:buNone/>
-            </a:pPr>
-            <a:r>
-              <a:rPr lang="en-US" sz="2600" b="1" dirty="0">
-                <a:solidFill>
-                  <a:srgbClr val="60A5FA"/>
-                </a:solidFill>
-                <a:latin typeface="Calibri" pitchFamily="34" charset="0"/>
-                <a:ea typeface="Calibri" pitchFamily="34" charset="-122"/>
-                <a:cs typeface="Calibri" pitchFamily="34" charset="-120"/>
-              </a:rPr>
-              <a:t>19 PNGs</a:t>
-            </a:r>
-            <a:endParaRPr lang="en-US" sz="2600" dirty="0"/>
-          </a:p>
-        </p:txBody>
-      </p:sp>
-      <p:sp>
-        <p:nvSpPr>
-          <p:cNvPr id="37" name="Text 35"/>
-          <p:cNvSpPr/>
-          <p:nvPr/>
-        </p:nvSpPr>
-        <p:spPr>
-          <a:xfrm>
-            <a:off x="8321040" y="4251960"/>
-            <a:ext cx="3200400" cy="292608"/>
-          </a:xfrm>
-          <a:prstGeom prst="rect">
-            <a:avLst/>
-          </a:prstGeom>
-          <a:noFill/>
-          <a:ln/>
-        </p:spPr>
-        <p:txBody>
-          <a:bodyPr wrap="square" lIns="0" tIns="0" rIns="0" bIns="0" rtlCol="0" anchor="ctr"/>
-          <a:lstStyle/>
-          <a:p>
-            <a:pPr indent="0" marL="0">
-              <a:buNone/>
-            </a:pPr>
-            <a:r>
-              <a:rPr lang="en-US" sz="1300" b="1" dirty="0">
-                <a:solidFill>
-                  <a:srgbClr val="F1F5F9"/>
-                </a:solidFill>
-                <a:latin typeface="Calibri" pitchFamily="34" charset="0"/>
-                <a:ea typeface="Calibri" pitchFamily="34" charset="-122"/>
-                <a:cs typeface="Calibri" pitchFamily="34" charset="-120"/>
-              </a:rPr>
-              <a:t>Live screenshots regenerated</a:t>
-            </a:r>
-            <a:endParaRPr lang="en-US" sz="1300" dirty="0"/>
-          </a:p>
-        </p:txBody>
-      </p:sp>
-      <p:sp>
-        <p:nvSpPr>
-          <p:cNvPr id="38" name="Text 36"/>
-          <p:cNvSpPr/>
-          <p:nvPr/>
-        </p:nvSpPr>
-        <p:spPr>
-          <a:xfrm>
-            <a:off x="8321040" y="4526280"/>
-            <a:ext cx="3200400" cy="320040"/>
-          </a:xfrm>
-          <a:prstGeom prst="rect">
-            <a:avLst/>
-          </a:prstGeom>
-          <a:noFill/>
-          <a:ln/>
-        </p:spPr>
-        <p:txBody>
-          <a:bodyPr wrap="square" lIns="0" tIns="0" rIns="0" bIns="0" rtlCol="0" anchor="ctr"/>
-          <a:lstStyle/>
-          <a:p>
-            <a:pPr indent="0" marL="0">
-              <a:buNone/>
-            </a:pPr>
-            <a:r>
-              <a:rPr lang="en-US" sz="1100" dirty="0">
-                <a:solidFill>
-                  <a:srgbClr val="8B9BB4"/>
-                </a:solidFill>
-                <a:latin typeface="Consolas" pitchFamily="34" charset="0"/>
-                <a:ea typeface="Consolas" pitchFamily="34" charset="-122"/>
-                <a:cs typeface="Consolas" pitchFamily="34" charset="-120"/>
-              </a:rPr>
-              <a:t>tsx scripts/capture-demo.ts</a:t>
-            </a:r>
-            <a:endParaRPr lang="en-US" sz="1100" dirty="0"/>
-          </a:p>
-        </p:txBody>
-      </p:sp>
-      <p:sp>
-        <p:nvSpPr>
-          <p:cNvPr id="39" name="Shape 37"/>
-          <p:cNvSpPr/>
-          <p:nvPr/>
-        </p:nvSpPr>
-        <p:spPr>
-          <a:xfrm>
-            <a:off x="548640" y="5029200"/>
-            <a:ext cx="11064240" cy="914400"/>
-          </a:xfrm>
-          <a:prstGeom prst="rect">
-            <a:avLst/>
-          </a:prstGeom>
-          <a:solidFill>
-            <a:srgbClr val="111A30"/>
-          </a:solidFill>
-          <a:ln w="25400">
             <a:solidFill>
               <a:srgbClr val="3B82F6"/>
             </a:solidFill>
@@ -12253,14 +15309,53 @@
       </p:sp>
       <p:sp>
         <p:nvSpPr>
-          <p:cNvPr id="40" name="Text 38"/>
-          <p:cNvSpPr/>
-          <p:nvPr/>
-        </p:nvSpPr>
-        <p:spPr>
-          <a:xfrm>
-            <a:off x="777240" y="5074920"/>
-            <a:ext cx="5486400" cy="365760"/>
+          <p:cNvPr id="3" name="Text 1"/>
+          <p:cNvSpPr/>
+          <p:nvPr/>
+        </p:nvSpPr>
+        <p:spPr>
+          <a:xfrm>
+            <a:off x="457200" y="320040"/>
+            <a:ext cx="292608" cy="292608"/>
+          </a:xfrm>
+          <a:prstGeom prst="rect">
+            <a:avLst/>
+          </a:prstGeom>
+          <a:noFill/>
+          <a:ln/>
+        </p:spPr>
+        <p:txBody>
+          <a:bodyPr wrap="square" lIns="0" tIns="0" rIns="0" bIns="0" rtlCol="0" anchor="ctr"/>
+          <a:lstStyle/>
+          <a:p>
+            <a:pPr algn="ctr" indent="0" marL="0">
+              <a:buNone/>
+            </a:pPr>
+            <a:r>
+              <a:rPr lang="en-US" sz="1600" b="1" dirty="0">
+                <a:solidFill>
+                  <a:srgbClr val="FFFFFF"/>
+                </a:solidFill>
+                <a:latin typeface="Calibri" pitchFamily="34" charset="0"/>
+                <a:ea typeface="Calibri" pitchFamily="34" charset="-122"/>
+                <a:cs typeface="Calibri" pitchFamily="34" charset="-120"/>
+              </a:rPr>
+              <a:t>A</a:t>
+            </a:r>
+            <a:endParaRPr lang="en-US" sz="1600" dirty="0"/>
+          </a:p>
+        </p:txBody>
+      </p:sp>
+      <p:sp>
+        <p:nvSpPr>
+          <p:cNvPr id="4" name="Text 2"/>
+          <p:cNvSpPr/>
+          <p:nvPr/>
+        </p:nvSpPr>
+        <p:spPr>
+          <a:xfrm>
+            <a:off x="822960" y="320040"/>
+            <a:ext cx="2743200" cy="292608"/>
           </a:xfrm>
           <a:prstGeom prst="rect">
             <a:avLst/>
@@ -12276,7 +15371,46 @@
               <a:buNone/>
             </a:pPr>
             <a:r>
-              <a:rPr lang="en-US" sz="1300" b="1" spc="100" kern="0" dirty="0">
+              <a:rPr lang="en-US" sz="1300" b="1" dirty="0">
+                <a:solidFill>
+                  <a:srgbClr val="F1F5F9"/>
+                </a:solidFill>
+                <a:latin typeface="Calibri" pitchFamily="34" charset="0"/>
+                <a:ea typeface="Calibri" pitchFamily="34" charset="-122"/>
+                <a:cs typeface="Calibri" pitchFamily="34" charset="-120"/>
+              </a:rPr>
+              <a:t>Atlas AEC</a:t>
+            </a:r>
+            <a:endParaRPr lang="en-US" sz="1300" dirty="0"/>
+          </a:p>
+        </p:txBody>
+      </p:sp>
+      <p:sp>
+        <p:nvSpPr>
+          <p:cNvPr id="5" name="Text 3"/>
+          <p:cNvSpPr/>
+          <p:nvPr/>
+        </p:nvSpPr>
+        <p:spPr>
+          <a:xfrm>
+            <a:off x="3566160" y="356616"/>
+            <a:ext cx="5486400" cy="256032"/>
+          </a:xfrm>
+          <a:prstGeom prst="rect">
+            <a:avLst/>
+          </a:prstGeom>
+          <a:noFill/>
+          <a:ln/>
+        </p:spPr>
+        <p:txBody>
+          <a:bodyPr wrap="square" lIns="0" tIns="0" rIns="0" bIns="0" rtlCol="0" anchor="ctr"/>
+          <a:lstStyle/>
+          <a:p>
+            <a:pPr indent="0" marL="0">
+              <a:buNone/>
+            </a:pPr>
+            <a:r>
+              <a:rPr lang="en-US" sz="1100" dirty="0">
                 <a:solidFill>
                   <a:srgbClr val="8B9BB4"/>
                 </a:solidFill>
@@ -12284,22 +15418,61 @@
                 <a:ea typeface="Calibri" pitchFamily="34" charset="-122"/>
                 <a:cs typeface="Calibri" pitchFamily="34" charset="-120"/>
               </a:rPr>
-              <a:t>Replay demo bất kỳ lúc nào</a:t>
-            </a:r>
-            <a:endParaRPr lang="en-US" sz="1300" dirty="0"/>
-          </a:p>
-        </p:txBody>
-      </p:sp>
-      <p:sp>
-        <p:nvSpPr>
-          <p:cNvPr id="41" name="Text 39"/>
-          <p:cNvSpPr/>
-          <p:nvPr/>
-        </p:nvSpPr>
-        <p:spPr>
-          <a:xfrm>
-            <a:off x="777240" y="5394960"/>
-            <a:ext cx="10607040" cy="457200"/>
+              <a:t>Hành chính — Điều phối xe</a:t>
+            </a:r>
+            <a:endParaRPr lang="en-US" sz="1100" dirty="0"/>
+          </a:p>
+        </p:txBody>
+      </p:sp>
+      <p:sp>
+        <p:nvSpPr>
+          <p:cNvPr id="6" name="Text 4"/>
+          <p:cNvSpPr/>
+          <p:nvPr/>
+        </p:nvSpPr>
+        <p:spPr>
+          <a:xfrm>
+            <a:off x="10881360" y="320040"/>
+            <a:ext cx="822960" cy="292608"/>
+          </a:xfrm>
+          <a:prstGeom prst="rect">
+            <a:avLst/>
+          </a:prstGeom>
+          <a:noFill/>
+          <a:ln/>
+        </p:spPr>
+        <p:txBody>
+          <a:bodyPr wrap="square" lIns="0" tIns="0" rIns="0" bIns="0" rtlCol="0" anchor="ctr"/>
+          <a:lstStyle/>
+          <a:p>
+            <a:pPr algn="r" indent="0" marL="0">
+              <a:buNone/>
+            </a:pPr>
+            <a:r>
+              <a:rPr lang="en-US" sz="1100" dirty="0">
+                <a:solidFill>
+                  <a:srgbClr val="8B9BB4"/>
+                </a:solidFill>
+                <a:latin typeface="Calibri" pitchFamily="34" charset="0"/>
+                <a:ea typeface="Calibri" pitchFamily="34" charset="-122"/>
+                <a:cs typeface="Calibri" pitchFamily="34" charset="-120"/>
+              </a:rPr>
+              <a:t>27 / 32</a:t>
+            </a:r>
+            <a:endParaRPr lang="en-US" sz="1100" dirty="0"/>
+          </a:p>
+        </p:txBody>
+      </p:sp>
+      <p:sp>
+        <p:nvSpPr>
+          <p:cNvPr id="7" name="Text 5"/>
+          <p:cNvSpPr/>
+          <p:nvPr/>
+        </p:nvSpPr>
+        <p:spPr>
+          <a:xfrm>
+            <a:off x="457200" y="822960"/>
+            <a:ext cx="11247120" cy="502920"/>
           </a:xfrm>
           <a:prstGeom prst="rect">
             <a:avLst/>
@@ -12315,23 +15488,319 @@
               <a:buNone/>
             </a:pPr>
             <a:r>
-              <a:rPr lang="en-US" sz="1800" dirty="0">
-                <a:solidFill>
-                  <a:srgbClr val="60A5FA"/>
-                </a:solidFill>
-                <a:latin typeface="Consolas" pitchFamily="34" charset="0"/>
-                <a:ea typeface="Consolas" pitchFamily="34" charset="-122"/>
-                <a:cs typeface="Consolas" pitchFamily="34" charset="-120"/>
-              </a:rPr>
-              <a:t>http://localhost:3000/demo.html  ·  docs/DEMO.md  ·  docs/Atlas-AEC-Demo.pptx</a:t>
-            </a:r>
-            <a:endParaRPr lang="en-US" sz="1800" dirty="0"/>
-          </a:p>
-        </p:txBody>
-      </p:sp>
-      <p:sp>
-        <p:nvSpPr>
-          <p:cNvPr id="42" name="Text 40"/>
+              <a:rPr lang="en-US" sz="2600" b="1" dirty="0">
+                <a:solidFill>
+                  <a:srgbClr val="F1F5F9"/>
+                </a:solidFill>
+                <a:latin typeface="Calibri" pitchFamily="34" charset="0"/>
+                <a:ea typeface="Calibri" pitchFamily="34" charset="-122"/>
+                <a:cs typeface="Calibri" pitchFamily="34" charset="-120"/>
+              </a:rPr>
+              <a:t>Điều phối xe · Sổ lệnh điều xe công ty</a:t>
+            </a:r>
+            <a:endParaRPr lang="en-US" sz="2600" dirty="0"/>
+          </a:p>
+        </p:txBody>
+      </p:sp>
+      <p:sp>
+        <p:nvSpPr>
+          <p:cNvPr id="8" name="Text 6"/>
+          <p:cNvSpPr/>
+          <p:nvPr/>
+        </p:nvSpPr>
+        <p:spPr>
+          <a:xfrm>
+            <a:off x="457200" y="1325880"/>
+            <a:ext cx="11247120" cy="292608"/>
+          </a:xfrm>
+          <a:prstGeom prst="rect">
+            <a:avLst/>
+          </a:prstGeom>
+          <a:noFill/>
+          <a:ln/>
+        </p:spPr>
+        <p:txBody>
+          <a:bodyPr wrap="square" lIns="0" tIns="0" rIns="0" bIns="0" rtlCol="0" anchor="ctr"/>
+          <a:lstStyle/>
+          <a:p>
+            <a:pPr indent="0" marL="0">
+              <a:buNone/>
+            </a:pPr>
+            <a:r>
+              <a:rPr lang="en-US" sz="1400" i="1" dirty="0">
+                <a:solidFill>
+                  <a:srgbClr val="8B9BB4"/>
+                </a:solidFill>
+                <a:latin typeface="Calibri" pitchFamily="34" charset="0"/>
+                <a:ea typeface="Calibri" pitchFamily="34" charset="-122"/>
+                <a:cs typeface="Calibri" pitchFamily="34" charset="-120"/>
+              </a:rPr>
+              <a:t>VehicleDispatch · 4 trạng thái (Đặt lịch / Đang dùng / Đã trả / Huỷ)</a:t>
+            </a:r>
+            <a:endParaRPr lang="en-US" sz="1400" dirty="0"/>
+          </a:p>
+        </p:txBody>
+      </p:sp>
+      <p:sp>
+        <p:nvSpPr>
+          <p:cNvPr id="9" name="Shape 7"/>
+          <p:cNvSpPr/>
+          <p:nvPr/>
+        </p:nvSpPr>
+        <p:spPr>
+          <a:xfrm>
+            <a:off x="594360" y="1737360"/>
+            <a:ext cx="7863840" cy="4663440"/>
+          </a:xfrm>
+          <a:prstGeom prst="rect">
+            <a:avLst/>
+          </a:prstGeom>
+          <a:solidFill>
+            <a:srgbClr val="111A30"/>
+          </a:solidFill>
+          <a:ln w="12700">
+            <a:solidFill>
+              <a:srgbClr val="1F2A44"/>
+            </a:solidFill>
+            <a:prstDash val="solid"/>
+          </a:ln>
+        </p:spPr>
+      </p:sp>
+      <p:pic>
+        <p:nvPicPr>
+          <p:cNvPr id="10" name="Image 0" descr="/Users/vsf-thuynt519-l/Documents/GitHub/atlas-aec/docs/demo-screens/26-vehicledispatch.png">    </p:cNvPr>
+          <p:cNvPicPr>
+            <a:picLocks noChangeAspect="1"/>
+          </p:cNvPicPr>
+          <p:nvPr/>
+        </p:nvPicPr>
+        <p:blipFill>
+          <a:blip r:embed="rId1"/>
+          <a:srcRect l="0" r="0" t="0" b="0"/>
+          <a:stretch/>
+        </p:blipFill>
+        <p:spPr>
+          <a:xfrm>
+            <a:off x="640080" y="1783080"/>
+            <a:ext cx="7772400" cy="4572000"/>
+          </a:xfrm>
+          <a:prstGeom prst="rect">
+            <a:avLst/>
+          </a:prstGeom>
+        </p:spPr>
+      </p:pic>
+      <p:sp>
+        <p:nvSpPr>
+          <p:cNvPr id="11" name="Text 8"/>
+          <p:cNvSpPr/>
+          <p:nvPr/>
+        </p:nvSpPr>
+        <p:spPr>
+          <a:xfrm>
+            <a:off x="8778240" y="1783080"/>
+            <a:ext cx="2926080" cy="4572000"/>
+          </a:xfrm>
+          <a:prstGeom prst="rect">
+            <a:avLst/>
+          </a:prstGeom>
+          <a:noFill/>
+          <a:ln/>
+        </p:spPr>
+        <p:txBody>
+          <a:bodyPr wrap="square" lIns="0" tIns="0" rIns="0" bIns="0" rtlCol="0" anchor="t"/>
+          <a:lstStyle/>
+          <a:p>
+            <a:pPr>
+              <a:spcAft>
+                <a:spcPts val="600"/>
+              </a:spcAft>
+            </a:pPr>
+            <a:r>
+              <a:rPr lang="en-US" sz="1300" dirty="0">
+                <a:solidFill>
+                  <a:srgbClr val="F1F5F9"/>
+                </a:solidFill>
+                <a:latin typeface="Calibri" pitchFamily="34" charset="0"/>
+                <a:ea typeface="Calibri" pitchFamily="34" charset="-122"/>
+                <a:cs typeface="Calibri" pitchFamily="34" charset="-120"/>
+              </a:rPr>
+              <a:t>KPI: Tổng / Đang dùng /</a:t>
+            </a:r>
+            <a:endParaRPr lang="en-US" sz="1300" dirty="0"/>
+          </a:p>
+          <a:p>
+            <a:pPr>
+              <a:spcAft>
+                <a:spcPts val="600"/>
+              </a:spcAft>
+            </a:pPr>
+            <a:r>
+              <a:rPr lang="en-US" sz="1300" dirty="0">
+                <a:solidFill>
+                  <a:srgbClr val="F1F5F9"/>
+                </a:solidFill>
+                <a:latin typeface="Calibri" pitchFamily="34" charset="0"/>
+                <a:ea typeface="Calibri" pitchFamily="34" charset="-122"/>
+                <a:cs typeface="Calibri" pitchFamily="34" charset="-120"/>
+              </a:rPr>
+              <a:t>Đặt lịch / Đã trả 7d</a:t>
+            </a:r>
+            <a:endParaRPr lang="en-US" sz="1300" dirty="0"/>
+          </a:p>
+          <a:p>
+            <a:pPr>
+              <a:spcAft>
+                <a:spcPts val="600"/>
+              </a:spcAft>
+            </a:pPr>
+            <a:endParaRPr lang="en-US" sz="1300" dirty="0"/>
+          </a:p>
+          <a:p>
+            <a:pPr>
+              <a:spcAft>
+                <a:spcPts val="600"/>
+              </a:spcAft>
+            </a:pPr>
+            <a:r>
+              <a:rPr lang="en-US" sz="1300" dirty="0">
+                <a:solidFill>
+                  <a:srgbClr val="F1F5F9"/>
+                </a:solidFill>
+                <a:latin typeface="Calibri" pitchFamily="34" charset="0"/>
+                <a:ea typeface="Calibri" pitchFamily="34" charset="-122"/>
+                <a:cs typeface="Calibri" pitchFamily="34" charset="-120"/>
+              </a:rPr>
+              <a:t>Form CRUD:</a:t>
+            </a:r>
+            <a:endParaRPr lang="en-US" sz="1300" dirty="0"/>
+          </a:p>
+          <a:p>
+            <a:pPr>
+              <a:spcAft>
+                <a:spcPts val="600"/>
+              </a:spcAft>
+            </a:pPr>
+            <a:r>
+              <a:rPr lang="en-US" sz="1300" dirty="0">
+                <a:solidFill>
+                  <a:srgbClr val="F1F5F9"/>
+                </a:solidFill>
+                <a:latin typeface="Calibri" pitchFamily="34" charset="0"/>
+                <a:ea typeface="Calibri" pitchFamily="34" charset="-122"/>
+                <a:cs typeface="Calibri" pitchFamily="34" charset="-120"/>
+              </a:rPr>
+              <a:t>  + Điều xe</a:t>
+            </a:r>
+            <a:endParaRPr lang="en-US" sz="1300" dirty="0"/>
+          </a:p>
+          <a:p>
+            <a:pPr>
+              <a:spcAft>
+                <a:spcPts val="600"/>
+              </a:spcAft>
+            </a:pPr>
+            <a:r>
+              <a:rPr lang="en-US" sz="1300" dirty="0">
+                <a:solidFill>
+                  <a:srgbClr val="F1F5F9"/>
+                </a:solidFill>
+                <a:latin typeface="Calibri" pitchFamily="34" charset="0"/>
+                <a:ea typeface="Calibri" pitchFamily="34" charset="-122"/>
+                <a:cs typeface="Calibri" pitchFamily="34" charset="-120"/>
+              </a:rPr>
+              <a:t>  Biển số · Tài xế</a:t>
+            </a:r>
+            <a:endParaRPr lang="en-US" sz="1300" dirty="0"/>
+          </a:p>
+          <a:p>
+            <a:pPr>
+              <a:spcAft>
+                <a:spcPts val="600"/>
+              </a:spcAft>
+            </a:pPr>
+            <a:r>
+              <a:rPr lang="en-US" sz="1300" dirty="0">
+                <a:solidFill>
+                  <a:srgbClr val="F1F5F9"/>
+                </a:solidFill>
+                <a:latin typeface="Calibri" pitchFamily="34" charset="0"/>
+                <a:ea typeface="Calibri" pitchFamily="34" charset="-122"/>
+                <a:cs typeface="Calibri" pitchFamily="34" charset="-120"/>
+              </a:rPr>
+              <a:t>  Mục đích</a:t>
+            </a:r>
+            <a:endParaRPr lang="en-US" sz="1300" dirty="0"/>
+          </a:p>
+          <a:p>
+            <a:pPr>
+              <a:spcAft>
+                <a:spcPts val="600"/>
+              </a:spcAft>
+            </a:pPr>
+            <a:r>
+              <a:rPr lang="en-US" sz="1300" dirty="0">
+                <a:solidFill>
+                  <a:srgbClr val="F1F5F9"/>
+                </a:solidFill>
+                <a:latin typeface="Calibri" pitchFamily="34" charset="0"/>
+                <a:ea typeface="Calibri" pitchFamily="34" charset="-122"/>
+                <a:cs typeface="Calibri" pitchFamily="34" charset="-120"/>
+              </a:rPr>
+              <a:t>  Bắt đầu · Kết thúc</a:t>
+            </a:r>
+            <a:endParaRPr lang="en-US" sz="1300" dirty="0"/>
+          </a:p>
+          <a:p>
+            <a:pPr>
+              <a:spcAft>
+                <a:spcPts val="600"/>
+              </a:spcAft>
+            </a:pPr>
+            <a:endParaRPr lang="en-US" sz="1300" dirty="0"/>
+          </a:p>
+          <a:p>
+            <a:pPr>
+              <a:spcAft>
+                <a:spcPts val="600"/>
+              </a:spcAft>
+            </a:pPr>
+            <a:r>
+              <a:rPr lang="en-US" sz="1300" dirty="0">
+                <a:solidFill>
+                  <a:srgbClr val="F1F5F9"/>
+                </a:solidFill>
+                <a:latin typeface="Calibri" pitchFamily="34" charset="0"/>
+                <a:ea typeface="Calibri" pitchFamily="34" charset="-122"/>
+                <a:cs typeface="Calibri" pitchFamily="34" charset="-120"/>
+              </a:rPr>
+              <a:t>Datetime-local picker,</a:t>
+            </a:r>
+            <a:endParaRPr lang="en-US" sz="1300" dirty="0"/>
+          </a:p>
+          <a:p>
+            <a:pPr>
+              <a:spcAft>
+                <a:spcPts val="600"/>
+              </a:spcAft>
+            </a:pPr>
+            <a:r>
+              <a:rPr lang="en-US" sz="1300" dirty="0">
+                <a:solidFill>
+                  <a:srgbClr val="F1F5F9"/>
+                </a:solidFill>
+                <a:latin typeface="Calibri" pitchFamily="34" charset="0"/>
+                <a:ea typeface="Calibri" pitchFamily="34" charset="-122"/>
+                <a:cs typeface="Calibri" pitchFamily="34" charset="-120"/>
+              </a:rPr>
+              <a:t>badge màu theo trạng.</a:t>
+            </a:r>
+            <a:endParaRPr lang="en-US" sz="1300" dirty="0"/>
+          </a:p>
+        </p:txBody>
+      </p:sp>
+      <p:sp>
+        <p:nvSpPr>
+          <p:cNvPr id="12" name="Text 9"/>
           <p:cNvSpPr/>
           <p:nvPr/>
         </p:nvSpPr>
@@ -12362,7 +15831,1181 @@
                 <a:ea typeface="Calibri" pitchFamily="34" charset="-122"/>
                 <a:cs typeface="Calibri" pitchFamily="34" charset="-120"/>
               </a:rPr>
-              <a:t>Demo credentials: anh.nguyen@cofico.vn / demo1234! — đăng nhập, click 6 tabs, mọi thứ là live data từ Postgres.</a:t>
+              <a:t>atlas-aec · v2 · live demo</a:t>
+            </a:r>
+            <a:endParaRPr lang="en-US" sz="1000" dirty="0"/>
+          </a:p>
+        </p:txBody>
+      </p:sp>
+    </p:spTree>
+  </p:cSld>
+  <p:clrMapOvr>
+    <a:masterClrMapping/>
+  </p:clrMapOvr>
+</p:sld>
+</file>
+
+<file path=ppt/slides/slide28.xml><?xml version="1.0" encoding="utf-8"?>
+<p:sld xmlns:a="http://schemas.openxmlformats.org/drawingml/2006/main" xmlns:r="http://schemas.openxmlformats.org/officeDocument/2006/relationships" xmlns:p="http://schemas.openxmlformats.org/presentationml/2006/main">
+  <p:cSld name="Slide 28">
+    <p:bg>
+      <p:bgPr>
+        <a:solidFill>
+          <a:srgbClr val="0B1220"/>
+        </a:solidFill>
+      </p:bgPr>
+    </p:bg>
+    <p:spTree>
+      <p:nvGrpSpPr>
+        <p:cNvPr id="1" name=""/>
+        <p:cNvGrpSpPr/>
+        <p:nvPr/>
+      </p:nvGrpSpPr>
+      <p:grpSpPr>
+        <a:xfrm>
+          <a:off x="0" y="0"/>
+          <a:ext cx="0" cy="0"/>
+          <a:chOff x="0" y="0"/>
+          <a:chExt cx="0" cy="0"/>
+        </a:xfrm>
+      </p:grpSpPr>
+      <p:sp>
+        <p:nvSpPr>
+          <p:cNvPr id="2" name="Shape 0"/>
+          <p:cNvSpPr/>
+          <p:nvPr/>
+        </p:nvSpPr>
+        <p:spPr>
+          <a:xfrm>
+            <a:off x="457200" y="320040"/>
+            <a:ext cx="292608" cy="292608"/>
+          </a:xfrm>
+          <a:prstGeom prst="rect">
+            <a:avLst/>
+          </a:prstGeom>
+          <a:solidFill>
+            <a:srgbClr val="3B82F6"/>
+          </a:solidFill>
+          <a:ln w="12700">
+            <a:solidFill>
+              <a:srgbClr val="3B82F6"/>
+            </a:solidFill>
+            <a:prstDash val="solid"/>
+          </a:ln>
+        </p:spPr>
+      </p:sp>
+      <p:sp>
+        <p:nvSpPr>
+          <p:cNvPr id="3" name="Text 1"/>
+          <p:cNvSpPr/>
+          <p:nvPr/>
+        </p:nvSpPr>
+        <p:spPr>
+          <a:xfrm>
+            <a:off x="457200" y="320040"/>
+            <a:ext cx="292608" cy="292608"/>
+          </a:xfrm>
+          <a:prstGeom prst="rect">
+            <a:avLst/>
+          </a:prstGeom>
+          <a:noFill/>
+          <a:ln/>
+        </p:spPr>
+        <p:txBody>
+          <a:bodyPr wrap="square" lIns="0" tIns="0" rIns="0" bIns="0" rtlCol="0" anchor="ctr"/>
+          <a:lstStyle/>
+          <a:p>
+            <a:pPr algn="ctr" indent="0" marL="0">
+              <a:buNone/>
+            </a:pPr>
+            <a:r>
+              <a:rPr lang="en-US" sz="1600" b="1" dirty="0">
+                <a:solidFill>
+                  <a:srgbClr val="FFFFFF"/>
+                </a:solidFill>
+                <a:latin typeface="Calibri" pitchFamily="34" charset="0"/>
+                <a:ea typeface="Calibri" pitchFamily="34" charset="-122"/>
+                <a:cs typeface="Calibri" pitchFamily="34" charset="-120"/>
+              </a:rPr>
+              <a:t>A</a:t>
+            </a:r>
+            <a:endParaRPr lang="en-US" sz="1600" dirty="0"/>
+          </a:p>
+        </p:txBody>
+      </p:sp>
+      <p:sp>
+        <p:nvSpPr>
+          <p:cNvPr id="4" name="Text 2"/>
+          <p:cNvSpPr/>
+          <p:nvPr/>
+        </p:nvSpPr>
+        <p:spPr>
+          <a:xfrm>
+            <a:off x="822960" y="320040"/>
+            <a:ext cx="2743200" cy="292608"/>
+          </a:xfrm>
+          <a:prstGeom prst="rect">
+            <a:avLst/>
+          </a:prstGeom>
+          <a:noFill/>
+          <a:ln/>
+        </p:spPr>
+        <p:txBody>
+          <a:bodyPr wrap="square" lIns="0" tIns="0" rIns="0" bIns="0" rtlCol="0" anchor="ctr"/>
+          <a:lstStyle/>
+          <a:p>
+            <a:pPr indent="0" marL="0">
+              <a:buNone/>
+            </a:pPr>
+            <a:r>
+              <a:rPr lang="en-US" sz="1300" b="1" dirty="0">
+                <a:solidFill>
+                  <a:srgbClr val="F1F5F9"/>
+                </a:solidFill>
+                <a:latin typeface="Calibri" pitchFamily="34" charset="0"/>
+                <a:ea typeface="Calibri" pitchFamily="34" charset="-122"/>
+                <a:cs typeface="Calibri" pitchFamily="34" charset="-120"/>
+              </a:rPr>
+              <a:t>Atlas AEC</a:t>
+            </a:r>
+            <a:endParaRPr lang="en-US" sz="1300" dirty="0"/>
+          </a:p>
+        </p:txBody>
+      </p:sp>
+      <p:sp>
+        <p:nvSpPr>
+          <p:cNvPr id="5" name="Text 3"/>
+          <p:cNvSpPr/>
+          <p:nvPr/>
+        </p:nvSpPr>
+        <p:spPr>
+          <a:xfrm>
+            <a:off x="3566160" y="356616"/>
+            <a:ext cx="5486400" cy="256032"/>
+          </a:xfrm>
+          <a:prstGeom prst="rect">
+            <a:avLst/>
+          </a:prstGeom>
+          <a:noFill/>
+          <a:ln/>
+        </p:spPr>
+        <p:txBody>
+          <a:bodyPr wrap="square" lIns="0" tIns="0" rIns="0" bIns="0" rtlCol="0" anchor="ctr"/>
+          <a:lstStyle/>
+          <a:p>
+            <a:pPr indent="0" marL="0">
+              <a:buNone/>
+            </a:pPr>
+            <a:r>
+              <a:rPr lang="en-US" sz="1100" dirty="0">
+                <a:solidFill>
+                  <a:srgbClr val="8B9BB4"/>
+                </a:solidFill>
+                <a:latin typeface="Calibri" pitchFamily="34" charset="0"/>
+                <a:ea typeface="Calibri" pitchFamily="34" charset="-122"/>
+                <a:cs typeface="Calibri" pitchFamily="34" charset="-120"/>
+              </a:rPr>
+              <a:t>TC-KT — Tạm ứng/Thanh toán/Hoàn ứng</a:t>
+            </a:r>
+            <a:endParaRPr lang="en-US" sz="1100" dirty="0"/>
+          </a:p>
+        </p:txBody>
+      </p:sp>
+      <p:sp>
+        <p:nvSpPr>
+          <p:cNvPr id="6" name="Text 4"/>
+          <p:cNvSpPr/>
+          <p:nvPr/>
+        </p:nvSpPr>
+        <p:spPr>
+          <a:xfrm>
+            <a:off x="10881360" y="320040"/>
+            <a:ext cx="822960" cy="292608"/>
+          </a:xfrm>
+          <a:prstGeom prst="rect">
+            <a:avLst/>
+          </a:prstGeom>
+          <a:noFill/>
+          <a:ln/>
+        </p:spPr>
+        <p:txBody>
+          <a:bodyPr wrap="square" lIns="0" tIns="0" rIns="0" bIns="0" rtlCol="0" anchor="ctr"/>
+          <a:lstStyle/>
+          <a:p>
+            <a:pPr algn="r" indent="0" marL="0">
+              <a:buNone/>
+            </a:pPr>
+            <a:r>
+              <a:rPr lang="en-US" sz="1100" dirty="0">
+                <a:solidFill>
+                  <a:srgbClr val="8B9BB4"/>
+                </a:solidFill>
+                <a:latin typeface="Calibri" pitchFamily="34" charset="0"/>
+                <a:ea typeface="Calibri" pitchFamily="34" charset="-122"/>
+                <a:cs typeface="Calibri" pitchFamily="34" charset="-120"/>
+              </a:rPr>
+              <a:t>28 / 32</a:t>
+            </a:r>
+            <a:endParaRPr lang="en-US" sz="1100" dirty="0"/>
+          </a:p>
+        </p:txBody>
+      </p:sp>
+      <p:sp>
+        <p:nvSpPr>
+          <p:cNvPr id="7" name="Text 5"/>
+          <p:cNvSpPr/>
+          <p:nvPr/>
+        </p:nvSpPr>
+        <p:spPr>
+          <a:xfrm>
+            <a:off x="457200" y="822960"/>
+            <a:ext cx="11247120" cy="502920"/>
+          </a:xfrm>
+          <a:prstGeom prst="rect">
+            <a:avLst/>
+          </a:prstGeom>
+          <a:noFill/>
+          <a:ln/>
+        </p:spPr>
+        <p:txBody>
+          <a:bodyPr wrap="square" lIns="0" tIns="0" rIns="0" bIns="0" rtlCol="0" anchor="ctr"/>
+          <a:lstStyle/>
+          <a:p>
+            <a:pPr indent="0" marL="0">
+              <a:buNone/>
+            </a:pPr>
+            <a:r>
+              <a:rPr lang="en-US" sz="2600" b="1" dirty="0">
+                <a:solidFill>
+                  <a:srgbClr val="F1F5F9"/>
+                </a:solidFill>
+                <a:latin typeface="Calibri" pitchFamily="34" charset="0"/>
+                <a:ea typeface="Calibri" pitchFamily="34" charset="-122"/>
+                <a:cs typeface="Calibri" pitchFamily="34" charset="-120"/>
+              </a:rPr>
+              <a:t>Sổ tài chính · 3 loại GD · Lineage hoàn ứng</a:t>
+            </a:r>
+            <a:endParaRPr lang="en-US" sz="2600" dirty="0"/>
+          </a:p>
+        </p:txBody>
+      </p:sp>
+      <p:sp>
+        <p:nvSpPr>
+          <p:cNvPr id="8" name="Text 6"/>
+          <p:cNvSpPr/>
+          <p:nvPr/>
+        </p:nvSpPr>
+        <p:spPr>
+          <a:xfrm>
+            <a:off x="457200" y="1325880"/>
+            <a:ext cx="11247120" cy="292608"/>
+          </a:xfrm>
+          <a:prstGeom prst="rect">
+            <a:avLst/>
+          </a:prstGeom>
+          <a:noFill/>
+          <a:ln/>
+        </p:spPr>
+        <p:txBody>
+          <a:bodyPr wrap="square" lIns="0" tIns="0" rIns="0" bIns="0" rtlCol="0" anchor="ctr"/>
+          <a:lstStyle/>
+          <a:p>
+            <a:pPr indent="0" marL="0">
+              <a:buNone/>
+            </a:pPr>
+            <a:r>
+              <a:rPr lang="en-US" sz="1400" i="1" dirty="0">
+                <a:solidFill>
+                  <a:srgbClr val="8B9BB4"/>
+                </a:solidFill>
+                <a:latin typeface="Calibri" pitchFamily="34" charset="0"/>
+                <a:ea typeface="Calibri" pitchFamily="34" charset="-122"/>
+                <a:cs typeface="Calibri" pitchFamily="34" charset="-120"/>
+              </a:rPr>
+              <a:t>AdvanceTransaction · type TAM_UNG/THANH_TOAN/HOAN_UNG · status PENDING→APPROVED→SETTLED</a:t>
+            </a:r>
+            <a:endParaRPr lang="en-US" sz="1400" dirty="0"/>
+          </a:p>
+        </p:txBody>
+      </p:sp>
+      <p:sp>
+        <p:nvSpPr>
+          <p:cNvPr id="9" name="Shape 7"/>
+          <p:cNvSpPr/>
+          <p:nvPr/>
+        </p:nvSpPr>
+        <p:spPr>
+          <a:xfrm>
+            <a:off x="594360" y="1737360"/>
+            <a:ext cx="7863840" cy="4663440"/>
+          </a:xfrm>
+          <a:prstGeom prst="rect">
+            <a:avLst/>
+          </a:prstGeom>
+          <a:solidFill>
+            <a:srgbClr val="111A30"/>
+          </a:solidFill>
+          <a:ln w="12700">
+            <a:solidFill>
+              <a:srgbClr val="1F2A44"/>
+            </a:solidFill>
+            <a:prstDash val="solid"/>
+          </a:ln>
+        </p:spPr>
+      </p:sp>
+      <p:pic>
+        <p:nvPicPr>
+          <p:cNvPr id="10" name="Image 0" descr="/Users/vsf-thuynt519-l/Documents/GitHub/atlas-aec/docs/demo-screens/27-advances.png">    </p:cNvPr>
+          <p:cNvPicPr>
+            <a:picLocks noChangeAspect="1"/>
+          </p:cNvPicPr>
+          <p:nvPr/>
+        </p:nvPicPr>
+        <p:blipFill>
+          <a:blip r:embed="rId1"/>
+          <a:srcRect l="0" r="0" t="0" b="0"/>
+          <a:stretch/>
+        </p:blipFill>
+        <p:spPr>
+          <a:xfrm>
+            <a:off x="640080" y="1783080"/>
+            <a:ext cx="7772400" cy="4572000"/>
+          </a:xfrm>
+          <a:prstGeom prst="rect">
+            <a:avLst/>
+          </a:prstGeom>
+        </p:spPr>
+      </p:pic>
+      <p:sp>
+        <p:nvSpPr>
+          <p:cNvPr id="11" name="Text 8"/>
+          <p:cNvSpPr/>
+          <p:nvPr/>
+        </p:nvSpPr>
+        <p:spPr>
+          <a:xfrm>
+            <a:off x="8778240" y="1783080"/>
+            <a:ext cx="2926080" cy="4572000"/>
+          </a:xfrm>
+          <a:prstGeom prst="rect">
+            <a:avLst/>
+          </a:prstGeom>
+          <a:noFill/>
+          <a:ln/>
+        </p:spPr>
+        <p:txBody>
+          <a:bodyPr wrap="square" lIns="0" tIns="0" rIns="0" bIns="0" rtlCol="0" anchor="t"/>
+          <a:lstStyle/>
+          <a:p>
+            <a:pPr>
+              <a:spcAft>
+                <a:spcPts val="600"/>
+              </a:spcAft>
+            </a:pPr>
+            <a:r>
+              <a:rPr lang="en-US" sz="1300" dirty="0">
+                <a:solidFill>
+                  <a:srgbClr val="F1F5F9"/>
+                </a:solidFill>
+                <a:latin typeface="Calibri" pitchFamily="34" charset="0"/>
+                <a:ea typeface="Calibri" pitchFamily="34" charset="-122"/>
+                <a:cs typeface="Calibri" pitchFamily="34" charset="-120"/>
+              </a:rPr>
+              <a:t>KPI: Tổng GD / Tạm ứng</a:t>
+            </a:r>
+            <a:endParaRPr lang="en-US" sz="1300" dirty="0"/>
+          </a:p>
+          <a:p>
+            <a:pPr>
+              <a:spcAft>
+                <a:spcPts val="600"/>
+              </a:spcAft>
+            </a:pPr>
+            <a:r>
+              <a:rPr lang="en-US" sz="1300" dirty="0">
+                <a:solidFill>
+                  <a:srgbClr val="F1F5F9"/>
+                </a:solidFill>
+                <a:latin typeface="Calibri" pitchFamily="34" charset="0"/>
+                <a:ea typeface="Calibri" pitchFamily="34" charset="-122"/>
+                <a:cs typeface="Calibri" pitchFamily="34" charset="-120"/>
+              </a:rPr>
+              <a:t>chưa hoàn / Đã thanh</a:t>
+            </a:r>
+            <a:endParaRPr lang="en-US" sz="1300" dirty="0"/>
+          </a:p>
+          <a:p>
+            <a:pPr>
+              <a:spcAft>
+                <a:spcPts val="600"/>
+              </a:spcAft>
+            </a:pPr>
+            <a:r>
+              <a:rPr lang="en-US" sz="1300" dirty="0">
+                <a:solidFill>
+                  <a:srgbClr val="F1F5F9"/>
+                </a:solidFill>
+                <a:latin typeface="Calibri" pitchFamily="34" charset="0"/>
+                <a:ea typeface="Calibri" pitchFamily="34" charset="-122"/>
+                <a:cs typeface="Calibri" pitchFamily="34" charset="-120"/>
+              </a:rPr>
+              <a:t>toán / Đã hoàn ứng</a:t>
+            </a:r>
+            <a:endParaRPr lang="en-US" sz="1300" dirty="0"/>
+          </a:p>
+          <a:p>
+            <a:pPr>
+              <a:spcAft>
+                <a:spcPts val="600"/>
+              </a:spcAft>
+            </a:pPr>
+            <a:endParaRPr lang="en-US" sz="1300" dirty="0"/>
+          </a:p>
+          <a:p>
+            <a:pPr>
+              <a:spcAft>
+                <a:spcPts val="600"/>
+              </a:spcAft>
+            </a:pPr>
+            <a:r>
+              <a:rPr lang="en-US" sz="1300" dirty="0">
+                <a:solidFill>
+                  <a:srgbClr val="F1F5F9"/>
+                </a:solidFill>
+                <a:latin typeface="Calibri" pitchFamily="34" charset="0"/>
+                <a:ea typeface="Calibri" pitchFamily="34" charset="-122"/>
+                <a:cs typeface="Calibri" pitchFamily="34" charset="-120"/>
+              </a:rPr>
+              <a:t>Form CRUD:</a:t>
+            </a:r>
+            <a:endParaRPr lang="en-US" sz="1300" dirty="0"/>
+          </a:p>
+          <a:p>
+            <a:pPr>
+              <a:spcAft>
+                <a:spcPts val="600"/>
+              </a:spcAft>
+            </a:pPr>
+            <a:r>
+              <a:rPr lang="en-US" sz="1300" dirty="0">
+                <a:solidFill>
+                  <a:srgbClr val="F1F5F9"/>
+                </a:solidFill>
+                <a:latin typeface="Calibri" pitchFamily="34" charset="0"/>
+                <a:ea typeface="Calibri" pitchFamily="34" charset="-122"/>
+                <a:cs typeface="Calibri" pitchFamily="34" charset="-120"/>
+              </a:rPr>
+              <a:t>  + Tạm ứng/Thanh toán</a:t>
+            </a:r>
+            <a:endParaRPr lang="en-US" sz="1300" dirty="0"/>
+          </a:p>
+          <a:p>
+            <a:pPr>
+              <a:spcAft>
+                <a:spcPts val="600"/>
+              </a:spcAft>
+            </a:pPr>
+            <a:r>
+              <a:rPr lang="en-US" sz="1300" dirty="0">
+                <a:solidFill>
+                  <a:srgbClr val="F1F5F9"/>
+                </a:solidFill>
+                <a:latin typeface="Calibri" pitchFamily="34" charset="0"/>
+                <a:ea typeface="Calibri" pitchFamily="34" charset="-122"/>
+                <a:cs typeface="Calibri" pitchFamily="34" charset="-120"/>
+              </a:rPr>
+              <a:t>  Số phiếu · Người nhận</a:t>
+            </a:r>
+            <a:endParaRPr lang="en-US" sz="1300" dirty="0"/>
+          </a:p>
+          <a:p>
+            <a:pPr>
+              <a:spcAft>
+                <a:spcPts val="600"/>
+              </a:spcAft>
+            </a:pPr>
+            <a:r>
+              <a:rPr lang="en-US" sz="1300" dirty="0">
+                <a:solidFill>
+                  <a:srgbClr val="F1F5F9"/>
+                </a:solidFill>
+                <a:latin typeface="Calibri" pitchFamily="34" charset="0"/>
+                <a:ea typeface="Calibri" pitchFamily="34" charset="-122"/>
+                <a:cs typeface="Calibri" pitchFamily="34" charset="-120"/>
+              </a:rPr>
+              <a:t>  Số tiền · Mục đích</a:t>
+            </a:r>
+            <a:endParaRPr lang="en-US" sz="1300" dirty="0"/>
+          </a:p>
+          <a:p>
+            <a:pPr>
+              <a:spcAft>
+                <a:spcPts val="600"/>
+              </a:spcAft>
+            </a:pPr>
+            <a:r>
+              <a:rPr lang="en-US" sz="1300" dirty="0">
+                <a:solidFill>
+                  <a:srgbClr val="F1F5F9"/>
+                </a:solidFill>
+                <a:latin typeface="Calibri" pitchFamily="34" charset="0"/>
+                <a:ea typeface="Calibri" pitchFamily="34" charset="-122"/>
+                <a:cs typeface="Calibri" pitchFamily="34" charset="-120"/>
+              </a:rPr>
+              <a:t>  Gắn dự án (optional)</a:t>
+            </a:r>
+            <a:endParaRPr lang="en-US" sz="1300" dirty="0"/>
+          </a:p>
+          <a:p>
+            <a:pPr>
+              <a:spcAft>
+                <a:spcPts val="600"/>
+              </a:spcAft>
+            </a:pPr>
+            <a:endParaRPr lang="en-US" sz="1300" dirty="0"/>
+          </a:p>
+          <a:p>
+            <a:pPr>
+              <a:spcAft>
+                <a:spcPts val="600"/>
+              </a:spcAft>
+            </a:pPr>
+            <a:r>
+              <a:rPr lang="en-US" sz="1300" dirty="0">
+                <a:solidFill>
+                  <a:srgbClr val="F1F5F9"/>
+                </a:solidFill>
+                <a:latin typeface="Calibri" pitchFamily="34" charset="0"/>
+                <a:ea typeface="Calibri" pitchFamily="34" charset="-122"/>
+                <a:cs typeface="Calibri" pitchFamily="34" charset="-120"/>
+              </a:rPr>
+              <a:t>parentTxnId → lineage.</a:t>
+            </a:r>
+            <a:endParaRPr lang="en-US" sz="1300" dirty="0"/>
+          </a:p>
+        </p:txBody>
+      </p:sp>
+      <p:sp>
+        <p:nvSpPr>
+          <p:cNvPr id="12" name="Text 9"/>
+          <p:cNvSpPr/>
+          <p:nvPr/>
+        </p:nvSpPr>
+        <p:spPr>
+          <a:xfrm>
+            <a:off x="457200" y="6446520"/>
+            <a:ext cx="11247120" cy="274320"/>
+          </a:xfrm>
+          <a:prstGeom prst="rect">
+            <a:avLst/>
+          </a:prstGeom>
+          <a:noFill/>
+          <a:ln/>
+        </p:spPr>
+        <p:txBody>
+          <a:bodyPr wrap="square" lIns="0" tIns="0" rIns="0" bIns="0" rtlCol="0" anchor="ctr"/>
+          <a:lstStyle/>
+          <a:p>
+            <a:pPr indent="0" marL="0">
+              <a:buNone/>
+            </a:pPr>
+            <a:r>
+              <a:rPr lang="en-US" sz="1000" dirty="0">
+                <a:solidFill>
+                  <a:srgbClr val="475569"/>
+                </a:solidFill>
+                <a:latin typeface="Calibri" pitchFamily="34" charset="0"/>
+                <a:ea typeface="Calibri" pitchFamily="34" charset="-122"/>
+                <a:cs typeface="Calibri" pitchFamily="34" charset="-120"/>
+              </a:rPr>
+              <a:t>atlas-aec · v2 · live demo</a:t>
+            </a:r>
+            <a:endParaRPr lang="en-US" sz="1000" dirty="0"/>
+          </a:p>
+        </p:txBody>
+      </p:sp>
+    </p:spTree>
+  </p:cSld>
+  <p:clrMapOvr>
+    <a:masterClrMapping/>
+  </p:clrMapOvr>
+</p:sld>
+</file>
+
+<file path=ppt/slides/slide29.xml><?xml version="1.0" encoding="utf-8"?>
+<p:sld xmlns:a="http://schemas.openxmlformats.org/drawingml/2006/main" xmlns:r="http://schemas.openxmlformats.org/officeDocument/2006/relationships" xmlns:p="http://schemas.openxmlformats.org/presentationml/2006/main">
+  <p:cSld name="Slide 29">
+    <p:bg>
+      <p:bgPr>
+        <a:solidFill>
+          <a:srgbClr val="0B1220"/>
+        </a:solidFill>
+      </p:bgPr>
+    </p:bg>
+    <p:spTree>
+      <p:nvGrpSpPr>
+        <p:cNvPr id="1" name=""/>
+        <p:cNvGrpSpPr/>
+        <p:nvPr/>
+      </p:nvGrpSpPr>
+      <p:grpSpPr>
+        <a:xfrm>
+          <a:off x="0" y="0"/>
+          <a:ext cx="0" cy="0"/>
+          <a:chOff x="0" y="0"/>
+          <a:chExt cx="0" cy="0"/>
+        </a:xfrm>
+      </p:grpSpPr>
+      <p:sp>
+        <p:nvSpPr>
+          <p:cNvPr id="2" name="Shape 0"/>
+          <p:cNvSpPr/>
+          <p:nvPr/>
+        </p:nvSpPr>
+        <p:spPr>
+          <a:xfrm>
+            <a:off x="457200" y="320040"/>
+            <a:ext cx="292608" cy="292608"/>
+          </a:xfrm>
+          <a:prstGeom prst="rect">
+            <a:avLst/>
+          </a:prstGeom>
+          <a:solidFill>
+            <a:srgbClr val="3B82F6"/>
+          </a:solidFill>
+          <a:ln w="12700">
+            <a:solidFill>
+              <a:srgbClr val="3B82F6"/>
+            </a:solidFill>
+            <a:prstDash val="solid"/>
+          </a:ln>
+        </p:spPr>
+      </p:sp>
+      <p:sp>
+        <p:nvSpPr>
+          <p:cNvPr id="3" name="Text 1"/>
+          <p:cNvSpPr/>
+          <p:nvPr/>
+        </p:nvSpPr>
+        <p:spPr>
+          <a:xfrm>
+            <a:off x="457200" y="320040"/>
+            <a:ext cx="292608" cy="292608"/>
+          </a:xfrm>
+          <a:prstGeom prst="rect">
+            <a:avLst/>
+          </a:prstGeom>
+          <a:noFill/>
+          <a:ln/>
+        </p:spPr>
+        <p:txBody>
+          <a:bodyPr wrap="square" lIns="0" tIns="0" rIns="0" bIns="0" rtlCol="0" anchor="ctr"/>
+          <a:lstStyle/>
+          <a:p>
+            <a:pPr algn="ctr" indent="0" marL="0">
+              <a:buNone/>
+            </a:pPr>
+            <a:r>
+              <a:rPr lang="en-US" sz="1600" b="1" dirty="0">
+                <a:solidFill>
+                  <a:srgbClr val="FFFFFF"/>
+                </a:solidFill>
+                <a:latin typeface="Calibri" pitchFamily="34" charset="0"/>
+                <a:ea typeface="Calibri" pitchFamily="34" charset="-122"/>
+                <a:cs typeface="Calibri" pitchFamily="34" charset="-120"/>
+              </a:rPr>
+              <a:t>A</a:t>
+            </a:r>
+            <a:endParaRPr lang="en-US" sz="1600" dirty="0"/>
+          </a:p>
+        </p:txBody>
+      </p:sp>
+      <p:sp>
+        <p:nvSpPr>
+          <p:cNvPr id="4" name="Text 2"/>
+          <p:cNvSpPr/>
+          <p:nvPr/>
+        </p:nvSpPr>
+        <p:spPr>
+          <a:xfrm>
+            <a:off x="822960" y="320040"/>
+            <a:ext cx="2743200" cy="292608"/>
+          </a:xfrm>
+          <a:prstGeom prst="rect">
+            <a:avLst/>
+          </a:prstGeom>
+          <a:noFill/>
+          <a:ln/>
+        </p:spPr>
+        <p:txBody>
+          <a:bodyPr wrap="square" lIns="0" tIns="0" rIns="0" bIns="0" rtlCol="0" anchor="ctr"/>
+          <a:lstStyle/>
+          <a:p>
+            <a:pPr indent="0" marL="0">
+              <a:buNone/>
+            </a:pPr>
+            <a:r>
+              <a:rPr lang="en-US" sz="1300" b="1" dirty="0">
+                <a:solidFill>
+                  <a:srgbClr val="F1F5F9"/>
+                </a:solidFill>
+                <a:latin typeface="Calibri" pitchFamily="34" charset="0"/>
+                <a:ea typeface="Calibri" pitchFamily="34" charset="-122"/>
+                <a:cs typeface="Calibri" pitchFamily="34" charset="-120"/>
+              </a:rPr>
+              <a:t>Atlas AEC</a:t>
+            </a:r>
+            <a:endParaRPr lang="en-US" sz="1300" dirty="0"/>
+          </a:p>
+        </p:txBody>
+      </p:sp>
+      <p:sp>
+        <p:nvSpPr>
+          <p:cNvPr id="5" name="Text 3"/>
+          <p:cNvSpPr/>
+          <p:nvPr/>
+        </p:nvSpPr>
+        <p:spPr>
+          <a:xfrm>
+            <a:off x="3566160" y="356616"/>
+            <a:ext cx="5486400" cy="256032"/>
+          </a:xfrm>
+          <a:prstGeom prst="rect">
+            <a:avLst/>
+          </a:prstGeom>
+          <a:noFill/>
+          <a:ln/>
+        </p:spPr>
+        <p:txBody>
+          <a:bodyPr wrap="square" lIns="0" tIns="0" rIns="0" bIns="0" rtlCol="0" anchor="ctr"/>
+          <a:lstStyle/>
+          <a:p>
+            <a:pPr indent="0" marL="0">
+              <a:buNone/>
+            </a:pPr>
+            <a:r>
+              <a:rPr lang="en-US" sz="1100" dirty="0">
+                <a:solidFill>
+                  <a:srgbClr val="8B9BB4"/>
+                </a:solidFill>
+                <a:latin typeface="Calibri" pitchFamily="34" charset="0"/>
+                <a:ea typeface="Calibri" pitchFamily="34" charset="-122"/>
+                <a:cs typeface="Calibri" pitchFamily="34" charset="-120"/>
+              </a:rPr>
+              <a:t>TC-KT — Bảng giao khoán</a:t>
+            </a:r>
+            <a:endParaRPr lang="en-US" sz="1100" dirty="0"/>
+          </a:p>
+        </p:txBody>
+      </p:sp>
+      <p:sp>
+        <p:nvSpPr>
+          <p:cNvPr id="6" name="Text 4"/>
+          <p:cNvSpPr/>
+          <p:nvPr/>
+        </p:nvSpPr>
+        <p:spPr>
+          <a:xfrm>
+            <a:off x="10881360" y="320040"/>
+            <a:ext cx="822960" cy="292608"/>
+          </a:xfrm>
+          <a:prstGeom prst="rect">
+            <a:avLst/>
+          </a:prstGeom>
+          <a:noFill/>
+          <a:ln/>
+        </p:spPr>
+        <p:txBody>
+          <a:bodyPr wrap="square" lIns="0" tIns="0" rIns="0" bIns="0" rtlCol="0" anchor="ctr"/>
+          <a:lstStyle/>
+          <a:p>
+            <a:pPr algn="r" indent="0" marL="0">
+              <a:buNone/>
+            </a:pPr>
+            <a:r>
+              <a:rPr lang="en-US" sz="1100" dirty="0">
+                <a:solidFill>
+                  <a:srgbClr val="8B9BB4"/>
+                </a:solidFill>
+                <a:latin typeface="Calibri" pitchFamily="34" charset="0"/>
+                <a:ea typeface="Calibri" pitchFamily="34" charset="-122"/>
+                <a:cs typeface="Calibri" pitchFamily="34" charset="-120"/>
+              </a:rPr>
+              <a:t>29 / 32</a:t>
+            </a:r>
+            <a:endParaRPr lang="en-US" sz="1100" dirty="0"/>
+          </a:p>
+        </p:txBody>
+      </p:sp>
+      <p:sp>
+        <p:nvSpPr>
+          <p:cNvPr id="7" name="Text 5"/>
+          <p:cNvSpPr/>
+          <p:nvPr/>
+        </p:nvSpPr>
+        <p:spPr>
+          <a:xfrm>
+            <a:off x="457200" y="822960"/>
+            <a:ext cx="11247120" cy="502920"/>
+          </a:xfrm>
+          <a:prstGeom prst="rect">
+            <a:avLst/>
+          </a:prstGeom>
+          <a:noFill/>
+          <a:ln/>
+        </p:spPr>
+        <p:txBody>
+          <a:bodyPr wrap="square" lIns="0" tIns="0" rIns="0" bIns="0" rtlCol="0" anchor="ctr"/>
+          <a:lstStyle/>
+          <a:p>
+            <a:pPr indent="0" marL="0">
+              <a:buNone/>
+            </a:pPr>
+            <a:r>
+              <a:rPr lang="en-US" sz="2600" b="1" dirty="0">
+                <a:solidFill>
+                  <a:srgbClr val="F1F5F9"/>
+                </a:solidFill>
+                <a:latin typeface="Calibri" pitchFamily="34" charset="0"/>
+                <a:ea typeface="Calibri" pitchFamily="34" charset="-122"/>
+                <a:cs typeface="Calibri" pitchFamily="34" charset="-120"/>
+              </a:rPr>
+              <a:t>Bảng giao khoán cho đơn vị · Khoán gọn theo DA</a:t>
+            </a:r>
+            <a:endParaRPr lang="en-US" sz="2600" dirty="0"/>
+          </a:p>
+        </p:txBody>
+      </p:sp>
+      <p:sp>
+        <p:nvSpPr>
+          <p:cNvPr id="8" name="Text 6"/>
+          <p:cNvSpPr/>
+          <p:nvPr/>
+        </p:nvSpPr>
+        <p:spPr>
+          <a:xfrm>
+            <a:off x="457200" y="1325880"/>
+            <a:ext cx="11247120" cy="292608"/>
+          </a:xfrm>
+          <a:prstGeom prst="rect">
+            <a:avLst/>
+          </a:prstGeom>
+          <a:noFill/>
+          <a:ln/>
+        </p:spPr>
+        <p:txBody>
+          <a:bodyPr wrap="square" lIns="0" tIns="0" rIns="0" bIns="0" rtlCol="0" anchor="ctr"/>
+          <a:lstStyle/>
+          <a:p>
+            <a:pPr indent="0" marL="0">
+              <a:buNone/>
+            </a:pPr>
+            <a:r>
+              <a:rPr lang="en-US" sz="1400" i="1" dirty="0">
+                <a:solidFill>
+                  <a:srgbClr val="8B9BB4"/>
+                </a:solidFill>
+                <a:latin typeface="Calibri" pitchFamily="34" charset="0"/>
+                <a:ea typeface="Calibri" pitchFamily="34" charset="-122"/>
+                <a:cs typeface="Calibri" pitchFamily="34" charset="-120"/>
+              </a:rPr>
+              <a:t>ContractorAssignment · phạm vi + giá trị + tiến độ + mốc bàn giao</a:t>
+            </a:r>
+            <a:endParaRPr lang="en-US" sz="1400" dirty="0"/>
+          </a:p>
+        </p:txBody>
+      </p:sp>
+      <p:sp>
+        <p:nvSpPr>
+          <p:cNvPr id="9" name="Shape 7"/>
+          <p:cNvSpPr/>
+          <p:nvPr/>
+        </p:nvSpPr>
+        <p:spPr>
+          <a:xfrm>
+            <a:off x="594360" y="1737360"/>
+            <a:ext cx="7863840" cy="4663440"/>
+          </a:xfrm>
+          <a:prstGeom prst="rect">
+            <a:avLst/>
+          </a:prstGeom>
+          <a:solidFill>
+            <a:srgbClr val="111A30"/>
+          </a:solidFill>
+          <a:ln w="12700">
+            <a:solidFill>
+              <a:srgbClr val="1F2A44"/>
+            </a:solidFill>
+            <a:prstDash val="solid"/>
+          </a:ln>
+        </p:spPr>
+      </p:sp>
+      <p:pic>
+        <p:nvPicPr>
+          <p:cNvPr id="10" name="Image 0" descr="/Users/vsf-thuynt519-l/Documents/GitHub/atlas-aec/docs/demo-screens/28-contractorassigns.png">    </p:cNvPr>
+          <p:cNvPicPr>
+            <a:picLocks noChangeAspect="1"/>
+          </p:cNvPicPr>
+          <p:nvPr/>
+        </p:nvPicPr>
+        <p:blipFill>
+          <a:blip r:embed="rId1"/>
+          <a:srcRect l="0" r="0" t="0" b="0"/>
+          <a:stretch/>
+        </p:blipFill>
+        <p:spPr>
+          <a:xfrm>
+            <a:off x="640080" y="1783080"/>
+            <a:ext cx="7772400" cy="4572000"/>
+          </a:xfrm>
+          <a:prstGeom prst="rect">
+            <a:avLst/>
+          </a:prstGeom>
+        </p:spPr>
+      </p:pic>
+      <p:sp>
+        <p:nvSpPr>
+          <p:cNvPr id="11" name="Text 8"/>
+          <p:cNvSpPr/>
+          <p:nvPr/>
+        </p:nvSpPr>
+        <p:spPr>
+          <a:xfrm>
+            <a:off x="8778240" y="1783080"/>
+            <a:ext cx="2926080" cy="4572000"/>
+          </a:xfrm>
+          <a:prstGeom prst="rect">
+            <a:avLst/>
+          </a:prstGeom>
+          <a:noFill/>
+          <a:ln/>
+        </p:spPr>
+        <p:txBody>
+          <a:bodyPr wrap="square" lIns="0" tIns="0" rIns="0" bIns="0" rtlCol="0" anchor="t"/>
+          <a:lstStyle/>
+          <a:p>
+            <a:pPr>
+              <a:spcAft>
+                <a:spcPts val="600"/>
+              </a:spcAft>
+            </a:pPr>
+            <a:r>
+              <a:rPr lang="en-US" sz="1300" dirty="0">
+                <a:solidFill>
+                  <a:srgbClr val="F1F5F9"/>
+                </a:solidFill>
+                <a:latin typeface="Calibri" pitchFamily="34" charset="0"/>
+                <a:ea typeface="Calibri" pitchFamily="34" charset="-122"/>
+                <a:cs typeface="Calibri" pitchFamily="34" charset="-120"/>
+              </a:rPr>
+              <a:t>Project-scoped (FK</a:t>
+            </a:r>
+            <a:endParaRPr lang="en-US" sz="1300" dirty="0"/>
+          </a:p>
+          <a:p>
+            <a:pPr>
+              <a:spcAft>
+                <a:spcPts val="600"/>
+              </a:spcAft>
+            </a:pPr>
+            <a:r>
+              <a:rPr lang="en-US" sz="1300" dirty="0">
+                <a:solidFill>
+                  <a:srgbClr val="F1F5F9"/>
+                </a:solidFill>
+                <a:latin typeface="Calibri" pitchFamily="34" charset="0"/>
+                <a:ea typeface="Calibri" pitchFamily="34" charset="-122"/>
+                <a:cs typeface="Calibri" pitchFamily="34" charset="-120"/>
+              </a:rPr>
+              <a:t>Project + requireProject).</a:t>
+            </a:r>
+            <a:endParaRPr lang="en-US" sz="1300" dirty="0"/>
+          </a:p>
+          <a:p>
+            <a:pPr>
+              <a:spcAft>
+                <a:spcPts val="600"/>
+              </a:spcAft>
+            </a:pPr>
+            <a:endParaRPr lang="en-US" sz="1300" dirty="0"/>
+          </a:p>
+          <a:p>
+            <a:pPr>
+              <a:spcAft>
+                <a:spcPts val="600"/>
+              </a:spcAft>
+            </a:pPr>
+            <a:r>
+              <a:rPr lang="en-US" sz="1300" dirty="0">
+                <a:solidFill>
+                  <a:srgbClr val="F1F5F9"/>
+                </a:solidFill>
+                <a:latin typeface="Calibri" pitchFamily="34" charset="0"/>
+                <a:ea typeface="Calibri" pitchFamily="34" charset="-122"/>
+                <a:cs typeface="Calibri" pitchFamily="34" charset="-120"/>
+              </a:rPr>
+              <a:t>KPI: Tổng / Đang khoán /</a:t>
+            </a:r>
+            <a:endParaRPr lang="en-US" sz="1300" dirty="0"/>
+          </a:p>
+          <a:p>
+            <a:pPr>
+              <a:spcAft>
+                <a:spcPts val="600"/>
+              </a:spcAft>
+            </a:pPr>
+            <a:r>
+              <a:rPr lang="en-US" sz="1300" dirty="0">
+                <a:solidFill>
+                  <a:srgbClr val="F1F5F9"/>
+                </a:solidFill>
+                <a:latin typeface="Calibri" pitchFamily="34" charset="0"/>
+                <a:ea typeface="Calibri" pitchFamily="34" charset="-122"/>
+                <a:cs typeface="Calibri" pitchFamily="34" charset="-120"/>
+              </a:rPr>
+              <a:t>Giá trị / TB % HT</a:t>
+            </a:r>
+            <a:endParaRPr lang="en-US" sz="1300" dirty="0"/>
+          </a:p>
+          <a:p>
+            <a:pPr>
+              <a:spcAft>
+                <a:spcPts val="600"/>
+              </a:spcAft>
+            </a:pPr>
+            <a:endParaRPr lang="en-US" sz="1300" dirty="0"/>
+          </a:p>
+          <a:p>
+            <a:pPr>
+              <a:spcAft>
+                <a:spcPts val="600"/>
+              </a:spcAft>
+            </a:pPr>
+            <a:r>
+              <a:rPr lang="en-US" sz="1300" dirty="0">
+                <a:solidFill>
+                  <a:srgbClr val="F1F5F9"/>
+                </a:solidFill>
+                <a:latin typeface="Calibri" pitchFamily="34" charset="0"/>
+                <a:ea typeface="Calibri" pitchFamily="34" charset="-122"/>
+                <a:cs typeface="Calibri" pitchFamily="34" charset="-120"/>
+              </a:rPr>
+              <a:t>Form CRUD:</a:t>
+            </a:r>
+            <a:endParaRPr lang="en-US" sz="1300" dirty="0"/>
+          </a:p>
+          <a:p>
+            <a:pPr>
+              <a:spcAft>
+                <a:spcPts val="600"/>
+              </a:spcAft>
+            </a:pPr>
+            <a:r>
+              <a:rPr lang="en-US" sz="1300" dirty="0">
+                <a:solidFill>
+                  <a:srgbClr val="F1F5F9"/>
+                </a:solidFill>
+                <a:latin typeface="Calibri" pitchFamily="34" charset="0"/>
+                <a:ea typeface="Calibri" pitchFamily="34" charset="-122"/>
+                <a:cs typeface="Calibri" pitchFamily="34" charset="-120"/>
+              </a:rPr>
+              <a:t>  + Giao khoán</a:t>
+            </a:r>
+            <a:endParaRPr lang="en-US" sz="1300" dirty="0"/>
+          </a:p>
+          <a:p>
+            <a:pPr>
+              <a:spcAft>
+                <a:spcPts val="600"/>
+              </a:spcAft>
+            </a:pPr>
+            <a:r>
+              <a:rPr lang="en-US" sz="1300" dirty="0">
+                <a:solidFill>
+                  <a:srgbClr val="F1F5F9"/>
+                </a:solidFill>
+                <a:latin typeface="Calibri" pitchFamily="34" charset="0"/>
+                <a:ea typeface="Calibri" pitchFamily="34" charset="-122"/>
+                <a:cs typeface="Calibri" pitchFamily="34" charset="-120"/>
+              </a:rPr>
+              <a:t>  Tên ĐV · Phạm vi</a:t>
+            </a:r>
+            <a:endParaRPr lang="en-US" sz="1300" dirty="0"/>
+          </a:p>
+          <a:p>
+            <a:pPr>
+              <a:spcAft>
+                <a:spcPts val="600"/>
+              </a:spcAft>
+            </a:pPr>
+            <a:r>
+              <a:rPr lang="en-US" sz="1300" dirty="0">
+                <a:solidFill>
+                  <a:srgbClr val="F1F5F9"/>
+                </a:solidFill>
+                <a:latin typeface="Calibri" pitchFamily="34" charset="0"/>
+                <a:ea typeface="Calibri" pitchFamily="34" charset="-122"/>
+                <a:cs typeface="Calibri" pitchFamily="34" charset="-120"/>
+              </a:rPr>
+              <a:t>  Giá trị · NgàyBắt/Kết</a:t>
+            </a:r>
+            <a:endParaRPr lang="en-US" sz="1300" dirty="0"/>
+          </a:p>
+          <a:p>
+            <a:pPr>
+              <a:spcAft>
+                <a:spcPts val="600"/>
+              </a:spcAft>
+            </a:pPr>
+            <a:r>
+              <a:rPr lang="en-US" sz="1300" dirty="0">
+                <a:solidFill>
+                  <a:srgbClr val="F1F5F9"/>
+                </a:solidFill>
+                <a:latin typeface="Calibri" pitchFamily="34" charset="0"/>
+                <a:ea typeface="Calibri" pitchFamily="34" charset="-122"/>
+                <a:cs typeface="Calibri" pitchFamily="34" charset="-120"/>
+              </a:rPr>
+              <a:t>  % HT · Trạng thái</a:t>
+            </a:r>
+            <a:endParaRPr lang="en-US" sz="1300" dirty="0"/>
+          </a:p>
+        </p:txBody>
+      </p:sp>
+      <p:sp>
+        <p:nvSpPr>
+          <p:cNvPr id="12" name="Text 9"/>
+          <p:cNvSpPr/>
+          <p:nvPr/>
+        </p:nvSpPr>
+        <p:spPr>
+          <a:xfrm>
+            <a:off x="457200" y="6446520"/>
+            <a:ext cx="11247120" cy="274320"/>
+          </a:xfrm>
+          <a:prstGeom prst="rect">
+            <a:avLst/>
+          </a:prstGeom>
+          <a:noFill/>
+          <a:ln/>
+        </p:spPr>
+        <p:txBody>
+          <a:bodyPr wrap="square" lIns="0" tIns="0" rIns="0" bIns="0" rtlCol="0" anchor="ctr"/>
+          <a:lstStyle/>
+          <a:p>
+            <a:pPr indent="0" marL="0">
+              <a:buNone/>
+            </a:pPr>
+            <a:r>
+              <a:rPr lang="en-US" sz="1000" dirty="0">
+                <a:solidFill>
+                  <a:srgbClr val="475569"/>
+                </a:solidFill>
+                <a:latin typeface="Calibri" pitchFamily="34" charset="0"/>
+                <a:ea typeface="Calibri" pitchFamily="34" charset="-122"/>
+                <a:cs typeface="Calibri" pitchFamily="34" charset="-120"/>
+              </a:rPr>
+              <a:t>atlas-aec · v2 · live demo</a:t>
             </a:r>
             <a:endParaRPr lang="en-US" sz="1000" dirty="0"/>
           </a:p>
@@ -12575,7 +17218,7 @@
                 <a:ea typeface="Calibri" pitchFamily="34" charset="-122"/>
                 <a:cs typeface="Calibri" pitchFamily="34" charset="-120"/>
               </a:rPr>
-              <a:t>3 / 21</a:t>
+              <a:t>3 / 32</a:t>
             </a:r>
             <a:endParaRPr lang="en-US" sz="1100" dirty="0"/>
           </a:p>
@@ -14341,6 +18984,2577 @@
                 <a:cs typeface="Calibri" pitchFamily="34" charset="-120"/>
               </a:rPr>
               <a:t>Mỗi lớp shippable độc lập — UI cho P1/P2/P3 sẽ phủ tiếp ở các vertical slice kế tiếp.</a:t>
+            </a:r>
+            <a:endParaRPr lang="en-US" sz="1000" dirty="0"/>
+          </a:p>
+        </p:txBody>
+      </p:sp>
+    </p:spTree>
+  </p:cSld>
+  <p:clrMapOvr>
+    <a:masterClrMapping/>
+  </p:clrMapOvr>
+</p:sld>
+</file>
+
+<file path=ppt/slides/slide30.xml><?xml version="1.0" encoding="utf-8"?>
+<p:sld xmlns:a="http://schemas.openxmlformats.org/drawingml/2006/main" xmlns:r="http://schemas.openxmlformats.org/officeDocument/2006/relationships" xmlns:p="http://schemas.openxmlformats.org/presentationml/2006/main">
+  <p:cSld name="Slide 30">
+    <p:bg>
+      <p:bgPr>
+        <a:solidFill>
+          <a:srgbClr val="0B1220"/>
+        </a:solidFill>
+      </p:bgPr>
+    </p:bg>
+    <p:spTree>
+      <p:nvGrpSpPr>
+        <p:cNvPr id="1" name=""/>
+        <p:cNvGrpSpPr/>
+        <p:nvPr/>
+      </p:nvGrpSpPr>
+      <p:grpSpPr>
+        <a:xfrm>
+          <a:off x="0" y="0"/>
+          <a:ext cx="0" cy="0"/>
+          <a:chOff x="0" y="0"/>
+          <a:chExt cx="0" cy="0"/>
+        </a:xfrm>
+      </p:grpSpPr>
+      <p:sp>
+        <p:nvSpPr>
+          <p:cNvPr id="2" name="Shape 0"/>
+          <p:cNvSpPr/>
+          <p:nvPr/>
+        </p:nvSpPr>
+        <p:spPr>
+          <a:xfrm>
+            <a:off x="457200" y="320040"/>
+            <a:ext cx="292608" cy="292608"/>
+          </a:xfrm>
+          <a:prstGeom prst="rect">
+            <a:avLst/>
+          </a:prstGeom>
+          <a:solidFill>
+            <a:srgbClr val="3B82F6"/>
+          </a:solidFill>
+          <a:ln w="12700">
+            <a:solidFill>
+              <a:srgbClr val="3B82F6"/>
+            </a:solidFill>
+            <a:prstDash val="solid"/>
+          </a:ln>
+        </p:spPr>
+      </p:sp>
+      <p:sp>
+        <p:nvSpPr>
+          <p:cNvPr id="3" name="Text 1"/>
+          <p:cNvSpPr/>
+          <p:nvPr/>
+        </p:nvSpPr>
+        <p:spPr>
+          <a:xfrm>
+            <a:off x="457200" y="320040"/>
+            <a:ext cx="292608" cy="292608"/>
+          </a:xfrm>
+          <a:prstGeom prst="rect">
+            <a:avLst/>
+          </a:prstGeom>
+          <a:noFill/>
+          <a:ln/>
+        </p:spPr>
+        <p:txBody>
+          <a:bodyPr wrap="square" lIns="0" tIns="0" rIns="0" bIns="0" rtlCol="0" anchor="ctr"/>
+          <a:lstStyle/>
+          <a:p>
+            <a:pPr algn="ctr" indent="0" marL="0">
+              <a:buNone/>
+            </a:pPr>
+            <a:r>
+              <a:rPr lang="en-US" sz="1600" b="1" dirty="0">
+                <a:solidFill>
+                  <a:srgbClr val="FFFFFF"/>
+                </a:solidFill>
+                <a:latin typeface="Calibri" pitchFamily="34" charset="0"/>
+                <a:ea typeface="Calibri" pitchFamily="34" charset="-122"/>
+                <a:cs typeface="Calibri" pitchFamily="34" charset="-120"/>
+              </a:rPr>
+              <a:t>A</a:t>
+            </a:r>
+            <a:endParaRPr lang="en-US" sz="1600" dirty="0"/>
+          </a:p>
+        </p:txBody>
+      </p:sp>
+      <p:sp>
+        <p:nvSpPr>
+          <p:cNvPr id="4" name="Text 2"/>
+          <p:cNvSpPr/>
+          <p:nvPr/>
+        </p:nvSpPr>
+        <p:spPr>
+          <a:xfrm>
+            <a:off x="822960" y="320040"/>
+            <a:ext cx="2743200" cy="292608"/>
+          </a:xfrm>
+          <a:prstGeom prst="rect">
+            <a:avLst/>
+          </a:prstGeom>
+          <a:noFill/>
+          <a:ln/>
+        </p:spPr>
+        <p:txBody>
+          <a:bodyPr wrap="square" lIns="0" tIns="0" rIns="0" bIns="0" rtlCol="0" anchor="ctr"/>
+          <a:lstStyle/>
+          <a:p>
+            <a:pPr indent="0" marL="0">
+              <a:buNone/>
+            </a:pPr>
+            <a:r>
+              <a:rPr lang="en-US" sz="1300" b="1" dirty="0">
+                <a:solidFill>
+                  <a:srgbClr val="F1F5F9"/>
+                </a:solidFill>
+                <a:latin typeface="Calibri" pitchFamily="34" charset="0"/>
+                <a:ea typeface="Calibri" pitchFamily="34" charset="-122"/>
+                <a:cs typeface="Calibri" pitchFamily="34" charset="-120"/>
+              </a:rPr>
+              <a:t>Atlas AEC</a:t>
+            </a:r>
+            <a:endParaRPr lang="en-US" sz="1300" dirty="0"/>
+          </a:p>
+        </p:txBody>
+      </p:sp>
+      <p:sp>
+        <p:nvSpPr>
+          <p:cNvPr id="5" name="Text 3"/>
+          <p:cNvSpPr/>
+          <p:nvPr/>
+        </p:nvSpPr>
+        <p:spPr>
+          <a:xfrm>
+            <a:off x="3566160" y="356616"/>
+            <a:ext cx="5486400" cy="256032"/>
+          </a:xfrm>
+          <a:prstGeom prst="rect">
+            <a:avLst/>
+          </a:prstGeom>
+          <a:noFill/>
+          <a:ln/>
+        </p:spPr>
+        <p:txBody>
+          <a:bodyPr wrap="square" lIns="0" tIns="0" rIns="0" bIns="0" rtlCol="0" anchor="ctr"/>
+          <a:lstStyle/>
+          <a:p>
+            <a:pPr indent="0" marL="0">
+              <a:buNone/>
+            </a:pPr>
+            <a:r>
+              <a:rPr lang="en-US" sz="1100" dirty="0">
+                <a:solidFill>
+                  <a:srgbClr val="8B9BB4"/>
+                </a:solidFill>
+                <a:latin typeface="Calibri" pitchFamily="34" charset="0"/>
+                <a:ea typeface="Calibri" pitchFamily="34" charset="-122"/>
+                <a:cs typeface="Calibri" pitchFamily="34" charset="-120"/>
+              </a:rPr>
+              <a:t>PTTT — Địa bàn</a:t>
+            </a:r>
+            <a:endParaRPr lang="en-US" sz="1100" dirty="0"/>
+          </a:p>
+        </p:txBody>
+      </p:sp>
+      <p:sp>
+        <p:nvSpPr>
+          <p:cNvPr id="6" name="Text 4"/>
+          <p:cNvSpPr/>
+          <p:nvPr/>
+        </p:nvSpPr>
+        <p:spPr>
+          <a:xfrm>
+            <a:off x="10881360" y="320040"/>
+            <a:ext cx="822960" cy="292608"/>
+          </a:xfrm>
+          <a:prstGeom prst="rect">
+            <a:avLst/>
+          </a:prstGeom>
+          <a:noFill/>
+          <a:ln/>
+        </p:spPr>
+        <p:txBody>
+          <a:bodyPr wrap="square" lIns="0" tIns="0" rIns="0" bIns="0" rtlCol="0" anchor="ctr"/>
+          <a:lstStyle/>
+          <a:p>
+            <a:pPr algn="r" indent="0" marL="0">
+              <a:buNone/>
+            </a:pPr>
+            <a:r>
+              <a:rPr lang="en-US" sz="1100" dirty="0">
+                <a:solidFill>
+                  <a:srgbClr val="8B9BB4"/>
+                </a:solidFill>
+                <a:latin typeface="Calibri" pitchFamily="34" charset="0"/>
+                <a:ea typeface="Calibri" pitchFamily="34" charset="-122"/>
+                <a:cs typeface="Calibri" pitchFamily="34" charset="-120"/>
+              </a:rPr>
+              <a:t>30 / 32</a:t>
+            </a:r>
+            <a:endParaRPr lang="en-US" sz="1100" dirty="0"/>
+          </a:p>
+        </p:txBody>
+      </p:sp>
+      <p:sp>
+        <p:nvSpPr>
+          <p:cNvPr id="7" name="Text 5"/>
+          <p:cNvSpPr/>
+          <p:nvPr/>
+        </p:nvSpPr>
+        <p:spPr>
+          <a:xfrm>
+            <a:off x="457200" y="822960"/>
+            <a:ext cx="11247120" cy="502920"/>
+          </a:xfrm>
+          <a:prstGeom prst="rect">
+            <a:avLst/>
+          </a:prstGeom>
+          <a:noFill/>
+          <a:ln/>
+        </p:spPr>
+        <p:txBody>
+          <a:bodyPr wrap="square" lIns="0" tIns="0" rIns="0" bIns="0" rtlCol="0" anchor="ctr"/>
+          <a:lstStyle/>
+          <a:p>
+            <a:pPr indent="0" marL="0">
+              <a:buNone/>
+            </a:pPr>
+            <a:r>
+              <a:rPr lang="en-US" sz="2600" b="1" dirty="0">
+                <a:solidFill>
+                  <a:srgbClr val="F1F5F9"/>
+                </a:solidFill>
+                <a:latin typeface="Calibri" pitchFamily="34" charset="0"/>
+                <a:ea typeface="Calibri" pitchFamily="34" charset="-122"/>
+                <a:cs typeface="Calibri" pitchFamily="34" charset="-120"/>
+              </a:rPr>
+              <a:t>Địa bàn · Phân vùng phát triển thị trường</a:t>
+            </a:r>
+            <a:endParaRPr lang="en-US" sz="2600" dirty="0"/>
+          </a:p>
+        </p:txBody>
+      </p:sp>
+      <p:sp>
+        <p:nvSpPr>
+          <p:cNvPr id="8" name="Text 6"/>
+          <p:cNvSpPr/>
+          <p:nvPr/>
+        </p:nvSpPr>
+        <p:spPr>
+          <a:xfrm>
+            <a:off x="457200" y="1325880"/>
+            <a:ext cx="11247120" cy="292608"/>
+          </a:xfrm>
+          <a:prstGeom prst="rect">
+            <a:avLst/>
+          </a:prstGeom>
+          <a:noFill/>
+          <a:ln/>
+        </p:spPr>
+        <p:txBody>
+          <a:bodyPr wrap="square" lIns="0" tIns="0" rIns="0" bIns="0" rtlCol="0" anchor="ctr"/>
+          <a:lstStyle/>
+          <a:p>
+            <a:pPr indent="0" marL="0">
+              <a:buNone/>
+            </a:pPr>
+            <a:r>
+              <a:rPr lang="en-US" sz="1400" i="1" dirty="0">
+                <a:solidFill>
+                  <a:srgbClr val="8B9BB4"/>
+                </a:solidFill>
+                <a:latin typeface="Calibri" pitchFamily="34" charset="0"/>
+                <a:ea typeface="Calibri" pitchFamily="34" charset="-122"/>
+                <a:cs typeface="Calibri" pitchFamily="34" charset="-120"/>
+              </a:rPr>
+              <a:t>MarketTerritory · tỉnh trọng tâm + người phụ trách (chủ địa bàn) + count leads</a:t>
+            </a:r>
+            <a:endParaRPr lang="en-US" sz="1400" dirty="0"/>
+          </a:p>
+        </p:txBody>
+      </p:sp>
+      <p:sp>
+        <p:nvSpPr>
+          <p:cNvPr id="9" name="Shape 7"/>
+          <p:cNvSpPr/>
+          <p:nvPr/>
+        </p:nvSpPr>
+        <p:spPr>
+          <a:xfrm>
+            <a:off x="594360" y="1737360"/>
+            <a:ext cx="7863840" cy="4663440"/>
+          </a:xfrm>
+          <a:prstGeom prst="rect">
+            <a:avLst/>
+          </a:prstGeom>
+          <a:solidFill>
+            <a:srgbClr val="111A30"/>
+          </a:solidFill>
+          <a:ln w="12700">
+            <a:solidFill>
+              <a:srgbClr val="1F2A44"/>
+            </a:solidFill>
+            <a:prstDash val="solid"/>
+          </a:ln>
+        </p:spPr>
+      </p:sp>
+      <p:pic>
+        <p:nvPicPr>
+          <p:cNvPr id="10" name="Image 0" descr="/Users/vsf-thuynt519-l/Documents/GitHub/atlas-aec/docs/demo-screens/29-territories.png">    </p:cNvPr>
+          <p:cNvPicPr>
+            <a:picLocks noChangeAspect="1"/>
+          </p:cNvPicPr>
+          <p:nvPr/>
+        </p:nvPicPr>
+        <p:blipFill>
+          <a:blip r:embed="rId1"/>
+          <a:srcRect l="0" r="0" t="0" b="0"/>
+          <a:stretch/>
+        </p:blipFill>
+        <p:spPr>
+          <a:xfrm>
+            <a:off x="640080" y="1783080"/>
+            <a:ext cx="7772400" cy="4572000"/>
+          </a:xfrm>
+          <a:prstGeom prst="rect">
+            <a:avLst/>
+          </a:prstGeom>
+        </p:spPr>
+      </p:pic>
+      <p:sp>
+        <p:nvSpPr>
+          <p:cNvPr id="11" name="Text 8"/>
+          <p:cNvSpPr/>
+          <p:nvPr/>
+        </p:nvSpPr>
+        <p:spPr>
+          <a:xfrm>
+            <a:off x="8778240" y="1783080"/>
+            <a:ext cx="2926080" cy="4572000"/>
+          </a:xfrm>
+          <a:prstGeom prst="rect">
+            <a:avLst/>
+          </a:prstGeom>
+          <a:noFill/>
+          <a:ln/>
+        </p:spPr>
+        <p:txBody>
+          <a:bodyPr wrap="square" lIns="0" tIns="0" rIns="0" bIns="0" rtlCol="0" anchor="t"/>
+          <a:lstStyle/>
+          <a:p>
+            <a:pPr>
+              <a:spcAft>
+                <a:spcPts val="600"/>
+              </a:spcAft>
+            </a:pPr>
+            <a:r>
+              <a:rPr lang="en-US" sz="1300" dirty="0">
+                <a:solidFill>
+                  <a:srgbClr val="F1F5F9"/>
+                </a:solidFill>
+                <a:latin typeface="Calibri" pitchFamily="34" charset="0"/>
+                <a:ea typeface="Calibri" pitchFamily="34" charset="-122"/>
+                <a:cs typeface="Calibri" pitchFamily="34" charset="-120"/>
+              </a:rPr>
+              <a:t>KPI: Tổng / Hoạt động /</a:t>
+            </a:r>
+            <a:endParaRPr lang="en-US" sz="1300" dirty="0"/>
+          </a:p>
+          <a:p>
+            <a:pPr>
+              <a:spcAft>
+                <a:spcPts val="600"/>
+              </a:spcAft>
+            </a:pPr>
+            <a:r>
+              <a:rPr lang="en-US" sz="1300" dirty="0">
+                <a:solidFill>
+                  <a:srgbClr val="F1F5F9"/>
+                </a:solidFill>
+                <a:latin typeface="Calibri" pitchFamily="34" charset="0"/>
+                <a:ea typeface="Calibri" pitchFamily="34" charset="-122"/>
+                <a:cs typeface="Calibri" pitchFamily="34" charset="-120"/>
+              </a:rPr>
+              <a:t>Có chủ ĐB / Tổng leads</a:t>
+            </a:r>
+            <a:endParaRPr lang="en-US" sz="1300" dirty="0"/>
+          </a:p>
+          <a:p>
+            <a:pPr>
+              <a:spcAft>
+                <a:spcPts val="600"/>
+              </a:spcAft>
+            </a:pPr>
+            <a:endParaRPr lang="en-US" sz="1300" dirty="0"/>
+          </a:p>
+          <a:p>
+            <a:pPr>
+              <a:spcAft>
+                <a:spcPts val="600"/>
+              </a:spcAft>
+            </a:pPr>
+            <a:r>
+              <a:rPr lang="en-US" sz="1300" dirty="0">
+                <a:solidFill>
+                  <a:srgbClr val="F1F5F9"/>
+                </a:solidFill>
+                <a:latin typeface="Calibri" pitchFamily="34" charset="0"/>
+                <a:ea typeface="Calibri" pitchFamily="34" charset="-122"/>
+                <a:cs typeface="Calibri" pitchFamily="34" charset="-120"/>
+              </a:rPr>
+              <a:t>Form CRUD:</a:t>
+            </a:r>
+            <a:endParaRPr lang="en-US" sz="1300" dirty="0"/>
+          </a:p>
+          <a:p>
+            <a:pPr>
+              <a:spcAft>
+                <a:spcPts val="600"/>
+              </a:spcAft>
+            </a:pPr>
+            <a:r>
+              <a:rPr lang="en-US" sz="1300" dirty="0">
+                <a:solidFill>
+                  <a:srgbClr val="F1F5F9"/>
+                </a:solidFill>
+                <a:latin typeface="Calibri" pitchFamily="34" charset="0"/>
+                <a:ea typeface="Calibri" pitchFamily="34" charset="-122"/>
+                <a:cs typeface="Calibri" pitchFamily="34" charset="-120"/>
+              </a:rPr>
+              <a:t>  + Thêm địa bàn</a:t>
+            </a:r>
+            <a:endParaRPr lang="en-US" sz="1300" dirty="0"/>
+          </a:p>
+          <a:p>
+            <a:pPr>
+              <a:spcAft>
+                <a:spcPts val="600"/>
+              </a:spcAft>
+            </a:pPr>
+            <a:r>
+              <a:rPr lang="en-US" sz="1300" dirty="0">
+                <a:solidFill>
+                  <a:srgbClr val="F1F5F9"/>
+                </a:solidFill>
+                <a:latin typeface="Calibri" pitchFamily="34" charset="0"/>
+                <a:ea typeface="Calibri" pitchFamily="34" charset="-122"/>
+                <a:cs typeface="Calibri" pitchFamily="34" charset="-120"/>
+              </a:rPr>
+              <a:t>  Tên · Tỉnh · Phạm vi</a:t>
+            </a:r>
+            <a:endParaRPr lang="en-US" sz="1300" dirty="0"/>
+          </a:p>
+          <a:p>
+            <a:pPr>
+              <a:spcAft>
+                <a:spcPts val="600"/>
+              </a:spcAft>
+            </a:pPr>
+            <a:endParaRPr lang="en-US" sz="1300" dirty="0"/>
+          </a:p>
+          <a:p>
+            <a:pPr>
+              <a:spcAft>
+                <a:spcPts val="600"/>
+              </a:spcAft>
+            </a:pPr>
+            <a:r>
+              <a:rPr lang="en-US" sz="1300" dirty="0">
+                <a:solidFill>
+                  <a:srgbClr val="F1F5F9"/>
+                </a:solidFill>
+                <a:latin typeface="Calibri" pitchFamily="34" charset="0"/>
+                <a:ea typeface="Calibri" pitchFamily="34" charset="-122"/>
+                <a:cs typeface="Calibri" pitchFamily="34" charset="-120"/>
+              </a:rPr>
+              <a:t>Lead có territoryId FK →</a:t>
+            </a:r>
+            <a:endParaRPr lang="en-US" sz="1300" dirty="0"/>
+          </a:p>
+          <a:p>
+            <a:pPr>
+              <a:spcAft>
+                <a:spcPts val="600"/>
+              </a:spcAft>
+            </a:pPr>
+            <a:r>
+              <a:rPr lang="en-US" sz="1300" dirty="0">
+                <a:solidFill>
+                  <a:srgbClr val="F1F5F9"/>
+                </a:solidFill>
+                <a:latin typeface="Calibri" pitchFamily="34" charset="0"/>
+                <a:ea typeface="Calibri" pitchFamily="34" charset="-122"/>
+                <a:cs typeface="Calibri" pitchFamily="34" charset="-120"/>
+              </a:rPr>
+              <a:t>địa bàn cho BD planning.</a:t>
+            </a:r>
+            <a:endParaRPr lang="en-US" sz="1300" dirty="0"/>
+          </a:p>
+        </p:txBody>
+      </p:sp>
+      <p:sp>
+        <p:nvSpPr>
+          <p:cNvPr id="12" name="Text 9"/>
+          <p:cNvSpPr/>
+          <p:nvPr/>
+        </p:nvSpPr>
+        <p:spPr>
+          <a:xfrm>
+            <a:off x="457200" y="6446520"/>
+            <a:ext cx="11247120" cy="274320"/>
+          </a:xfrm>
+          <a:prstGeom prst="rect">
+            <a:avLst/>
+          </a:prstGeom>
+          <a:noFill/>
+          <a:ln/>
+        </p:spPr>
+        <p:txBody>
+          <a:bodyPr wrap="square" lIns="0" tIns="0" rIns="0" bIns="0" rtlCol="0" anchor="ctr"/>
+          <a:lstStyle/>
+          <a:p>
+            <a:pPr indent="0" marL="0">
+              <a:buNone/>
+            </a:pPr>
+            <a:r>
+              <a:rPr lang="en-US" sz="1000" dirty="0">
+                <a:solidFill>
+                  <a:srgbClr val="475569"/>
+                </a:solidFill>
+                <a:latin typeface="Calibri" pitchFamily="34" charset="0"/>
+                <a:ea typeface="Calibri" pitchFamily="34" charset="-122"/>
+                <a:cs typeface="Calibri" pitchFamily="34" charset="-120"/>
+              </a:rPr>
+              <a:t>atlas-aec · v2 · live demo</a:t>
+            </a:r>
+            <a:endParaRPr lang="en-US" sz="1000" dirty="0"/>
+          </a:p>
+        </p:txBody>
+      </p:sp>
+    </p:spTree>
+  </p:cSld>
+  <p:clrMapOvr>
+    <a:masterClrMapping/>
+  </p:clrMapOvr>
+</p:sld>
+</file>
+
+<file path=ppt/slides/slide31.xml><?xml version="1.0" encoding="utf-8"?>
+<p:sld xmlns:a="http://schemas.openxmlformats.org/drawingml/2006/main" xmlns:r="http://schemas.openxmlformats.org/officeDocument/2006/relationships" xmlns:p="http://schemas.openxmlformats.org/presentationml/2006/main">
+  <p:cSld name="Slide 31">
+    <p:bg>
+      <p:bgPr>
+        <a:solidFill>
+          <a:srgbClr val="0B1220"/>
+        </a:solidFill>
+      </p:bgPr>
+    </p:bg>
+    <p:spTree>
+      <p:nvGrpSpPr>
+        <p:cNvPr id="1" name=""/>
+        <p:cNvGrpSpPr/>
+        <p:nvPr/>
+      </p:nvGrpSpPr>
+      <p:grpSpPr>
+        <a:xfrm>
+          <a:off x="0" y="0"/>
+          <a:ext cx="0" cy="0"/>
+          <a:chOff x="0" y="0"/>
+          <a:chExt cx="0" cy="0"/>
+        </a:xfrm>
+      </p:grpSpPr>
+      <p:sp>
+        <p:nvSpPr>
+          <p:cNvPr id="2" name="Shape 0"/>
+          <p:cNvSpPr/>
+          <p:nvPr/>
+        </p:nvSpPr>
+        <p:spPr>
+          <a:xfrm>
+            <a:off x="457200" y="320040"/>
+            <a:ext cx="292608" cy="292608"/>
+          </a:xfrm>
+          <a:prstGeom prst="rect">
+            <a:avLst/>
+          </a:prstGeom>
+          <a:solidFill>
+            <a:srgbClr val="3B82F6"/>
+          </a:solidFill>
+          <a:ln w="12700">
+            <a:solidFill>
+              <a:srgbClr val="3B82F6"/>
+            </a:solidFill>
+            <a:prstDash val="solid"/>
+          </a:ln>
+        </p:spPr>
+      </p:sp>
+      <p:sp>
+        <p:nvSpPr>
+          <p:cNvPr id="3" name="Text 1"/>
+          <p:cNvSpPr/>
+          <p:nvPr/>
+        </p:nvSpPr>
+        <p:spPr>
+          <a:xfrm>
+            <a:off x="457200" y="320040"/>
+            <a:ext cx="292608" cy="292608"/>
+          </a:xfrm>
+          <a:prstGeom prst="rect">
+            <a:avLst/>
+          </a:prstGeom>
+          <a:noFill/>
+          <a:ln/>
+        </p:spPr>
+        <p:txBody>
+          <a:bodyPr wrap="square" lIns="0" tIns="0" rIns="0" bIns="0" rtlCol="0" anchor="ctr"/>
+          <a:lstStyle/>
+          <a:p>
+            <a:pPr algn="ctr" indent="0" marL="0">
+              <a:buNone/>
+            </a:pPr>
+            <a:r>
+              <a:rPr lang="en-US" sz="1600" b="1" dirty="0">
+                <a:solidFill>
+                  <a:srgbClr val="FFFFFF"/>
+                </a:solidFill>
+                <a:latin typeface="Calibri" pitchFamily="34" charset="0"/>
+                <a:ea typeface="Calibri" pitchFamily="34" charset="-122"/>
+                <a:cs typeface="Calibri" pitchFamily="34" charset="-120"/>
+              </a:rPr>
+              <a:t>A</a:t>
+            </a:r>
+            <a:endParaRPr lang="en-US" sz="1600" dirty="0"/>
+          </a:p>
+        </p:txBody>
+      </p:sp>
+      <p:sp>
+        <p:nvSpPr>
+          <p:cNvPr id="4" name="Text 2"/>
+          <p:cNvSpPr/>
+          <p:nvPr/>
+        </p:nvSpPr>
+        <p:spPr>
+          <a:xfrm>
+            <a:off x="822960" y="320040"/>
+            <a:ext cx="2743200" cy="292608"/>
+          </a:xfrm>
+          <a:prstGeom prst="rect">
+            <a:avLst/>
+          </a:prstGeom>
+          <a:noFill/>
+          <a:ln/>
+        </p:spPr>
+        <p:txBody>
+          <a:bodyPr wrap="square" lIns="0" tIns="0" rIns="0" bIns="0" rtlCol="0" anchor="ctr"/>
+          <a:lstStyle/>
+          <a:p>
+            <a:pPr indent="0" marL="0">
+              <a:buNone/>
+            </a:pPr>
+            <a:r>
+              <a:rPr lang="en-US" sz="1300" b="1" dirty="0">
+                <a:solidFill>
+                  <a:srgbClr val="F1F5F9"/>
+                </a:solidFill>
+                <a:latin typeface="Calibri" pitchFamily="34" charset="0"/>
+                <a:ea typeface="Calibri" pitchFamily="34" charset="-122"/>
+                <a:cs typeface="Calibri" pitchFamily="34" charset="-120"/>
+              </a:rPr>
+              <a:t>Atlas AEC</a:t>
+            </a:r>
+            <a:endParaRPr lang="en-US" sz="1300" dirty="0"/>
+          </a:p>
+        </p:txBody>
+      </p:sp>
+      <p:sp>
+        <p:nvSpPr>
+          <p:cNvPr id="5" name="Text 3"/>
+          <p:cNvSpPr/>
+          <p:nvPr/>
+        </p:nvSpPr>
+        <p:spPr>
+          <a:xfrm>
+            <a:off x="3566160" y="356616"/>
+            <a:ext cx="5486400" cy="256032"/>
+          </a:xfrm>
+          <a:prstGeom prst="rect">
+            <a:avLst/>
+          </a:prstGeom>
+          <a:noFill/>
+          <a:ln/>
+        </p:spPr>
+        <p:txBody>
+          <a:bodyPr wrap="square" lIns="0" tIns="0" rIns="0" bIns="0" rtlCol="0" anchor="ctr"/>
+          <a:lstStyle/>
+          <a:p>
+            <a:pPr indent="0" marL="0">
+              <a:buNone/>
+            </a:pPr>
+            <a:r>
+              <a:rPr lang="en-US" sz="1100" dirty="0">
+                <a:solidFill>
+                  <a:srgbClr val="8B9BB4"/>
+                </a:solidFill>
+                <a:latin typeface="Calibri" pitchFamily="34" charset="0"/>
+                <a:ea typeface="Calibri" pitchFamily="34" charset="-122"/>
+                <a:cs typeface="Calibri" pitchFamily="34" charset="-120"/>
+              </a:rPr>
+              <a:t>PTTT — Dự án đang theo &amp; tiềm năng</a:t>
+            </a:r>
+            <a:endParaRPr lang="en-US" sz="1100" dirty="0"/>
+          </a:p>
+        </p:txBody>
+      </p:sp>
+      <p:sp>
+        <p:nvSpPr>
+          <p:cNvPr id="6" name="Text 4"/>
+          <p:cNvSpPr/>
+          <p:nvPr/>
+        </p:nvSpPr>
+        <p:spPr>
+          <a:xfrm>
+            <a:off x="10881360" y="320040"/>
+            <a:ext cx="822960" cy="292608"/>
+          </a:xfrm>
+          <a:prstGeom prst="rect">
+            <a:avLst/>
+          </a:prstGeom>
+          <a:noFill/>
+          <a:ln/>
+        </p:spPr>
+        <p:txBody>
+          <a:bodyPr wrap="square" lIns="0" tIns="0" rIns="0" bIns="0" rtlCol="0" anchor="ctr"/>
+          <a:lstStyle/>
+          <a:p>
+            <a:pPr algn="r" indent="0" marL="0">
+              <a:buNone/>
+            </a:pPr>
+            <a:r>
+              <a:rPr lang="en-US" sz="1100" dirty="0">
+                <a:solidFill>
+                  <a:srgbClr val="8B9BB4"/>
+                </a:solidFill>
+                <a:latin typeface="Calibri" pitchFamily="34" charset="0"/>
+                <a:ea typeface="Calibri" pitchFamily="34" charset="-122"/>
+                <a:cs typeface="Calibri" pitchFamily="34" charset="-120"/>
+              </a:rPr>
+              <a:t>31 / 32</a:t>
+            </a:r>
+            <a:endParaRPr lang="en-US" sz="1100" dirty="0"/>
+          </a:p>
+        </p:txBody>
+      </p:sp>
+      <p:sp>
+        <p:nvSpPr>
+          <p:cNvPr id="7" name="Text 5"/>
+          <p:cNvSpPr/>
+          <p:nvPr/>
+        </p:nvSpPr>
+        <p:spPr>
+          <a:xfrm>
+            <a:off x="457200" y="822960"/>
+            <a:ext cx="11247120" cy="502920"/>
+          </a:xfrm>
+          <a:prstGeom prst="rect">
+            <a:avLst/>
+          </a:prstGeom>
+          <a:noFill/>
+          <a:ln/>
+        </p:spPr>
+        <p:txBody>
+          <a:bodyPr wrap="square" lIns="0" tIns="0" rIns="0" bIns="0" rtlCol="0" anchor="ctr"/>
+          <a:lstStyle/>
+          <a:p>
+            <a:pPr indent="0" marL="0">
+              <a:buNone/>
+            </a:pPr>
+            <a:r>
+              <a:rPr lang="en-US" sz="2600" b="1" dirty="0">
+                <a:solidFill>
+                  <a:srgbClr val="F1F5F9"/>
+                </a:solidFill>
+                <a:latin typeface="Calibri" pitchFamily="34" charset="0"/>
+                <a:ea typeface="Calibri" pitchFamily="34" charset="-122"/>
+                <a:cs typeface="Calibri" pitchFamily="34" charset="-120"/>
+              </a:rPr>
+              <a:t>Pipeline cơ hội · Tiềm năng → Đang theo → Trúng / Không trúng</a:t>
+            </a:r>
+            <a:endParaRPr lang="en-US" sz="2600" dirty="0"/>
+          </a:p>
+        </p:txBody>
+      </p:sp>
+      <p:sp>
+        <p:nvSpPr>
+          <p:cNvPr id="8" name="Text 6"/>
+          <p:cNvSpPr/>
+          <p:nvPr/>
+        </p:nvSpPr>
+        <p:spPr>
+          <a:xfrm>
+            <a:off x="457200" y="1325880"/>
+            <a:ext cx="11247120" cy="292608"/>
+          </a:xfrm>
+          <a:prstGeom prst="rect">
+            <a:avLst/>
+          </a:prstGeom>
+          <a:noFill/>
+          <a:ln/>
+        </p:spPr>
+        <p:txBody>
+          <a:bodyPr wrap="square" lIns="0" tIns="0" rIns="0" bIns="0" rtlCol="0" anchor="ctr"/>
+          <a:lstStyle/>
+          <a:p>
+            <a:pPr indent="0" marL="0">
+              <a:buNone/>
+            </a:pPr>
+            <a:r>
+              <a:rPr lang="en-US" sz="1400" i="1" dirty="0">
+                <a:solidFill>
+                  <a:srgbClr val="8B9BB4"/>
+                </a:solidFill>
+                <a:latin typeface="Calibri" pitchFamily="34" charset="0"/>
+                <a:ea typeface="Calibri" pitchFamily="34" charset="-122"/>
+                <a:cs typeface="Calibri" pitchFamily="34" charset="-120"/>
+              </a:rPr>
+              <a:t>ProjectLead · 5 status (POTENTIAL/TRACKING/WON/LOST/ARCHIVED) · pipeline value</a:t>
+            </a:r>
+            <a:endParaRPr lang="en-US" sz="1400" dirty="0"/>
+          </a:p>
+        </p:txBody>
+      </p:sp>
+      <p:sp>
+        <p:nvSpPr>
+          <p:cNvPr id="9" name="Shape 7"/>
+          <p:cNvSpPr/>
+          <p:nvPr/>
+        </p:nvSpPr>
+        <p:spPr>
+          <a:xfrm>
+            <a:off x="594360" y="1737360"/>
+            <a:ext cx="7863840" cy="4663440"/>
+          </a:xfrm>
+          <a:prstGeom prst="rect">
+            <a:avLst/>
+          </a:prstGeom>
+          <a:solidFill>
+            <a:srgbClr val="111A30"/>
+          </a:solidFill>
+          <a:ln w="12700">
+            <a:solidFill>
+              <a:srgbClr val="1F2A44"/>
+            </a:solidFill>
+            <a:prstDash val="solid"/>
+          </a:ln>
+        </p:spPr>
+      </p:sp>
+      <p:pic>
+        <p:nvPicPr>
+          <p:cNvPr id="10" name="Image 0" descr="/Users/vsf-thuynt519-l/Documents/GitHub/atlas-aec/docs/demo-screens/30-leads.png">    </p:cNvPr>
+          <p:cNvPicPr>
+            <a:picLocks noChangeAspect="1"/>
+          </p:cNvPicPr>
+          <p:nvPr/>
+        </p:nvPicPr>
+        <p:blipFill>
+          <a:blip r:embed="rId1"/>
+          <a:srcRect l="0" r="0" t="0" b="0"/>
+          <a:stretch/>
+        </p:blipFill>
+        <p:spPr>
+          <a:xfrm>
+            <a:off x="640080" y="1783080"/>
+            <a:ext cx="7772400" cy="4572000"/>
+          </a:xfrm>
+          <a:prstGeom prst="rect">
+            <a:avLst/>
+          </a:prstGeom>
+        </p:spPr>
+      </p:pic>
+      <p:sp>
+        <p:nvSpPr>
+          <p:cNvPr id="11" name="Text 8"/>
+          <p:cNvSpPr/>
+          <p:nvPr/>
+        </p:nvSpPr>
+        <p:spPr>
+          <a:xfrm>
+            <a:off x="8778240" y="1783080"/>
+            <a:ext cx="2926080" cy="4572000"/>
+          </a:xfrm>
+          <a:prstGeom prst="rect">
+            <a:avLst/>
+          </a:prstGeom>
+          <a:noFill/>
+          <a:ln/>
+        </p:spPr>
+        <p:txBody>
+          <a:bodyPr wrap="square" lIns="0" tIns="0" rIns="0" bIns="0" rtlCol="0" anchor="t"/>
+          <a:lstStyle/>
+          <a:p>
+            <a:pPr>
+              <a:spcAft>
+                <a:spcPts val="600"/>
+              </a:spcAft>
+            </a:pPr>
+            <a:r>
+              <a:rPr lang="en-US" sz="1300" dirty="0">
+                <a:solidFill>
+                  <a:srgbClr val="F1F5F9"/>
+                </a:solidFill>
+                <a:latin typeface="Calibri" pitchFamily="34" charset="0"/>
+                <a:ea typeface="Calibri" pitchFamily="34" charset="-122"/>
+                <a:cs typeface="Calibri" pitchFamily="34" charset="-120"/>
+              </a:rPr>
+              <a:t>KPI: Tổng / Tiềm năng /</a:t>
+            </a:r>
+            <a:endParaRPr lang="en-US" sz="1300" dirty="0"/>
+          </a:p>
+          <a:p>
+            <a:pPr>
+              <a:spcAft>
+                <a:spcPts val="600"/>
+              </a:spcAft>
+            </a:pPr>
+            <a:r>
+              <a:rPr lang="en-US" sz="1300" dirty="0">
+                <a:solidFill>
+                  <a:srgbClr val="F1F5F9"/>
+                </a:solidFill>
+                <a:latin typeface="Calibri" pitchFamily="34" charset="0"/>
+                <a:ea typeface="Calibri" pitchFamily="34" charset="-122"/>
+                <a:cs typeface="Calibri" pitchFamily="34" charset="-120"/>
+              </a:rPr>
+              <a:t>Đang theo / Pipeline VND</a:t>
+            </a:r>
+            <a:endParaRPr lang="en-US" sz="1300" dirty="0"/>
+          </a:p>
+          <a:p>
+            <a:pPr>
+              <a:spcAft>
+                <a:spcPts val="600"/>
+              </a:spcAft>
+            </a:pPr>
+            <a:endParaRPr lang="en-US" sz="1300" dirty="0"/>
+          </a:p>
+          <a:p>
+            <a:pPr>
+              <a:spcAft>
+                <a:spcPts val="600"/>
+              </a:spcAft>
+            </a:pPr>
+            <a:r>
+              <a:rPr lang="en-US" sz="1300" dirty="0">
+                <a:solidFill>
+                  <a:srgbClr val="F1F5F9"/>
+                </a:solidFill>
+                <a:latin typeface="Calibri" pitchFamily="34" charset="0"/>
+                <a:ea typeface="Calibri" pitchFamily="34" charset="-122"/>
+                <a:cs typeface="Calibri" pitchFamily="34" charset="-120"/>
+              </a:rPr>
+              <a:t>Form CRUD:</a:t>
+            </a:r>
+            <a:endParaRPr lang="en-US" sz="1300" dirty="0"/>
+          </a:p>
+          <a:p>
+            <a:pPr>
+              <a:spcAft>
+                <a:spcPts val="600"/>
+              </a:spcAft>
+            </a:pPr>
+            <a:r>
+              <a:rPr lang="en-US" sz="1300" dirty="0">
+                <a:solidFill>
+                  <a:srgbClr val="F1F5F9"/>
+                </a:solidFill>
+                <a:latin typeface="Calibri" pitchFamily="34" charset="0"/>
+                <a:ea typeface="Calibri" pitchFamily="34" charset="-122"/>
+                <a:cs typeface="Calibri" pitchFamily="34" charset="-120"/>
+              </a:rPr>
+              <a:t>  + Thêm cơ hội</a:t>
+            </a:r>
+            <a:endParaRPr lang="en-US" sz="1300" dirty="0"/>
+          </a:p>
+          <a:p>
+            <a:pPr>
+              <a:spcAft>
+                <a:spcPts val="600"/>
+              </a:spcAft>
+            </a:pPr>
+            <a:r>
+              <a:rPr lang="en-US" sz="1300" dirty="0">
+                <a:solidFill>
+                  <a:srgbClr val="F1F5F9"/>
+                </a:solidFill>
+                <a:latin typeface="Calibri" pitchFamily="34" charset="0"/>
+                <a:ea typeface="Calibri" pitchFamily="34" charset="-122"/>
+                <a:cs typeface="Calibri" pitchFamily="34" charset="-120"/>
+              </a:rPr>
+              <a:t>  Tên · Khách hàng</a:t>
+            </a:r>
+            <a:endParaRPr lang="en-US" sz="1300" dirty="0"/>
+          </a:p>
+          <a:p>
+            <a:pPr>
+              <a:spcAft>
+                <a:spcPts val="600"/>
+              </a:spcAft>
+            </a:pPr>
+            <a:r>
+              <a:rPr lang="en-US" sz="1300" dirty="0">
+                <a:solidFill>
+                  <a:srgbClr val="F1F5F9"/>
+                </a:solidFill>
+                <a:latin typeface="Calibri" pitchFamily="34" charset="0"/>
+                <a:ea typeface="Calibri" pitchFamily="34" charset="-122"/>
+                <a:cs typeface="Calibri" pitchFamily="34" charset="-120"/>
+              </a:rPr>
+              <a:t>  Tỉnh · Giá trị dự kiến</a:t>
+            </a:r>
+            <a:endParaRPr lang="en-US" sz="1300" dirty="0"/>
+          </a:p>
+          <a:p>
+            <a:pPr>
+              <a:spcAft>
+                <a:spcPts val="600"/>
+              </a:spcAft>
+            </a:pPr>
+            <a:r>
+              <a:rPr lang="en-US" sz="1300" dirty="0">
+                <a:solidFill>
+                  <a:srgbClr val="F1F5F9"/>
+                </a:solidFill>
+                <a:latin typeface="Calibri" pitchFamily="34" charset="0"/>
+                <a:ea typeface="Calibri" pitchFamily="34" charset="-122"/>
+                <a:cs typeface="Calibri" pitchFamily="34" charset="-120"/>
+              </a:rPr>
+              <a:t>  Nguồn · Next action</a:t>
+            </a:r>
+            <a:endParaRPr lang="en-US" sz="1300" dirty="0"/>
+          </a:p>
+          <a:p>
+            <a:pPr>
+              <a:spcAft>
+                <a:spcPts val="600"/>
+              </a:spcAft>
+            </a:pPr>
+            <a:endParaRPr lang="en-US" sz="1300" dirty="0"/>
+          </a:p>
+          <a:p>
+            <a:pPr>
+              <a:spcAft>
+                <a:spcPts val="600"/>
+              </a:spcAft>
+            </a:pPr>
+            <a:r>
+              <a:rPr lang="en-US" sz="1300" dirty="0">
+                <a:solidFill>
+                  <a:srgbClr val="F1F5F9"/>
+                </a:solidFill>
+                <a:latin typeface="Calibri" pitchFamily="34" charset="0"/>
+                <a:ea typeface="Calibri" pitchFamily="34" charset="-122"/>
+                <a:cs typeface="Calibri" pitchFamily="34" charset="-120"/>
+              </a:rPr>
+              <a:t>WON → chuyển thành</a:t>
+            </a:r>
+            <a:endParaRPr lang="en-US" sz="1300" dirty="0"/>
+          </a:p>
+          <a:p>
+            <a:pPr>
+              <a:spcAft>
+                <a:spcPts val="600"/>
+              </a:spcAft>
+            </a:pPr>
+            <a:r>
+              <a:rPr lang="en-US" sz="1300" dirty="0">
+                <a:solidFill>
+                  <a:srgbClr val="F1F5F9"/>
+                </a:solidFill>
+                <a:latin typeface="Calibri" pitchFamily="34" charset="0"/>
+                <a:ea typeface="Calibri" pitchFamily="34" charset="-122"/>
+                <a:cs typeface="Calibri" pitchFamily="34" charset="-120"/>
+              </a:rPr>
+              <a:t>Project chính thức.</a:t>
+            </a:r>
+            <a:endParaRPr lang="en-US" sz="1300" dirty="0"/>
+          </a:p>
+        </p:txBody>
+      </p:sp>
+      <p:sp>
+        <p:nvSpPr>
+          <p:cNvPr id="12" name="Text 9"/>
+          <p:cNvSpPr/>
+          <p:nvPr/>
+        </p:nvSpPr>
+        <p:spPr>
+          <a:xfrm>
+            <a:off x="457200" y="6446520"/>
+            <a:ext cx="11247120" cy="274320"/>
+          </a:xfrm>
+          <a:prstGeom prst="rect">
+            <a:avLst/>
+          </a:prstGeom>
+          <a:noFill/>
+          <a:ln/>
+        </p:spPr>
+        <p:txBody>
+          <a:bodyPr wrap="square" lIns="0" tIns="0" rIns="0" bIns="0" rtlCol="0" anchor="ctr"/>
+          <a:lstStyle/>
+          <a:p>
+            <a:pPr indent="0" marL="0">
+              <a:buNone/>
+            </a:pPr>
+            <a:r>
+              <a:rPr lang="en-US" sz="1000" dirty="0">
+                <a:solidFill>
+                  <a:srgbClr val="475569"/>
+                </a:solidFill>
+                <a:latin typeface="Calibri" pitchFamily="34" charset="0"/>
+                <a:ea typeface="Calibri" pitchFamily="34" charset="-122"/>
+                <a:cs typeface="Calibri" pitchFamily="34" charset="-120"/>
+              </a:rPr>
+              <a:t>atlas-aec · v2 · live demo</a:t>
+            </a:r>
+            <a:endParaRPr lang="en-US" sz="1000" dirty="0"/>
+          </a:p>
+        </p:txBody>
+      </p:sp>
+    </p:spTree>
+  </p:cSld>
+  <p:clrMapOvr>
+    <a:masterClrMapping/>
+  </p:clrMapOvr>
+</p:sld>
+</file>
+
+<file path=ppt/slides/slide32.xml><?xml version="1.0" encoding="utf-8"?>
+<p:sld xmlns:a="http://schemas.openxmlformats.org/drawingml/2006/main" xmlns:r="http://schemas.openxmlformats.org/officeDocument/2006/relationships" xmlns:p="http://schemas.openxmlformats.org/presentationml/2006/main">
+  <p:cSld name="Slide 32">
+    <p:bg>
+      <p:bgPr>
+        <a:solidFill>
+          <a:srgbClr val="0B1220"/>
+        </a:solidFill>
+      </p:bgPr>
+    </p:bg>
+    <p:spTree>
+      <p:nvGrpSpPr>
+        <p:cNvPr id="1" name=""/>
+        <p:cNvGrpSpPr/>
+        <p:nvPr/>
+      </p:nvGrpSpPr>
+      <p:grpSpPr>
+        <a:xfrm>
+          <a:off x="0" y="0"/>
+          <a:ext cx="0" cy="0"/>
+          <a:chOff x="0" y="0"/>
+          <a:chExt cx="0" cy="0"/>
+        </a:xfrm>
+      </p:grpSpPr>
+      <p:sp>
+        <p:nvSpPr>
+          <p:cNvPr id="2" name="Shape 0"/>
+          <p:cNvSpPr/>
+          <p:nvPr/>
+        </p:nvSpPr>
+        <p:spPr>
+          <a:xfrm>
+            <a:off x="457200" y="320040"/>
+            <a:ext cx="292608" cy="292608"/>
+          </a:xfrm>
+          <a:prstGeom prst="rect">
+            <a:avLst/>
+          </a:prstGeom>
+          <a:solidFill>
+            <a:srgbClr val="3B82F6"/>
+          </a:solidFill>
+          <a:ln w="12700">
+            <a:solidFill>
+              <a:srgbClr val="3B82F6"/>
+            </a:solidFill>
+            <a:prstDash val="solid"/>
+          </a:ln>
+        </p:spPr>
+      </p:sp>
+      <p:sp>
+        <p:nvSpPr>
+          <p:cNvPr id="3" name="Text 1"/>
+          <p:cNvSpPr/>
+          <p:nvPr/>
+        </p:nvSpPr>
+        <p:spPr>
+          <a:xfrm>
+            <a:off x="457200" y="320040"/>
+            <a:ext cx="292608" cy="292608"/>
+          </a:xfrm>
+          <a:prstGeom prst="rect">
+            <a:avLst/>
+          </a:prstGeom>
+          <a:noFill/>
+          <a:ln/>
+        </p:spPr>
+        <p:txBody>
+          <a:bodyPr wrap="square" lIns="0" tIns="0" rIns="0" bIns="0" rtlCol="0" anchor="ctr"/>
+          <a:lstStyle/>
+          <a:p>
+            <a:pPr algn="ctr" indent="0" marL="0">
+              <a:buNone/>
+            </a:pPr>
+            <a:r>
+              <a:rPr lang="en-US" sz="1600" b="1" dirty="0">
+                <a:solidFill>
+                  <a:srgbClr val="FFFFFF"/>
+                </a:solidFill>
+                <a:latin typeface="Calibri" pitchFamily="34" charset="0"/>
+                <a:ea typeface="Calibri" pitchFamily="34" charset="-122"/>
+                <a:cs typeface="Calibri" pitchFamily="34" charset="-120"/>
+              </a:rPr>
+              <a:t>A</a:t>
+            </a:r>
+            <a:endParaRPr lang="en-US" sz="1600" dirty="0"/>
+          </a:p>
+        </p:txBody>
+      </p:sp>
+      <p:sp>
+        <p:nvSpPr>
+          <p:cNvPr id="4" name="Text 2"/>
+          <p:cNvSpPr/>
+          <p:nvPr/>
+        </p:nvSpPr>
+        <p:spPr>
+          <a:xfrm>
+            <a:off x="822960" y="320040"/>
+            <a:ext cx="2743200" cy="292608"/>
+          </a:xfrm>
+          <a:prstGeom prst="rect">
+            <a:avLst/>
+          </a:prstGeom>
+          <a:noFill/>
+          <a:ln/>
+        </p:spPr>
+        <p:txBody>
+          <a:bodyPr wrap="square" lIns="0" tIns="0" rIns="0" bIns="0" rtlCol="0" anchor="ctr"/>
+          <a:lstStyle/>
+          <a:p>
+            <a:pPr indent="0" marL="0">
+              <a:buNone/>
+            </a:pPr>
+            <a:r>
+              <a:rPr lang="en-US" sz="1300" b="1" dirty="0">
+                <a:solidFill>
+                  <a:srgbClr val="F1F5F9"/>
+                </a:solidFill>
+                <a:latin typeface="Calibri" pitchFamily="34" charset="0"/>
+                <a:ea typeface="Calibri" pitchFamily="34" charset="-122"/>
+                <a:cs typeface="Calibri" pitchFamily="34" charset="-120"/>
+              </a:rPr>
+              <a:t>Atlas AEC</a:t>
+            </a:r>
+            <a:endParaRPr lang="en-US" sz="1300" dirty="0"/>
+          </a:p>
+        </p:txBody>
+      </p:sp>
+      <p:sp>
+        <p:nvSpPr>
+          <p:cNvPr id="5" name="Text 3"/>
+          <p:cNvSpPr/>
+          <p:nvPr/>
+        </p:nvSpPr>
+        <p:spPr>
+          <a:xfrm>
+            <a:off x="3566160" y="356616"/>
+            <a:ext cx="5486400" cy="256032"/>
+          </a:xfrm>
+          <a:prstGeom prst="rect">
+            <a:avLst/>
+          </a:prstGeom>
+          <a:noFill/>
+          <a:ln/>
+        </p:spPr>
+        <p:txBody>
+          <a:bodyPr wrap="square" lIns="0" tIns="0" rIns="0" bIns="0" rtlCol="0" anchor="ctr"/>
+          <a:lstStyle/>
+          <a:p>
+            <a:pPr indent="0" marL="0">
+              <a:buNone/>
+            </a:pPr>
+            <a:r>
+              <a:rPr lang="en-US" sz="1100" dirty="0">
+                <a:solidFill>
+                  <a:srgbClr val="8B9BB4"/>
+                </a:solidFill>
+                <a:latin typeface="Calibri" pitchFamily="34" charset="0"/>
+                <a:ea typeface="Calibri" pitchFamily="34" charset="-122"/>
+                <a:cs typeface="Calibri" pitchFamily="34" charset="-120"/>
+              </a:rPr>
+              <a:t>Shipping evidence</a:t>
+            </a:r>
+            <a:endParaRPr lang="en-US" sz="1100" dirty="0"/>
+          </a:p>
+        </p:txBody>
+      </p:sp>
+      <p:sp>
+        <p:nvSpPr>
+          <p:cNvPr id="6" name="Text 4"/>
+          <p:cNvSpPr/>
+          <p:nvPr/>
+        </p:nvSpPr>
+        <p:spPr>
+          <a:xfrm>
+            <a:off x="10881360" y="320040"/>
+            <a:ext cx="822960" cy="292608"/>
+          </a:xfrm>
+          <a:prstGeom prst="rect">
+            <a:avLst/>
+          </a:prstGeom>
+          <a:noFill/>
+          <a:ln/>
+        </p:spPr>
+        <p:txBody>
+          <a:bodyPr wrap="square" lIns="0" tIns="0" rIns="0" bIns="0" rtlCol="0" anchor="ctr"/>
+          <a:lstStyle/>
+          <a:p>
+            <a:pPr algn="r" indent="0" marL="0">
+              <a:buNone/>
+            </a:pPr>
+            <a:r>
+              <a:rPr lang="en-US" sz="1100" dirty="0">
+                <a:solidFill>
+                  <a:srgbClr val="8B9BB4"/>
+                </a:solidFill>
+                <a:latin typeface="Calibri" pitchFamily="34" charset="0"/>
+                <a:ea typeface="Calibri" pitchFamily="34" charset="-122"/>
+                <a:cs typeface="Calibri" pitchFamily="34" charset="-120"/>
+              </a:rPr>
+              <a:t>32 / 32</a:t>
+            </a:r>
+            <a:endParaRPr lang="en-US" sz="1100" dirty="0"/>
+          </a:p>
+        </p:txBody>
+      </p:sp>
+      <p:sp>
+        <p:nvSpPr>
+          <p:cNvPr id="7" name="Text 5"/>
+          <p:cNvSpPr/>
+          <p:nvPr/>
+        </p:nvSpPr>
+        <p:spPr>
+          <a:xfrm>
+            <a:off x="548640" y="914400"/>
+            <a:ext cx="11064240" cy="640080"/>
+          </a:xfrm>
+          <a:prstGeom prst="rect">
+            <a:avLst/>
+          </a:prstGeom>
+          <a:noFill/>
+          <a:ln/>
+        </p:spPr>
+        <p:txBody>
+          <a:bodyPr wrap="square" lIns="0" tIns="0" rIns="0" bIns="0" rtlCol="0" anchor="ctr"/>
+          <a:lstStyle/>
+          <a:p>
+            <a:pPr indent="0" marL="0">
+              <a:buNone/>
+            </a:pPr>
+            <a:r>
+              <a:rPr lang="en-US" sz="3600" b="1" dirty="0">
+                <a:solidFill>
+                  <a:srgbClr val="F1F5F9"/>
+                </a:solidFill>
+                <a:latin typeface="Calibri" pitchFamily="34" charset="0"/>
+                <a:ea typeface="Calibri" pitchFamily="34" charset="-122"/>
+                <a:cs typeface="Calibri" pitchFamily="34" charset="-120"/>
+              </a:rPr>
+              <a:t>Atlas AEC · v2 shipped 19/05/2026</a:t>
+            </a:r>
+            <a:endParaRPr lang="en-US" sz="3600" dirty="0"/>
+          </a:p>
+        </p:txBody>
+      </p:sp>
+      <p:sp>
+        <p:nvSpPr>
+          <p:cNvPr id="8" name="Text 6"/>
+          <p:cNvSpPr/>
+          <p:nvPr/>
+        </p:nvSpPr>
+        <p:spPr>
+          <a:xfrm>
+            <a:off x="548640" y="1554480"/>
+            <a:ext cx="11064240" cy="365760"/>
+          </a:xfrm>
+          <a:prstGeom prst="rect">
+            <a:avLst/>
+          </a:prstGeom>
+          <a:noFill/>
+          <a:ln/>
+        </p:spPr>
+        <p:txBody>
+          <a:bodyPr wrap="square" lIns="0" tIns="0" rIns="0" bIns="0" rtlCol="0" anchor="ctr"/>
+          <a:lstStyle/>
+          <a:p>
+            <a:pPr indent="0" marL="0">
+              <a:buNone/>
+            </a:pPr>
+            <a:r>
+              <a:rPr lang="en-US" sz="1400" i="1" dirty="0">
+                <a:solidFill>
+                  <a:srgbClr val="8B9BB4"/>
+                </a:solidFill>
+                <a:latin typeface="Calibri" pitchFamily="34" charset="0"/>
+                <a:ea typeface="Calibri" pitchFamily="34" charset="-122"/>
+                <a:cs typeface="Calibri" pitchFamily="34" charset="-120"/>
+              </a:rPr>
+              <a:t>Mỗi gate đều tự re-run được — không phải lời hứa, là làm rồi.</a:t>
+            </a:r>
+            <a:endParaRPr lang="en-US" sz="1400" dirty="0"/>
+          </a:p>
+        </p:txBody>
+      </p:sp>
+      <p:sp>
+        <p:nvSpPr>
+          <p:cNvPr id="9" name="Shape 7"/>
+          <p:cNvSpPr/>
+          <p:nvPr/>
+        </p:nvSpPr>
+        <p:spPr>
+          <a:xfrm>
+            <a:off x="411480" y="2194560"/>
+            <a:ext cx="3657600" cy="1280160"/>
+          </a:xfrm>
+          <a:prstGeom prst="rect">
+            <a:avLst/>
+          </a:prstGeom>
+          <a:solidFill>
+            <a:srgbClr val="111A30"/>
+          </a:solidFill>
+          <a:ln w="12700">
+            <a:solidFill>
+              <a:srgbClr val="1F2A44"/>
+            </a:solidFill>
+            <a:prstDash val="solid"/>
+          </a:ln>
+        </p:spPr>
+      </p:sp>
+      <p:sp>
+        <p:nvSpPr>
+          <p:cNvPr id="10" name="Shape 8"/>
+          <p:cNvSpPr/>
+          <p:nvPr/>
+        </p:nvSpPr>
+        <p:spPr>
+          <a:xfrm>
+            <a:off x="411480" y="2194560"/>
+            <a:ext cx="73152" cy="1280160"/>
+          </a:xfrm>
+          <a:prstGeom prst="rect">
+            <a:avLst/>
+          </a:prstGeom>
+          <a:solidFill>
+            <a:srgbClr val="10B981"/>
+          </a:solidFill>
+          <a:ln w="12700">
+            <a:solidFill>
+              <a:srgbClr val="10B981"/>
+            </a:solidFill>
+            <a:prstDash val="solid"/>
+          </a:ln>
+        </p:spPr>
+      </p:sp>
+      <p:sp>
+        <p:nvSpPr>
+          <p:cNvPr id="11" name="Text 9"/>
+          <p:cNvSpPr/>
+          <p:nvPr/>
+        </p:nvSpPr>
+        <p:spPr>
+          <a:xfrm>
+            <a:off x="640080" y="2331720"/>
+            <a:ext cx="3200400" cy="457200"/>
+          </a:xfrm>
+          <a:prstGeom prst="rect">
+            <a:avLst/>
+          </a:prstGeom>
+          <a:noFill/>
+          <a:ln/>
+        </p:spPr>
+        <p:txBody>
+          <a:bodyPr wrap="square" lIns="0" tIns="0" rIns="0" bIns="0" rtlCol="0" anchor="ctr"/>
+          <a:lstStyle/>
+          <a:p>
+            <a:pPr indent="0" marL="0">
+              <a:buNone/>
+            </a:pPr>
+            <a:r>
+              <a:rPr lang="en-US" sz="2600" b="1" dirty="0">
+                <a:solidFill>
+                  <a:srgbClr val="10B981"/>
+                </a:solidFill>
+                <a:latin typeface="Calibri" pitchFamily="34" charset="0"/>
+                <a:ea typeface="Calibri" pitchFamily="34" charset="-122"/>
+                <a:cs typeface="Calibri" pitchFamily="34" charset="-120"/>
+              </a:rPr>
+              <a:t>9 / 9</a:t>
+            </a:r>
+            <a:endParaRPr lang="en-US" sz="2600" dirty="0"/>
+          </a:p>
+        </p:txBody>
+      </p:sp>
+      <p:sp>
+        <p:nvSpPr>
+          <p:cNvPr id="12" name="Text 10"/>
+          <p:cNvSpPr/>
+          <p:nvPr/>
+        </p:nvSpPr>
+        <p:spPr>
+          <a:xfrm>
+            <a:off x="640080" y="2788920"/>
+            <a:ext cx="3200400" cy="292608"/>
+          </a:xfrm>
+          <a:prstGeom prst="rect">
+            <a:avLst/>
+          </a:prstGeom>
+          <a:noFill/>
+          <a:ln/>
+        </p:spPr>
+        <p:txBody>
+          <a:bodyPr wrap="square" lIns="0" tIns="0" rIns="0" bIns="0" rtlCol="0" anchor="ctr"/>
+          <a:lstStyle/>
+          <a:p>
+            <a:pPr indent="0" marL="0">
+              <a:buNone/>
+            </a:pPr>
+            <a:r>
+              <a:rPr lang="en-US" sz="1300" b="1" dirty="0">
+                <a:solidFill>
+                  <a:srgbClr val="F1F5F9"/>
+                </a:solidFill>
+                <a:latin typeface="Calibri" pitchFamily="34" charset="0"/>
+                <a:ea typeface="Calibri" pitchFamily="34" charset="-122"/>
+                <a:cs typeface="Calibri" pitchFamily="34" charset="-120"/>
+              </a:rPr>
+              <a:t>Packages typecheck</a:t>
+            </a:r>
+            <a:endParaRPr lang="en-US" sz="1300" dirty="0"/>
+          </a:p>
+        </p:txBody>
+      </p:sp>
+      <p:sp>
+        <p:nvSpPr>
+          <p:cNvPr id="13" name="Text 11"/>
+          <p:cNvSpPr/>
+          <p:nvPr/>
+        </p:nvSpPr>
+        <p:spPr>
+          <a:xfrm>
+            <a:off x="640080" y="3063240"/>
+            <a:ext cx="3200400" cy="320040"/>
+          </a:xfrm>
+          <a:prstGeom prst="rect">
+            <a:avLst/>
+          </a:prstGeom>
+          <a:noFill/>
+          <a:ln/>
+        </p:spPr>
+        <p:txBody>
+          <a:bodyPr wrap="square" lIns="0" tIns="0" rIns="0" bIns="0" rtlCol="0" anchor="ctr"/>
+          <a:lstStyle/>
+          <a:p>
+            <a:pPr indent="0" marL="0">
+              <a:buNone/>
+            </a:pPr>
+            <a:r>
+              <a:rPr lang="en-US" sz="1100" dirty="0">
+                <a:solidFill>
+                  <a:srgbClr val="8B9BB4"/>
+                </a:solidFill>
+                <a:latin typeface="Consolas" pitchFamily="34" charset="0"/>
+                <a:ea typeface="Consolas" pitchFamily="34" charset="-122"/>
+                <a:cs typeface="Consolas" pitchFamily="34" charset="-120"/>
+              </a:rPr>
+              <a:t>pnpm typecheck</a:t>
+            </a:r>
+            <a:endParaRPr lang="en-US" sz="1100" dirty="0"/>
+          </a:p>
+        </p:txBody>
+      </p:sp>
+      <p:sp>
+        <p:nvSpPr>
+          <p:cNvPr id="14" name="Shape 12"/>
+          <p:cNvSpPr/>
+          <p:nvPr/>
+        </p:nvSpPr>
+        <p:spPr>
+          <a:xfrm>
+            <a:off x="4251960" y="2194560"/>
+            <a:ext cx="3657600" cy="1280160"/>
+          </a:xfrm>
+          <a:prstGeom prst="rect">
+            <a:avLst/>
+          </a:prstGeom>
+          <a:solidFill>
+            <a:srgbClr val="111A30"/>
+          </a:solidFill>
+          <a:ln w="12700">
+            <a:solidFill>
+              <a:srgbClr val="1F2A44"/>
+            </a:solidFill>
+            <a:prstDash val="solid"/>
+          </a:ln>
+        </p:spPr>
+      </p:sp>
+      <p:sp>
+        <p:nvSpPr>
+          <p:cNvPr id="15" name="Shape 13"/>
+          <p:cNvSpPr/>
+          <p:nvPr/>
+        </p:nvSpPr>
+        <p:spPr>
+          <a:xfrm>
+            <a:off x="4251960" y="2194560"/>
+            <a:ext cx="73152" cy="1280160"/>
+          </a:xfrm>
+          <a:prstGeom prst="rect">
+            <a:avLst/>
+          </a:prstGeom>
+          <a:solidFill>
+            <a:srgbClr val="10B981"/>
+          </a:solidFill>
+          <a:ln w="12700">
+            <a:solidFill>
+              <a:srgbClr val="10B981"/>
+            </a:solidFill>
+            <a:prstDash val="solid"/>
+          </a:ln>
+        </p:spPr>
+      </p:sp>
+      <p:sp>
+        <p:nvSpPr>
+          <p:cNvPr id="16" name="Text 14"/>
+          <p:cNvSpPr/>
+          <p:nvPr/>
+        </p:nvSpPr>
+        <p:spPr>
+          <a:xfrm>
+            <a:off x="4480560" y="2331720"/>
+            <a:ext cx="3200400" cy="457200"/>
+          </a:xfrm>
+          <a:prstGeom prst="rect">
+            <a:avLst/>
+          </a:prstGeom>
+          <a:noFill/>
+          <a:ln/>
+        </p:spPr>
+        <p:txBody>
+          <a:bodyPr wrap="square" lIns="0" tIns="0" rIns="0" bIns="0" rtlCol="0" anchor="ctr"/>
+          <a:lstStyle/>
+          <a:p>
+            <a:pPr indent="0" marL="0">
+              <a:buNone/>
+            </a:pPr>
+            <a:r>
+              <a:rPr lang="en-US" sz="2600" b="1" dirty="0">
+                <a:solidFill>
+                  <a:srgbClr val="10B981"/>
+                </a:solidFill>
+                <a:latin typeface="Calibri" pitchFamily="34" charset="0"/>
+                <a:ea typeface="Calibri" pitchFamily="34" charset="-122"/>
+                <a:cs typeface="Calibri" pitchFamily="34" charset="-120"/>
+              </a:rPr>
+              <a:t>2 / 2</a:t>
+            </a:r>
+            <a:endParaRPr lang="en-US" sz="2600" dirty="0"/>
+          </a:p>
+        </p:txBody>
+      </p:sp>
+      <p:sp>
+        <p:nvSpPr>
+          <p:cNvPr id="17" name="Text 15"/>
+          <p:cNvSpPr/>
+          <p:nvPr/>
+        </p:nvSpPr>
+        <p:spPr>
+          <a:xfrm>
+            <a:off x="4480560" y="2788920"/>
+            <a:ext cx="3200400" cy="292608"/>
+          </a:xfrm>
+          <a:prstGeom prst="rect">
+            <a:avLst/>
+          </a:prstGeom>
+          <a:noFill/>
+          <a:ln/>
+        </p:spPr>
+        <p:txBody>
+          <a:bodyPr wrap="square" lIns="0" tIns="0" rIns="0" bIns="0" rtlCol="0" anchor="ctr"/>
+          <a:lstStyle/>
+          <a:p>
+            <a:pPr indent="0" marL="0">
+              <a:buNone/>
+            </a:pPr>
+            <a:r>
+              <a:rPr lang="en-US" sz="1300" b="1" dirty="0">
+                <a:solidFill>
+                  <a:srgbClr val="F1F5F9"/>
+                </a:solidFill>
+                <a:latin typeface="Calibri" pitchFamily="34" charset="0"/>
+                <a:ea typeface="Calibri" pitchFamily="34" charset="-122"/>
+                <a:cs typeface="Calibri" pitchFamily="34" charset="-120"/>
+              </a:rPr>
+              <a:t>Next apps lint clean</a:t>
+            </a:r>
+            <a:endParaRPr lang="en-US" sz="1300" dirty="0"/>
+          </a:p>
+        </p:txBody>
+      </p:sp>
+      <p:sp>
+        <p:nvSpPr>
+          <p:cNvPr id="18" name="Text 16"/>
+          <p:cNvSpPr/>
+          <p:nvPr/>
+        </p:nvSpPr>
+        <p:spPr>
+          <a:xfrm>
+            <a:off x="4480560" y="3063240"/>
+            <a:ext cx="3200400" cy="320040"/>
+          </a:xfrm>
+          <a:prstGeom prst="rect">
+            <a:avLst/>
+          </a:prstGeom>
+          <a:noFill/>
+          <a:ln/>
+        </p:spPr>
+        <p:txBody>
+          <a:bodyPr wrap="square" lIns="0" tIns="0" rIns="0" bIns="0" rtlCol="0" anchor="ctr"/>
+          <a:lstStyle/>
+          <a:p>
+            <a:pPr indent="0" marL="0">
+              <a:buNone/>
+            </a:pPr>
+            <a:r>
+              <a:rPr lang="en-US" sz="1100" dirty="0">
+                <a:solidFill>
+                  <a:srgbClr val="8B9BB4"/>
+                </a:solidFill>
+                <a:latin typeface="Consolas" pitchFamily="34" charset="0"/>
+                <a:ea typeface="Consolas" pitchFamily="34" charset="-122"/>
+                <a:cs typeface="Consolas" pitchFamily="34" charset="-120"/>
+              </a:rPr>
+              <a:t>pnpm lint</a:t>
+            </a:r>
+            <a:endParaRPr lang="en-US" sz="1100" dirty="0"/>
+          </a:p>
+        </p:txBody>
+      </p:sp>
+      <p:sp>
+        <p:nvSpPr>
+          <p:cNvPr id="19" name="Shape 17"/>
+          <p:cNvSpPr/>
+          <p:nvPr/>
+        </p:nvSpPr>
+        <p:spPr>
+          <a:xfrm>
+            <a:off x="8092440" y="2194560"/>
+            <a:ext cx="3657600" cy="1280160"/>
+          </a:xfrm>
+          <a:prstGeom prst="rect">
+            <a:avLst/>
+          </a:prstGeom>
+          <a:solidFill>
+            <a:srgbClr val="111A30"/>
+          </a:solidFill>
+          <a:ln w="12700">
+            <a:solidFill>
+              <a:srgbClr val="1F2A44"/>
+            </a:solidFill>
+            <a:prstDash val="solid"/>
+          </a:ln>
+        </p:spPr>
+      </p:sp>
+      <p:sp>
+        <p:nvSpPr>
+          <p:cNvPr id="20" name="Shape 18"/>
+          <p:cNvSpPr/>
+          <p:nvPr/>
+        </p:nvSpPr>
+        <p:spPr>
+          <a:xfrm>
+            <a:off x="8092440" y="2194560"/>
+            <a:ext cx="73152" cy="1280160"/>
+          </a:xfrm>
+          <a:prstGeom prst="rect">
+            <a:avLst/>
+          </a:prstGeom>
+          <a:solidFill>
+            <a:srgbClr val="10B981"/>
+          </a:solidFill>
+          <a:ln w="12700">
+            <a:solidFill>
+              <a:srgbClr val="10B981"/>
+            </a:solidFill>
+            <a:prstDash val="solid"/>
+          </a:ln>
+        </p:spPr>
+      </p:sp>
+      <p:sp>
+        <p:nvSpPr>
+          <p:cNvPr id="21" name="Text 19"/>
+          <p:cNvSpPr/>
+          <p:nvPr/>
+        </p:nvSpPr>
+        <p:spPr>
+          <a:xfrm>
+            <a:off x="8321040" y="2331720"/>
+            <a:ext cx="3200400" cy="457200"/>
+          </a:xfrm>
+          <a:prstGeom prst="rect">
+            <a:avLst/>
+          </a:prstGeom>
+          <a:noFill/>
+          <a:ln/>
+        </p:spPr>
+        <p:txBody>
+          <a:bodyPr wrap="square" lIns="0" tIns="0" rIns="0" bIns="0" rtlCol="0" anchor="ctr"/>
+          <a:lstStyle/>
+          <a:p>
+            <a:pPr indent="0" marL="0">
+              <a:buNone/>
+            </a:pPr>
+            <a:r>
+              <a:rPr lang="en-US" sz="2600" b="1" dirty="0">
+                <a:solidFill>
+                  <a:srgbClr val="10B981"/>
+                </a:solidFill>
+                <a:latin typeface="Calibri" pitchFamily="34" charset="0"/>
+                <a:ea typeface="Calibri" pitchFamily="34" charset="-122"/>
+                <a:cs typeface="Calibri" pitchFamily="34" charset="-120"/>
+              </a:rPr>
+              <a:t>10 / 10</a:t>
+            </a:r>
+            <a:endParaRPr lang="en-US" sz="2600" dirty="0"/>
+          </a:p>
+        </p:txBody>
+      </p:sp>
+      <p:sp>
+        <p:nvSpPr>
+          <p:cNvPr id="22" name="Text 20"/>
+          <p:cNvSpPr/>
+          <p:nvPr/>
+        </p:nvSpPr>
+        <p:spPr>
+          <a:xfrm>
+            <a:off x="8321040" y="2788920"/>
+            <a:ext cx="3200400" cy="292608"/>
+          </a:xfrm>
+          <a:prstGeom prst="rect">
+            <a:avLst/>
+          </a:prstGeom>
+          <a:noFill/>
+          <a:ln/>
+        </p:spPr>
+        <p:txBody>
+          <a:bodyPr wrap="square" lIns="0" tIns="0" rIns="0" bIns="0" rtlCol="0" anchor="ctr"/>
+          <a:lstStyle/>
+          <a:p>
+            <a:pPr indent="0" marL="0">
+              <a:buNone/>
+            </a:pPr>
+            <a:r>
+              <a:rPr lang="en-US" sz="1300" b="1" dirty="0">
+                <a:solidFill>
+                  <a:srgbClr val="F1F5F9"/>
+                </a:solidFill>
+                <a:latin typeface="Calibri" pitchFamily="34" charset="0"/>
+                <a:ea typeface="Calibri" pitchFamily="34" charset="-122"/>
+                <a:cs typeface="Calibri" pitchFamily="34" charset="-120"/>
+              </a:rPr>
+              <a:t>Vitest FSM tests pass</a:t>
+            </a:r>
+            <a:endParaRPr lang="en-US" sz="1300" dirty="0"/>
+          </a:p>
+        </p:txBody>
+      </p:sp>
+      <p:sp>
+        <p:nvSpPr>
+          <p:cNvPr id="23" name="Text 21"/>
+          <p:cNvSpPr/>
+          <p:nvPr/>
+        </p:nvSpPr>
+        <p:spPr>
+          <a:xfrm>
+            <a:off x="8321040" y="3063240"/>
+            <a:ext cx="3200400" cy="320040"/>
+          </a:xfrm>
+          <a:prstGeom prst="rect">
+            <a:avLst/>
+          </a:prstGeom>
+          <a:noFill/>
+          <a:ln/>
+        </p:spPr>
+        <p:txBody>
+          <a:bodyPr wrap="square" lIns="0" tIns="0" rIns="0" bIns="0" rtlCol="0" anchor="ctr"/>
+          <a:lstStyle/>
+          <a:p>
+            <a:pPr indent="0" marL="0">
+              <a:buNone/>
+            </a:pPr>
+            <a:r>
+              <a:rPr lang="en-US" sz="1100" dirty="0">
+                <a:solidFill>
+                  <a:srgbClr val="8B9BB4"/>
+                </a:solidFill>
+                <a:latin typeface="Consolas" pitchFamily="34" charset="0"/>
+                <a:ea typeface="Consolas" pitchFamily="34" charset="-122"/>
+                <a:cs typeface="Consolas" pitchFamily="34" charset="-120"/>
+              </a:rPr>
+              <a:t>pnpm test</a:t>
+            </a:r>
+            <a:endParaRPr lang="en-US" sz="1100" dirty="0"/>
+          </a:p>
+        </p:txBody>
+      </p:sp>
+      <p:sp>
+        <p:nvSpPr>
+          <p:cNvPr id="24" name="Shape 22"/>
+          <p:cNvSpPr/>
+          <p:nvPr/>
+        </p:nvSpPr>
+        <p:spPr>
+          <a:xfrm>
+            <a:off x="411480" y="3657600"/>
+            <a:ext cx="3657600" cy="1280160"/>
+          </a:xfrm>
+          <a:prstGeom prst="rect">
+            <a:avLst/>
+          </a:prstGeom>
+          <a:solidFill>
+            <a:srgbClr val="111A30"/>
+          </a:solidFill>
+          <a:ln w="12700">
+            <a:solidFill>
+              <a:srgbClr val="1F2A44"/>
+            </a:solidFill>
+            <a:prstDash val="solid"/>
+          </a:ln>
+        </p:spPr>
+      </p:sp>
+      <p:sp>
+        <p:nvSpPr>
+          <p:cNvPr id="25" name="Shape 23"/>
+          <p:cNvSpPr/>
+          <p:nvPr/>
+        </p:nvSpPr>
+        <p:spPr>
+          <a:xfrm>
+            <a:off x="411480" y="3657600"/>
+            <a:ext cx="73152" cy="1280160"/>
+          </a:xfrm>
+          <a:prstGeom prst="rect">
+            <a:avLst/>
+          </a:prstGeom>
+          <a:solidFill>
+            <a:srgbClr val="10B981"/>
+          </a:solidFill>
+          <a:ln w="12700">
+            <a:solidFill>
+              <a:srgbClr val="10B981"/>
+            </a:solidFill>
+            <a:prstDash val="solid"/>
+          </a:ln>
+        </p:spPr>
+      </p:sp>
+      <p:sp>
+        <p:nvSpPr>
+          <p:cNvPr id="26" name="Text 24"/>
+          <p:cNvSpPr/>
+          <p:nvPr/>
+        </p:nvSpPr>
+        <p:spPr>
+          <a:xfrm>
+            <a:off x="640080" y="3794760"/>
+            <a:ext cx="3200400" cy="457200"/>
+          </a:xfrm>
+          <a:prstGeom prst="rect">
+            <a:avLst/>
+          </a:prstGeom>
+          <a:noFill/>
+          <a:ln/>
+        </p:spPr>
+        <p:txBody>
+          <a:bodyPr wrap="square" lIns="0" tIns="0" rIns="0" bIns="0" rtlCol="0" anchor="ctr"/>
+          <a:lstStyle/>
+          <a:p>
+            <a:pPr indent="0" marL="0">
+              <a:buNone/>
+            </a:pPr>
+            <a:r>
+              <a:rPr lang="en-US" sz="2600" b="1" dirty="0">
+                <a:solidFill>
+                  <a:srgbClr val="10B981"/>
+                </a:solidFill>
+                <a:latin typeface="Calibri" pitchFamily="34" charset="0"/>
+                <a:ea typeface="Calibri" pitchFamily="34" charset="-122"/>
+                <a:cs typeface="Calibri" pitchFamily="34" charset="-120"/>
+              </a:rPr>
+              <a:t>58 routes</a:t>
+            </a:r>
+            <a:endParaRPr lang="en-US" sz="2600" dirty="0"/>
+          </a:p>
+        </p:txBody>
+      </p:sp>
+      <p:sp>
+        <p:nvSpPr>
+          <p:cNvPr id="27" name="Text 25"/>
+          <p:cNvSpPr/>
+          <p:nvPr/>
+        </p:nvSpPr>
+        <p:spPr>
+          <a:xfrm>
+            <a:off x="640080" y="4251960"/>
+            <a:ext cx="3200400" cy="292608"/>
+          </a:xfrm>
+          <a:prstGeom prst="rect">
+            <a:avLst/>
+          </a:prstGeom>
+          <a:noFill/>
+          <a:ln/>
+        </p:spPr>
+        <p:txBody>
+          <a:bodyPr wrap="square" lIns="0" tIns="0" rIns="0" bIns="0" rtlCol="0" anchor="ctr"/>
+          <a:lstStyle/>
+          <a:p>
+            <a:pPr indent="0" marL="0">
+              <a:buNone/>
+            </a:pPr>
+            <a:r>
+              <a:rPr lang="en-US" sz="1300" b="1" dirty="0">
+                <a:solidFill>
+                  <a:srgbClr val="F1F5F9"/>
+                </a:solidFill>
+                <a:latin typeface="Calibri" pitchFamily="34" charset="0"/>
+                <a:ea typeface="Calibri" pitchFamily="34" charset="-122"/>
+                <a:cs typeface="Calibri" pitchFamily="34" charset="-120"/>
+              </a:rPr>
+              <a:t>Production build OK</a:t>
+            </a:r>
+            <a:endParaRPr lang="en-US" sz="1300" dirty="0"/>
+          </a:p>
+        </p:txBody>
+      </p:sp>
+      <p:sp>
+        <p:nvSpPr>
+          <p:cNvPr id="28" name="Text 26"/>
+          <p:cNvSpPr/>
+          <p:nvPr/>
+        </p:nvSpPr>
+        <p:spPr>
+          <a:xfrm>
+            <a:off x="640080" y="4526280"/>
+            <a:ext cx="3200400" cy="320040"/>
+          </a:xfrm>
+          <a:prstGeom prst="rect">
+            <a:avLst/>
+          </a:prstGeom>
+          <a:noFill/>
+          <a:ln/>
+        </p:spPr>
+        <p:txBody>
+          <a:bodyPr wrap="square" lIns="0" tIns="0" rIns="0" bIns="0" rtlCol="0" anchor="ctr"/>
+          <a:lstStyle/>
+          <a:p>
+            <a:pPr indent="0" marL="0">
+              <a:buNone/>
+            </a:pPr>
+            <a:r>
+              <a:rPr lang="en-US" sz="1100" dirty="0">
+                <a:solidFill>
+                  <a:srgbClr val="8B9BB4"/>
+                </a:solidFill>
+                <a:latin typeface="Consolas" pitchFamily="34" charset="0"/>
+                <a:ea typeface="Consolas" pitchFamily="34" charset="-122"/>
+                <a:cs typeface="Consolas" pitchFamily="34" charset="-120"/>
+              </a:rPr>
+              <a:t>pnpm build</a:t>
+            </a:r>
+            <a:endParaRPr lang="en-US" sz="1100" dirty="0"/>
+          </a:p>
+        </p:txBody>
+      </p:sp>
+      <p:sp>
+        <p:nvSpPr>
+          <p:cNvPr id="29" name="Shape 27"/>
+          <p:cNvSpPr/>
+          <p:nvPr/>
+        </p:nvSpPr>
+        <p:spPr>
+          <a:xfrm>
+            <a:off x="4251960" y="3657600"/>
+            <a:ext cx="3657600" cy="1280160"/>
+          </a:xfrm>
+          <a:prstGeom prst="rect">
+            <a:avLst/>
+          </a:prstGeom>
+          <a:solidFill>
+            <a:srgbClr val="111A30"/>
+          </a:solidFill>
+          <a:ln w="12700">
+            <a:solidFill>
+              <a:srgbClr val="1F2A44"/>
+            </a:solidFill>
+            <a:prstDash val="solid"/>
+          </a:ln>
+        </p:spPr>
+      </p:sp>
+      <p:sp>
+        <p:nvSpPr>
+          <p:cNvPr id="30" name="Shape 28"/>
+          <p:cNvSpPr/>
+          <p:nvPr/>
+        </p:nvSpPr>
+        <p:spPr>
+          <a:xfrm>
+            <a:off x="4251960" y="3657600"/>
+            <a:ext cx="73152" cy="1280160"/>
+          </a:xfrm>
+          <a:prstGeom prst="rect">
+            <a:avLst/>
+          </a:prstGeom>
+          <a:solidFill>
+            <a:srgbClr val="60A5FA"/>
+          </a:solidFill>
+          <a:ln w="12700">
+            <a:solidFill>
+              <a:srgbClr val="60A5FA"/>
+            </a:solidFill>
+            <a:prstDash val="solid"/>
+          </a:ln>
+        </p:spPr>
+      </p:sp>
+      <p:sp>
+        <p:nvSpPr>
+          <p:cNvPr id="31" name="Text 29"/>
+          <p:cNvSpPr/>
+          <p:nvPr/>
+        </p:nvSpPr>
+        <p:spPr>
+          <a:xfrm>
+            <a:off x="4480560" y="3794760"/>
+            <a:ext cx="3200400" cy="457200"/>
+          </a:xfrm>
+          <a:prstGeom prst="rect">
+            <a:avLst/>
+          </a:prstGeom>
+          <a:noFill/>
+          <a:ln/>
+        </p:spPr>
+        <p:txBody>
+          <a:bodyPr wrap="square" lIns="0" tIns="0" rIns="0" bIns="0" rtlCol="0" anchor="ctr"/>
+          <a:lstStyle/>
+          <a:p>
+            <a:pPr indent="0" marL="0">
+              <a:buNone/>
+            </a:pPr>
+            <a:r>
+              <a:rPr lang="en-US" sz="2600" b="1" dirty="0">
+                <a:solidFill>
+                  <a:srgbClr val="60A5FA"/>
+                </a:solidFill>
+                <a:latin typeface="Calibri" pitchFamily="34" charset="0"/>
+                <a:ea typeface="Calibri" pitchFamily="34" charset="-122"/>
+                <a:cs typeface="Calibri" pitchFamily="34" charset="-120"/>
+              </a:rPr>
+              <a:t>35+ models</a:t>
+            </a:r>
+            <a:endParaRPr lang="en-US" sz="2600" dirty="0"/>
+          </a:p>
+        </p:txBody>
+      </p:sp>
+      <p:sp>
+        <p:nvSpPr>
+          <p:cNvPr id="32" name="Text 30"/>
+          <p:cNvSpPr/>
+          <p:nvPr/>
+        </p:nvSpPr>
+        <p:spPr>
+          <a:xfrm>
+            <a:off x="4480560" y="4251960"/>
+            <a:ext cx="3200400" cy="292608"/>
+          </a:xfrm>
+          <a:prstGeom prst="rect">
+            <a:avLst/>
+          </a:prstGeom>
+          <a:noFill/>
+          <a:ln/>
+        </p:spPr>
+        <p:txBody>
+          <a:bodyPr wrap="square" lIns="0" tIns="0" rIns="0" bIns="0" rtlCol="0" anchor="ctr"/>
+          <a:lstStyle/>
+          <a:p>
+            <a:pPr indent="0" marL="0">
+              <a:buNone/>
+            </a:pPr>
+            <a:r>
+              <a:rPr lang="en-US" sz="1300" b="1" dirty="0">
+                <a:solidFill>
+                  <a:srgbClr val="F1F5F9"/>
+                </a:solidFill>
+                <a:latin typeface="Calibri" pitchFamily="34" charset="0"/>
+                <a:ea typeface="Calibri" pitchFamily="34" charset="-122"/>
+                <a:cs typeface="Calibri" pitchFamily="34" charset="-120"/>
+              </a:rPr>
+              <a:t>Prisma schema applied</a:t>
+            </a:r>
+            <a:endParaRPr lang="en-US" sz="1300" dirty="0"/>
+          </a:p>
+        </p:txBody>
+      </p:sp>
+      <p:sp>
+        <p:nvSpPr>
+          <p:cNvPr id="33" name="Text 31"/>
+          <p:cNvSpPr/>
+          <p:nvPr/>
+        </p:nvSpPr>
+        <p:spPr>
+          <a:xfrm>
+            <a:off x="4480560" y="4526280"/>
+            <a:ext cx="3200400" cy="320040"/>
+          </a:xfrm>
+          <a:prstGeom prst="rect">
+            <a:avLst/>
+          </a:prstGeom>
+          <a:noFill/>
+          <a:ln/>
+        </p:spPr>
+        <p:txBody>
+          <a:bodyPr wrap="square" lIns="0" tIns="0" rIns="0" bIns="0" rtlCol="0" anchor="ctr"/>
+          <a:lstStyle/>
+          <a:p>
+            <a:pPr indent="0" marL="0">
+              <a:buNone/>
+            </a:pPr>
+            <a:r>
+              <a:rPr lang="en-US" sz="1100" dirty="0">
+                <a:solidFill>
+                  <a:srgbClr val="8B9BB4"/>
+                </a:solidFill>
+                <a:latin typeface="Consolas" pitchFamily="34" charset="0"/>
+                <a:ea typeface="Consolas" pitchFamily="34" charset="-122"/>
+                <a:cs typeface="Consolas" pitchFamily="34" charset="-120"/>
+              </a:rPr>
+              <a:t>pnpm db:push</a:t>
+            </a:r>
+            <a:endParaRPr lang="en-US" sz="1100" dirty="0"/>
+          </a:p>
+        </p:txBody>
+      </p:sp>
+      <p:sp>
+        <p:nvSpPr>
+          <p:cNvPr id="34" name="Shape 32"/>
+          <p:cNvSpPr/>
+          <p:nvPr/>
+        </p:nvSpPr>
+        <p:spPr>
+          <a:xfrm>
+            <a:off x="8092440" y="3657600"/>
+            <a:ext cx="3657600" cy="1280160"/>
+          </a:xfrm>
+          <a:prstGeom prst="rect">
+            <a:avLst/>
+          </a:prstGeom>
+          <a:solidFill>
+            <a:srgbClr val="111A30"/>
+          </a:solidFill>
+          <a:ln w="12700">
+            <a:solidFill>
+              <a:srgbClr val="1F2A44"/>
+            </a:solidFill>
+            <a:prstDash val="solid"/>
+          </a:ln>
+        </p:spPr>
+      </p:sp>
+      <p:sp>
+        <p:nvSpPr>
+          <p:cNvPr id="35" name="Shape 33"/>
+          <p:cNvSpPr/>
+          <p:nvPr/>
+        </p:nvSpPr>
+        <p:spPr>
+          <a:xfrm>
+            <a:off x="8092440" y="3657600"/>
+            <a:ext cx="73152" cy="1280160"/>
+          </a:xfrm>
+          <a:prstGeom prst="rect">
+            <a:avLst/>
+          </a:prstGeom>
+          <a:solidFill>
+            <a:srgbClr val="60A5FA"/>
+          </a:solidFill>
+          <a:ln w="12700">
+            <a:solidFill>
+              <a:srgbClr val="60A5FA"/>
+            </a:solidFill>
+            <a:prstDash val="solid"/>
+          </a:ln>
+        </p:spPr>
+      </p:sp>
+      <p:sp>
+        <p:nvSpPr>
+          <p:cNvPr id="36" name="Text 34"/>
+          <p:cNvSpPr/>
+          <p:nvPr/>
+        </p:nvSpPr>
+        <p:spPr>
+          <a:xfrm>
+            <a:off x="8321040" y="3794760"/>
+            <a:ext cx="3200400" cy="457200"/>
+          </a:xfrm>
+          <a:prstGeom prst="rect">
+            <a:avLst/>
+          </a:prstGeom>
+          <a:noFill/>
+          <a:ln/>
+        </p:spPr>
+        <p:txBody>
+          <a:bodyPr wrap="square" lIns="0" tIns="0" rIns="0" bIns="0" rtlCol="0" anchor="ctr"/>
+          <a:lstStyle/>
+          <a:p>
+            <a:pPr indent="0" marL="0">
+              <a:buNone/>
+            </a:pPr>
+            <a:r>
+              <a:rPr lang="en-US" sz="2600" b="1" dirty="0">
+                <a:solidFill>
+                  <a:srgbClr val="60A5FA"/>
+                </a:solidFill>
+                <a:latin typeface="Calibri" pitchFamily="34" charset="0"/>
+                <a:ea typeface="Calibri" pitchFamily="34" charset="-122"/>
+                <a:cs typeface="Calibri" pitchFamily="34" charset="-120"/>
+              </a:rPr>
+              <a:t>19 PNGs</a:t>
+            </a:r>
+            <a:endParaRPr lang="en-US" sz="2600" dirty="0"/>
+          </a:p>
+        </p:txBody>
+      </p:sp>
+      <p:sp>
+        <p:nvSpPr>
+          <p:cNvPr id="37" name="Text 35"/>
+          <p:cNvSpPr/>
+          <p:nvPr/>
+        </p:nvSpPr>
+        <p:spPr>
+          <a:xfrm>
+            <a:off x="8321040" y="4251960"/>
+            <a:ext cx="3200400" cy="292608"/>
+          </a:xfrm>
+          <a:prstGeom prst="rect">
+            <a:avLst/>
+          </a:prstGeom>
+          <a:noFill/>
+          <a:ln/>
+        </p:spPr>
+        <p:txBody>
+          <a:bodyPr wrap="square" lIns="0" tIns="0" rIns="0" bIns="0" rtlCol="0" anchor="ctr"/>
+          <a:lstStyle/>
+          <a:p>
+            <a:pPr indent="0" marL="0">
+              <a:buNone/>
+            </a:pPr>
+            <a:r>
+              <a:rPr lang="en-US" sz="1300" b="1" dirty="0">
+                <a:solidFill>
+                  <a:srgbClr val="F1F5F9"/>
+                </a:solidFill>
+                <a:latin typeface="Calibri" pitchFamily="34" charset="0"/>
+                <a:ea typeface="Calibri" pitchFamily="34" charset="-122"/>
+                <a:cs typeface="Calibri" pitchFamily="34" charset="-120"/>
+              </a:rPr>
+              <a:t>Live screenshots regenerated</a:t>
+            </a:r>
+            <a:endParaRPr lang="en-US" sz="1300" dirty="0"/>
+          </a:p>
+        </p:txBody>
+      </p:sp>
+      <p:sp>
+        <p:nvSpPr>
+          <p:cNvPr id="38" name="Text 36"/>
+          <p:cNvSpPr/>
+          <p:nvPr/>
+        </p:nvSpPr>
+        <p:spPr>
+          <a:xfrm>
+            <a:off x="8321040" y="4526280"/>
+            <a:ext cx="3200400" cy="320040"/>
+          </a:xfrm>
+          <a:prstGeom prst="rect">
+            <a:avLst/>
+          </a:prstGeom>
+          <a:noFill/>
+          <a:ln/>
+        </p:spPr>
+        <p:txBody>
+          <a:bodyPr wrap="square" lIns="0" tIns="0" rIns="0" bIns="0" rtlCol="0" anchor="ctr"/>
+          <a:lstStyle/>
+          <a:p>
+            <a:pPr indent="0" marL="0">
+              <a:buNone/>
+            </a:pPr>
+            <a:r>
+              <a:rPr lang="en-US" sz="1100" dirty="0">
+                <a:solidFill>
+                  <a:srgbClr val="8B9BB4"/>
+                </a:solidFill>
+                <a:latin typeface="Consolas" pitchFamily="34" charset="0"/>
+                <a:ea typeface="Consolas" pitchFamily="34" charset="-122"/>
+                <a:cs typeface="Consolas" pitchFamily="34" charset="-120"/>
+              </a:rPr>
+              <a:t>tsx scripts/capture-demo.ts</a:t>
+            </a:r>
+            <a:endParaRPr lang="en-US" sz="1100" dirty="0"/>
+          </a:p>
+        </p:txBody>
+      </p:sp>
+      <p:sp>
+        <p:nvSpPr>
+          <p:cNvPr id="39" name="Shape 37"/>
+          <p:cNvSpPr/>
+          <p:nvPr/>
+        </p:nvSpPr>
+        <p:spPr>
+          <a:xfrm>
+            <a:off x="548640" y="5029200"/>
+            <a:ext cx="11064240" cy="914400"/>
+          </a:xfrm>
+          <a:prstGeom prst="rect">
+            <a:avLst/>
+          </a:prstGeom>
+          <a:solidFill>
+            <a:srgbClr val="111A30"/>
+          </a:solidFill>
+          <a:ln w="25400">
+            <a:solidFill>
+              <a:srgbClr val="3B82F6"/>
+            </a:solidFill>
+            <a:prstDash val="solid"/>
+          </a:ln>
+        </p:spPr>
+      </p:sp>
+      <p:sp>
+        <p:nvSpPr>
+          <p:cNvPr id="40" name="Text 38"/>
+          <p:cNvSpPr/>
+          <p:nvPr/>
+        </p:nvSpPr>
+        <p:spPr>
+          <a:xfrm>
+            <a:off x="777240" y="5074920"/>
+            <a:ext cx="5486400" cy="365760"/>
+          </a:xfrm>
+          <a:prstGeom prst="rect">
+            <a:avLst/>
+          </a:prstGeom>
+          <a:noFill/>
+          <a:ln/>
+        </p:spPr>
+        <p:txBody>
+          <a:bodyPr wrap="square" lIns="0" tIns="0" rIns="0" bIns="0" rtlCol="0" anchor="ctr"/>
+          <a:lstStyle/>
+          <a:p>
+            <a:pPr indent="0" marL="0">
+              <a:buNone/>
+            </a:pPr>
+            <a:r>
+              <a:rPr lang="en-US" sz="1300" b="1" spc="100" kern="0" dirty="0">
+                <a:solidFill>
+                  <a:srgbClr val="8B9BB4"/>
+                </a:solidFill>
+                <a:latin typeface="Calibri" pitchFamily="34" charset="0"/>
+                <a:ea typeface="Calibri" pitchFamily="34" charset="-122"/>
+                <a:cs typeface="Calibri" pitchFamily="34" charset="-120"/>
+              </a:rPr>
+              <a:t>Replay demo bất kỳ lúc nào</a:t>
+            </a:r>
+            <a:endParaRPr lang="en-US" sz="1300" dirty="0"/>
+          </a:p>
+        </p:txBody>
+      </p:sp>
+      <p:sp>
+        <p:nvSpPr>
+          <p:cNvPr id="41" name="Text 39"/>
+          <p:cNvSpPr/>
+          <p:nvPr/>
+        </p:nvSpPr>
+        <p:spPr>
+          <a:xfrm>
+            <a:off x="777240" y="5394960"/>
+            <a:ext cx="10607040" cy="457200"/>
+          </a:xfrm>
+          <a:prstGeom prst="rect">
+            <a:avLst/>
+          </a:prstGeom>
+          <a:noFill/>
+          <a:ln/>
+        </p:spPr>
+        <p:txBody>
+          <a:bodyPr wrap="square" lIns="0" tIns="0" rIns="0" bIns="0" rtlCol="0" anchor="ctr"/>
+          <a:lstStyle/>
+          <a:p>
+            <a:pPr indent="0" marL="0">
+              <a:buNone/>
+            </a:pPr>
+            <a:r>
+              <a:rPr lang="en-US" sz="1800" dirty="0">
+                <a:solidFill>
+                  <a:srgbClr val="60A5FA"/>
+                </a:solidFill>
+                <a:latin typeface="Consolas" pitchFamily="34" charset="0"/>
+                <a:ea typeface="Consolas" pitchFamily="34" charset="-122"/>
+                <a:cs typeface="Consolas" pitchFamily="34" charset="-120"/>
+              </a:rPr>
+              <a:t>http://localhost:3000/demo.html  ·  docs/DEMO.md  ·  docs/Atlas-AEC-Demo.pptx</a:t>
+            </a:r>
+            <a:endParaRPr lang="en-US" sz="1800" dirty="0"/>
+          </a:p>
+        </p:txBody>
+      </p:sp>
+      <p:sp>
+        <p:nvSpPr>
+          <p:cNvPr id="42" name="Text 40"/>
+          <p:cNvSpPr/>
+          <p:nvPr/>
+        </p:nvSpPr>
+        <p:spPr>
+          <a:xfrm>
+            <a:off x="457200" y="6446520"/>
+            <a:ext cx="11247120" cy="274320"/>
+          </a:xfrm>
+          <a:prstGeom prst="rect">
+            <a:avLst/>
+          </a:prstGeom>
+          <a:noFill/>
+          <a:ln/>
+        </p:spPr>
+        <p:txBody>
+          <a:bodyPr wrap="square" lIns="0" tIns="0" rIns="0" bIns="0" rtlCol="0" anchor="ctr"/>
+          <a:lstStyle/>
+          <a:p>
+            <a:pPr indent="0" marL="0">
+              <a:buNone/>
+            </a:pPr>
+            <a:r>
+              <a:rPr lang="en-US" sz="1000" dirty="0">
+                <a:solidFill>
+                  <a:srgbClr val="475569"/>
+                </a:solidFill>
+                <a:latin typeface="Calibri" pitchFamily="34" charset="0"/>
+                <a:ea typeface="Calibri" pitchFamily="34" charset="-122"/>
+                <a:cs typeface="Calibri" pitchFamily="34" charset="-120"/>
+              </a:rPr>
+              <a:t>Demo credentials: anh.nguyen@cofico.vn / demo1234! — đăng nhập, click 6 tabs, mọi thứ là live data từ Postgres.</a:t>
             </a:r>
             <a:endParaRPr lang="en-US" sz="1000" dirty="0"/>
           </a:p>
@@ -14553,7 +21767,7 @@
                 <a:ea typeface="Calibri" pitchFamily="34" charset="-122"/>
                 <a:cs typeface="Calibri" pitchFamily="34" charset="-120"/>
               </a:rPr>
-              <a:t>4 / 21</a:t>
+              <a:t>4 / 32</a:t>
             </a:r>
             <a:endParaRPr lang="en-US" sz="1100" dirty="0"/>
           </a:p>
@@ -15056,7 +22270,7 @@
                 <a:ea typeface="Calibri" pitchFamily="34" charset="-122"/>
                 <a:cs typeface="Calibri" pitchFamily="34" charset="-120"/>
               </a:rPr>
-              <a:t>5 / 21</a:t>
+              <a:t>5 / 32</a:t>
             </a:r>
             <a:endParaRPr lang="en-US" sz="1100" dirty="0"/>
           </a:p>
@@ -15597,7 +22811,7 @@
                 <a:ea typeface="Calibri" pitchFamily="34" charset="-122"/>
                 <a:cs typeface="Calibri" pitchFamily="34" charset="-120"/>
               </a:rPr>
-              <a:t>6 / 21</a:t>
+              <a:t>6 / 32</a:t>
             </a:r>
             <a:endParaRPr lang="en-US" sz="1100" dirty="0"/>
           </a:p>
@@ -16184,7 +23398,7 @@
                 <a:ea typeface="Calibri" pitchFamily="34" charset="-122"/>
                 <a:cs typeface="Calibri" pitchFamily="34" charset="-120"/>
               </a:rPr>
-              <a:t>7 / 21</a:t>
+              <a:t>7 / 32</a:t>
             </a:r>
             <a:endParaRPr lang="en-US" sz="1100" dirty="0"/>
           </a:p>
@@ -16760,7 +23974,7 @@
                 <a:ea typeface="Calibri" pitchFamily="34" charset="-122"/>
                 <a:cs typeface="Calibri" pitchFamily="34" charset="-120"/>
               </a:rPr>
-              <a:t>8 / 21</a:t>
+              <a:t>8 / 32</a:t>
             </a:r>
             <a:endParaRPr lang="en-US" sz="1100" dirty="0"/>
           </a:p>
@@ -17374,7 +24588,7 @@
                 <a:ea typeface="Calibri" pitchFamily="34" charset="-122"/>
                 <a:cs typeface="Calibri" pitchFamily="34" charset="-120"/>
               </a:rPr>
-              <a:t>9 / 21</a:t>
+              <a:t>9 / 32</a:t>
             </a:r>
             <a:endParaRPr lang="en-US" sz="1100" dirty="0"/>
           </a:p>
